--- a/data/EVRAZ_Agent_main.pptx
+++ b/data/EVRAZ_Agent_main.pptx
@@ -139,6 +139,564 @@
 </p:presentation>
 </file>
 
+<file path=ppt/changesInfos/changesInfo1.xml><?xml version="1.0" encoding="utf-8"?>
+<pc:chgInfo xmlns:a="http://schemas.openxmlformats.org/drawingml/2006/main" xmlns:r="http://schemas.openxmlformats.org/officeDocument/2006/relationships" xmlns:ac="http://schemas.microsoft.com/office/drawing/2013/main/command" xmlns:pc="http://schemas.microsoft.com/office/powerpoint/2013/main/command">
+  <pc:docChgLst>
+    <pc:chgData name="Ярослав Zhjckfd" userId="180ae11dff91542b" providerId="LiveId" clId="{E2501CB2-C655-458D-845F-849DFB16B14F}"/>
+    <pc:docChg chg="undo custSel modSld sldOrd">
+      <pc:chgData name="Ярослав Zhjckfd" userId="180ae11dff91542b" providerId="LiveId" clId="{E2501CB2-C655-458D-845F-849DFB16B14F}" dt="2026-10-24T13:21:51.426" v="114" actId="255"/>
+      <pc:docMkLst>
+        <pc:docMk/>
+      </pc:docMkLst>
+      <pc:sldChg chg="modSp mod">
+        <pc:chgData name="Ярослав Zhjckfd" userId="180ae11dff91542b" providerId="LiveId" clId="{E2501CB2-C655-458D-845F-849DFB16B14F}" dt="2026-10-24T12:51:41.614" v="23" actId="255"/>
+        <pc:sldMkLst>
+          <pc:docMk/>
+          <pc:sldMk cId="0" sldId="256"/>
+        </pc:sldMkLst>
+        <pc:spChg chg="mod">
+          <ac:chgData name="Ярослав Zhjckfd" userId="180ae11dff91542b" providerId="LiveId" clId="{E2501CB2-C655-458D-845F-849DFB16B14F}" dt="2026-10-24T12:50:55.467" v="17" actId="207"/>
+          <ac:spMkLst>
+            <pc:docMk/>
+            <pc:sldMk cId="0" sldId="256"/>
+            <ac:spMk id="10" creationId="{00000000-0000-0000-0000-000000000000}"/>
+          </ac:spMkLst>
+        </pc:spChg>
+        <pc:spChg chg="mod">
+          <ac:chgData name="Ярослав Zhjckfd" userId="180ae11dff91542b" providerId="LiveId" clId="{E2501CB2-C655-458D-845F-849DFB16B14F}" dt="2026-10-24T12:51:05.579" v="18" actId="255"/>
+          <ac:spMkLst>
+            <pc:docMk/>
+            <pc:sldMk cId="0" sldId="256"/>
+            <ac:spMk id="13" creationId="{00000000-0000-0000-0000-000000000000}"/>
+          </ac:spMkLst>
+        </pc:spChg>
+        <pc:spChg chg="mod">
+          <ac:chgData name="Ярослав Zhjckfd" userId="180ae11dff91542b" providerId="LiveId" clId="{E2501CB2-C655-458D-845F-849DFB16B14F}" dt="2026-10-24T12:51:32.758" v="21" actId="255"/>
+          <ac:spMkLst>
+            <pc:docMk/>
+            <pc:sldMk cId="0" sldId="256"/>
+            <ac:spMk id="14" creationId="{00000000-0000-0000-0000-000000000000}"/>
+          </ac:spMkLst>
+        </pc:spChg>
+        <pc:spChg chg="mod">
+          <ac:chgData name="Ярослав Zhjckfd" userId="180ae11dff91542b" providerId="LiveId" clId="{E2501CB2-C655-458D-845F-849DFB16B14F}" dt="2026-10-24T12:51:09.266" v="19" actId="255"/>
+          <ac:spMkLst>
+            <pc:docMk/>
+            <pc:sldMk cId="0" sldId="256"/>
+            <ac:spMk id="16" creationId="{00000000-0000-0000-0000-000000000000}"/>
+          </ac:spMkLst>
+        </pc:spChg>
+        <pc:spChg chg="mod">
+          <ac:chgData name="Ярослав Zhjckfd" userId="180ae11dff91542b" providerId="LiveId" clId="{E2501CB2-C655-458D-845F-849DFB16B14F}" dt="2026-10-24T12:51:37.539" v="22" actId="255"/>
+          <ac:spMkLst>
+            <pc:docMk/>
+            <pc:sldMk cId="0" sldId="256"/>
+            <ac:spMk id="17" creationId="{00000000-0000-0000-0000-000000000000}"/>
+          </ac:spMkLst>
+        </pc:spChg>
+        <pc:spChg chg="mod">
+          <ac:chgData name="Ярослав Zhjckfd" userId="180ae11dff91542b" providerId="LiveId" clId="{E2501CB2-C655-458D-845F-849DFB16B14F}" dt="2026-10-24T12:51:13.417" v="20" actId="255"/>
+          <ac:spMkLst>
+            <pc:docMk/>
+            <pc:sldMk cId="0" sldId="256"/>
+            <ac:spMk id="19" creationId="{00000000-0000-0000-0000-000000000000}"/>
+          </ac:spMkLst>
+        </pc:spChg>
+        <pc:spChg chg="mod">
+          <ac:chgData name="Ярослав Zhjckfd" userId="180ae11dff91542b" providerId="LiveId" clId="{E2501CB2-C655-458D-845F-849DFB16B14F}" dt="2026-10-24T12:51:41.614" v="23" actId="255"/>
+          <ac:spMkLst>
+            <pc:docMk/>
+            <pc:sldMk cId="0" sldId="256"/>
+            <ac:spMk id="20" creationId="{00000000-0000-0000-0000-000000000000}"/>
+          </ac:spMkLst>
+        </pc:spChg>
+      </pc:sldChg>
+      <pc:sldChg chg="modSp mod">
+        <pc:chgData name="Ярослав Zhjckfd" userId="180ae11dff91542b" providerId="LiveId" clId="{E2501CB2-C655-458D-845F-849DFB16B14F}" dt="2026-10-24T12:54:18.469" v="32" actId="1076"/>
+        <pc:sldMkLst>
+          <pc:docMk/>
+          <pc:sldMk cId="0" sldId="258"/>
+        </pc:sldMkLst>
+        <pc:spChg chg="mod">
+          <ac:chgData name="Ярослав Zhjckfd" userId="180ae11dff91542b" providerId="LiveId" clId="{E2501CB2-C655-458D-845F-849DFB16B14F}" dt="2026-10-24T12:54:18.469" v="32" actId="1076"/>
+          <ac:spMkLst>
+            <pc:docMk/>
+            <pc:sldMk cId="0" sldId="258"/>
+            <ac:spMk id="8" creationId="{00000000-0000-0000-0000-000000000000}"/>
+          </ac:spMkLst>
+        </pc:spChg>
+        <pc:spChg chg="mod">
+          <ac:chgData name="Ярослав Zhjckfd" userId="180ae11dff91542b" providerId="LiveId" clId="{E2501CB2-C655-458D-845F-849DFB16B14F}" dt="2026-10-24T12:53:52.438" v="28" actId="255"/>
+          <ac:spMkLst>
+            <pc:docMk/>
+            <pc:sldMk cId="0" sldId="258"/>
+            <ac:spMk id="11" creationId="{00000000-0000-0000-0000-000000000000}"/>
+          </ac:spMkLst>
+        </pc:spChg>
+        <pc:spChg chg="mod">
+          <ac:chgData name="Ярослав Zhjckfd" userId="180ae11dff91542b" providerId="LiveId" clId="{E2501CB2-C655-458D-845F-849DFB16B14F}" dt="2026-10-24T12:53:56.590" v="29" actId="255"/>
+          <ac:spMkLst>
+            <pc:docMk/>
+            <pc:sldMk cId="0" sldId="258"/>
+            <ac:spMk id="15" creationId="{00000000-0000-0000-0000-000000000000}"/>
+          </ac:spMkLst>
+        </pc:spChg>
+        <pc:spChg chg="mod">
+          <ac:chgData name="Ярослав Zhjckfd" userId="180ae11dff91542b" providerId="LiveId" clId="{E2501CB2-C655-458D-845F-849DFB16B14F}" dt="2026-10-24T12:54:00.222" v="30" actId="255"/>
+          <ac:spMkLst>
+            <pc:docMk/>
+            <pc:sldMk cId="0" sldId="258"/>
+            <ac:spMk id="19" creationId="{00000000-0000-0000-0000-000000000000}"/>
+          </ac:spMkLst>
+        </pc:spChg>
+        <pc:spChg chg="mod">
+          <ac:chgData name="Ярослав Zhjckfd" userId="180ae11dff91542b" providerId="LiveId" clId="{E2501CB2-C655-458D-845F-849DFB16B14F}" dt="2026-10-24T12:54:04.134" v="31" actId="255"/>
+          <ac:spMkLst>
+            <pc:docMk/>
+            <pc:sldMk cId="0" sldId="258"/>
+            <ac:spMk id="23" creationId="{00000000-0000-0000-0000-000000000000}"/>
+          </ac:spMkLst>
+        </pc:spChg>
+        <pc:spChg chg="mod">
+          <ac:chgData name="Ярослав Zhjckfd" userId="180ae11dff91542b" providerId="LiveId" clId="{E2501CB2-C655-458D-845F-849DFB16B14F}" dt="2026-10-24T12:53:45.636" v="27" actId="14100"/>
+          <ac:spMkLst>
+            <pc:docMk/>
+            <pc:sldMk cId="0" sldId="258"/>
+            <ac:spMk id="27" creationId="{00000000-0000-0000-0000-000000000000}"/>
+          </ac:spMkLst>
+        </pc:spChg>
+        <pc:spChg chg="mod">
+          <ac:chgData name="Ярослав Zhjckfd" userId="180ae11dff91542b" providerId="LiveId" clId="{E2501CB2-C655-458D-845F-849DFB16B14F}" dt="2026-10-24T12:53:42.488" v="26" actId="14100"/>
+          <ac:spMkLst>
+            <pc:docMk/>
+            <pc:sldMk cId="0" sldId="258"/>
+            <ac:spMk id="30" creationId="{00000000-0000-0000-0000-000000000000}"/>
+          </ac:spMkLst>
+        </pc:spChg>
+      </pc:sldChg>
+      <pc:sldChg chg="modSp mod">
+        <pc:chgData name="Ярослав Zhjckfd" userId="180ae11dff91542b" providerId="LiveId" clId="{E2501CB2-C655-458D-845F-849DFB16B14F}" dt="2026-10-24T12:46:19.575" v="15" actId="255"/>
+        <pc:sldMkLst>
+          <pc:docMk/>
+          <pc:sldMk cId="0" sldId="259"/>
+        </pc:sldMkLst>
+        <pc:spChg chg="mod">
+          <ac:chgData name="Ярослав Zhjckfd" userId="180ae11dff91542b" providerId="LiveId" clId="{E2501CB2-C655-458D-845F-849DFB16B14F}" dt="2026-10-24T12:45:49.518" v="10" actId="207"/>
+          <ac:spMkLst>
+            <pc:docMk/>
+            <pc:sldMk cId="0" sldId="259"/>
+            <ac:spMk id="8" creationId="{00000000-0000-0000-0000-000000000000}"/>
+          </ac:spMkLst>
+        </pc:spChg>
+        <pc:spChg chg="mod">
+          <ac:chgData name="Ярослав Zhjckfd" userId="180ae11dff91542b" providerId="LiveId" clId="{E2501CB2-C655-458D-845F-849DFB16B14F}" dt="2026-10-24T12:45:59.966" v="11" actId="255"/>
+          <ac:spMkLst>
+            <pc:docMk/>
+            <pc:sldMk cId="0" sldId="259"/>
+            <ac:spMk id="11" creationId="{00000000-0000-0000-0000-000000000000}"/>
+          </ac:spMkLst>
+        </pc:spChg>
+        <pc:spChg chg="mod">
+          <ac:chgData name="Ярослав Zhjckfd" userId="180ae11dff91542b" providerId="LiveId" clId="{E2501CB2-C655-458D-845F-849DFB16B14F}" dt="2026-10-24T12:46:04.390" v="12" actId="255"/>
+          <ac:spMkLst>
+            <pc:docMk/>
+            <pc:sldMk cId="0" sldId="259"/>
+            <ac:spMk id="16" creationId="{00000000-0000-0000-0000-000000000000}"/>
+          </ac:spMkLst>
+        </pc:spChg>
+        <pc:spChg chg="mod">
+          <ac:chgData name="Ярослав Zhjckfd" userId="180ae11dff91542b" providerId="LiveId" clId="{E2501CB2-C655-458D-845F-849DFB16B14F}" dt="2026-10-24T12:46:09.548" v="13" actId="255"/>
+          <ac:spMkLst>
+            <pc:docMk/>
+            <pc:sldMk cId="0" sldId="259"/>
+            <ac:spMk id="21" creationId="{00000000-0000-0000-0000-000000000000}"/>
+          </ac:spMkLst>
+        </pc:spChg>
+        <pc:spChg chg="mod">
+          <ac:chgData name="Ярослав Zhjckfd" userId="180ae11dff91542b" providerId="LiveId" clId="{E2501CB2-C655-458D-845F-849DFB16B14F}" dt="2026-10-24T12:46:14.908" v="14" actId="255"/>
+          <ac:spMkLst>
+            <pc:docMk/>
+            <pc:sldMk cId="0" sldId="259"/>
+            <ac:spMk id="26" creationId="{00000000-0000-0000-0000-000000000000}"/>
+          </ac:spMkLst>
+        </pc:spChg>
+        <pc:spChg chg="mod">
+          <ac:chgData name="Ярослав Zhjckfd" userId="180ae11dff91542b" providerId="LiveId" clId="{E2501CB2-C655-458D-845F-849DFB16B14F}" dt="2026-10-24T12:46:19.575" v="15" actId="255"/>
+          <ac:spMkLst>
+            <pc:docMk/>
+            <pc:sldMk cId="0" sldId="259"/>
+            <ac:spMk id="31" creationId="{00000000-0000-0000-0000-000000000000}"/>
+          </ac:spMkLst>
+        </pc:spChg>
+      </pc:sldChg>
+      <pc:sldChg chg="modSp mod ord">
+        <pc:chgData name="Ярослав Zhjckfd" userId="180ae11dff91542b" providerId="LiveId" clId="{E2501CB2-C655-458D-845F-849DFB16B14F}" dt="2026-10-24T13:02:43.158" v="65" actId="255"/>
+        <pc:sldMkLst>
+          <pc:docMk/>
+          <pc:sldMk cId="0" sldId="275"/>
+        </pc:sldMkLst>
+        <pc:spChg chg="mod">
+          <ac:chgData name="Ярослав Zhjckfd" userId="180ae11dff91542b" providerId="LiveId" clId="{E2501CB2-C655-458D-845F-849DFB16B14F}" dt="2026-10-24T13:02:15.253" v="60" actId="255"/>
+          <ac:spMkLst>
+            <pc:docMk/>
+            <pc:sldMk cId="0" sldId="275"/>
+            <ac:spMk id="103" creationId="{00000000-0000-0000-0000-000000000000}"/>
+          </ac:spMkLst>
+        </pc:spChg>
+        <pc:spChg chg="mod">
+          <ac:chgData name="Ярослав Zhjckfd" userId="180ae11dff91542b" providerId="LiveId" clId="{E2501CB2-C655-458D-845F-849DFB16B14F}" dt="2026-10-24T13:02:11.833" v="59" actId="255"/>
+          <ac:spMkLst>
+            <pc:docMk/>
+            <pc:sldMk cId="0" sldId="275"/>
+            <ac:spMk id="106" creationId="{00000000-0000-0000-0000-000000000000}"/>
+          </ac:spMkLst>
+        </pc:spChg>
+        <pc:spChg chg="mod">
+          <ac:chgData name="Ярослав Zhjckfd" userId="180ae11dff91542b" providerId="LiveId" clId="{E2501CB2-C655-458D-845F-849DFB16B14F}" dt="2026-10-24T13:02:08.933" v="58" actId="255"/>
+          <ac:spMkLst>
+            <pc:docMk/>
+            <pc:sldMk cId="0" sldId="275"/>
+            <ac:spMk id="109" creationId="{00000000-0000-0000-0000-000000000000}"/>
+          </ac:spMkLst>
+        </pc:spChg>
+        <pc:spChg chg="mod">
+          <ac:chgData name="Ярослав Zhjckfd" userId="180ae11dff91542b" providerId="LiveId" clId="{E2501CB2-C655-458D-845F-849DFB16B14F}" dt="2026-10-24T13:02:05.388" v="57" actId="255"/>
+          <ac:spMkLst>
+            <pc:docMk/>
+            <pc:sldMk cId="0" sldId="275"/>
+            <ac:spMk id="112" creationId="{00000000-0000-0000-0000-000000000000}"/>
+          </ac:spMkLst>
+        </pc:spChg>
+        <pc:spChg chg="mod">
+          <ac:chgData name="Ярослав Zhjckfd" userId="180ae11dff91542b" providerId="LiveId" clId="{E2501CB2-C655-458D-845F-849DFB16B14F}" dt="2026-10-24T13:02:24.344" v="62" actId="255"/>
+          <ac:spMkLst>
+            <pc:docMk/>
+            <pc:sldMk cId="0" sldId="275"/>
+            <ac:spMk id="115" creationId="{00000000-0000-0000-0000-000000000000}"/>
+          </ac:spMkLst>
+        </pc:spChg>
+        <pc:spChg chg="mod">
+          <ac:chgData name="Ярослав Zhjckfd" userId="180ae11dff91542b" providerId="LiveId" clId="{E2501CB2-C655-458D-845F-849DFB16B14F}" dt="2026-10-24T13:02:32.209" v="64" actId="255"/>
+          <ac:spMkLst>
+            <pc:docMk/>
+            <pc:sldMk cId="0" sldId="275"/>
+            <ac:spMk id="118" creationId="{00000000-0000-0000-0000-000000000000}"/>
+          </ac:spMkLst>
+        </pc:spChg>
+        <pc:spChg chg="mod">
+          <ac:chgData name="Ярослав Zhjckfd" userId="180ae11dff91542b" providerId="LiveId" clId="{E2501CB2-C655-458D-845F-849DFB16B14F}" dt="2026-10-24T13:00:46.733" v="47" actId="255"/>
+          <ac:spMkLst>
+            <pc:docMk/>
+            <pc:sldMk cId="0" sldId="275"/>
+            <ac:spMk id="119" creationId="{00000000-0000-0000-0000-000000000000}"/>
+          </ac:spMkLst>
+        </pc:spChg>
+        <pc:graphicFrameChg chg="modGraphic">
+          <ac:chgData name="Ярослав Zhjckfd" userId="180ae11dff91542b" providerId="LiveId" clId="{E2501CB2-C655-458D-845F-849DFB16B14F}" dt="2026-10-24T13:02:43.158" v="65" actId="255"/>
+          <ac:graphicFrameMkLst>
+            <pc:docMk/>
+            <pc:sldMk cId="0" sldId="275"/>
+            <ac:graphicFrameMk id="120" creationId="{00000000-0000-0000-0000-000000000000}"/>
+          </ac:graphicFrameMkLst>
+        </pc:graphicFrameChg>
+      </pc:sldChg>
+      <pc:sldChg chg="modSp mod">
+        <pc:chgData name="Ярослав Zhjckfd" userId="180ae11dff91542b" providerId="LiveId" clId="{E2501CB2-C655-458D-845F-849DFB16B14F}" dt="2026-10-24T13:05:16.393" v="79" actId="20577"/>
+        <pc:sldMkLst>
+          <pc:docMk/>
+          <pc:sldMk cId="0" sldId="277"/>
+        </pc:sldMkLst>
+        <pc:spChg chg="mod">
+          <ac:chgData name="Ярослав Zhjckfd" userId="180ae11dff91542b" providerId="LiveId" clId="{E2501CB2-C655-458D-845F-849DFB16B14F}" dt="2026-10-24T13:05:16.393" v="79" actId="20577"/>
+          <ac:spMkLst>
+            <pc:docMk/>
+            <pc:sldMk cId="0" sldId="277"/>
+            <ac:spMk id="104" creationId="{00000000-0000-0000-0000-000000000000}"/>
+          </ac:spMkLst>
+        </pc:spChg>
+      </pc:sldChg>
+      <pc:sldChg chg="modSp mod ord">
+        <pc:chgData name="Ярослав Zhjckfd" userId="180ae11dff91542b" providerId="LiveId" clId="{E2501CB2-C655-458D-845F-849DFB16B14F}" dt="2026-10-24T13:21:51.426" v="114" actId="255"/>
+        <pc:sldMkLst>
+          <pc:docMk/>
+          <pc:sldMk cId="0" sldId="279"/>
+        </pc:sldMkLst>
+        <pc:spChg chg="mod">
+          <ac:chgData name="Ярослав Zhjckfd" userId="180ae11dff91542b" providerId="LiveId" clId="{E2501CB2-C655-458D-845F-849DFB16B14F}" dt="2026-10-24T13:20:58.870" v="102" actId="255"/>
+          <ac:spMkLst>
+            <pc:docMk/>
+            <pc:sldMk cId="0" sldId="279"/>
+            <ac:spMk id="103" creationId="{00000000-0000-0000-0000-000000000000}"/>
+          </ac:spMkLst>
+        </pc:spChg>
+        <pc:spChg chg="mod">
+          <ac:chgData name="Ярослав Zhjckfd" userId="180ae11dff91542b" providerId="LiveId" clId="{E2501CB2-C655-458D-845F-849DFB16B14F}" dt="2026-10-24T13:21:03.024" v="103" actId="255"/>
+          <ac:spMkLst>
+            <pc:docMk/>
+            <pc:sldMk cId="0" sldId="279"/>
+            <ac:spMk id="106" creationId="{00000000-0000-0000-0000-000000000000}"/>
+          </ac:spMkLst>
+        </pc:spChg>
+        <pc:spChg chg="mod">
+          <ac:chgData name="Ярослав Zhjckfd" userId="180ae11dff91542b" providerId="LiveId" clId="{E2501CB2-C655-458D-845F-849DFB16B14F}" dt="2026-10-24T13:21:51.426" v="114" actId="255"/>
+          <ac:spMkLst>
+            <pc:docMk/>
+            <pc:sldMk cId="0" sldId="279"/>
+            <ac:spMk id="108" creationId="{00000000-0000-0000-0000-000000000000}"/>
+          </ac:spMkLst>
+        </pc:spChg>
+        <pc:spChg chg="mod">
+          <ac:chgData name="Ярослав Zhjckfd" userId="180ae11dff91542b" providerId="LiveId" clId="{E2501CB2-C655-458D-845F-849DFB16B14F}" dt="2026-10-24T13:21:31.856" v="110" actId="255"/>
+          <ac:spMkLst>
+            <pc:docMk/>
+            <pc:sldMk cId="0" sldId="279"/>
+            <ac:spMk id="110" creationId="{00000000-0000-0000-0000-000000000000}"/>
+          </ac:spMkLst>
+        </pc:spChg>
+        <pc:spChg chg="mod">
+          <ac:chgData name="Ярослав Zhjckfd" userId="180ae11dff91542b" providerId="LiveId" clId="{E2501CB2-C655-458D-845F-849DFB16B14F}" dt="2026-10-24T13:20:55.182" v="101" actId="255"/>
+          <ac:spMkLst>
+            <pc:docMk/>
+            <pc:sldMk cId="0" sldId="279"/>
+            <ac:spMk id="112" creationId="{00000000-0000-0000-0000-000000000000}"/>
+          </ac:spMkLst>
+        </pc:spChg>
+        <pc:spChg chg="mod">
+          <ac:chgData name="Ярослав Zhjckfd" userId="180ae11dff91542b" providerId="LiveId" clId="{E2501CB2-C655-458D-845F-849DFB16B14F}" dt="2026-10-24T13:21:37.082" v="111" actId="255"/>
+          <ac:spMkLst>
+            <pc:docMk/>
+            <pc:sldMk cId="0" sldId="279"/>
+            <ac:spMk id="115" creationId="{00000000-0000-0000-0000-000000000000}"/>
+          </ac:spMkLst>
+        </pc:spChg>
+        <pc:spChg chg="mod">
+          <ac:chgData name="Ярослав Zhjckfd" userId="180ae11dff91542b" providerId="LiveId" clId="{E2501CB2-C655-458D-845F-849DFB16B14F}" dt="2026-10-24T13:21:28.205" v="109" actId="255"/>
+          <ac:spMkLst>
+            <pc:docMk/>
+            <pc:sldMk cId="0" sldId="279"/>
+            <ac:spMk id="116" creationId="{00000000-0000-0000-0000-000000000000}"/>
+          </ac:spMkLst>
+        </pc:spChg>
+        <pc:spChg chg="mod">
+          <ac:chgData name="Ярослав Zhjckfd" userId="180ae11dff91542b" providerId="LiveId" clId="{E2501CB2-C655-458D-845F-849DFB16B14F}" dt="2026-10-24T13:21:07.366" v="104" actId="255"/>
+          <ac:spMkLst>
+            <pc:docMk/>
+            <pc:sldMk cId="0" sldId="279"/>
+            <ac:spMk id="118" creationId="{00000000-0000-0000-0000-000000000000}"/>
+          </ac:spMkLst>
+        </pc:spChg>
+        <pc:spChg chg="mod">
+          <ac:chgData name="Ярослав Zhjckfd" userId="180ae11dff91542b" providerId="LiveId" clId="{E2501CB2-C655-458D-845F-849DFB16B14F}" dt="2026-10-24T13:21:11.485" v="105" actId="255"/>
+          <ac:spMkLst>
+            <pc:docMk/>
+            <pc:sldMk cId="0" sldId="279"/>
+            <ac:spMk id="120" creationId="{00000000-0000-0000-0000-000000000000}"/>
+          </ac:spMkLst>
+        </pc:spChg>
+        <pc:spChg chg="mod">
+          <ac:chgData name="Ярослав Zhjckfd" userId="180ae11dff91542b" providerId="LiveId" clId="{E2501CB2-C655-458D-845F-849DFB16B14F}" dt="2026-10-24T13:04:21.365" v="76" actId="14100"/>
+          <ac:spMkLst>
+            <pc:docMk/>
+            <pc:sldMk cId="0" sldId="279"/>
+            <ac:spMk id="121" creationId="{00000000-0000-0000-0000-000000000000}"/>
+          </ac:spMkLst>
+        </pc:spChg>
+        <pc:spChg chg="mod">
+          <ac:chgData name="Ярослав Zhjckfd" userId="180ae11dff91542b" providerId="LiveId" clId="{E2501CB2-C655-458D-845F-849DFB16B14F}" dt="2026-10-24T13:21:18.532" v="107" actId="255"/>
+          <ac:spMkLst>
+            <pc:docMk/>
+            <pc:sldMk cId="0" sldId="279"/>
+            <ac:spMk id="122" creationId="{00000000-0000-0000-0000-000000000000}"/>
+          </ac:spMkLst>
+        </pc:spChg>
+        <pc:spChg chg="mod">
+          <ac:chgData name="Ярослав Zhjckfd" userId="180ae11dff91542b" providerId="LiveId" clId="{E2501CB2-C655-458D-845F-849DFB16B14F}" dt="2026-10-24T13:21:21.891" v="108" actId="255"/>
+          <ac:spMkLst>
+            <pc:docMk/>
+            <pc:sldMk cId="0" sldId="279"/>
+            <ac:spMk id="125" creationId="{00000000-0000-0000-0000-000000000000}"/>
+          </ac:spMkLst>
+        </pc:spChg>
+        <pc:spChg chg="mod">
+          <ac:chgData name="Ярослав Zhjckfd" userId="180ae11dff91542b" providerId="LiveId" clId="{E2501CB2-C655-458D-845F-849DFB16B14F}" dt="2026-10-24T13:21:41.219" v="112" actId="255"/>
+          <ac:spMkLst>
+            <pc:docMk/>
+            <pc:sldMk cId="0" sldId="279"/>
+            <ac:spMk id="129" creationId="{00000000-0000-0000-0000-000000000000}"/>
+          </ac:spMkLst>
+        </pc:spChg>
+        <pc:spChg chg="mod">
+          <ac:chgData name="Ярослав Zhjckfd" userId="180ae11dff91542b" providerId="LiveId" clId="{E2501CB2-C655-458D-845F-849DFB16B14F}" dt="2026-10-24T13:21:45.344" v="113" actId="255"/>
+          <ac:spMkLst>
+            <pc:docMk/>
+            <pc:sldMk cId="0" sldId="279"/>
+            <ac:spMk id="130" creationId="{00000000-0000-0000-0000-000000000000}"/>
+          </ac:spMkLst>
+        </pc:spChg>
+        <pc:spChg chg="mod">
+          <ac:chgData name="Ярослав Zhjckfd" userId="180ae11dff91542b" providerId="LiveId" clId="{E2501CB2-C655-458D-845F-849DFB16B14F}" dt="2026-10-24T13:21:14.952" v="106" actId="255"/>
+          <ac:spMkLst>
+            <pc:docMk/>
+            <pc:sldMk cId="0" sldId="279"/>
+            <ac:spMk id="132" creationId="{00000000-0000-0000-0000-000000000000}"/>
+          </ac:spMkLst>
+        </pc:spChg>
+      </pc:sldChg>
+      <pc:sldChg chg="modSp mod">
+        <pc:chgData name="Ярослав Zhjckfd" userId="180ae11dff91542b" providerId="LiveId" clId="{E2501CB2-C655-458D-845F-849DFB16B14F}" dt="2026-10-24T12:58:39.847" v="36" actId="255"/>
+        <pc:sldMkLst>
+          <pc:docMk/>
+          <pc:sldMk cId="0" sldId="280"/>
+        </pc:sldMkLst>
+        <pc:spChg chg="mod">
+          <ac:chgData name="Ярослав Zhjckfd" userId="180ae11dff91542b" providerId="LiveId" clId="{E2501CB2-C655-458D-845F-849DFB16B14F}" dt="2026-10-24T12:58:31.447" v="34" actId="255"/>
+          <ac:spMkLst>
+            <pc:docMk/>
+            <pc:sldMk cId="0" sldId="280"/>
+            <ac:spMk id="104" creationId="{00000000-0000-0000-0000-000000000000}"/>
+          </ac:spMkLst>
+        </pc:spChg>
+        <pc:spChg chg="mod">
+          <ac:chgData name="Ярослав Zhjckfd" userId="180ae11dff91542b" providerId="LiveId" clId="{E2501CB2-C655-458D-845F-849DFB16B14F}" dt="2026-10-24T12:58:35.920" v="35" actId="255"/>
+          <ac:spMkLst>
+            <pc:docMk/>
+            <pc:sldMk cId="0" sldId="280"/>
+            <ac:spMk id="108" creationId="{00000000-0000-0000-0000-000000000000}"/>
+          </ac:spMkLst>
+        </pc:spChg>
+        <pc:spChg chg="mod">
+          <ac:chgData name="Ярослав Zhjckfd" userId="180ae11dff91542b" providerId="LiveId" clId="{E2501CB2-C655-458D-845F-849DFB16B14F}" dt="2026-10-24T12:58:39.847" v="36" actId="255"/>
+          <ac:spMkLst>
+            <pc:docMk/>
+            <pc:sldMk cId="0" sldId="280"/>
+            <ac:spMk id="112" creationId="{00000000-0000-0000-0000-000000000000}"/>
+          </ac:spMkLst>
+        </pc:spChg>
+        <pc:spChg chg="mod">
+          <ac:chgData name="Ярослав Zhjckfd" userId="180ae11dff91542b" providerId="LiveId" clId="{E2501CB2-C655-458D-845F-849DFB16B14F}" dt="2026-10-24T12:54:55.017" v="33" actId="255"/>
+          <ac:spMkLst>
+            <pc:docMk/>
+            <pc:sldMk cId="0" sldId="280"/>
+            <ac:spMk id="115" creationId="{00000000-0000-0000-0000-000000000000}"/>
+          </ac:spMkLst>
+        </pc:spChg>
+      </pc:sldChg>
+      <pc:sldChg chg="modSp mod">
+        <pc:chgData name="Ярослав Zhjckfd" userId="180ae11dff91542b" providerId="LiveId" clId="{E2501CB2-C655-458D-845F-849DFB16B14F}" dt="2026-10-24T13:20:45.505" v="100" actId="255"/>
+        <pc:sldMkLst>
+          <pc:docMk/>
+          <pc:sldMk cId="0" sldId="281"/>
+        </pc:sldMkLst>
+        <pc:spChg chg="mod">
+          <ac:chgData name="Ярослав Zhjckfd" userId="180ae11dff91542b" providerId="LiveId" clId="{E2501CB2-C655-458D-845F-849DFB16B14F}" dt="2026-10-24T13:08:33.263" v="82" actId="20577"/>
+          <ac:spMkLst>
+            <pc:docMk/>
+            <pc:sldMk cId="0" sldId="281"/>
+            <ac:spMk id="103" creationId="{00000000-0000-0000-0000-000000000000}"/>
+          </ac:spMkLst>
+        </pc:spChg>
+        <pc:spChg chg="mod">
+          <ac:chgData name="Ярослав Zhjckfd" userId="180ae11dff91542b" providerId="LiveId" clId="{E2501CB2-C655-458D-845F-849DFB16B14F}" dt="2026-10-24T13:08:47.599" v="85" actId="20577"/>
+          <ac:spMkLst>
+            <pc:docMk/>
+            <pc:sldMk cId="0" sldId="281"/>
+            <ac:spMk id="105" creationId="{00000000-0000-0000-0000-000000000000}"/>
+          </ac:spMkLst>
+        </pc:spChg>
+        <pc:spChg chg="mod">
+          <ac:chgData name="Ярослав Zhjckfd" userId="180ae11dff91542b" providerId="LiveId" clId="{E2501CB2-C655-458D-845F-849DFB16B14F}" dt="2026-10-24T13:20:00.249" v="89" actId="255"/>
+          <ac:spMkLst>
+            <pc:docMk/>
+            <pc:sldMk cId="0" sldId="281"/>
+            <ac:spMk id="107" creationId="{00000000-0000-0000-0000-000000000000}"/>
+          </ac:spMkLst>
+        </pc:spChg>
+        <pc:spChg chg="mod">
+          <ac:chgData name="Ярослав Zhjckfd" userId="180ae11dff91542b" providerId="LiveId" clId="{E2501CB2-C655-458D-845F-849DFB16B14F}" dt="2026-10-24T13:19:56.803" v="88" actId="255"/>
+          <ac:spMkLst>
+            <pc:docMk/>
+            <pc:sldMk cId="0" sldId="281"/>
+            <ac:spMk id="109" creationId="{00000000-0000-0000-0000-000000000000}"/>
+          </ac:spMkLst>
+        </pc:spChg>
+        <pc:spChg chg="mod">
+          <ac:chgData name="Ярослав Zhjckfd" userId="180ae11dff91542b" providerId="LiveId" clId="{E2501CB2-C655-458D-845F-849DFB16B14F}" dt="2026-10-24T13:20:45.505" v="100" actId="255"/>
+          <ac:spMkLst>
+            <pc:docMk/>
+            <pc:sldMk cId="0" sldId="281"/>
+            <ac:spMk id="111" creationId="{00000000-0000-0000-0000-000000000000}"/>
+          </ac:spMkLst>
+        </pc:spChg>
+        <pc:spChg chg="mod">
+          <ac:chgData name="Ярослав Zhjckfd" userId="180ae11dff91542b" providerId="LiveId" clId="{E2501CB2-C655-458D-845F-849DFB16B14F}" dt="2026-10-24T13:20:04.066" v="90" actId="255"/>
+          <ac:spMkLst>
+            <pc:docMk/>
+            <pc:sldMk cId="0" sldId="281"/>
+            <ac:spMk id="118" creationId="{00000000-0000-0000-0000-000000000000}"/>
+          </ac:spMkLst>
+        </pc:spChg>
+        <pc:spChg chg="mod">
+          <ac:chgData name="Ярослав Zhjckfd" userId="180ae11dff91542b" providerId="LiveId" clId="{E2501CB2-C655-458D-845F-849DFB16B14F}" dt="2026-10-24T13:20:08.193" v="91" actId="255"/>
+          <ac:spMkLst>
+            <pc:docMk/>
+            <pc:sldMk cId="0" sldId="281"/>
+            <ac:spMk id="120" creationId="{00000000-0000-0000-0000-000000000000}"/>
+          </ac:spMkLst>
+        </pc:spChg>
+        <pc:spChg chg="mod">
+          <ac:chgData name="Ярослав Zhjckfd" userId="180ae11dff91542b" providerId="LiveId" clId="{E2501CB2-C655-458D-845F-849DFB16B14F}" dt="2026-10-24T13:20:18.980" v="94" actId="255"/>
+          <ac:spMkLst>
+            <pc:docMk/>
+            <pc:sldMk cId="0" sldId="281"/>
+            <ac:spMk id="122" creationId="{00000000-0000-0000-0000-000000000000}"/>
+          </ac:spMkLst>
+        </pc:spChg>
+        <pc:spChg chg="mod">
+          <ac:chgData name="Ярослав Zhjckfd" userId="180ae11dff91542b" providerId="LiveId" clId="{E2501CB2-C655-458D-845F-849DFB16B14F}" dt="2026-10-24T13:20:23.045" v="95" actId="255"/>
+          <ac:spMkLst>
+            <pc:docMk/>
+            <pc:sldMk cId="0" sldId="281"/>
+            <ac:spMk id="124" creationId="{00000000-0000-0000-0000-000000000000}"/>
+          </ac:spMkLst>
+        </pc:spChg>
+        <pc:spChg chg="mod">
+          <ac:chgData name="Ярослав Zhjckfd" userId="180ae11dff91542b" providerId="LiveId" clId="{E2501CB2-C655-458D-845F-849DFB16B14F}" dt="2026-10-24T13:20:26.840" v="96" actId="255"/>
+          <ac:spMkLst>
+            <pc:docMk/>
+            <pc:sldMk cId="0" sldId="281"/>
+            <ac:spMk id="131" creationId="{00000000-0000-0000-0000-000000000000}"/>
+          </ac:spMkLst>
+        </pc:spChg>
+        <pc:spChg chg="mod">
+          <ac:chgData name="Ярослав Zhjckfd" userId="180ae11dff91542b" providerId="LiveId" clId="{E2501CB2-C655-458D-845F-849DFB16B14F}" dt="2026-10-24T13:20:30.916" v="97" actId="255"/>
+          <ac:spMkLst>
+            <pc:docMk/>
+            <pc:sldMk cId="0" sldId="281"/>
+            <ac:spMk id="133" creationId="{00000000-0000-0000-0000-000000000000}"/>
+          </ac:spMkLst>
+        </pc:spChg>
+        <pc:spChg chg="mod">
+          <ac:chgData name="Ярослав Zhjckfd" userId="180ae11dff91542b" providerId="LiveId" clId="{E2501CB2-C655-458D-845F-849DFB16B14F}" dt="2026-10-24T13:20:34.483" v="98" actId="255"/>
+          <ac:spMkLst>
+            <pc:docMk/>
+            <pc:sldMk cId="0" sldId="281"/>
+            <ac:spMk id="135" creationId="{00000000-0000-0000-0000-000000000000}"/>
+          </ac:spMkLst>
+        </pc:spChg>
+        <pc:spChg chg="mod">
+          <ac:chgData name="Ярослав Zhjckfd" userId="180ae11dff91542b" providerId="LiveId" clId="{E2501CB2-C655-458D-845F-849DFB16B14F}" dt="2026-10-24T13:20:42.008" v="99" actId="255"/>
+          <ac:spMkLst>
+            <pc:docMk/>
+            <pc:sldMk cId="0" sldId="281"/>
+            <ac:spMk id="137" creationId="{00000000-0000-0000-0000-000000000000}"/>
+          </ac:spMkLst>
+        </pc:spChg>
+      </pc:sldChg>
+    </pc:docChg>
+  </pc:docChgLst>
+</pc:chgInfo>
+</file>
+
 <file path=ppt/notesMasters/notesMaster1.xml><?xml version="1.0" encoding="utf-8"?>
 <p:notesMaster xmlns:a="http://schemas.openxmlformats.org/drawingml/2006/main" xmlns:r="http://schemas.openxmlformats.org/officeDocument/2006/relationships" xmlns:p="http://schemas.openxmlformats.org/presentationml/2006/main">
   <p:cSld>
@@ -221,7 +779,7 @@
           <a:p>
             <a:fld id="{3FA89327-E8A3-415C-A891-4B227273A86B}" type="datetimeFigureOut">
               <a:rPr lang="ru-RU" smtClean="0"/>
-              <a:t>23.10.2026</a:t>
+              <a:t>24.10.2026</a:t>
             </a:fld>
             <a:endParaRPr lang="ru-RU"/>
           </a:p>
@@ -751,7 +1309,7 @@
           <a:p>
             <a:fld id="{5BCAD085-E8A6-8845-BD4E-CB4CCA059FC4}" type="datetimeFigureOut">
               <a:rPr lang="en-US" smtClean="0"/>
-              <a:t>10/23/2026</a:t>
+              <a:t>10/24/2026</a:t>
             </a:fld>
             <a:endParaRPr lang="en-US"/>
           </a:p>
@@ -919,7 +1477,7 @@
           <a:p>
             <a:fld id="{5BCAD085-E8A6-8845-BD4E-CB4CCA059FC4}" type="datetimeFigureOut">
               <a:rPr lang="en-US" smtClean="0"/>
-              <a:t>10/23/2026</a:t>
+              <a:t>10/24/2026</a:t>
             </a:fld>
             <a:endParaRPr lang="en-US"/>
           </a:p>
@@ -1097,7 +1655,7 @@
           <a:p>
             <a:fld id="{5BCAD085-E8A6-8845-BD4E-CB4CCA059FC4}" type="datetimeFigureOut">
               <a:rPr lang="en-US" smtClean="0"/>
-              <a:t>10/23/2026</a:t>
+              <a:t>10/24/2026</a:t>
             </a:fld>
             <a:endParaRPr lang="en-US"/>
           </a:p>
@@ -1265,7 +1823,7 @@
           <a:p>
             <a:fld id="{5BCAD085-E8A6-8845-BD4E-CB4CCA059FC4}" type="datetimeFigureOut">
               <a:rPr lang="en-US" smtClean="0"/>
-              <a:t>10/23/2026</a:t>
+              <a:t>10/24/2026</a:t>
             </a:fld>
             <a:endParaRPr lang="en-US"/>
           </a:p>
@@ -1510,7 +2068,7 @@
           <a:p>
             <a:fld id="{5BCAD085-E8A6-8845-BD4E-CB4CCA059FC4}" type="datetimeFigureOut">
               <a:rPr lang="en-US" smtClean="0"/>
-              <a:t>10/23/2026</a:t>
+              <a:t>10/24/2026</a:t>
             </a:fld>
             <a:endParaRPr lang="en-US"/>
           </a:p>
@@ -1795,7 +2353,7 @@
           <a:p>
             <a:fld id="{5BCAD085-E8A6-8845-BD4E-CB4CCA059FC4}" type="datetimeFigureOut">
               <a:rPr lang="en-US" smtClean="0"/>
-              <a:t>10/23/2026</a:t>
+              <a:t>10/24/2026</a:t>
             </a:fld>
             <a:endParaRPr lang="en-US"/>
           </a:p>
@@ -2214,7 +2772,7 @@
           <a:p>
             <a:fld id="{5BCAD085-E8A6-8845-BD4E-CB4CCA059FC4}" type="datetimeFigureOut">
               <a:rPr lang="en-US" smtClean="0"/>
-              <a:t>10/23/2026</a:t>
+              <a:t>10/24/2026</a:t>
             </a:fld>
             <a:endParaRPr lang="en-US"/>
           </a:p>
@@ -2331,7 +2889,7 @@
           <a:p>
             <a:fld id="{5BCAD085-E8A6-8845-BD4E-CB4CCA059FC4}" type="datetimeFigureOut">
               <a:rPr lang="en-US" smtClean="0"/>
-              <a:t>10/23/2026</a:t>
+              <a:t>10/24/2026</a:t>
             </a:fld>
             <a:endParaRPr lang="en-US"/>
           </a:p>
@@ -2426,7 +2984,7 @@
           <a:p>
             <a:fld id="{5BCAD085-E8A6-8845-BD4E-CB4CCA059FC4}" type="datetimeFigureOut">
               <a:rPr lang="en-US" smtClean="0"/>
-              <a:t>10/23/2026</a:t>
+              <a:t>10/24/2026</a:t>
             </a:fld>
             <a:endParaRPr lang="en-US"/>
           </a:p>
@@ -2701,7 +3259,7 @@
           <a:p>
             <a:fld id="{5BCAD085-E8A6-8845-BD4E-CB4CCA059FC4}" type="datetimeFigureOut">
               <a:rPr lang="en-US" smtClean="0"/>
-              <a:t>10/23/2026</a:t>
+              <a:t>10/24/2026</a:t>
             </a:fld>
             <a:endParaRPr lang="en-US"/>
           </a:p>
@@ -2953,7 +3511,7 @@
           <a:p>
             <a:fld id="{5BCAD085-E8A6-8845-BD4E-CB4CCA059FC4}" type="datetimeFigureOut">
               <a:rPr lang="en-US" smtClean="0"/>
-              <a:t>10/23/2026</a:t>
+              <a:t>10/24/2026</a:t>
             </a:fld>
             <a:endParaRPr lang="en-US"/>
           </a:p>
@@ -3164,7 +3722,7 @@
           <a:p>
             <a:fld id="{5BCAD085-E8A6-8845-BD4E-CB4CCA059FC4}" type="datetimeFigureOut">
               <a:rPr lang="en-US" smtClean="0"/>
-              <a:t>10/23/2026</a:t>
+              <a:t>10/24/2026</a:t>
             </a:fld>
             <a:endParaRPr lang="en-US"/>
           </a:p>
@@ -3761,7 +4319,7 @@
         <p:spPr>
           <a:xfrm>
             <a:off x="548640" y="3566160"/>
-            <a:ext cx="10515600" cy="548640"/>
+            <a:ext cx="10515600" cy="430887"/>
           </a:xfrm>
           <a:prstGeom prst="rect">
             <a:avLst/>
@@ -3780,14 +4338,155 @@
               </a:lnSpc>
             </a:pPr>
             <a:r>
-              <a:rPr sz="2000" b="0" i="0">
-                <a:solidFill>
-                  <a:srgbClr val="8A97A6"/>
-                </a:solidFill>
-                <a:latin typeface="Calibri"/>
-              </a:rPr>
-              <a:t>ИИ-помощник для работы с Excel-файлами цен на цветные металлы</a:t>
-            </a:r>
+              <a:rPr sz="2800" b="0" i="0" dirty="0">
+                <a:solidFill>
+                  <a:schemeClr val="bg1"/>
+                </a:solidFill>
+                <a:latin typeface="Calibri"/>
+              </a:rPr>
+              <a:t>ИИ-</a:t>
+            </a:r>
+            <a:r>
+              <a:rPr sz="2800" b="0" i="0" dirty="0" err="1">
+                <a:solidFill>
+                  <a:schemeClr val="bg1"/>
+                </a:solidFill>
+                <a:latin typeface="Calibri"/>
+              </a:rPr>
+              <a:t>помощник</a:t>
+            </a:r>
+            <a:r>
+              <a:rPr sz="2800" b="0" i="0" dirty="0">
+                <a:solidFill>
+                  <a:schemeClr val="bg1"/>
+                </a:solidFill>
+                <a:latin typeface="Calibri"/>
+              </a:rPr>
+              <a:t> </a:t>
+            </a:r>
+            <a:r>
+              <a:rPr sz="2800" b="0" i="0" dirty="0" err="1">
+                <a:solidFill>
+                  <a:schemeClr val="bg1"/>
+                </a:solidFill>
+                <a:latin typeface="Calibri"/>
+              </a:rPr>
+              <a:t>для</a:t>
+            </a:r>
+            <a:r>
+              <a:rPr sz="2800" b="0" i="0" dirty="0">
+                <a:solidFill>
+                  <a:schemeClr val="bg1"/>
+                </a:solidFill>
+                <a:latin typeface="Calibri"/>
+              </a:rPr>
+              <a:t> </a:t>
+            </a:r>
+            <a:r>
+              <a:rPr sz="2800" b="0" i="0" dirty="0" err="1">
+                <a:solidFill>
+                  <a:schemeClr val="bg1"/>
+                </a:solidFill>
+                <a:latin typeface="Calibri"/>
+              </a:rPr>
+              <a:t>работы</a:t>
+            </a:r>
+            <a:r>
+              <a:rPr sz="2800" b="0" i="0" dirty="0">
+                <a:solidFill>
+                  <a:schemeClr val="bg1"/>
+                </a:solidFill>
+                <a:latin typeface="Calibri"/>
+              </a:rPr>
+              <a:t> с Excel-</a:t>
+            </a:r>
+            <a:r>
+              <a:rPr sz="2800" b="0" i="0" dirty="0" err="1">
+                <a:solidFill>
+                  <a:schemeClr val="bg1"/>
+                </a:solidFill>
+                <a:latin typeface="Calibri"/>
+              </a:rPr>
+              <a:t>файлами</a:t>
+            </a:r>
+            <a:r>
+              <a:rPr sz="2800" b="0" i="0" dirty="0">
+                <a:solidFill>
+                  <a:schemeClr val="bg1"/>
+                </a:solidFill>
+                <a:latin typeface="Calibri"/>
+              </a:rPr>
+              <a:t> </a:t>
+            </a:r>
+            <a:r>
+              <a:rPr sz="2800" b="0" i="0" dirty="0" err="1">
+                <a:solidFill>
+                  <a:schemeClr val="bg1"/>
+                </a:solidFill>
+                <a:latin typeface="Calibri"/>
+              </a:rPr>
+              <a:t>цен</a:t>
+            </a:r>
+            <a:r>
+              <a:rPr sz="2800" b="0" i="0" dirty="0">
+                <a:solidFill>
+                  <a:schemeClr val="bg1"/>
+                </a:solidFill>
+                <a:latin typeface="Calibri"/>
+              </a:rPr>
+              <a:t> </a:t>
+            </a:r>
+            <a:r>
+              <a:rPr sz="2800" b="0" i="0" dirty="0" err="1">
+                <a:solidFill>
+                  <a:schemeClr val="bg1"/>
+                </a:solidFill>
+                <a:latin typeface="Calibri"/>
+              </a:rPr>
+              <a:t>на</a:t>
+            </a:r>
+            <a:r>
+              <a:rPr sz="2800" b="0" i="0" dirty="0">
+                <a:solidFill>
+                  <a:schemeClr val="bg1"/>
+                </a:solidFill>
+                <a:latin typeface="Calibri"/>
+              </a:rPr>
+              <a:t> </a:t>
+            </a:r>
+            <a:r>
+              <a:rPr sz="2800" b="0" i="0" dirty="0" err="1">
+                <a:solidFill>
+                  <a:schemeClr val="bg1"/>
+                </a:solidFill>
+                <a:latin typeface="Calibri"/>
+              </a:rPr>
+              <a:t>цветные</a:t>
+            </a:r>
+            <a:r>
+              <a:rPr sz="2800" b="0" i="0" dirty="0">
+                <a:solidFill>
+                  <a:schemeClr val="bg1"/>
+                </a:solidFill>
+                <a:latin typeface="Calibri"/>
+              </a:rPr>
+              <a:t> </a:t>
+            </a:r>
+            <a:r>
+              <a:rPr sz="2800" b="0" i="0" dirty="0" err="1">
+                <a:solidFill>
+                  <a:schemeClr val="bg1"/>
+                </a:solidFill>
+                <a:latin typeface="Calibri"/>
+              </a:rPr>
+              <a:t>металлы</a:t>
+            </a:r>
+            <a:endParaRPr sz="2800" b="0" i="0" dirty="0">
+              <a:solidFill>
+                <a:schemeClr val="bg1"/>
+              </a:solidFill>
+              <a:latin typeface="Calibri"/>
+            </a:endParaRPr>
           </a:p>
         </p:txBody>
       </p:sp>
@@ -3888,7 +4587,7 @@
         <p:spPr>
           <a:xfrm>
             <a:off x="749808" y="5047488"/>
-            <a:ext cx="3200400" cy="365760"/>
+            <a:ext cx="3200400" cy="307777"/>
           </a:xfrm>
           <a:prstGeom prst="rect">
             <a:avLst/>
@@ -3907,14 +4606,38 @@
               </a:lnSpc>
             </a:pPr>
             <a:r>
-              <a:rPr sz="1500" b="1" i="0">
+              <a:rPr sz="2000" b="1" i="0" dirty="0" err="1">
                 <a:solidFill>
                   <a:srgbClr val="FFFFFF"/>
                 </a:solidFill>
                 <a:latin typeface="Calibri"/>
               </a:rPr>
-              <a:t>Загрузил файл</a:t>
-            </a:r>
+              <a:t>Загрузил</a:t>
+            </a:r>
+            <a:r>
+              <a:rPr sz="2000" b="1" i="0" dirty="0">
+                <a:solidFill>
+                  <a:srgbClr val="FFFFFF"/>
+                </a:solidFill>
+                <a:latin typeface="Calibri"/>
+              </a:rPr>
+              <a:t> </a:t>
+            </a:r>
+            <a:r>
+              <a:rPr sz="2000" b="1" i="0" dirty="0" err="1">
+                <a:solidFill>
+                  <a:srgbClr val="FFFFFF"/>
+                </a:solidFill>
+                <a:latin typeface="Calibri"/>
+              </a:rPr>
+              <a:t>файл</a:t>
+            </a:r>
+            <a:endParaRPr sz="2000" b="1" i="0" dirty="0">
+              <a:solidFill>
+                <a:srgbClr val="FFFFFF"/>
+              </a:solidFill>
+              <a:latin typeface="Calibri"/>
+            </a:endParaRPr>
           </a:p>
         </p:txBody>
       </p:sp>
@@ -3927,7 +4650,7 @@
         <p:spPr>
           <a:xfrm>
             <a:off x="749808" y="5413248"/>
-            <a:ext cx="3200400" cy="502920"/>
+            <a:ext cx="3200400" cy="528093"/>
           </a:xfrm>
           <a:prstGeom prst="rect">
             <a:avLst/>
@@ -3946,14 +4669,92 @@
               </a:lnSpc>
             </a:pPr>
             <a:r>
-              <a:rPr sz="1200" b="0" i="0">
+              <a:rPr sz="1600" b="0" i="0" dirty="0" err="1">
                 <a:solidFill>
                   <a:srgbClr val="8A97A6"/>
                 </a:solidFill>
                 <a:latin typeface="Calibri"/>
               </a:rPr>
-              <a:t>Система сама разобрала структуру таблиц</a:t>
-            </a:r>
+              <a:t>Система</a:t>
+            </a:r>
+            <a:r>
+              <a:rPr sz="1600" b="0" i="0" dirty="0">
+                <a:solidFill>
+                  <a:srgbClr val="8A97A6"/>
+                </a:solidFill>
+                <a:latin typeface="Calibri"/>
+              </a:rPr>
+              <a:t> </a:t>
+            </a:r>
+            <a:r>
+              <a:rPr sz="1600" b="0" i="0" dirty="0" err="1">
+                <a:solidFill>
+                  <a:srgbClr val="8A97A6"/>
+                </a:solidFill>
+                <a:latin typeface="Calibri"/>
+              </a:rPr>
+              <a:t>сама</a:t>
+            </a:r>
+            <a:r>
+              <a:rPr sz="1600" b="0" i="0" dirty="0">
+                <a:solidFill>
+                  <a:srgbClr val="8A97A6"/>
+                </a:solidFill>
+                <a:latin typeface="Calibri"/>
+              </a:rPr>
+              <a:t> </a:t>
+            </a:r>
+            <a:r>
+              <a:rPr sz="1600" b="0" i="0" dirty="0" err="1">
+                <a:solidFill>
+                  <a:srgbClr val="8A97A6"/>
+                </a:solidFill>
+                <a:latin typeface="Calibri"/>
+              </a:rPr>
+              <a:t>разобрала</a:t>
+            </a:r>
+            <a:r>
+              <a:rPr sz="1600" b="0" i="0" dirty="0">
+                <a:solidFill>
+                  <a:srgbClr val="8A97A6"/>
+                </a:solidFill>
+                <a:latin typeface="Calibri"/>
+              </a:rPr>
+              <a:t> </a:t>
+            </a:r>
+            <a:r>
+              <a:rPr sz="1600" b="0" i="0" dirty="0" err="1">
+                <a:solidFill>
+                  <a:srgbClr val="8A97A6"/>
+                </a:solidFill>
+                <a:latin typeface="Calibri"/>
+              </a:rPr>
+              <a:t>структуру</a:t>
+            </a:r>
+            <a:r>
+              <a:rPr sz="1600" b="0" i="0" dirty="0">
+                <a:solidFill>
+                  <a:srgbClr val="8A97A6"/>
+                </a:solidFill>
+                <a:latin typeface="Calibri"/>
+              </a:rPr>
+              <a:t> </a:t>
+            </a:r>
+            <a:r>
+              <a:rPr sz="1600" b="0" i="0" dirty="0" err="1">
+                <a:solidFill>
+                  <a:srgbClr val="8A97A6"/>
+                </a:solidFill>
+                <a:latin typeface="Calibri"/>
+              </a:rPr>
+              <a:t>таблиц</a:t>
+            </a:r>
+            <a:endParaRPr sz="1600" b="0" i="0" dirty="0">
+              <a:solidFill>
+                <a:srgbClr val="8A97A6"/>
+              </a:solidFill>
+              <a:latin typeface="Calibri"/>
+            </a:endParaRPr>
           </a:p>
         </p:txBody>
       </p:sp>
@@ -4015,7 +4816,7 @@
         <p:spPr>
           <a:xfrm>
             <a:off x="4544568" y="5047488"/>
-            <a:ext cx="3200400" cy="365760"/>
+            <a:ext cx="3200400" cy="307777"/>
           </a:xfrm>
           <a:prstGeom prst="rect">
             <a:avLst/>
@@ -4034,14 +4835,38 @@
               </a:lnSpc>
             </a:pPr>
             <a:r>
-              <a:rPr sz="1500" b="1" i="0">
+              <a:rPr sz="2000" b="1" i="0" dirty="0" err="1">
                 <a:solidFill>
                   <a:srgbClr val="FFFFFF"/>
                 </a:solidFill>
                 <a:latin typeface="Calibri"/>
               </a:rPr>
-              <a:t>Задал вопрос</a:t>
-            </a:r>
+              <a:t>Задал</a:t>
+            </a:r>
+            <a:r>
+              <a:rPr sz="2000" b="1" i="0" dirty="0">
+                <a:solidFill>
+                  <a:srgbClr val="FFFFFF"/>
+                </a:solidFill>
+                <a:latin typeface="Calibri"/>
+              </a:rPr>
+              <a:t> </a:t>
+            </a:r>
+            <a:r>
+              <a:rPr sz="2000" b="1" i="0" dirty="0" err="1">
+                <a:solidFill>
+                  <a:srgbClr val="FFFFFF"/>
+                </a:solidFill>
+                <a:latin typeface="Calibri"/>
+              </a:rPr>
+              <a:t>вопрос</a:t>
+            </a:r>
+            <a:endParaRPr sz="2000" b="1" i="0" dirty="0">
+              <a:solidFill>
+                <a:srgbClr val="FFFFFF"/>
+              </a:solidFill>
+              <a:latin typeface="Calibri"/>
+            </a:endParaRPr>
           </a:p>
         </p:txBody>
       </p:sp>
@@ -4054,7 +4879,7 @@
         <p:spPr>
           <a:xfrm>
             <a:off x="4544568" y="5413248"/>
-            <a:ext cx="3200400" cy="502920"/>
+            <a:ext cx="3200400" cy="257250"/>
           </a:xfrm>
           <a:prstGeom prst="rect">
             <a:avLst/>
@@ -4073,14 +4898,74 @@
               </a:lnSpc>
             </a:pPr>
             <a:r>
-              <a:rPr sz="1200" b="0" i="0">
+              <a:rPr sz="1600" b="0" i="0" dirty="0" err="1">
                 <a:solidFill>
                   <a:srgbClr val="8A97A6"/>
                 </a:solidFill>
                 <a:latin typeface="Calibri"/>
               </a:rPr>
-              <a:t>Обычным языком, как коллеге</a:t>
-            </a:r>
+              <a:t>Обычным</a:t>
+            </a:r>
+            <a:r>
+              <a:rPr sz="1600" b="0" i="0" dirty="0">
+                <a:solidFill>
+                  <a:srgbClr val="8A97A6"/>
+                </a:solidFill>
+                <a:latin typeface="Calibri"/>
+              </a:rPr>
+              <a:t> </a:t>
+            </a:r>
+            <a:r>
+              <a:rPr sz="1600" b="0" i="0" dirty="0" err="1">
+                <a:solidFill>
+                  <a:srgbClr val="8A97A6"/>
+                </a:solidFill>
+                <a:latin typeface="Calibri"/>
+              </a:rPr>
+              <a:t>языком</a:t>
+            </a:r>
+            <a:r>
+              <a:rPr sz="1600" b="0" i="0" dirty="0">
+                <a:solidFill>
+                  <a:srgbClr val="8A97A6"/>
+                </a:solidFill>
+                <a:latin typeface="Calibri"/>
+              </a:rPr>
+              <a:t>, </a:t>
+            </a:r>
+            <a:r>
+              <a:rPr sz="1600" b="0" i="0" dirty="0" err="1">
+                <a:solidFill>
+                  <a:srgbClr val="8A97A6"/>
+                </a:solidFill>
+                <a:latin typeface="Calibri"/>
+              </a:rPr>
+              <a:t>как</a:t>
+            </a:r>
+            <a:r>
+              <a:rPr sz="1600" b="0" i="0" dirty="0">
+                <a:solidFill>
+                  <a:srgbClr val="8A97A6"/>
+                </a:solidFill>
+                <a:latin typeface="Calibri"/>
+              </a:rPr>
+              <a:t> </a:t>
+            </a:r>
+            <a:r>
+              <a:rPr sz="1600" b="0" i="0" dirty="0" err="1">
+                <a:solidFill>
+                  <a:srgbClr val="8A97A6"/>
+                </a:solidFill>
+                <a:latin typeface="Calibri"/>
+              </a:rPr>
+              <a:t>коллеге</a:t>
+            </a:r>
+            <a:endParaRPr sz="1600" b="0" i="0" dirty="0">
+              <a:solidFill>
+                <a:srgbClr val="8A97A6"/>
+              </a:solidFill>
+              <a:latin typeface="Calibri"/>
+            </a:endParaRPr>
           </a:p>
         </p:txBody>
       </p:sp>
@@ -4142,7 +5027,7 @@
         <p:spPr>
           <a:xfrm>
             <a:off x="8339328" y="5047488"/>
-            <a:ext cx="3200400" cy="365760"/>
+            <a:ext cx="3200400" cy="307777"/>
           </a:xfrm>
           <a:prstGeom prst="rect">
             <a:avLst/>
@@ -4161,14 +5046,38 @@
               </a:lnSpc>
             </a:pPr>
             <a:r>
-              <a:rPr sz="1500" b="1" i="0">
+              <a:rPr sz="2000" b="1" i="0" dirty="0" err="1">
                 <a:solidFill>
                   <a:srgbClr val="FFFFFF"/>
                 </a:solidFill>
                 <a:latin typeface="Calibri"/>
               </a:rPr>
-              <a:t>Получил ответ</a:t>
-            </a:r>
+              <a:t>Получил</a:t>
+            </a:r>
+            <a:r>
+              <a:rPr sz="2000" b="1" i="0" dirty="0">
+                <a:solidFill>
+                  <a:srgbClr val="FFFFFF"/>
+                </a:solidFill>
+                <a:latin typeface="Calibri"/>
+              </a:rPr>
+              <a:t> </a:t>
+            </a:r>
+            <a:r>
+              <a:rPr sz="2000" b="1" i="0" dirty="0" err="1">
+                <a:solidFill>
+                  <a:srgbClr val="FFFFFF"/>
+                </a:solidFill>
+                <a:latin typeface="Calibri"/>
+              </a:rPr>
+              <a:t>ответ</a:t>
+            </a:r>
+            <a:endParaRPr sz="2000" b="1" i="0" dirty="0">
+              <a:solidFill>
+                <a:srgbClr val="FFFFFF"/>
+              </a:solidFill>
+              <a:latin typeface="Calibri"/>
+            </a:endParaRPr>
           </a:p>
         </p:txBody>
       </p:sp>
@@ -4181,7 +5090,7 @@
         <p:spPr>
           <a:xfrm>
             <a:off x="8339328" y="5413248"/>
-            <a:ext cx="3200400" cy="502920"/>
+            <a:ext cx="3200400" cy="257250"/>
           </a:xfrm>
           <a:prstGeom prst="rect">
             <a:avLst/>
@@ -4200,14 +5109,74 @@
               </a:lnSpc>
             </a:pPr>
             <a:r>
-              <a:rPr sz="1200" b="0" i="0">
+              <a:rPr sz="1600" b="0" i="0" dirty="0" err="1">
                 <a:solidFill>
                   <a:srgbClr val="8A97A6"/>
                 </a:solidFill>
                 <a:latin typeface="Calibri"/>
               </a:rPr>
-              <a:t>Цифра · график · источник данных</a:t>
-            </a:r>
+              <a:t>Цифра</a:t>
+            </a:r>
+            <a:r>
+              <a:rPr sz="1600" b="0" i="0" dirty="0">
+                <a:solidFill>
+                  <a:srgbClr val="8A97A6"/>
+                </a:solidFill>
+                <a:latin typeface="Calibri"/>
+              </a:rPr>
+              <a:t> · </a:t>
+            </a:r>
+            <a:r>
+              <a:rPr sz="1600" b="0" i="0" dirty="0" err="1">
+                <a:solidFill>
+                  <a:srgbClr val="8A97A6"/>
+                </a:solidFill>
+                <a:latin typeface="Calibri"/>
+              </a:rPr>
+              <a:t>график</a:t>
+            </a:r>
+            <a:r>
+              <a:rPr sz="1600" b="0" i="0" dirty="0">
+                <a:solidFill>
+                  <a:srgbClr val="8A97A6"/>
+                </a:solidFill>
+                <a:latin typeface="Calibri"/>
+              </a:rPr>
+              <a:t> · </a:t>
+            </a:r>
+            <a:r>
+              <a:rPr sz="1600" b="0" i="0" dirty="0" err="1">
+                <a:solidFill>
+                  <a:srgbClr val="8A97A6"/>
+                </a:solidFill>
+                <a:latin typeface="Calibri"/>
+              </a:rPr>
+              <a:t>источник</a:t>
+            </a:r>
+            <a:r>
+              <a:rPr sz="1600" b="0" i="0" dirty="0">
+                <a:solidFill>
+                  <a:srgbClr val="8A97A6"/>
+                </a:solidFill>
+                <a:latin typeface="Calibri"/>
+              </a:rPr>
+              <a:t> </a:t>
+            </a:r>
+            <a:r>
+              <a:rPr sz="1600" b="0" i="0" dirty="0" err="1">
+                <a:solidFill>
+                  <a:srgbClr val="8A97A6"/>
+                </a:solidFill>
+                <a:latin typeface="Calibri"/>
+              </a:rPr>
+              <a:t>данных</a:t>
+            </a:r>
+            <a:endParaRPr sz="1600" b="0" i="0" dirty="0">
+              <a:solidFill>
+                <a:srgbClr val="8A97A6"/>
+              </a:solidFill>
+              <a:latin typeface="Calibri"/>
+            </a:endParaRPr>
           </a:p>
         </p:txBody>
       </p:sp>
@@ -6089,12 +7058,12 @@
         </p:nvSpPr>
         <p:spPr>
           <a:xfrm>
-            <a:off x="548640" y="1737360"/>
-            <a:ext cx="5029200" cy="658368"/>
+            <a:off x="548640" y="1554480"/>
+            <a:ext cx="3383280" cy="4206240"/>
           </a:xfrm>
           <a:prstGeom prst="roundRect">
             <a:avLst>
-              <a:gd name="adj" fmla="val 9000"/>
+              <a:gd name="adj" fmla="val 6000"/>
             </a:avLst>
           </a:prstGeom>
           <a:solidFill>
@@ -6102,7 +7071,7 @@
           </a:solidFill>
           <a:ln w="12700">
             <a:solidFill>
-              <a:srgbClr val="3D4A57"/>
+              <a:srgbClr val="3A434D"/>
             </a:solidFill>
           </a:ln>
           <a:effectLst/>
@@ -6132,23 +7101,124 @@
       </p:sp>
       <p:sp>
         <p:nvSpPr>
-          <p:cNvPr id="9" name="Rectangle 8"/>
+          <p:cNvPr id="9" name="TextBox 8"/>
+          <p:cNvSpPr txBox="1"/>
+          <p:nvPr/>
+        </p:nvSpPr>
+        <p:spPr>
+          <a:xfrm>
+            <a:off x="777240" y="1719072"/>
+            <a:ext cx="2926080" cy="365760"/>
+          </a:xfrm>
+          <a:prstGeom prst="rect">
+            <a:avLst/>
+          </a:prstGeom>
+          <a:noFill/>
+        </p:spPr>
+        <p:txBody>
+          <a:bodyPr wrap="square" lIns="0" tIns="0" rIns="0" bIns="0" anchor="t">
+            <a:spAutoFit/>
+          </a:bodyPr>
+          <a:lstStyle/>
+          <a:p>
+            <a:r>
+              <a:rPr sz="1600" b="1">
+                <a:solidFill>
+                  <a:srgbClr val="FF5A36"/>
+                </a:solidFill>
+                <a:latin typeface="Calibri"/>
+              </a:rPr>
+              <a:t>Графики и таблицы</a:t>
+            </a:r>
+          </a:p>
+        </p:txBody>
+      </p:sp>
+      <p:pic>
+        <p:nvPicPr>
+          <p:cNvPr id="10" name="Picture 9" descr="chart.png"/>
+          <p:cNvPicPr>
+            <a:picLocks noChangeAspect="1"/>
+          </p:cNvPicPr>
+          <p:nvPr/>
+        </p:nvPicPr>
+        <p:blipFill>
+          <a:blip r:embed="rId2"/>
+          <a:stretch>
+            <a:fillRect/>
+          </a:stretch>
+        </p:blipFill>
+        <p:spPr>
+          <a:xfrm>
+            <a:off x="749808" y="2395728"/>
+            <a:ext cx="2980944" cy="2313432"/>
+          </a:xfrm>
+          <a:prstGeom prst="rect">
+            <a:avLst/>
+          </a:prstGeom>
+        </p:spPr>
+      </p:pic>
+      <p:sp>
+        <p:nvSpPr>
+          <p:cNvPr id="11" name="TextBox 10"/>
+          <p:cNvSpPr txBox="1"/>
+          <p:nvPr/>
+        </p:nvSpPr>
+        <p:spPr>
+          <a:xfrm>
+            <a:off x="777240" y="4937760"/>
+            <a:ext cx="2926080" cy="731520"/>
+          </a:xfrm>
+          <a:prstGeom prst="rect">
+            <a:avLst/>
+          </a:prstGeom>
+          <a:noFill/>
+        </p:spPr>
+        <p:txBody>
+          <a:bodyPr wrap="square" lIns="0" tIns="0" rIns="0" bIns="0" anchor="t">
+            <a:spAutoFit/>
+          </a:bodyPr>
+          <a:lstStyle/>
+          <a:p>
+            <a:pPr>
+              <a:lnSpc>
+                <a:spcPct val="115000"/>
+              </a:lnSpc>
+            </a:pPr>
+            <a:r>
+              <a:rPr sz="1200">
+                <a:solidFill>
+                  <a:srgbClr val="A9B4C0"/>
+                </a:solidFill>
+                <a:latin typeface="Calibri"/>
+              </a:rPr>
+              <a:t>Динамика за месяцы — график строится вместе с ответом и источником.</a:t>
+            </a:r>
+          </a:p>
+        </p:txBody>
+      </p:sp>
+      <p:sp>
+        <p:nvSpPr>
+          <p:cNvPr id="12" name="Rounded Rectangle 11"/>
           <p:cNvSpPr/>
           <p:nvPr/>
         </p:nvSpPr>
         <p:spPr>
           <a:xfrm>
-            <a:off x="548640" y="1737360"/>
-            <a:ext cx="5029200" cy="54864"/>
-          </a:xfrm>
-          <a:prstGeom prst="rect">
-            <a:avLst/>
+            <a:off x="4251960" y="1554480"/>
+            <a:ext cx="3383280" cy="4206240"/>
+          </a:xfrm>
+          <a:prstGeom prst="roundRect">
+            <a:avLst>
+              <a:gd name="adj" fmla="val 6000"/>
+            </a:avLst>
           </a:prstGeom>
           <a:solidFill>
-            <a:srgbClr val="2FA6C9"/>
+            <a:srgbClr val="262C33"/>
           </a:solidFill>
-          <a:ln>
-            <a:noFill/>
+          <a:ln w="12700">
+            <a:solidFill>
+              <a:srgbClr val="3A434D"/>
+            </a:solidFill>
           </a:ln>
           <a:effectLst/>
         </p:spPr>
@@ -6177,23 +7247,124 @@
       </p:sp>
       <p:sp>
         <p:nvSpPr>
-          <p:cNvPr id="10" name="Oval 9"/>
+          <p:cNvPr id="13" name="TextBox 12"/>
+          <p:cNvSpPr txBox="1"/>
+          <p:nvPr/>
+        </p:nvSpPr>
+        <p:spPr>
+          <a:xfrm>
+            <a:off x="4480560" y="1719072"/>
+            <a:ext cx="2926080" cy="365760"/>
+          </a:xfrm>
+          <a:prstGeom prst="rect">
+            <a:avLst/>
+          </a:prstGeom>
+          <a:noFill/>
+        </p:spPr>
+        <p:txBody>
+          <a:bodyPr wrap="square" lIns="0" tIns="0" rIns="0" bIns="0" anchor="t">
+            <a:spAutoFit/>
+          </a:bodyPr>
+          <a:lstStyle/>
+          <a:p>
+            <a:r>
+              <a:rPr sz="1600" b="1">
+                <a:solidFill>
+                  <a:srgbClr val="FF5A36"/>
+                </a:solidFill>
+                <a:latin typeface="Calibri"/>
+              </a:rPr>
+              <a:t>Уточнение вопросов</a:t>
+            </a:r>
+          </a:p>
+        </p:txBody>
+      </p:sp>
+      <p:pic>
+        <p:nvPicPr>
+          <p:cNvPr id="14" name="Picture 13" descr="clarify.png"/>
+          <p:cNvPicPr>
+            <a:picLocks noChangeAspect="1"/>
+          </p:cNvPicPr>
+          <p:nvPr/>
+        </p:nvPicPr>
+        <p:blipFill>
+          <a:blip r:embed="rId3"/>
+          <a:stretch>
+            <a:fillRect/>
+          </a:stretch>
+        </p:blipFill>
+        <p:spPr>
+          <a:xfrm>
+            <a:off x="4453128" y="2395728"/>
+            <a:ext cx="2980944" cy="2313432"/>
+          </a:xfrm>
+          <a:prstGeom prst="rect">
+            <a:avLst/>
+          </a:prstGeom>
+        </p:spPr>
+      </p:pic>
+      <p:sp>
+        <p:nvSpPr>
+          <p:cNvPr id="15" name="TextBox 14"/>
+          <p:cNvSpPr txBox="1"/>
+          <p:nvPr/>
+        </p:nvSpPr>
+        <p:spPr>
+          <a:xfrm>
+            <a:off x="4480560" y="4937760"/>
+            <a:ext cx="2926080" cy="731520"/>
+          </a:xfrm>
+          <a:prstGeom prst="rect">
+            <a:avLst/>
+          </a:prstGeom>
+          <a:noFill/>
+        </p:spPr>
+        <p:txBody>
+          <a:bodyPr wrap="square" lIns="0" tIns="0" rIns="0" bIns="0" anchor="t">
+            <a:spAutoFit/>
+          </a:bodyPr>
+          <a:lstStyle/>
+          <a:p>
+            <a:pPr>
+              <a:lnSpc>
+                <a:spcPct val="115000"/>
+              </a:lnSpc>
+            </a:pPr>
+            <a:r>
+              <a:rPr sz="1200">
+                <a:solidFill>
+                  <a:srgbClr val="A9B4C0"/>
+                </a:solidFill>
+                <a:latin typeface="Calibri"/>
+              </a:rPr>
+              <a:t>При неоднозначности агент переспросит и продолжит диалог.</a:t>
+            </a:r>
+          </a:p>
+        </p:txBody>
+      </p:sp>
+      <p:sp>
+        <p:nvSpPr>
+          <p:cNvPr id="16" name="Rounded Rectangle 15"/>
           <p:cNvSpPr/>
           <p:nvPr/>
         </p:nvSpPr>
         <p:spPr>
           <a:xfrm>
-            <a:off x="676656" y="1920239"/>
-            <a:ext cx="292608" cy="292608"/>
-          </a:xfrm>
-          <a:prstGeom prst="ellipse">
-            <a:avLst/>
+            <a:off x="7955279" y="1554480"/>
+            <a:ext cx="3383280" cy="4206240"/>
+          </a:xfrm>
+          <a:prstGeom prst="roundRect">
+            <a:avLst>
+              <a:gd name="adj" fmla="val 6000"/>
+            </a:avLst>
           </a:prstGeom>
           <a:solidFill>
-            <a:srgbClr val="2FA6C9"/>
+            <a:srgbClr val="262C33"/>
           </a:solidFill>
-          <a:ln>
-            <a:noFill/>
+          <a:ln w="12700">
+            <a:solidFill>
+              <a:srgbClr val="3A434D"/>
+            </a:solidFill>
           </a:ln>
           <a:effectLst/>
         </p:spPr>
@@ -6222,48 +7393,14 @@
       </p:sp>
       <p:sp>
         <p:nvSpPr>
-          <p:cNvPr id="11" name="TextBox 10"/>
+          <p:cNvPr id="17" name="TextBox 16"/>
           <p:cNvSpPr txBox="1"/>
           <p:nvPr/>
         </p:nvSpPr>
         <p:spPr>
           <a:xfrm>
-            <a:off x="676656" y="1897379"/>
-            <a:ext cx="292608" cy="292608"/>
-          </a:xfrm>
-          <a:prstGeom prst="rect">
-            <a:avLst/>
-          </a:prstGeom>
-          <a:noFill/>
-        </p:spPr>
-        <p:txBody>
-          <a:bodyPr wrap="square" lIns="0" tIns="0" rIns="0" bIns="0" anchor="ctr">
-            <a:spAutoFit/>
-          </a:bodyPr>
-          <a:lstStyle/>
-          <a:p>
-            <a:pPr algn="ctr"/>
-            <a:r>
-              <a:rPr sz="1200" b="1">
-                <a:solidFill>
-                  <a:srgbClr val="1B1F24"/>
-                </a:solidFill>
-              </a:rPr>
-              <a:t>1</a:t>
-            </a:r>
-          </a:p>
-        </p:txBody>
-      </p:sp>
-      <p:sp>
-        <p:nvSpPr>
-          <p:cNvPr id="12" name="TextBox 11"/>
-          <p:cNvSpPr txBox="1"/>
-          <p:nvPr/>
-        </p:nvSpPr>
-        <p:spPr>
-          <a:xfrm>
-            <a:off x="1115568" y="1828800"/>
-            <a:ext cx="4315968" cy="274320"/>
+            <a:off x="8183879" y="1719072"/>
+            <a:ext cx="2926080" cy="365760"/>
           </a:xfrm>
           <a:prstGeom prst="rect">
             <a:avLst/>
@@ -6276,1108 +7413,36 @@
           </a:bodyPr>
           <a:lstStyle/>
           <a:p>
-            <a:pPr algn="l"/>
-            <a:r>
-              <a:rPr sz="1200" b="1">
-                <a:solidFill>
-                  <a:srgbClr val="FFFFFF"/>
-                </a:solidFill>
-              </a:rPr>
-              <a:t>Вопросы простым языком</a:t>
-            </a:r>
-          </a:p>
-        </p:txBody>
-      </p:sp>
-      <p:sp>
-        <p:nvSpPr>
-          <p:cNvPr id="13" name="TextBox 12"/>
-          <p:cNvSpPr txBox="1"/>
-          <p:nvPr/>
-        </p:nvSpPr>
-        <p:spPr>
-          <a:xfrm>
-            <a:off x="1115568" y="2103120"/>
-            <a:ext cx="4315968" cy="237744"/>
-          </a:xfrm>
-          <a:prstGeom prst="rect">
-            <a:avLst/>
-          </a:prstGeom>
-          <a:noFill/>
-        </p:spPr>
-        <p:txBody>
-          <a:bodyPr wrap="square" lIns="0" tIns="0" rIns="0" bIns="0" anchor="t">
-            <a:spAutoFit/>
-          </a:bodyPr>
-          <a:lstStyle/>
-          <a:p>
-            <a:pPr algn="l"/>
-            <a:r>
-              <a:rPr sz="950" b="0">
-                <a:solidFill>
-                  <a:srgbClr val="A9B4C0"/>
-                </a:solidFill>
-              </a:rPr>
-              <a:t>понимает деловые формулировки и термины</a:t>
-            </a:r>
-          </a:p>
-        </p:txBody>
-      </p:sp>
-      <p:sp>
-        <p:nvSpPr>
-          <p:cNvPr id="14" name="Rounded Rectangle 13"/>
-          <p:cNvSpPr/>
-          <p:nvPr/>
-        </p:nvSpPr>
-        <p:spPr>
-          <a:xfrm>
-            <a:off x="548640" y="2514600"/>
-            <a:ext cx="5029200" cy="658368"/>
-          </a:xfrm>
-          <a:prstGeom prst="roundRect">
-            <a:avLst>
-              <a:gd name="adj" fmla="val 9000"/>
-            </a:avLst>
-          </a:prstGeom>
-          <a:solidFill>
-            <a:srgbClr val="262C33"/>
-          </a:solidFill>
-          <a:ln w="12700">
-            <a:solidFill>
-              <a:srgbClr val="3D4A57"/>
-            </a:solidFill>
-          </a:ln>
-          <a:effectLst/>
-        </p:spPr>
-        <p:style>
-          <a:lnRef idx="1">
-            <a:schemeClr val="accent1"/>
-          </a:lnRef>
-          <a:fillRef idx="3">
-            <a:schemeClr val="accent1"/>
-          </a:fillRef>
-          <a:effectRef idx="2">
-            <a:schemeClr val="accent1"/>
-          </a:effectRef>
-          <a:fontRef idx="minor">
-            <a:schemeClr val="lt1"/>
-          </a:fontRef>
-        </p:style>
-        <p:txBody>
-          <a:bodyPr rtlCol="0" anchor="ctr"/>
-          <a:lstStyle/>
-          <a:p>
-            <a:pPr algn="ctr"/>
-            <a:endParaRPr/>
-          </a:p>
-        </p:txBody>
-      </p:sp>
-      <p:sp>
-        <p:nvSpPr>
-          <p:cNvPr id="15" name="Rectangle 14"/>
-          <p:cNvSpPr/>
-          <p:nvPr/>
-        </p:nvSpPr>
-        <p:spPr>
-          <a:xfrm>
-            <a:off x="548640" y="2514600"/>
-            <a:ext cx="5029200" cy="54864"/>
-          </a:xfrm>
-          <a:prstGeom prst="rect">
-            <a:avLst/>
-          </a:prstGeom>
-          <a:solidFill>
-            <a:srgbClr val="3FBF8A"/>
-          </a:solidFill>
-          <a:ln>
-            <a:noFill/>
-          </a:ln>
-          <a:effectLst/>
-        </p:spPr>
-        <p:style>
-          <a:lnRef idx="1">
-            <a:schemeClr val="accent1"/>
-          </a:lnRef>
-          <a:fillRef idx="3">
-            <a:schemeClr val="accent1"/>
-          </a:fillRef>
-          <a:effectRef idx="2">
-            <a:schemeClr val="accent1"/>
-          </a:effectRef>
-          <a:fontRef idx="minor">
-            <a:schemeClr val="lt1"/>
-          </a:fontRef>
-        </p:style>
-        <p:txBody>
-          <a:bodyPr rtlCol="0" anchor="ctr"/>
-          <a:lstStyle/>
-          <a:p>
-            <a:pPr algn="ctr"/>
-            <a:endParaRPr/>
-          </a:p>
-        </p:txBody>
-      </p:sp>
-      <p:sp>
-        <p:nvSpPr>
-          <p:cNvPr id="16" name="Oval 15"/>
-          <p:cNvSpPr/>
-          <p:nvPr/>
-        </p:nvSpPr>
-        <p:spPr>
-          <a:xfrm>
-            <a:off x="676656" y="2697479"/>
-            <a:ext cx="292608" cy="292608"/>
-          </a:xfrm>
-          <a:prstGeom prst="ellipse">
-            <a:avLst/>
-          </a:prstGeom>
-          <a:solidFill>
-            <a:srgbClr val="3FBF8A"/>
-          </a:solidFill>
-          <a:ln>
-            <a:noFill/>
-          </a:ln>
-          <a:effectLst/>
-        </p:spPr>
-        <p:style>
-          <a:lnRef idx="1">
-            <a:schemeClr val="accent1"/>
-          </a:lnRef>
-          <a:fillRef idx="3">
-            <a:schemeClr val="accent1"/>
-          </a:fillRef>
-          <a:effectRef idx="2">
-            <a:schemeClr val="accent1"/>
-          </a:effectRef>
-          <a:fontRef idx="minor">
-            <a:schemeClr val="lt1"/>
-          </a:fontRef>
-        </p:style>
-        <p:txBody>
-          <a:bodyPr rtlCol="0" anchor="ctr"/>
-          <a:lstStyle/>
-          <a:p>
-            <a:pPr algn="ctr"/>
-            <a:endParaRPr/>
-          </a:p>
-        </p:txBody>
-      </p:sp>
-      <p:sp>
-        <p:nvSpPr>
-          <p:cNvPr id="17" name="TextBox 16"/>
-          <p:cNvSpPr txBox="1"/>
-          <p:nvPr/>
-        </p:nvSpPr>
-        <p:spPr>
-          <a:xfrm>
-            <a:off x="676656" y="2674620"/>
-            <a:ext cx="292608" cy="292608"/>
-          </a:xfrm>
-          <a:prstGeom prst="rect">
-            <a:avLst/>
-          </a:prstGeom>
-          <a:noFill/>
-        </p:spPr>
-        <p:txBody>
-          <a:bodyPr wrap="square" lIns="0" tIns="0" rIns="0" bIns="0" anchor="ctr">
-            <a:spAutoFit/>
-          </a:bodyPr>
-          <a:lstStyle/>
-          <a:p>
-            <a:pPr algn="ctr"/>
-            <a:r>
-              <a:rPr sz="1200" b="1">
-                <a:solidFill>
-                  <a:srgbClr val="1B1F24"/>
-                </a:solidFill>
-              </a:rPr>
-              <a:t>2</a:t>
-            </a:r>
-          </a:p>
-        </p:txBody>
-      </p:sp>
-      <p:sp>
-        <p:nvSpPr>
-          <p:cNvPr id="18" name="TextBox 17"/>
-          <p:cNvSpPr txBox="1"/>
-          <p:nvPr/>
-        </p:nvSpPr>
-        <p:spPr>
-          <a:xfrm>
-            <a:off x="1115568" y="2606040"/>
-            <a:ext cx="4315968" cy="274320"/>
-          </a:xfrm>
-          <a:prstGeom prst="rect">
-            <a:avLst/>
-          </a:prstGeom>
-          <a:noFill/>
-        </p:spPr>
-        <p:txBody>
-          <a:bodyPr wrap="square" lIns="0" tIns="0" rIns="0" bIns="0" anchor="t">
-            <a:spAutoFit/>
-          </a:bodyPr>
-          <a:lstStyle/>
-          <a:p>
-            <a:pPr algn="l"/>
-            <a:r>
-              <a:rPr sz="1200" b="1">
-                <a:solidFill>
-                  <a:srgbClr val="FFFFFF"/>
-                </a:solidFill>
-              </a:rPr>
-              <a:t>Расчёты автоматически</a:t>
-            </a:r>
-          </a:p>
-        </p:txBody>
-      </p:sp>
-      <p:sp>
-        <p:nvSpPr>
-          <p:cNvPr id="19" name="TextBox 18"/>
-          <p:cNvSpPr txBox="1"/>
-          <p:nvPr/>
-        </p:nvSpPr>
-        <p:spPr>
-          <a:xfrm>
-            <a:off x="1115568" y="2880360"/>
-            <a:ext cx="4315968" cy="237744"/>
-          </a:xfrm>
-          <a:prstGeom prst="rect">
-            <a:avLst/>
-          </a:prstGeom>
-          <a:noFill/>
-        </p:spPr>
-        <p:txBody>
-          <a:bodyPr wrap="square" lIns="0" tIns="0" rIns="0" bIns="0" anchor="t">
-            <a:spAutoFit/>
-          </a:bodyPr>
-          <a:lstStyle/>
-          <a:p>
-            <a:pPr algn="l"/>
-            <a:r>
-              <a:rPr sz="950" b="0">
-                <a:solidFill>
-                  <a:srgbClr val="A9B4C0"/>
-                </a:solidFill>
-              </a:rPr>
-              <a:t>средние, мин/макс, разница, рост за период</a:t>
-            </a:r>
-          </a:p>
-        </p:txBody>
-      </p:sp>
-      <p:sp>
-        <p:nvSpPr>
-          <p:cNvPr id="20" name="Rounded Rectangle 19"/>
-          <p:cNvSpPr/>
-          <p:nvPr/>
-        </p:nvSpPr>
-        <p:spPr>
-          <a:xfrm>
-            <a:off x="548640" y="3291839"/>
-            <a:ext cx="5029200" cy="658368"/>
-          </a:xfrm>
-          <a:prstGeom prst="roundRect">
-            <a:avLst>
-              <a:gd name="adj" fmla="val 9000"/>
-            </a:avLst>
-          </a:prstGeom>
-          <a:solidFill>
-            <a:srgbClr val="262C33"/>
-          </a:solidFill>
-          <a:ln w="12700">
-            <a:solidFill>
-              <a:srgbClr val="3D4A57"/>
-            </a:solidFill>
-          </a:ln>
-          <a:effectLst/>
-        </p:spPr>
-        <p:style>
-          <a:lnRef idx="1">
-            <a:schemeClr val="accent1"/>
-          </a:lnRef>
-          <a:fillRef idx="3">
-            <a:schemeClr val="accent1"/>
-          </a:fillRef>
-          <a:effectRef idx="2">
-            <a:schemeClr val="accent1"/>
-          </a:effectRef>
-          <a:fontRef idx="minor">
-            <a:schemeClr val="lt1"/>
-          </a:fontRef>
-        </p:style>
-        <p:txBody>
-          <a:bodyPr rtlCol="0" anchor="ctr"/>
-          <a:lstStyle/>
-          <a:p>
-            <a:pPr algn="ctr"/>
-            <a:endParaRPr/>
-          </a:p>
-        </p:txBody>
-      </p:sp>
-      <p:sp>
-        <p:nvSpPr>
-          <p:cNvPr id="21" name="Rectangle 20"/>
-          <p:cNvSpPr/>
-          <p:nvPr/>
-        </p:nvSpPr>
-        <p:spPr>
-          <a:xfrm>
-            <a:off x="548640" y="3291839"/>
-            <a:ext cx="5029200" cy="54864"/>
-          </a:xfrm>
-          <a:prstGeom prst="rect">
-            <a:avLst/>
-          </a:prstGeom>
-          <a:solidFill>
-            <a:srgbClr val="E5B53D"/>
-          </a:solidFill>
-          <a:ln>
-            <a:noFill/>
-          </a:ln>
-          <a:effectLst/>
-        </p:spPr>
-        <p:style>
-          <a:lnRef idx="1">
-            <a:schemeClr val="accent1"/>
-          </a:lnRef>
-          <a:fillRef idx="3">
-            <a:schemeClr val="accent1"/>
-          </a:fillRef>
-          <a:effectRef idx="2">
-            <a:schemeClr val="accent1"/>
-          </a:effectRef>
-          <a:fontRef idx="minor">
-            <a:schemeClr val="lt1"/>
-          </a:fontRef>
-        </p:style>
-        <p:txBody>
-          <a:bodyPr rtlCol="0" anchor="ctr"/>
-          <a:lstStyle/>
-          <a:p>
-            <a:pPr algn="ctr"/>
-            <a:endParaRPr/>
-          </a:p>
-        </p:txBody>
-      </p:sp>
-      <p:sp>
-        <p:nvSpPr>
-          <p:cNvPr id="22" name="Oval 21"/>
-          <p:cNvSpPr/>
-          <p:nvPr/>
-        </p:nvSpPr>
-        <p:spPr>
-          <a:xfrm>
-            <a:off x="676656" y="3474719"/>
-            <a:ext cx="292608" cy="292608"/>
-          </a:xfrm>
-          <a:prstGeom prst="ellipse">
-            <a:avLst/>
-          </a:prstGeom>
-          <a:solidFill>
-            <a:srgbClr val="E5B53D"/>
-          </a:solidFill>
-          <a:ln>
-            <a:noFill/>
-          </a:ln>
-          <a:effectLst/>
-        </p:spPr>
-        <p:style>
-          <a:lnRef idx="1">
-            <a:schemeClr val="accent1"/>
-          </a:lnRef>
-          <a:fillRef idx="3">
-            <a:schemeClr val="accent1"/>
-          </a:fillRef>
-          <a:effectRef idx="2">
-            <a:schemeClr val="accent1"/>
-          </a:effectRef>
-          <a:fontRef idx="minor">
-            <a:schemeClr val="lt1"/>
-          </a:fontRef>
-        </p:style>
-        <p:txBody>
-          <a:bodyPr rtlCol="0" anchor="ctr"/>
-          <a:lstStyle/>
-          <a:p>
-            <a:pPr algn="ctr"/>
-            <a:endParaRPr/>
-          </a:p>
-        </p:txBody>
-      </p:sp>
-      <p:sp>
-        <p:nvSpPr>
-          <p:cNvPr id="23" name="TextBox 22"/>
-          <p:cNvSpPr txBox="1"/>
-          <p:nvPr/>
-        </p:nvSpPr>
-        <p:spPr>
-          <a:xfrm>
-            <a:off x="676656" y="3451859"/>
-            <a:ext cx="292608" cy="292608"/>
-          </a:xfrm>
-          <a:prstGeom prst="rect">
-            <a:avLst/>
-          </a:prstGeom>
-          <a:noFill/>
-        </p:spPr>
-        <p:txBody>
-          <a:bodyPr wrap="square" lIns="0" tIns="0" rIns="0" bIns="0" anchor="ctr">
-            <a:spAutoFit/>
-          </a:bodyPr>
-          <a:lstStyle/>
-          <a:p>
-            <a:pPr algn="ctr"/>
-            <a:r>
-              <a:rPr sz="1200" b="1">
-                <a:solidFill>
-                  <a:srgbClr val="1B1F24"/>
-                </a:solidFill>
-              </a:rPr>
-              <a:t>3</a:t>
-            </a:r>
-          </a:p>
-        </p:txBody>
-      </p:sp>
-      <p:sp>
-        <p:nvSpPr>
-          <p:cNvPr id="24" name="TextBox 23"/>
-          <p:cNvSpPr txBox="1"/>
-          <p:nvPr/>
-        </p:nvSpPr>
-        <p:spPr>
-          <a:xfrm>
-            <a:off x="1115568" y="3383279"/>
-            <a:ext cx="4315968" cy="274320"/>
-          </a:xfrm>
-          <a:prstGeom prst="rect">
-            <a:avLst/>
-          </a:prstGeom>
-          <a:noFill/>
-        </p:spPr>
-        <p:txBody>
-          <a:bodyPr wrap="square" lIns="0" tIns="0" rIns="0" bIns="0" anchor="t">
-            <a:spAutoFit/>
-          </a:bodyPr>
-          <a:lstStyle/>
-          <a:p>
-            <a:pPr algn="l"/>
-            <a:r>
-              <a:rPr sz="1200" b="1">
-                <a:solidFill>
-                  <a:srgbClr val="FFFFFF"/>
-                </a:solidFill>
-              </a:rPr>
-              <a:t>Графики и таблицы</a:t>
-            </a:r>
-          </a:p>
-        </p:txBody>
-      </p:sp>
-      <p:sp>
-        <p:nvSpPr>
-          <p:cNvPr id="25" name="TextBox 24"/>
-          <p:cNvSpPr txBox="1"/>
-          <p:nvPr/>
-        </p:nvSpPr>
-        <p:spPr>
-          <a:xfrm>
-            <a:off x="1115568" y="3657599"/>
-            <a:ext cx="4315968" cy="237744"/>
-          </a:xfrm>
-          <a:prstGeom prst="rect">
-            <a:avLst/>
-          </a:prstGeom>
-          <a:noFill/>
-        </p:spPr>
-        <p:txBody>
-          <a:bodyPr wrap="square" lIns="0" tIns="0" rIns="0" bIns="0" anchor="t">
-            <a:spAutoFit/>
-          </a:bodyPr>
-          <a:lstStyle/>
-          <a:p>
-            <a:pPr algn="l"/>
-            <a:r>
-              <a:rPr sz="950" b="0">
-                <a:solidFill>
-                  <a:srgbClr val="A9B4C0"/>
-                </a:solidFill>
-              </a:rPr>
-              <a:t>динамика за месяцы — рядом сразу график</a:t>
-            </a:r>
-          </a:p>
-        </p:txBody>
-      </p:sp>
-      <p:sp>
-        <p:nvSpPr>
-          <p:cNvPr id="27" name="Rectangle 26"/>
-          <p:cNvSpPr/>
-          <p:nvPr/>
-        </p:nvSpPr>
-        <p:spPr>
-          <a:xfrm>
-            <a:off x="548640" y="4069079"/>
-            <a:ext cx="5029200" cy="54864"/>
-          </a:xfrm>
-          <a:prstGeom prst="rect">
-            <a:avLst/>
-          </a:prstGeom>
-          <a:solidFill>
-            <a:srgbClr val="FF5A36"/>
-          </a:solidFill>
-          <a:ln>
-            <a:noFill/>
-          </a:ln>
-          <a:effectLst/>
-        </p:spPr>
-        <p:style>
-          <a:lnRef idx="1">
-            <a:schemeClr val="accent1"/>
-          </a:lnRef>
-          <a:fillRef idx="3">
-            <a:schemeClr val="accent1"/>
-          </a:fillRef>
-          <a:effectRef idx="2">
-            <a:schemeClr val="accent1"/>
-          </a:effectRef>
-          <a:fontRef idx="minor">
-            <a:schemeClr val="lt1"/>
-          </a:fontRef>
-        </p:style>
-        <p:txBody>
-          <a:bodyPr rtlCol="0" anchor="ctr"/>
-          <a:lstStyle/>
-          <a:p>
-            <a:pPr algn="ctr"/>
-            <a:endParaRPr/>
-          </a:p>
-        </p:txBody>
-      </p:sp>
-      <p:sp>
-        <p:nvSpPr>
-          <p:cNvPr id="28" name="Oval 27"/>
-          <p:cNvSpPr/>
-          <p:nvPr/>
-        </p:nvSpPr>
-        <p:spPr>
-          <a:xfrm>
-            <a:off x="676656" y="4251959"/>
-            <a:ext cx="292608" cy="292608"/>
-          </a:xfrm>
-          <a:prstGeom prst="ellipse">
-            <a:avLst/>
-          </a:prstGeom>
-          <a:solidFill>
-            <a:srgbClr val="FF5A36"/>
-          </a:solidFill>
-          <a:ln>
-            <a:noFill/>
-          </a:ln>
-          <a:effectLst/>
-        </p:spPr>
-        <p:style>
-          <a:lnRef idx="1">
-            <a:schemeClr val="accent1"/>
-          </a:lnRef>
-          <a:fillRef idx="3">
-            <a:schemeClr val="accent1"/>
-          </a:fillRef>
-          <a:effectRef idx="2">
-            <a:schemeClr val="accent1"/>
-          </a:effectRef>
-          <a:fontRef idx="minor">
-            <a:schemeClr val="lt1"/>
-          </a:fontRef>
-        </p:style>
-        <p:txBody>
-          <a:bodyPr rtlCol="0" anchor="ctr"/>
-          <a:lstStyle/>
-          <a:p>
-            <a:pPr algn="ctr"/>
-            <a:endParaRPr/>
-          </a:p>
-        </p:txBody>
-      </p:sp>
-      <p:sp>
-        <p:nvSpPr>
-          <p:cNvPr id="29" name="TextBox 28"/>
-          <p:cNvSpPr txBox="1"/>
-          <p:nvPr/>
-        </p:nvSpPr>
-        <p:spPr>
-          <a:xfrm>
-            <a:off x="676656" y="4229100"/>
-            <a:ext cx="292608" cy="292608"/>
-          </a:xfrm>
-          <a:prstGeom prst="rect">
-            <a:avLst/>
-          </a:prstGeom>
-          <a:noFill/>
-        </p:spPr>
-        <p:txBody>
-          <a:bodyPr wrap="square" lIns="0" tIns="0" rIns="0" bIns="0" anchor="ctr">
-            <a:spAutoFit/>
-          </a:bodyPr>
-          <a:lstStyle/>
-          <a:p>
-            <a:pPr algn="ctr"/>
-            <a:r>
-              <a:rPr sz="1200" b="1">
-                <a:solidFill>
-                  <a:srgbClr val="1B1F24"/>
-                </a:solidFill>
-              </a:rPr>
-              <a:t>4</a:t>
-            </a:r>
-          </a:p>
-        </p:txBody>
-      </p:sp>
-      <p:sp>
-        <p:nvSpPr>
-          <p:cNvPr id="30" name="TextBox 29"/>
-          <p:cNvSpPr txBox="1"/>
-          <p:nvPr/>
-        </p:nvSpPr>
-        <p:spPr>
-          <a:xfrm>
-            <a:off x="1115568" y="4160519"/>
-            <a:ext cx="4315968" cy="274320"/>
-          </a:xfrm>
-          <a:prstGeom prst="rect">
-            <a:avLst/>
-          </a:prstGeom>
-          <a:noFill/>
-        </p:spPr>
-        <p:txBody>
-          <a:bodyPr wrap="square" lIns="0" tIns="0" rIns="0" bIns="0" anchor="t">
-            <a:spAutoFit/>
-          </a:bodyPr>
-          <a:lstStyle/>
-          <a:p>
-            <a:pPr algn="l"/>
-            <a:r>
-              <a:rPr sz="1200" b="1" dirty="0" err="1">
-                <a:solidFill>
-                  <a:srgbClr val="FFFFFF"/>
-                </a:solidFill>
-              </a:rPr>
-              <a:t>Сравнение</a:t>
-            </a:r>
-            <a:r>
-              <a:rPr sz="1200" b="1" dirty="0">
-                <a:solidFill>
-                  <a:srgbClr val="FFFFFF"/>
-                </a:solidFill>
-              </a:rPr>
-              <a:t> </a:t>
-            </a:r>
-            <a:r>
-              <a:rPr sz="1200" b="1" dirty="0" err="1">
-                <a:solidFill>
-                  <a:srgbClr val="FFFFFF"/>
-                </a:solidFill>
-              </a:rPr>
-              <a:t>поставщиков</a:t>
-            </a:r>
-            <a:endParaRPr sz="1200" b="1" dirty="0">
-              <a:solidFill>
-                <a:srgbClr val="FFFFFF"/>
-              </a:solidFill>
-            </a:endParaRPr>
-          </a:p>
-        </p:txBody>
-      </p:sp>
-      <p:sp>
-        <p:nvSpPr>
-          <p:cNvPr id="31" name="TextBox 30"/>
-          <p:cNvSpPr txBox="1"/>
-          <p:nvPr/>
-        </p:nvSpPr>
-        <p:spPr>
-          <a:xfrm>
-            <a:off x="1115568" y="4434840"/>
-            <a:ext cx="4315968" cy="237744"/>
-          </a:xfrm>
-          <a:prstGeom prst="rect">
-            <a:avLst/>
-          </a:prstGeom>
-          <a:noFill/>
-        </p:spPr>
-        <p:txBody>
-          <a:bodyPr wrap="square" lIns="0" tIns="0" rIns="0" bIns="0" anchor="t">
-            <a:spAutoFit/>
-          </a:bodyPr>
-          <a:lstStyle/>
-          <a:p>
-            <a:pPr algn="l"/>
-            <a:r>
-              <a:rPr sz="950" b="0">
-                <a:solidFill>
-                  <a:srgbClr val="A9B4C0"/>
-                </a:solidFill>
-              </a:rPr>
-              <a:t>разные поставщики и позиции в одном вопросе</a:t>
-            </a:r>
-          </a:p>
-        </p:txBody>
-      </p:sp>
-      <p:sp>
-        <p:nvSpPr>
-          <p:cNvPr id="32" name="Rounded Rectangle 31"/>
-          <p:cNvSpPr/>
-          <p:nvPr/>
-        </p:nvSpPr>
-        <p:spPr>
-          <a:xfrm>
-            <a:off x="548640" y="4846320"/>
-            <a:ext cx="5029200" cy="658368"/>
-          </a:xfrm>
-          <a:prstGeom prst="roundRect">
-            <a:avLst>
-              <a:gd name="adj" fmla="val 9000"/>
-            </a:avLst>
-          </a:prstGeom>
-          <a:solidFill>
-            <a:srgbClr val="262C33"/>
-          </a:solidFill>
-          <a:ln w="12700">
-            <a:solidFill>
-              <a:srgbClr val="3D4A57"/>
-            </a:solidFill>
-          </a:ln>
-          <a:effectLst/>
-        </p:spPr>
-        <p:style>
-          <a:lnRef idx="1">
-            <a:schemeClr val="accent1"/>
-          </a:lnRef>
-          <a:fillRef idx="3">
-            <a:schemeClr val="accent1"/>
-          </a:fillRef>
-          <a:effectRef idx="2">
-            <a:schemeClr val="accent1"/>
-          </a:effectRef>
-          <a:fontRef idx="minor">
-            <a:schemeClr val="lt1"/>
-          </a:fontRef>
-        </p:style>
-        <p:txBody>
-          <a:bodyPr rtlCol="0" anchor="ctr"/>
-          <a:lstStyle/>
-          <a:p>
-            <a:pPr algn="ctr"/>
-            <a:endParaRPr/>
-          </a:p>
-        </p:txBody>
-      </p:sp>
-      <p:sp>
-        <p:nvSpPr>
-          <p:cNvPr id="33" name="Rectangle 32"/>
-          <p:cNvSpPr/>
-          <p:nvPr/>
-        </p:nvSpPr>
-        <p:spPr>
-          <a:xfrm>
-            <a:off x="548640" y="4846320"/>
-            <a:ext cx="5029200" cy="54864"/>
-          </a:xfrm>
-          <a:prstGeom prst="rect">
-            <a:avLst/>
-          </a:prstGeom>
-          <a:solidFill>
-            <a:srgbClr val="2FA6C9"/>
-          </a:solidFill>
-          <a:ln>
-            <a:noFill/>
-          </a:ln>
-          <a:effectLst/>
-        </p:spPr>
-        <p:style>
-          <a:lnRef idx="1">
-            <a:schemeClr val="accent1"/>
-          </a:lnRef>
-          <a:fillRef idx="3">
-            <a:schemeClr val="accent1"/>
-          </a:fillRef>
-          <a:effectRef idx="2">
-            <a:schemeClr val="accent1"/>
-          </a:effectRef>
-          <a:fontRef idx="minor">
-            <a:schemeClr val="lt1"/>
-          </a:fontRef>
-        </p:style>
-        <p:txBody>
-          <a:bodyPr rtlCol="0" anchor="ctr"/>
-          <a:lstStyle/>
-          <a:p>
-            <a:pPr algn="ctr"/>
-            <a:endParaRPr/>
-          </a:p>
-        </p:txBody>
-      </p:sp>
-      <p:sp>
-        <p:nvSpPr>
-          <p:cNvPr id="34" name="Oval 33"/>
-          <p:cNvSpPr/>
-          <p:nvPr/>
-        </p:nvSpPr>
-        <p:spPr>
-          <a:xfrm>
-            <a:off x="676656" y="5029200"/>
-            <a:ext cx="292608" cy="292608"/>
-          </a:xfrm>
-          <a:prstGeom prst="ellipse">
-            <a:avLst/>
-          </a:prstGeom>
-          <a:solidFill>
-            <a:srgbClr val="2FA6C9"/>
-          </a:solidFill>
-          <a:ln>
-            <a:noFill/>
-          </a:ln>
-          <a:effectLst/>
-        </p:spPr>
-        <p:style>
-          <a:lnRef idx="1">
-            <a:schemeClr val="accent1"/>
-          </a:lnRef>
-          <a:fillRef idx="3">
-            <a:schemeClr val="accent1"/>
-          </a:fillRef>
-          <a:effectRef idx="2">
-            <a:schemeClr val="accent1"/>
-          </a:effectRef>
-          <a:fontRef idx="minor">
-            <a:schemeClr val="lt1"/>
-          </a:fontRef>
-        </p:style>
-        <p:txBody>
-          <a:bodyPr rtlCol="0" anchor="ctr"/>
-          <a:lstStyle/>
-          <a:p>
-            <a:pPr algn="ctr"/>
-            <a:endParaRPr/>
-          </a:p>
-        </p:txBody>
-      </p:sp>
-      <p:sp>
-        <p:nvSpPr>
-          <p:cNvPr id="35" name="TextBox 34"/>
-          <p:cNvSpPr txBox="1"/>
-          <p:nvPr/>
-        </p:nvSpPr>
-        <p:spPr>
-          <a:xfrm>
-            <a:off x="676656" y="5006340"/>
-            <a:ext cx="292608" cy="292608"/>
-          </a:xfrm>
-          <a:prstGeom prst="rect">
-            <a:avLst/>
-          </a:prstGeom>
-          <a:noFill/>
-        </p:spPr>
-        <p:txBody>
-          <a:bodyPr wrap="square" lIns="0" tIns="0" rIns="0" bIns="0" anchor="ctr">
-            <a:spAutoFit/>
-          </a:bodyPr>
-          <a:lstStyle/>
-          <a:p>
-            <a:pPr algn="ctr"/>
-            <a:r>
-              <a:rPr sz="1200" b="1">
-                <a:solidFill>
-                  <a:srgbClr val="1B1F24"/>
-                </a:solidFill>
-              </a:rPr>
-              <a:t>5</a:t>
-            </a:r>
-          </a:p>
-        </p:txBody>
-      </p:sp>
-      <p:sp>
-        <p:nvSpPr>
-          <p:cNvPr id="36" name="TextBox 35"/>
-          <p:cNvSpPr txBox="1"/>
-          <p:nvPr/>
-        </p:nvSpPr>
-        <p:spPr>
-          <a:xfrm>
-            <a:off x="1115568" y="4937759"/>
-            <a:ext cx="4315968" cy="274320"/>
-          </a:xfrm>
-          <a:prstGeom prst="rect">
-            <a:avLst/>
-          </a:prstGeom>
-          <a:noFill/>
-        </p:spPr>
-        <p:txBody>
-          <a:bodyPr wrap="square" lIns="0" tIns="0" rIns="0" bIns="0" anchor="t">
-            <a:spAutoFit/>
-          </a:bodyPr>
-          <a:lstStyle/>
-          <a:p>
-            <a:pPr algn="l"/>
-            <a:r>
-              <a:rPr sz="1200" b="1">
-                <a:solidFill>
-                  <a:srgbClr val="FFFFFF"/>
-                </a:solidFill>
-              </a:rPr>
-              <a:t>Уточняющие вопросы</a:t>
-            </a:r>
-          </a:p>
-        </p:txBody>
-      </p:sp>
-      <p:sp>
-        <p:nvSpPr>
-          <p:cNvPr id="37" name="TextBox 36"/>
-          <p:cNvSpPr txBox="1"/>
-          <p:nvPr/>
-        </p:nvSpPr>
-        <p:spPr>
-          <a:xfrm>
-            <a:off x="1115568" y="5212080"/>
-            <a:ext cx="4315968" cy="237744"/>
-          </a:xfrm>
-          <a:prstGeom prst="rect">
-            <a:avLst/>
-          </a:prstGeom>
-          <a:noFill/>
-        </p:spPr>
-        <p:txBody>
-          <a:bodyPr wrap="square" lIns="0" tIns="0" rIns="0" bIns="0" anchor="t">
-            <a:spAutoFit/>
-          </a:bodyPr>
-          <a:lstStyle/>
-          <a:p>
-            <a:pPr algn="l"/>
-            <a:r>
-              <a:rPr sz="950" b="0" dirty="0" err="1">
-                <a:solidFill>
-                  <a:srgbClr val="A9B4C0"/>
-                </a:solidFill>
-              </a:rPr>
-              <a:t>при</a:t>
-            </a:r>
-            <a:r>
-              <a:rPr sz="950" b="0" dirty="0">
-                <a:solidFill>
-                  <a:srgbClr val="A9B4C0"/>
-                </a:solidFill>
-              </a:rPr>
-              <a:t> </a:t>
-            </a:r>
-            <a:r>
-              <a:rPr sz="950" b="0" dirty="0" err="1">
-                <a:solidFill>
-                  <a:srgbClr val="A9B4C0"/>
-                </a:solidFill>
-              </a:rPr>
-              <a:t>неоднозначности</a:t>
-            </a:r>
-            <a:r>
-              <a:rPr sz="950" b="0" dirty="0">
-                <a:solidFill>
-                  <a:srgbClr val="A9B4C0"/>
-                </a:solidFill>
-              </a:rPr>
-              <a:t> — </a:t>
-            </a:r>
-            <a:r>
-              <a:rPr sz="950" b="0" dirty="0" err="1">
-                <a:solidFill>
-                  <a:srgbClr val="A9B4C0"/>
-                </a:solidFill>
-              </a:rPr>
-              <a:t>переспросит</a:t>
-            </a:r>
-            <a:r>
-              <a:rPr sz="950" b="0" dirty="0">
-                <a:solidFill>
-                  <a:srgbClr val="A9B4C0"/>
-                </a:solidFill>
-              </a:rPr>
-              <a:t> и </a:t>
-            </a:r>
-            <a:r>
-              <a:rPr sz="950" b="0" dirty="0" err="1">
-                <a:solidFill>
-                  <a:srgbClr val="A9B4C0"/>
-                </a:solidFill>
-              </a:rPr>
-              <a:t>продолжит</a:t>
-            </a:r>
-            <a:endParaRPr sz="950" b="0" dirty="0">
-              <a:solidFill>
-                <a:srgbClr val="A9B4C0"/>
-              </a:solidFill>
-            </a:endParaRPr>
-          </a:p>
-        </p:txBody>
-      </p:sp>
-      <p:sp>
-        <p:nvSpPr>
-          <p:cNvPr id="44" name="Rounded Rectangle 43"/>
-          <p:cNvSpPr/>
-          <p:nvPr/>
-        </p:nvSpPr>
-        <p:spPr>
-          <a:xfrm>
-            <a:off x="5897880" y="1737360"/>
-            <a:ext cx="5742432" cy="4206240"/>
-          </a:xfrm>
-          <a:prstGeom prst="roundRect">
-            <a:avLst>
-              <a:gd name="adj" fmla="val 4500"/>
-            </a:avLst>
-          </a:prstGeom>
-          <a:solidFill>
-            <a:srgbClr val="262C33"/>
-          </a:solidFill>
-          <a:ln w="12700">
-            <a:solidFill>
-              <a:srgbClr val="3D4A57"/>
-            </a:solidFill>
-          </a:ln>
-          <a:effectLst/>
-        </p:spPr>
-        <p:style>
-          <a:lnRef idx="1">
-            <a:schemeClr val="accent1"/>
-          </a:lnRef>
-          <a:fillRef idx="3">
-            <a:schemeClr val="accent1"/>
-          </a:fillRef>
-          <a:effectRef idx="2">
-            <a:schemeClr val="accent1"/>
-          </a:effectRef>
-          <a:fontRef idx="minor">
-            <a:schemeClr val="lt1"/>
-          </a:fontRef>
-        </p:style>
-        <p:txBody>
-          <a:bodyPr rtlCol="0" anchor="ctr"/>
-          <a:lstStyle/>
-          <a:p>
-            <a:pPr algn="ctr"/>
-            <a:endParaRPr/>
+            <a:r>
+              <a:rPr sz="1600" b="1">
+                <a:solidFill>
+                  <a:srgbClr val="FF5A36"/>
+                </a:solidFill>
+                <a:latin typeface="Calibri"/>
+              </a:rPr>
+              <a:t>SQL-запросы агента</a:t>
+            </a:r>
           </a:p>
         </p:txBody>
       </p:sp>
       <p:pic>
         <p:nvPicPr>
-          <p:cNvPr id="45" name="Picture 44" descr="frontend-new.png"/>
+          <p:cNvPr id="18" name="Picture 17" descr="sql.png"/>
           <p:cNvPicPr>
             <a:picLocks noChangeAspect="1"/>
           </p:cNvPicPr>
           <p:nvPr/>
         </p:nvPicPr>
         <p:blipFill>
-          <a:blip r:embed="rId2"/>
+          <a:blip r:embed="rId4"/>
           <a:stretch>
             <a:fillRect/>
           </a:stretch>
         </p:blipFill>
         <p:spPr>
           <a:xfrm>
-            <a:off x="6007608" y="1865376"/>
-            <a:ext cx="5362956" cy="3575304"/>
+            <a:off x="8156448" y="2395728"/>
+            <a:ext cx="2980944" cy="2313432"/>
           </a:xfrm>
           <a:prstGeom prst="rect">
             <a:avLst/>
@@ -7386,14 +7451,14 @@
       </p:pic>
       <p:sp>
         <p:nvSpPr>
-          <p:cNvPr id="46" name="TextBox 45"/>
+          <p:cNvPr id="19" name="TextBox 18"/>
           <p:cNvSpPr txBox="1"/>
           <p:nvPr/>
         </p:nvSpPr>
         <p:spPr>
           <a:xfrm>
-            <a:off x="6044184" y="5495544"/>
-            <a:ext cx="5449824" cy="365760"/>
+            <a:off x="8183879" y="4937760"/>
+            <a:ext cx="2926080" cy="731520"/>
           </a:xfrm>
           <a:prstGeom prst="rect">
             <a:avLst/>
@@ -7406,97 +7471,19 @@
           </a:bodyPr>
           <a:lstStyle/>
           <a:p>
-            <a:pPr algn="ctr"/>
-            <a:r>
-              <a:rPr sz="1000" b="1">
+            <a:pPr>
+              <a:lnSpc>
+                <a:spcPct val="115000"/>
+              </a:lnSpc>
+            </a:pPr>
+            <a:r>
+              <a:rPr sz="1200">
                 <a:solidFill>
                   <a:srgbClr val="A9B4C0"/>
                 </a:solidFill>
-              </a:rPr>
-              <a:t>Живой интерфейс: вопрос → ответ с цифрой, графиком и источником</a:t>
-            </a:r>
-          </a:p>
-        </p:txBody>
-      </p:sp>
-      <p:sp>
-        <p:nvSpPr>
-          <p:cNvPr id="47" name="Rounded Rectangle 46"/>
-          <p:cNvSpPr/>
-          <p:nvPr/>
-        </p:nvSpPr>
-        <p:spPr>
-          <a:xfrm>
-            <a:off x="548640" y="6126480"/>
-            <a:ext cx="11064240" cy="320040"/>
-          </a:xfrm>
-          <a:prstGeom prst="roundRect">
-            <a:avLst>
-              <a:gd name="adj" fmla="val 16000"/>
-            </a:avLst>
-          </a:prstGeom>
-          <a:solidFill>
-            <a:srgbClr val="262C33"/>
-          </a:solidFill>
-          <a:ln w="12700">
-            <a:solidFill>
-              <a:srgbClr val="3D4A57"/>
-            </a:solidFill>
-          </a:ln>
-          <a:effectLst/>
-        </p:spPr>
-        <p:style>
-          <a:lnRef idx="1">
-            <a:schemeClr val="accent1"/>
-          </a:lnRef>
-          <a:fillRef idx="3">
-            <a:schemeClr val="accent1"/>
-          </a:fillRef>
-          <a:effectRef idx="2">
-            <a:schemeClr val="accent1"/>
-          </a:effectRef>
-          <a:fontRef idx="minor">
-            <a:schemeClr val="lt1"/>
-          </a:fontRef>
-        </p:style>
-        <p:txBody>
-          <a:bodyPr rtlCol="0" anchor="ctr"/>
-          <a:lstStyle/>
-          <a:p>
-            <a:pPr algn="ctr"/>
-            <a:endParaRPr/>
-          </a:p>
-        </p:txBody>
-      </p:sp>
-      <p:sp>
-        <p:nvSpPr>
-          <p:cNvPr id="48" name="TextBox 47"/>
-          <p:cNvSpPr txBox="1"/>
-          <p:nvPr/>
-        </p:nvSpPr>
-        <p:spPr>
-          <a:xfrm>
-            <a:off x="548640" y="6126480"/>
-            <a:ext cx="11064240" cy="320040"/>
-          </a:xfrm>
-          <a:prstGeom prst="rect">
-            <a:avLst/>
-          </a:prstGeom>
-          <a:noFill/>
-        </p:spPr>
-        <p:txBody>
-          <a:bodyPr wrap="square" lIns="0" tIns="0" rIns="0" bIns="0" anchor="ctr">
-            <a:spAutoFit/>
-          </a:bodyPr>
-          <a:lstStyle/>
-          <a:p>
-            <a:pPr algn="ctr"/>
-            <a:r>
-              <a:rPr sz="1200" b="1">
-                <a:solidFill>
-                  <a:srgbClr val="FFFFFF"/>
-                </a:solidFill>
-              </a:rPr>
-              <a:t>Один помощник вместо десятков открытых файлов на рабочем столе</a:t>
+                <a:latin typeface="Calibri"/>
+              </a:rPr>
+              <a:t>Агент сам пишет безопасный SELECT по витрине — только чтение.</a:t>
             </a:r>
           </a:p>
         </p:txBody>
@@ -7769,8 +7756,8 @@
         </p:nvSpPr>
         <p:spPr>
           <a:xfrm>
-            <a:off x="548640" y="1737360"/>
-            <a:ext cx="5212080" cy="1874519"/>
+            <a:off x="548640" y="1554480"/>
+            <a:ext cx="3383280" cy="4206240"/>
           </a:xfrm>
           <a:prstGeom prst="roundRect">
             <a:avLst>
@@ -7782,7 +7769,7 @@
           </a:solidFill>
           <a:ln w="12700">
             <a:solidFill>
-              <a:srgbClr val="3D4A57"/>
+              <a:srgbClr val="3A434D"/>
             </a:solidFill>
           </a:ln>
           <a:effectLst/>
@@ -7812,23 +7799,124 @@
       </p:sp>
       <p:sp>
         <p:nvSpPr>
-          <p:cNvPr id="59" name="Rectangle 58"/>
+          <p:cNvPr id="59" name="TextBox 58"/>
+          <p:cNvSpPr txBox="1"/>
+          <p:nvPr/>
+        </p:nvSpPr>
+        <p:spPr>
+          <a:xfrm>
+            <a:off x="777240" y="1719072"/>
+            <a:ext cx="2926080" cy="365760"/>
+          </a:xfrm>
+          <a:prstGeom prst="rect">
+            <a:avLst/>
+          </a:prstGeom>
+          <a:noFill/>
+        </p:spPr>
+        <p:txBody>
+          <a:bodyPr wrap="square" lIns="0" tIns="0" rIns="0" bIns="0" anchor="t">
+            <a:spAutoFit/>
+          </a:bodyPr>
+          <a:lstStyle/>
+          <a:p>
+            <a:r>
+              <a:rPr sz="1600" b="1">
+                <a:solidFill>
+                  <a:srgbClr val="FF5A36"/>
+                </a:solidFill>
+                <a:latin typeface="Calibri"/>
+              </a:rPr>
+              <a:t>Трейсы запросов</a:t>
+            </a:r>
+          </a:p>
+        </p:txBody>
+      </p:sp>
+      <p:pic>
+        <p:nvPicPr>
+          <p:cNvPr id="60" name="Picture 59" descr="trace.png"/>
+          <p:cNvPicPr>
+            <a:picLocks noChangeAspect="1"/>
+          </p:cNvPicPr>
+          <p:nvPr/>
+        </p:nvPicPr>
+        <p:blipFill>
+          <a:blip r:embed="rId2"/>
+          <a:stretch>
+            <a:fillRect/>
+          </a:stretch>
+        </p:blipFill>
+        <p:spPr>
+          <a:xfrm>
+            <a:off x="749808" y="2395728"/>
+            <a:ext cx="2980944" cy="2313432"/>
+          </a:xfrm>
+          <a:prstGeom prst="rect">
+            <a:avLst/>
+          </a:prstGeom>
+        </p:spPr>
+      </p:pic>
+      <p:sp>
+        <p:nvSpPr>
+          <p:cNvPr id="61" name="TextBox 60"/>
+          <p:cNvSpPr txBox="1"/>
+          <p:nvPr/>
+        </p:nvSpPr>
+        <p:spPr>
+          <a:xfrm>
+            <a:off x="777240" y="4937760"/>
+            <a:ext cx="2926080" cy="731520"/>
+          </a:xfrm>
+          <a:prstGeom prst="rect">
+            <a:avLst/>
+          </a:prstGeom>
+          <a:noFill/>
+        </p:spPr>
+        <p:txBody>
+          <a:bodyPr wrap="square" lIns="0" tIns="0" rIns="0" bIns="0" anchor="t">
+            <a:spAutoFit/>
+          </a:bodyPr>
+          <a:lstStyle/>
+          <a:p>
+            <a:pPr>
+              <a:lnSpc>
+                <a:spcPct val="115000"/>
+              </a:lnSpc>
+            </a:pPr>
+            <a:r>
+              <a:rPr sz="1200">
+                <a:solidFill>
+                  <a:srgbClr val="A9B4C0"/>
+                </a:solidFill>
+                <a:latin typeface="Calibri"/>
+              </a:rPr>
+              <a:t>Каждый вопрос — отдельный request_id: виден каждый шаг агента, SQL и уверенность. API: /trace/{request_id}</a:t>
+            </a:r>
+          </a:p>
+        </p:txBody>
+      </p:sp>
+      <p:sp>
+        <p:nvSpPr>
+          <p:cNvPr id="62" name="Rounded Rectangle 61"/>
           <p:cNvSpPr/>
           <p:nvPr/>
         </p:nvSpPr>
         <p:spPr>
           <a:xfrm>
-            <a:off x="548640" y="1737360"/>
-            <a:ext cx="5212080" cy="54864"/>
-          </a:xfrm>
-          <a:prstGeom prst="rect">
-            <a:avLst/>
+            <a:off x="4251960" y="1554480"/>
+            <a:ext cx="3383280" cy="4206240"/>
+          </a:xfrm>
+          <a:prstGeom prst="roundRect">
+            <a:avLst>
+              <a:gd name="adj" fmla="val 6000"/>
+            </a:avLst>
           </a:prstGeom>
           <a:solidFill>
-            <a:srgbClr val="2FA6C9"/>
+            <a:srgbClr val="262C33"/>
           </a:solidFill>
-          <a:ln>
-            <a:noFill/>
+          <a:ln w="12700">
+            <a:solidFill>
+              <a:srgbClr val="3A434D"/>
+            </a:solidFill>
           </a:ln>
           <a:effectLst/>
         </p:spPr>
@@ -7857,14 +7945,14 @@
       </p:sp>
       <p:sp>
         <p:nvSpPr>
-          <p:cNvPr id="60" name="TextBox 59"/>
+          <p:cNvPr id="63" name="TextBox 62"/>
           <p:cNvSpPr txBox="1"/>
           <p:nvPr/>
         </p:nvSpPr>
         <p:spPr>
           <a:xfrm>
-            <a:off x="731520" y="1865376"/>
-            <a:ext cx="4846320" cy="274320"/>
+            <a:off x="4480560" y="1719072"/>
+            <a:ext cx="2926080" cy="365760"/>
           </a:xfrm>
           <a:prstGeom prst="rect">
             <a:avLst/>
@@ -7877,28 +7965,52 @@
           </a:bodyPr>
           <a:lstStyle/>
           <a:p>
-            <a:pPr algn="l"/>
-            <a:r>
-              <a:rPr sz="1300" b="1">
-                <a:solidFill>
-                  <a:srgbClr val="FFFFFF"/>
-                </a:solidFill>
-              </a:rPr>
-              <a:t>Трейсы запросов</a:t>
-            </a:r>
-          </a:p>
-        </p:txBody>
-      </p:sp>
-      <p:sp>
-        <p:nvSpPr>
-          <p:cNvPr id="61" name="TextBox 60"/>
+            <a:r>
+              <a:rPr sz="1600" b="1">
+                <a:solidFill>
+                  <a:srgbClr val="FF5A36"/>
+                </a:solidFill>
+                <a:latin typeface="Calibri"/>
+              </a:rPr>
+              <a:t>Метрики Prometheus</a:t>
+            </a:r>
+          </a:p>
+        </p:txBody>
+      </p:sp>
+      <p:pic>
+        <p:nvPicPr>
+          <p:cNvPr id="64" name="Picture 63" descr="metrics.png"/>
+          <p:cNvPicPr>
+            <a:picLocks noChangeAspect="1"/>
+          </p:cNvPicPr>
+          <p:nvPr/>
+        </p:nvPicPr>
+        <p:blipFill>
+          <a:blip r:embed="rId3"/>
+          <a:stretch>
+            <a:fillRect/>
+          </a:stretch>
+        </p:blipFill>
+        <p:spPr>
+          <a:xfrm>
+            <a:off x="4453128" y="2395728"/>
+            <a:ext cx="2980944" cy="2313432"/>
+          </a:xfrm>
+          <a:prstGeom prst="rect">
+            <a:avLst/>
+          </a:prstGeom>
+        </p:spPr>
+      </p:pic>
+      <p:sp>
+        <p:nvSpPr>
+          <p:cNvPr id="65" name="TextBox 64"/>
           <p:cNvSpPr txBox="1"/>
           <p:nvPr/>
         </p:nvSpPr>
         <p:spPr>
           <a:xfrm>
-            <a:off x="731520" y="2157984"/>
-            <a:ext cx="4846320" cy="502920"/>
+            <a:off x="4480560" y="4937760"/>
+            <a:ext cx="2926080" cy="731520"/>
           </a:xfrm>
           <a:prstGeom prst="rect">
             <a:avLst/>
@@ -7911,75 +8023,37 @@
           </a:bodyPr>
           <a:lstStyle/>
           <a:p>
-            <a:pPr algn="l">
+            <a:pPr>
               <a:lnSpc>
-                <a:spcPct val="105000"/>
+                <a:spcPct val="115000"/>
               </a:lnSpc>
             </a:pPr>
             <a:r>
-              <a:rPr sz="950" b="0">
+              <a:rPr sz="1200">
                 <a:solidFill>
                   <a:srgbClr val="A9B4C0"/>
                 </a:solidFill>
-              </a:rPr>
-              <a:t>Каждый вопрос получает request_id — журнал хранит весь путь ответа.</a:t>
-            </a:r>
-          </a:p>
-        </p:txBody>
-      </p:sp>
-      <p:sp>
-        <p:nvSpPr>
-          <p:cNvPr id="62" name="TextBox 61"/>
-          <p:cNvSpPr txBox="1"/>
-          <p:nvPr/>
-        </p:nvSpPr>
-        <p:spPr>
-          <a:xfrm>
-            <a:off x="731520" y="2633472"/>
-            <a:ext cx="4846320" cy="457200"/>
-          </a:xfrm>
-          <a:prstGeom prst="rect">
-            <a:avLst/>
-          </a:prstGeom>
-          <a:noFill/>
-        </p:spPr>
-        <p:txBody>
-          <a:bodyPr wrap="square" lIns="0" tIns="0" rIns="0" bIns="0" anchor="t">
-            <a:spAutoFit/>
-          </a:bodyPr>
-          <a:lstStyle/>
-          <a:p>
-            <a:pPr algn="l">
-              <a:lnSpc>
-                <a:spcPct val="110000"/>
-              </a:lnSpc>
-            </a:pPr>
-            <a:r>
-              <a:rPr sz="950" b="0">
-                <a:solidFill>
-                  <a:srgbClr val="A9B4C0"/>
-                </a:solidFill>
-              </a:rPr>
-              <a:t>•  время каждого шага, итоговый SQL и уверенность
-•  просмотр в интерфейсе и через API: /trace/{request_id}</a:t>
-            </a:r>
-          </a:p>
-        </p:txBody>
-      </p:sp>
-      <p:sp>
-        <p:nvSpPr>
-          <p:cNvPr id="63" name="Rounded Rectangle 62"/>
+                <a:latin typeface="Calibri"/>
+              </a:rPr>
+              <a:t>/metrics в реальном времени: число запросов, статусы, задержки и токены LLM.</a:t>
+            </a:r>
+          </a:p>
+        </p:txBody>
+      </p:sp>
+      <p:sp>
+        <p:nvSpPr>
+          <p:cNvPr id="66" name="Rounded Rectangle 65"/>
           <p:cNvSpPr/>
           <p:nvPr/>
         </p:nvSpPr>
         <p:spPr>
           <a:xfrm>
-            <a:off x="731520" y="3227832"/>
-            <a:ext cx="868680" cy="274320"/>
+            <a:off x="7955279" y="1554480"/>
+            <a:ext cx="3383280" cy="4206240"/>
           </a:xfrm>
           <a:prstGeom prst="roundRect">
             <a:avLst>
-              <a:gd name="adj" fmla="val 50000"/>
+              <a:gd name="adj" fmla="val 6000"/>
             </a:avLst>
           </a:prstGeom>
           <a:solidFill>
@@ -7987,7 +8061,7 @@
           </a:solidFill>
           <a:ln w="12700">
             <a:solidFill>
-              <a:srgbClr val="2FA6C9"/>
+              <a:srgbClr val="3A434D"/>
             </a:solidFill>
           </a:ln>
           <a:effectLst/>
@@ -8017,610 +8091,14 @@
       </p:sp>
       <p:sp>
         <p:nvSpPr>
-          <p:cNvPr id="64" name="TextBox 63"/>
-          <p:cNvSpPr txBox="1"/>
-          <p:nvPr/>
-        </p:nvSpPr>
-        <p:spPr>
-          <a:xfrm>
-            <a:off x="731520" y="3227832"/>
-            <a:ext cx="868680" cy="274320"/>
-          </a:xfrm>
-          <a:prstGeom prst="rect">
-            <a:avLst/>
-          </a:prstGeom>
-          <a:noFill/>
-        </p:spPr>
-        <p:txBody>
-          <a:bodyPr wrap="square" lIns="0" tIns="0" rIns="0" bIns="0" anchor="ctr">
-            <a:spAutoFit/>
-          </a:bodyPr>
-          <a:lstStyle/>
-          <a:p>
-            <a:pPr algn="ctr"/>
-            <a:r>
-              <a:rPr sz="800" b="1">
-                <a:solidFill>
-                  <a:srgbClr val="A9B4C0"/>
-                </a:solidFill>
-              </a:rPr>
-              <a:t>классификация</a:t>
-            </a:r>
-          </a:p>
-        </p:txBody>
-      </p:sp>
-      <p:sp>
-        <p:nvSpPr>
-          <p:cNvPr id="65" name="TextBox 64"/>
-          <p:cNvSpPr txBox="1"/>
-          <p:nvPr/>
-        </p:nvSpPr>
-        <p:spPr>
-          <a:xfrm>
-            <a:off x="1613916" y="3227832"/>
-            <a:ext cx="91440" cy="274320"/>
-          </a:xfrm>
-          <a:prstGeom prst="rect">
-            <a:avLst/>
-          </a:prstGeom>
-          <a:noFill/>
-        </p:spPr>
-        <p:txBody>
-          <a:bodyPr wrap="square" lIns="0" tIns="0" rIns="0" bIns="0" anchor="ctr">
-            <a:spAutoFit/>
-          </a:bodyPr>
-          <a:lstStyle/>
-          <a:p>
-            <a:pPr algn="ctr"/>
-            <a:r>
-              <a:rPr sz="900" b="1">
-                <a:solidFill>
-                  <a:srgbClr val="2FA6C9"/>
-                </a:solidFill>
-              </a:rPr>
-              <a:t>→</a:t>
-            </a:r>
-          </a:p>
-        </p:txBody>
-      </p:sp>
-      <p:sp>
-        <p:nvSpPr>
-          <p:cNvPr id="66" name="Rounded Rectangle 65"/>
-          <p:cNvSpPr/>
-          <p:nvPr/>
-        </p:nvSpPr>
-        <p:spPr>
-          <a:xfrm>
-            <a:off x="1719072" y="3227832"/>
-            <a:ext cx="868680" cy="274320"/>
-          </a:xfrm>
-          <a:prstGeom prst="roundRect">
-            <a:avLst>
-              <a:gd name="adj" fmla="val 50000"/>
-            </a:avLst>
-          </a:prstGeom>
-          <a:solidFill>
-            <a:srgbClr val="262C33"/>
-          </a:solidFill>
-          <a:ln w="12700">
-            <a:solidFill>
-              <a:srgbClr val="2FA6C9"/>
-            </a:solidFill>
-          </a:ln>
-          <a:effectLst/>
-        </p:spPr>
-        <p:style>
-          <a:lnRef idx="1">
-            <a:schemeClr val="accent1"/>
-          </a:lnRef>
-          <a:fillRef idx="3">
-            <a:schemeClr val="accent1"/>
-          </a:fillRef>
-          <a:effectRef idx="2">
-            <a:schemeClr val="accent1"/>
-          </a:effectRef>
-          <a:fontRef idx="minor">
-            <a:schemeClr val="lt1"/>
-          </a:fontRef>
-        </p:style>
-        <p:txBody>
-          <a:bodyPr rtlCol="0" anchor="ctr"/>
-          <a:lstStyle/>
-          <a:p>
-            <a:pPr algn="ctr"/>
-            <a:endParaRPr/>
-          </a:p>
-        </p:txBody>
-      </p:sp>
-      <p:sp>
-        <p:nvSpPr>
           <p:cNvPr id="67" name="TextBox 66"/>
           <p:cNvSpPr txBox="1"/>
           <p:nvPr/>
         </p:nvSpPr>
         <p:spPr>
           <a:xfrm>
-            <a:off x="1719072" y="3227832"/>
-            <a:ext cx="868680" cy="274320"/>
-          </a:xfrm>
-          <a:prstGeom prst="rect">
-            <a:avLst/>
-          </a:prstGeom>
-          <a:noFill/>
-        </p:spPr>
-        <p:txBody>
-          <a:bodyPr wrap="square" lIns="0" tIns="0" rIns="0" bIns="0" anchor="ctr">
-            <a:spAutoFit/>
-          </a:bodyPr>
-          <a:lstStyle/>
-          <a:p>
-            <a:pPr algn="ctr"/>
-            <a:r>
-              <a:rPr sz="800" b="1">
-                <a:solidFill>
-                  <a:srgbClr val="A9B4C0"/>
-                </a:solidFill>
-              </a:rPr>
-              <a:t>план</a:t>
-            </a:r>
-          </a:p>
-        </p:txBody>
-      </p:sp>
-      <p:sp>
-        <p:nvSpPr>
-          <p:cNvPr id="68" name="TextBox 67"/>
-          <p:cNvSpPr txBox="1"/>
-          <p:nvPr/>
-        </p:nvSpPr>
-        <p:spPr>
-          <a:xfrm>
-            <a:off x="2601468" y="3227832"/>
-            <a:ext cx="91440" cy="274320"/>
-          </a:xfrm>
-          <a:prstGeom prst="rect">
-            <a:avLst/>
-          </a:prstGeom>
-          <a:noFill/>
-        </p:spPr>
-        <p:txBody>
-          <a:bodyPr wrap="square" lIns="0" tIns="0" rIns="0" bIns="0" anchor="ctr">
-            <a:spAutoFit/>
-          </a:bodyPr>
-          <a:lstStyle/>
-          <a:p>
-            <a:pPr algn="ctr"/>
-            <a:r>
-              <a:rPr sz="900" b="1">
-                <a:solidFill>
-                  <a:srgbClr val="2FA6C9"/>
-                </a:solidFill>
-              </a:rPr>
-              <a:t>→</a:t>
-            </a:r>
-          </a:p>
-        </p:txBody>
-      </p:sp>
-      <p:sp>
-        <p:nvSpPr>
-          <p:cNvPr id="69" name="Rounded Rectangle 68"/>
-          <p:cNvSpPr/>
-          <p:nvPr/>
-        </p:nvSpPr>
-        <p:spPr>
-          <a:xfrm>
-            <a:off x="2706624" y="3227832"/>
-            <a:ext cx="868680" cy="274320"/>
-          </a:xfrm>
-          <a:prstGeom prst="roundRect">
-            <a:avLst>
-              <a:gd name="adj" fmla="val 50000"/>
-            </a:avLst>
-          </a:prstGeom>
-          <a:solidFill>
-            <a:srgbClr val="262C33"/>
-          </a:solidFill>
-          <a:ln w="12700">
-            <a:solidFill>
-              <a:srgbClr val="2FA6C9"/>
-            </a:solidFill>
-          </a:ln>
-          <a:effectLst/>
-        </p:spPr>
-        <p:style>
-          <a:lnRef idx="1">
-            <a:schemeClr val="accent1"/>
-          </a:lnRef>
-          <a:fillRef idx="3">
-            <a:schemeClr val="accent1"/>
-          </a:fillRef>
-          <a:effectRef idx="2">
-            <a:schemeClr val="accent1"/>
-          </a:effectRef>
-          <a:fontRef idx="minor">
-            <a:schemeClr val="lt1"/>
-          </a:fontRef>
-        </p:style>
-        <p:txBody>
-          <a:bodyPr rtlCol="0" anchor="ctr"/>
-          <a:lstStyle/>
-          <a:p>
-            <a:pPr algn="ctr"/>
-            <a:endParaRPr/>
-          </a:p>
-        </p:txBody>
-      </p:sp>
-      <p:sp>
-        <p:nvSpPr>
-          <p:cNvPr id="70" name="TextBox 69"/>
-          <p:cNvSpPr txBox="1"/>
-          <p:nvPr/>
-        </p:nvSpPr>
-        <p:spPr>
-          <a:xfrm>
-            <a:off x="2706624" y="3227832"/>
-            <a:ext cx="868680" cy="274320"/>
-          </a:xfrm>
-          <a:prstGeom prst="rect">
-            <a:avLst/>
-          </a:prstGeom>
-          <a:noFill/>
-        </p:spPr>
-        <p:txBody>
-          <a:bodyPr wrap="square" lIns="0" tIns="0" rIns="0" bIns="0" anchor="ctr">
-            <a:spAutoFit/>
-          </a:bodyPr>
-          <a:lstStyle/>
-          <a:p>
-            <a:pPr algn="ctr"/>
-            <a:r>
-              <a:rPr sz="800" b="1">
-                <a:solidFill>
-                  <a:srgbClr val="A9B4C0"/>
-                </a:solidFill>
-              </a:rPr>
-              <a:t>SQL</a:t>
-            </a:r>
-          </a:p>
-        </p:txBody>
-      </p:sp>
-      <p:sp>
-        <p:nvSpPr>
-          <p:cNvPr id="71" name="TextBox 70"/>
-          <p:cNvSpPr txBox="1"/>
-          <p:nvPr/>
-        </p:nvSpPr>
-        <p:spPr>
-          <a:xfrm>
-            <a:off x="3589020" y="3227832"/>
-            <a:ext cx="91440" cy="274320"/>
-          </a:xfrm>
-          <a:prstGeom prst="rect">
-            <a:avLst/>
-          </a:prstGeom>
-          <a:noFill/>
-        </p:spPr>
-        <p:txBody>
-          <a:bodyPr wrap="square" lIns="0" tIns="0" rIns="0" bIns="0" anchor="ctr">
-            <a:spAutoFit/>
-          </a:bodyPr>
-          <a:lstStyle/>
-          <a:p>
-            <a:pPr algn="ctr"/>
-            <a:r>
-              <a:rPr sz="900" b="1">
-                <a:solidFill>
-                  <a:srgbClr val="2FA6C9"/>
-                </a:solidFill>
-              </a:rPr>
-              <a:t>→</a:t>
-            </a:r>
-          </a:p>
-        </p:txBody>
-      </p:sp>
-      <p:sp>
-        <p:nvSpPr>
-          <p:cNvPr id="72" name="Rounded Rectangle 71"/>
-          <p:cNvSpPr/>
-          <p:nvPr/>
-        </p:nvSpPr>
-        <p:spPr>
-          <a:xfrm>
-            <a:off x="3694176" y="3227832"/>
-            <a:ext cx="868680" cy="274320"/>
-          </a:xfrm>
-          <a:prstGeom prst="roundRect">
-            <a:avLst>
-              <a:gd name="adj" fmla="val 50000"/>
-            </a:avLst>
-          </a:prstGeom>
-          <a:solidFill>
-            <a:srgbClr val="262C33"/>
-          </a:solidFill>
-          <a:ln w="12700">
-            <a:solidFill>
-              <a:srgbClr val="2FA6C9"/>
-            </a:solidFill>
-          </a:ln>
-          <a:effectLst/>
-        </p:spPr>
-        <p:style>
-          <a:lnRef idx="1">
-            <a:schemeClr val="accent1"/>
-          </a:lnRef>
-          <a:fillRef idx="3">
-            <a:schemeClr val="accent1"/>
-          </a:fillRef>
-          <a:effectRef idx="2">
-            <a:schemeClr val="accent1"/>
-          </a:effectRef>
-          <a:fontRef idx="minor">
-            <a:schemeClr val="lt1"/>
-          </a:fontRef>
-        </p:style>
-        <p:txBody>
-          <a:bodyPr rtlCol="0" anchor="ctr"/>
-          <a:lstStyle/>
-          <a:p>
-            <a:pPr algn="ctr"/>
-            <a:endParaRPr/>
-          </a:p>
-        </p:txBody>
-      </p:sp>
-      <p:sp>
-        <p:nvSpPr>
-          <p:cNvPr id="73" name="TextBox 72"/>
-          <p:cNvSpPr txBox="1"/>
-          <p:nvPr/>
-        </p:nvSpPr>
-        <p:spPr>
-          <a:xfrm>
-            <a:off x="3694176" y="3227832"/>
-            <a:ext cx="868680" cy="274320"/>
-          </a:xfrm>
-          <a:prstGeom prst="rect">
-            <a:avLst/>
-          </a:prstGeom>
-          <a:noFill/>
-        </p:spPr>
-        <p:txBody>
-          <a:bodyPr wrap="square" lIns="0" tIns="0" rIns="0" bIns="0" anchor="ctr">
-            <a:spAutoFit/>
-          </a:bodyPr>
-          <a:lstStyle/>
-          <a:p>
-            <a:pPr algn="ctr"/>
-            <a:r>
-              <a:rPr sz="800" b="1">
-                <a:solidFill>
-                  <a:srgbClr val="A9B4C0"/>
-                </a:solidFill>
-              </a:rPr>
-              <a:t>выполнение</a:t>
-            </a:r>
-          </a:p>
-        </p:txBody>
-      </p:sp>
-      <p:sp>
-        <p:nvSpPr>
-          <p:cNvPr id="74" name="TextBox 73"/>
-          <p:cNvSpPr txBox="1"/>
-          <p:nvPr/>
-        </p:nvSpPr>
-        <p:spPr>
-          <a:xfrm>
-            <a:off x="4576572" y="3227832"/>
-            <a:ext cx="91440" cy="274320"/>
-          </a:xfrm>
-          <a:prstGeom prst="rect">
-            <a:avLst/>
-          </a:prstGeom>
-          <a:noFill/>
-        </p:spPr>
-        <p:txBody>
-          <a:bodyPr wrap="square" lIns="0" tIns="0" rIns="0" bIns="0" anchor="ctr">
-            <a:spAutoFit/>
-          </a:bodyPr>
-          <a:lstStyle/>
-          <a:p>
-            <a:pPr algn="ctr"/>
-            <a:r>
-              <a:rPr sz="900" b="1">
-                <a:solidFill>
-                  <a:srgbClr val="2FA6C9"/>
-                </a:solidFill>
-              </a:rPr>
-              <a:t>→</a:t>
-            </a:r>
-          </a:p>
-        </p:txBody>
-      </p:sp>
-      <p:sp>
-        <p:nvSpPr>
-          <p:cNvPr id="75" name="Rounded Rectangle 74"/>
-          <p:cNvSpPr/>
-          <p:nvPr/>
-        </p:nvSpPr>
-        <p:spPr>
-          <a:xfrm>
-            <a:off x="4681728" y="3227832"/>
-            <a:ext cx="868680" cy="274320"/>
-          </a:xfrm>
-          <a:prstGeom prst="roundRect">
-            <a:avLst>
-              <a:gd name="adj" fmla="val 50000"/>
-            </a:avLst>
-          </a:prstGeom>
-          <a:solidFill>
-            <a:srgbClr val="262C33"/>
-          </a:solidFill>
-          <a:ln w="12700">
-            <a:solidFill>
-              <a:srgbClr val="2FA6C9"/>
-            </a:solidFill>
-          </a:ln>
-          <a:effectLst/>
-        </p:spPr>
-        <p:style>
-          <a:lnRef idx="1">
-            <a:schemeClr val="accent1"/>
-          </a:lnRef>
-          <a:fillRef idx="3">
-            <a:schemeClr val="accent1"/>
-          </a:fillRef>
-          <a:effectRef idx="2">
-            <a:schemeClr val="accent1"/>
-          </a:effectRef>
-          <a:fontRef idx="minor">
-            <a:schemeClr val="lt1"/>
-          </a:fontRef>
-        </p:style>
-        <p:txBody>
-          <a:bodyPr rtlCol="0" anchor="ctr"/>
-          <a:lstStyle/>
-          <a:p>
-            <a:pPr algn="ctr"/>
-            <a:endParaRPr/>
-          </a:p>
-        </p:txBody>
-      </p:sp>
-      <p:sp>
-        <p:nvSpPr>
-          <p:cNvPr id="76" name="TextBox 75"/>
-          <p:cNvSpPr txBox="1"/>
-          <p:nvPr/>
-        </p:nvSpPr>
-        <p:spPr>
-          <a:xfrm>
-            <a:off x="4681728" y="3227832"/>
-            <a:ext cx="868680" cy="274320"/>
-          </a:xfrm>
-          <a:prstGeom prst="rect">
-            <a:avLst/>
-          </a:prstGeom>
-          <a:noFill/>
-        </p:spPr>
-        <p:txBody>
-          <a:bodyPr wrap="square" lIns="0" tIns="0" rIns="0" bIns="0" anchor="ctr">
-            <a:spAutoFit/>
-          </a:bodyPr>
-          <a:lstStyle/>
-          <a:p>
-            <a:pPr algn="ctr"/>
-            <a:r>
-              <a:rPr sz="800" b="1">
-                <a:solidFill>
-                  <a:srgbClr val="A9B4C0"/>
-                </a:solidFill>
-              </a:rPr>
-              <a:t>проверка</a:t>
-            </a:r>
-          </a:p>
-        </p:txBody>
-      </p:sp>
-      <p:sp>
-        <p:nvSpPr>
-          <p:cNvPr id="77" name="Rounded Rectangle 76"/>
-          <p:cNvSpPr/>
-          <p:nvPr/>
-        </p:nvSpPr>
-        <p:spPr>
-          <a:xfrm>
-            <a:off x="548640" y="3794760"/>
-            <a:ext cx="5212080" cy="1024128"/>
-          </a:xfrm>
-          <a:prstGeom prst="roundRect">
-            <a:avLst>
-              <a:gd name="adj" fmla="val 6000"/>
-            </a:avLst>
-          </a:prstGeom>
-          <a:solidFill>
-            <a:srgbClr val="262C33"/>
-          </a:solidFill>
-          <a:ln w="12700">
-            <a:solidFill>
-              <a:srgbClr val="3D4A57"/>
-            </a:solidFill>
-          </a:ln>
-          <a:effectLst/>
-        </p:spPr>
-        <p:style>
-          <a:lnRef idx="1">
-            <a:schemeClr val="accent1"/>
-          </a:lnRef>
-          <a:fillRef idx="3">
-            <a:schemeClr val="accent1"/>
-          </a:fillRef>
-          <a:effectRef idx="2">
-            <a:schemeClr val="accent1"/>
-          </a:effectRef>
-          <a:fontRef idx="minor">
-            <a:schemeClr val="lt1"/>
-          </a:fontRef>
-        </p:style>
-        <p:txBody>
-          <a:bodyPr rtlCol="0" anchor="ctr"/>
-          <a:lstStyle/>
-          <a:p>
-            <a:pPr algn="ctr"/>
-            <a:endParaRPr/>
-          </a:p>
-        </p:txBody>
-      </p:sp>
-      <p:sp>
-        <p:nvSpPr>
-          <p:cNvPr id="78" name="Rectangle 77"/>
-          <p:cNvSpPr/>
-          <p:nvPr/>
-        </p:nvSpPr>
-        <p:spPr>
-          <a:xfrm>
-            <a:off x="548640" y="3794760"/>
-            <a:ext cx="5212080" cy="54864"/>
-          </a:xfrm>
-          <a:prstGeom prst="rect">
-            <a:avLst/>
-          </a:prstGeom>
-          <a:solidFill>
-            <a:srgbClr val="FF5A36"/>
-          </a:solidFill>
-          <a:ln>
-            <a:noFill/>
-          </a:ln>
-          <a:effectLst/>
-        </p:spPr>
-        <p:style>
-          <a:lnRef idx="1">
-            <a:schemeClr val="accent1"/>
-          </a:lnRef>
-          <a:fillRef idx="3">
-            <a:schemeClr val="accent1"/>
-          </a:fillRef>
-          <a:effectRef idx="2">
-            <a:schemeClr val="accent1"/>
-          </a:effectRef>
-          <a:fontRef idx="minor">
-            <a:schemeClr val="lt1"/>
-          </a:fontRef>
-        </p:style>
-        <p:txBody>
-          <a:bodyPr rtlCol="0" anchor="ctr"/>
-          <a:lstStyle/>
-          <a:p>
-            <a:pPr algn="ctr"/>
-            <a:endParaRPr/>
-          </a:p>
-        </p:txBody>
-      </p:sp>
-      <p:sp>
-        <p:nvSpPr>
-          <p:cNvPr id="79" name="TextBox 78"/>
-          <p:cNvSpPr txBox="1"/>
-          <p:nvPr/>
-        </p:nvSpPr>
-        <p:spPr>
-          <a:xfrm>
-            <a:off x="731520" y="3904488"/>
-            <a:ext cx="4846320" cy="256032"/>
+            <a:off x="8183879" y="1719072"/>
+            <a:ext cx="2926080" cy="365760"/>
           </a:xfrm>
           <a:prstGeom prst="rect">
             <a:avLst/>
@@ -8633,323 +8111,36 @@
           </a:bodyPr>
           <a:lstStyle/>
           <a:p>
-            <a:pPr algn="l"/>
-            <a:r>
-              <a:rPr sz="1200" b="1">
-                <a:solidFill>
-                  <a:srgbClr val="FFFFFF"/>
-                </a:solidFill>
-              </a:rPr>
-              <a:t>Prometheus — метрики · :9090</a:t>
-            </a:r>
-          </a:p>
-        </p:txBody>
-      </p:sp>
-      <p:sp>
-        <p:nvSpPr>
-          <p:cNvPr id="80" name="TextBox 79"/>
-          <p:cNvSpPr txBox="1"/>
-          <p:nvPr/>
-        </p:nvSpPr>
-        <p:spPr>
-          <a:xfrm>
-            <a:off x="731520" y="4197096"/>
-            <a:ext cx="4846320" cy="548640"/>
-          </a:xfrm>
-          <a:prstGeom prst="rect">
-            <a:avLst/>
-          </a:prstGeom>
-          <a:noFill/>
-        </p:spPr>
-        <p:txBody>
-          <a:bodyPr wrap="square" lIns="0" tIns="0" rIns="0" bIns="0" anchor="t">
-            <a:spAutoFit/>
-          </a:bodyPr>
-          <a:lstStyle/>
-          <a:p>
-            <a:pPr algn="l">
-              <a:lnSpc>
-                <a:spcPct val="105000"/>
-              </a:lnSpc>
-            </a:pPr>
-            <a:r>
-              <a:rPr sz="950" b="0">
-                <a:solidFill>
-                  <a:srgbClr val="A9B4C0"/>
-                </a:solidFill>
-              </a:rPr>
-              <a:t>сервис отдаёт метрики на /metrics: число запросов, статусы, задержки, токены LLM</a:t>
-            </a:r>
-          </a:p>
-        </p:txBody>
-      </p:sp>
-      <p:sp>
-        <p:nvSpPr>
-          <p:cNvPr id="81" name="Rounded Rectangle 80"/>
-          <p:cNvSpPr/>
-          <p:nvPr/>
-        </p:nvSpPr>
-        <p:spPr>
-          <a:xfrm>
-            <a:off x="548640" y="4956048"/>
-            <a:ext cx="5212080" cy="1024128"/>
-          </a:xfrm>
-          <a:prstGeom prst="roundRect">
-            <a:avLst>
-              <a:gd name="adj" fmla="val 6000"/>
-            </a:avLst>
-          </a:prstGeom>
-          <a:solidFill>
-            <a:srgbClr val="262C33"/>
-          </a:solidFill>
-          <a:ln w="12700">
-            <a:solidFill>
-              <a:srgbClr val="3D4A57"/>
-            </a:solidFill>
-          </a:ln>
-          <a:effectLst/>
-        </p:spPr>
-        <p:style>
-          <a:lnRef idx="1">
-            <a:schemeClr val="accent1"/>
-          </a:lnRef>
-          <a:fillRef idx="3">
-            <a:schemeClr val="accent1"/>
-          </a:fillRef>
-          <a:effectRef idx="2">
-            <a:schemeClr val="accent1"/>
-          </a:effectRef>
-          <a:fontRef idx="minor">
-            <a:schemeClr val="lt1"/>
-          </a:fontRef>
-        </p:style>
-        <p:txBody>
-          <a:bodyPr rtlCol="0" anchor="ctr"/>
-          <a:lstStyle/>
-          <a:p>
-            <a:pPr algn="ctr"/>
-            <a:endParaRPr/>
-          </a:p>
-        </p:txBody>
-      </p:sp>
-      <p:sp>
-        <p:nvSpPr>
-          <p:cNvPr id="82" name="Rectangle 81"/>
-          <p:cNvSpPr/>
-          <p:nvPr/>
-        </p:nvSpPr>
-        <p:spPr>
-          <a:xfrm>
-            <a:off x="548640" y="4956048"/>
-            <a:ext cx="5212080" cy="54864"/>
-          </a:xfrm>
-          <a:prstGeom prst="rect">
-            <a:avLst/>
-          </a:prstGeom>
-          <a:solidFill>
-            <a:srgbClr val="E5B53D"/>
-          </a:solidFill>
-          <a:ln>
-            <a:noFill/>
-          </a:ln>
-          <a:effectLst/>
-        </p:spPr>
-        <p:style>
-          <a:lnRef idx="1">
-            <a:schemeClr val="accent1"/>
-          </a:lnRef>
-          <a:fillRef idx="3">
-            <a:schemeClr val="accent1"/>
-          </a:fillRef>
-          <a:effectRef idx="2">
-            <a:schemeClr val="accent1"/>
-          </a:effectRef>
-          <a:fontRef idx="minor">
-            <a:schemeClr val="lt1"/>
-          </a:fontRef>
-        </p:style>
-        <p:txBody>
-          <a:bodyPr rtlCol="0" anchor="ctr"/>
-          <a:lstStyle/>
-          <a:p>
-            <a:pPr algn="ctr"/>
-            <a:endParaRPr/>
-          </a:p>
-        </p:txBody>
-      </p:sp>
-      <p:sp>
-        <p:nvSpPr>
-          <p:cNvPr id="83" name="TextBox 82"/>
-          <p:cNvSpPr txBox="1"/>
-          <p:nvPr/>
-        </p:nvSpPr>
-        <p:spPr>
-          <a:xfrm>
-            <a:off x="731520" y="5065776"/>
-            <a:ext cx="4846320" cy="256032"/>
-          </a:xfrm>
-          <a:prstGeom prst="rect">
-            <a:avLst/>
-          </a:prstGeom>
-          <a:noFill/>
-        </p:spPr>
-        <p:txBody>
-          <a:bodyPr wrap="square" lIns="0" tIns="0" rIns="0" bIns="0" anchor="t">
-            <a:spAutoFit/>
-          </a:bodyPr>
-          <a:lstStyle/>
-          <a:p>
-            <a:pPr algn="l"/>
-            <a:r>
-              <a:rPr sz="1200" b="1">
-                <a:solidFill>
-                  <a:srgbClr val="FFFFFF"/>
-                </a:solidFill>
-              </a:rPr>
-              <a:t>Grafana — дашборды · :3001</a:t>
-            </a:r>
-          </a:p>
-        </p:txBody>
-      </p:sp>
-      <p:sp>
-        <p:nvSpPr>
-          <p:cNvPr id="84" name="TextBox 83"/>
-          <p:cNvSpPr txBox="1"/>
-          <p:nvPr/>
-        </p:nvSpPr>
-        <p:spPr>
-          <a:xfrm>
-            <a:off x="731520" y="5358384"/>
-            <a:ext cx="4846320" cy="548640"/>
-          </a:xfrm>
-          <a:prstGeom prst="rect">
-            <a:avLst/>
-          </a:prstGeom>
-          <a:noFill/>
-        </p:spPr>
-        <p:txBody>
-          <a:bodyPr wrap="square" lIns="0" tIns="0" rIns="0" bIns="0" anchor="t">
-            <a:spAutoFit/>
-          </a:bodyPr>
-          <a:lstStyle/>
-          <a:p>
-            <a:pPr algn="l">
-              <a:lnSpc>
-                <a:spcPct val="105000"/>
-              </a:lnSpc>
-            </a:pPr>
-            <a:r>
-              <a:rPr sz="950" b="0">
-                <a:solidFill>
-                  <a:srgbClr val="A9B4C0"/>
-                </a:solidFill>
-              </a:rPr>
-              <a:t>панели на метриках Prometheus · http://localhost:3001 (admin / admin)</a:t>
-            </a:r>
-          </a:p>
-        </p:txBody>
-      </p:sp>
-      <p:sp>
-        <p:nvSpPr>
-          <p:cNvPr id="85" name="TextBox 84"/>
-          <p:cNvSpPr txBox="1"/>
-          <p:nvPr/>
-        </p:nvSpPr>
-        <p:spPr>
-          <a:xfrm>
-            <a:off x="594360" y="6108192"/>
-            <a:ext cx="5212080" cy="274320"/>
-          </a:xfrm>
-          <a:prstGeom prst="rect">
-            <a:avLst/>
-          </a:prstGeom>
-          <a:noFill/>
-        </p:spPr>
-        <p:txBody>
-          <a:bodyPr wrap="square" lIns="0" tIns="0" rIns="0" bIns="0" anchor="t">
-            <a:spAutoFit/>
-          </a:bodyPr>
-          <a:lstStyle/>
-          <a:p>
-            <a:pPr algn="l"/>
-            <a:r>
-              <a:rPr sz="950" b="1">
-                <a:solidFill>
-                  <a:srgbClr val="A9B4C0"/>
-                </a:solidFill>
-              </a:rPr>
-              <a:t>API: /trace/{request_id} · /metrics · /health</a:t>
-            </a:r>
-          </a:p>
-        </p:txBody>
-      </p:sp>
-      <p:sp>
-        <p:nvSpPr>
-          <p:cNvPr id="86" name="Rounded Rectangle 85"/>
-          <p:cNvSpPr/>
-          <p:nvPr/>
-        </p:nvSpPr>
-        <p:spPr>
-          <a:xfrm>
-            <a:off x="6035040" y="1737360"/>
-            <a:ext cx="5605272" cy="4069080"/>
-          </a:xfrm>
-          <a:prstGeom prst="roundRect">
-            <a:avLst>
-              <a:gd name="adj" fmla="val 4500"/>
-            </a:avLst>
-          </a:prstGeom>
-          <a:solidFill>
-            <a:srgbClr val="262C33"/>
-          </a:solidFill>
-          <a:ln w="12700">
-            <a:solidFill>
-              <a:srgbClr val="3D4A57"/>
-            </a:solidFill>
-          </a:ln>
-          <a:effectLst/>
-        </p:spPr>
-        <p:style>
-          <a:lnRef idx="1">
-            <a:schemeClr val="accent1"/>
-          </a:lnRef>
-          <a:fillRef idx="3">
-            <a:schemeClr val="accent1"/>
-          </a:fillRef>
-          <a:effectRef idx="2">
-            <a:schemeClr val="accent1"/>
-          </a:effectRef>
-          <a:fontRef idx="minor">
-            <a:schemeClr val="lt1"/>
-          </a:fontRef>
-        </p:style>
-        <p:txBody>
-          <a:bodyPr rtlCol="0" anchor="ctr"/>
-          <a:lstStyle/>
-          <a:p>
-            <a:pPr algn="ctr"/>
-            <a:endParaRPr/>
+            <a:r>
+              <a:rPr sz="1600" b="1">
+                <a:solidFill>
+                  <a:srgbClr val="FF5A36"/>
+                </a:solidFill>
+                <a:latin typeface="Calibri"/>
+              </a:rPr>
+              <a:t>Дашборды Grafana</a:t>
+            </a:r>
           </a:p>
         </p:txBody>
       </p:sp>
       <p:pic>
         <p:nvPicPr>
-          <p:cNvPr id="87" name="Picture 86" descr="debug-1.png"/>
+          <p:cNvPr id="68" name="Picture 67" descr="grafana.png"/>
           <p:cNvPicPr>
             <a:picLocks noChangeAspect="1"/>
           </p:cNvPicPr>
           <p:nvPr/>
         </p:nvPicPr>
         <p:blipFill>
-          <a:blip r:embed="rId2"/>
+          <a:blip r:embed="rId4"/>
           <a:stretch>
             <a:fillRect/>
           </a:stretch>
         </p:blipFill>
         <p:spPr>
           <a:xfrm>
-            <a:off x="6144768" y="1865376"/>
-            <a:ext cx="5157216" cy="3438144"/>
+            <a:off x="8156448" y="2395728"/>
+            <a:ext cx="2980944" cy="2313432"/>
           </a:xfrm>
           <a:prstGeom prst="rect">
             <a:avLst/>
@@ -8958,14 +8149,14 @@
       </p:pic>
       <p:sp>
         <p:nvSpPr>
-          <p:cNvPr id="88" name="TextBox 87"/>
+          <p:cNvPr id="69" name="TextBox 68"/>
           <p:cNvSpPr txBox="1"/>
           <p:nvPr/>
         </p:nvSpPr>
         <p:spPr>
           <a:xfrm>
-            <a:off x="6181344" y="5358383"/>
-            <a:ext cx="5312664" cy="365760"/>
+            <a:off x="8183879" y="4937760"/>
+            <a:ext cx="2926080" cy="731520"/>
           </a:xfrm>
           <a:prstGeom prst="rect">
             <a:avLst/>
@@ -8978,14 +8169,19 @@
           </a:bodyPr>
           <a:lstStyle/>
           <a:p>
-            <a:pPr algn="ctr"/>
-            <a:r>
-              <a:rPr sz="1000" b="1">
+            <a:pPr>
+              <a:lnSpc>
+                <a:spcPct val="115000"/>
+              </a:lnSpc>
+            </a:pPr>
+            <a:r>
+              <a:rPr sz="1200">
                 <a:solidFill>
                   <a:srgbClr val="A9B4C0"/>
                 </a:solidFill>
-              </a:rPr>
-              <a:t>Трейс запроса: виден каждый шаг агента — от классификации до ответа</a:t>
+                <a:latin typeface="Calibri"/>
+              </a:rPr>
+              <a:t>Панели на метриках Prometheus: время ответа, статусы, точность · :3001</a:t>
             </a:r>
           </a:p>
         </p:txBody>
@@ -13244,8 +12440,8 @@
         </p:nvSpPr>
         <p:spPr>
           <a:xfrm>
-            <a:off x="548640" y="1691640"/>
-            <a:ext cx="11064240" cy="548640"/>
+            <a:off x="548640" y="1502389"/>
+            <a:ext cx="11064240" cy="642612"/>
           </a:xfrm>
           <a:prstGeom prst="rect">
             <a:avLst/>
@@ -13264,22 +12460,238 @@
               </a:lnSpc>
             </a:pPr>
             <a:r>
-              <a:rPr sz="1800" b="1">
+              <a:rPr sz="1800" b="1" dirty="0" err="1">
                 <a:solidFill>
                   <a:srgbClr val="FFFFFF"/>
                 </a:solidFill>
                 <a:latin typeface="Calibri"/>
               </a:rPr>
-              <a:t>Сделать работу с данными о ценах простой и быстрой: </a:t>
-            </a:r>
-            <a:r>
-              <a:rPr sz="1800" b="1">
-                <a:solidFill>
-                  <a:srgbClr val="8A97A6"/>
-                </a:solidFill>
-                <a:latin typeface="Calibri"/>
-              </a:rPr>
-              <a:t>загрузил файл — задал вопрос — получил проверяемый ответ.</a:t>
+              <a:t>Сделать</a:t>
+            </a:r>
+            <a:r>
+              <a:rPr sz="1800" b="1" dirty="0">
+                <a:solidFill>
+                  <a:srgbClr val="FFFFFF"/>
+                </a:solidFill>
+                <a:latin typeface="Calibri"/>
+              </a:rPr>
+              <a:t> </a:t>
+            </a:r>
+            <a:r>
+              <a:rPr sz="1800" b="1" dirty="0" err="1">
+                <a:solidFill>
+                  <a:srgbClr val="FFFFFF"/>
+                </a:solidFill>
+                <a:latin typeface="Calibri"/>
+              </a:rPr>
+              <a:t>работу</a:t>
+            </a:r>
+            <a:r>
+              <a:rPr sz="1800" b="1" dirty="0">
+                <a:solidFill>
+                  <a:srgbClr val="FFFFFF"/>
+                </a:solidFill>
+                <a:latin typeface="Calibri"/>
+              </a:rPr>
+              <a:t> с </a:t>
+            </a:r>
+            <a:r>
+              <a:rPr sz="1800" b="1" dirty="0" err="1">
+                <a:solidFill>
+                  <a:srgbClr val="FFFFFF"/>
+                </a:solidFill>
+                <a:latin typeface="Calibri"/>
+              </a:rPr>
+              <a:t>данными</a:t>
+            </a:r>
+            <a:r>
+              <a:rPr sz="1800" b="1" dirty="0">
+                <a:solidFill>
+                  <a:srgbClr val="FFFFFF"/>
+                </a:solidFill>
+                <a:latin typeface="Calibri"/>
+              </a:rPr>
+              <a:t> о </a:t>
+            </a:r>
+            <a:r>
+              <a:rPr sz="1800" b="1" dirty="0" err="1">
+                <a:solidFill>
+                  <a:srgbClr val="FFFFFF"/>
+                </a:solidFill>
+                <a:latin typeface="Calibri"/>
+              </a:rPr>
+              <a:t>ценах</a:t>
+            </a:r>
+            <a:r>
+              <a:rPr sz="1800" b="1" dirty="0">
+                <a:solidFill>
+                  <a:srgbClr val="FFFFFF"/>
+                </a:solidFill>
+                <a:latin typeface="Calibri"/>
+              </a:rPr>
+              <a:t> </a:t>
+            </a:r>
+            <a:r>
+              <a:rPr sz="1800" b="1" dirty="0" err="1">
+                <a:solidFill>
+                  <a:srgbClr val="FFFFFF"/>
+                </a:solidFill>
+                <a:latin typeface="Calibri"/>
+              </a:rPr>
+              <a:t>простой</a:t>
+            </a:r>
+            <a:r>
+              <a:rPr sz="1800" b="1" dirty="0">
+                <a:solidFill>
+                  <a:srgbClr val="FFFFFF"/>
+                </a:solidFill>
+                <a:latin typeface="Calibri"/>
+              </a:rPr>
+              <a:t> и </a:t>
+            </a:r>
+            <a:r>
+              <a:rPr sz="1800" b="1" dirty="0" err="1">
+                <a:solidFill>
+                  <a:srgbClr val="FFFFFF"/>
+                </a:solidFill>
+                <a:latin typeface="Calibri"/>
+              </a:rPr>
+              <a:t>быстрой</a:t>
+            </a:r>
+            <a:r>
+              <a:rPr sz="1800" b="1" dirty="0">
+                <a:solidFill>
+                  <a:srgbClr val="FFFFFF"/>
+                </a:solidFill>
+                <a:latin typeface="Calibri"/>
+              </a:rPr>
+              <a:t>: </a:t>
+            </a:r>
+            <a:r>
+              <a:rPr sz="1800" b="1" dirty="0" err="1">
+                <a:solidFill>
+                  <a:schemeClr val="bg1"/>
+                </a:solidFill>
+                <a:latin typeface="Calibri"/>
+              </a:rPr>
+              <a:t>загрузил</a:t>
+            </a:r>
+            <a:r>
+              <a:rPr sz="1800" b="1" dirty="0">
+                <a:solidFill>
+                  <a:schemeClr val="bg1"/>
+                </a:solidFill>
+                <a:latin typeface="Calibri"/>
+              </a:rPr>
+              <a:t> </a:t>
+            </a:r>
+            <a:r>
+              <a:rPr sz="1800" b="1" dirty="0" err="1">
+                <a:solidFill>
+                  <a:schemeClr val="bg1"/>
+                </a:solidFill>
+                <a:latin typeface="Calibri"/>
+              </a:rPr>
+              <a:t>файл</a:t>
+            </a:r>
+            <a:r>
+              <a:rPr sz="1800" b="1" dirty="0">
+                <a:solidFill>
+                  <a:schemeClr val="bg1"/>
+                </a:solidFill>
+                <a:latin typeface="Calibri"/>
+              </a:rPr>
+              <a:t> — </a:t>
+            </a:r>
+            <a:r>
+              <a:rPr sz="1800" b="1" dirty="0" err="1">
+                <a:solidFill>
+                  <a:schemeClr val="bg1"/>
+                </a:solidFill>
+                <a:latin typeface="Calibri"/>
+              </a:rPr>
+              <a:t>задал</a:t>
+            </a:r>
+            <a:r>
+              <a:rPr sz="1800" b="1" dirty="0">
+                <a:solidFill>
+                  <a:schemeClr val="bg1"/>
+                </a:solidFill>
+                <a:latin typeface="Calibri"/>
+              </a:rPr>
+              <a:t> </a:t>
+            </a:r>
+            <a:r>
+              <a:rPr sz="1800" b="1" dirty="0" err="1">
+                <a:solidFill>
+                  <a:schemeClr val="bg1"/>
+                </a:solidFill>
+                <a:latin typeface="Calibri"/>
+              </a:rPr>
+              <a:t>вопрос</a:t>
+            </a:r>
+            <a:r>
+              <a:rPr sz="1800" b="1" dirty="0">
+                <a:solidFill>
+                  <a:schemeClr val="bg1"/>
+                </a:solidFill>
+                <a:latin typeface="Calibri"/>
+              </a:rPr>
+              <a:t> — </a:t>
+            </a:r>
+            <a:r>
+              <a:rPr sz="1800" b="1" dirty="0" err="1">
+                <a:solidFill>
+                  <a:schemeClr val="bg1"/>
+                </a:solidFill>
+                <a:latin typeface="Calibri"/>
+              </a:rPr>
+              <a:t>получил</a:t>
+            </a:r>
+            <a:r>
+              <a:rPr sz="1800" b="1" dirty="0">
+                <a:solidFill>
+                  <a:schemeClr val="bg1"/>
+                </a:solidFill>
+                <a:latin typeface="Calibri"/>
+              </a:rPr>
+              <a:t> </a:t>
+            </a:r>
+            <a:r>
+              <a:rPr sz="1800" b="1" dirty="0" err="1">
+                <a:solidFill>
+                  <a:schemeClr val="bg1"/>
+                </a:solidFill>
+                <a:latin typeface="Calibri"/>
+              </a:rPr>
+              <a:t>проверяемый</a:t>
+            </a:r>
+            <a:r>
+              <a:rPr sz="1800" b="1" dirty="0">
+                <a:solidFill>
+                  <a:schemeClr val="bg1"/>
+                </a:solidFill>
+                <a:latin typeface="Calibri"/>
+              </a:rPr>
+              <a:t> </a:t>
+            </a:r>
+            <a:r>
+              <a:rPr sz="1800" b="1" dirty="0" err="1">
+                <a:solidFill>
+                  <a:schemeClr val="bg1"/>
+                </a:solidFill>
+                <a:latin typeface="Calibri"/>
+              </a:rPr>
+              <a:t>ответ</a:t>
+            </a:r>
+            <a:r>
+              <a:rPr sz="1800" b="1" dirty="0">
+                <a:solidFill>
+                  <a:schemeClr val="bg1"/>
+                </a:solidFill>
+                <a:latin typeface="Calibri"/>
+              </a:rPr>
+              <a:t>.</a:t>
             </a:r>
           </a:p>
         </p:txBody>
@@ -13381,7 +12793,7 @@
         <p:spPr>
           <a:xfrm>
             <a:off x="1234440" y="2587752"/>
-            <a:ext cx="4526280" cy="365760"/>
+            <a:ext cx="4526280" cy="307777"/>
           </a:xfrm>
           <a:prstGeom prst="rect">
             <a:avLst/>
@@ -13400,14 +12812,38 @@
               </a:lnSpc>
             </a:pPr>
             <a:r>
-              <a:rPr sz="1600" b="1" i="0">
+              <a:rPr sz="2000" b="1" i="0" dirty="0" err="1">
                 <a:solidFill>
                   <a:srgbClr val="FFFFFF"/>
                 </a:solidFill>
                 <a:latin typeface="Calibri"/>
               </a:rPr>
-              <a:t>Загрузил файл</a:t>
-            </a:r>
+              <a:t>Загрузил</a:t>
+            </a:r>
+            <a:r>
+              <a:rPr sz="2000" b="1" i="0" dirty="0">
+                <a:solidFill>
+                  <a:srgbClr val="FFFFFF"/>
+                </a:solidFill>
+                <a:latin typeface="Calibri"/>
+              </a:rPr>
+              <a:t> </a:t>
+            </a:r>
+            <a:r>
+              <a:rPr sz="2000" b="1" i="0" dirty="0" err="1">
+                <a:solidFill>
+                  <a:srgbClr val="FFFFFF"/>
+                </a:solidFill>
+                <a:latin typeface="Calibri"/>
+              </a:rPr>
+              <a:t>файл</a:t>
+            </a:r>
+            <a:endParaRPr sz="2000" b="1" i="0" dirty="0">
+              <a:solidFill>
+                <a:srgbClr val="FFFFFF"/>
+              </a:solidFill>
+              <a:latin typeface="Calibri"/>
+            </a:endParaRPr>
           </a:p>
         </p:txBody>
       </p:sp>
@@ -13547,7 +12983,7 @@
         <p:spPr>
           <a:xfrm>
             <a:off x="6858000" y="2587752"/>
-            <a:ext cx="4526280" cy="365760"/>
+            <a:ext cx="4526280" cy="307777"/>
           </a:xfrm>
           <a:prstGeom prst="rect">
             <a:avLst/>
@@ -13566,7 +13002,7 @@
               </a:lnSpc>
             </a:pPr>
             <a:r>
-              <a:rPr sz="1600" b="1" i="0">
+              <a:rPr sz="2000" b="1" i="0" dirty="0" err="1">
                 <a:solidFill>
                   <a:srgbClr val="FFFFFF"/>
                 </a:solidFill>
@@ -13574,6 +13010,12 @@
               </a:rPr>
               <a:t>Спросил</a:t>
             </a:r>
+            <a:endParaRPr sz="2000" b="1" i="0" dirty="0">
+              <a:solidFill>
+                <a:srgbClr val="FFFFFF"/>
+              </a:solidFill>
+              <a:latin typeface="Calibri"/>
+            </a:endParaRPr>
           </a:p>
         </p:txBody>
       </p:sp>
@@ -13713,7 +13155,7 @@
         <p:spPr>
           <a:xfrm>
             <a:off x="1234440" y="4050791"/>
-            <a:ext cx="4526280" cy="365760"/>
+            <a:ext cx="4526280" cy="307777"/>
           </a:xfrm>
           <a:prstGeom prst="rect">
             <a:avLst/>
@@ -13732,7 +13174,7 @@
               </a:lnSpc>
             </a:pPr>
             <a:r>
-              <a:rPr sz="1600" b="1" i="0">
+              <a:rPr sz="2000" b="1" i="0" dirty="0" err="1">
                 <a:solidFill>
                   <a:srgbClr val="FFFFFF"/>
                 </a:solidFill>
@@ -13740,6 +13182,12 @@
               </a:rPr>
               <a:t>Проверил</a:t>
             </a:r>
+            <a:endParaRPr sz="2000" b="1" i="0" dirty="0">
+              <a:solidFill>
+                <a:srgbClr val="FFFFFF"/>
+              </a:solidFill>
+              <a:latin typeface="Calibri"/>
+            </a:endParaRPr>
           </a:p>
         </p:txBody>
       </p:sp>
@@ -13879,7 +13327,7 @@
         <p:spPr>
           <a:xfrm>
             <a:off x="6858000" y="4050791"/>
-            <a:ext cx="4526280" cy="365760"/>
+            <a:ext cx="4526280" cy="307777"/>
           </a:xfrm>
           <a:prstGeom prst="rect">
             <a:avLst/>
@@ -13898,14 +13346,74 @@
               </a:lnSpc>
             </a:pPr>
             <a:r>
-              <a:rPr sz="1600" b="1" i="0">
+              <a:rPr sz="2000" b="1" i="0" dirty="0" err="1">
                 <a:solidFill>
                   <a:srgbClr val="FFFFFF"/>
                 </a:solidFill>
                 <a:latin typeface="Calibri"/>
               </a:rPr>
-              <a:t>Не переживаешь за данные</a:t>
-            </a:r>
+              <a:t>Не</a:t>
+            </a:r>
+            <a:r>
+              <a:rPr sz="2000" b="1" i="0" dirty="0">
+                <a:solidFill>
+                  <a:srgbClr val="FFFFFF"/>
+                </a:solidFill>
+                <a:latin typeface="Calibri"/>
+              </a:rPr>
+              <a:t> </a:t>
+            </a:r>
+            <a:r>
+              <a:rPr sz="2000" b="1" i="0" dirty="0" err="1">
+                <a:solidFill>
+                  <a:srgbClr val="FFFFFF"/>
+                </a:solidFill>
+                <a:latin typeface="Calibri"/>
+              </a:rPr>
+              <a:t>переживаешь</a:t>
+            </a:r>
+            <a:r>
+              <a:rPr sz="2000" b="1" i="0" dirty="0">
+                <a:solidFill>
+                  <a:srgbClr val="FFFFFF"/>
+                </a:solidFill>
+                <a:latin typeface="Calibri"/>
+              </a:rPr>
+              <a:t> </a:t>
+            </a:r>
+            <a:r>
+              <a:rPr sz="2000" b="1" i="0" dirty="0" err="1">
+                <a:solidFill>
+                  <a:srgbClr val="FFFFFF"/>
+                </a:solidFill>
+                <a:latin typeface="Calibri"/>
+              </a:rPr>
+              <a:t>за</a:t>
+            </a:r>
+            <a:r>
+              <a:rPr sz="2000" b="1" i="0" dirty="0">
+                <a:solidFill>
+                  <a:srgbClr val="FFFFFF"/>
+                </a:solidFill>
+                <a:latin typeface="Calibri"/>
+              </a:rPr>
+              <a:t> </a:t>
+            </a:r>
+            <a:r>
+              <a:rPr sz="2000" b="1" i="0" dirty="0" err="1">
+                <a:solidFill>
+                  <a:srgbClr val="FFFFFF"/>
+                </a:solidFill>
+                <a:latin typeface="Calibri"/>
+              </a:rPr>
+              <a:t>данные</a:t>
+            </a:r>
+            <a:endParaRPr sz="2000" b="1" i="0" dirty="0">
+              <a:solidFill>
+                <a:srgbClr val="FFFFFF"/>
+              </a:solidFill>
+              <a:latin typeface="Calibri"/>
+            </a:endParaRPr>
           </a:p>
         </p:txBody>
       </p:sp>
@@ -14044,8 +13552,8 @@
         </p:nvSpPr>
         <p:spPr>
           <a:xfrm>
-            <a:off x="3200400" y="5669280"/>
-            <a:ext cx="2514600" cy="548640"/>
+            <a:off x="2006600" y="5788557"/>
+            <a:ext cx="3708400" cy="310085"/>
           </a:xfrm>
           <a:prstGeom prst="rect">
             <a:avLst/>
@@ -14064,14 +13572,56 @@
               </a:lnSpc>
             </a:pPr>
             <a:r>
-              <a:rPr sz="1400" b="1" i="0">
+              <a:rPr sz="2000" b="1" i="0" dirty="0" err="1">
                 <a:solidFill>
                   <a:srgbClr val="FFFFFF"/>
                 </a:solidFill>
                 <a:latin typeface="Calibri"/>
               </a:rPr>
-              <a:t>Целевая точность ответов</a:t>
-            </a:r>
+              <a:t>Целевая</a:t>
+            </a:r>
+            <a:r>
+              <a:rPr sz="2000" b="1" i="0" dirty="0">
+                <a:solidFill>
+                  <a:srgbClr val="FFFFFF"/>
+                </a:solidFill>
+                <a:latin typeface="Calibri"/>
+              </a:rPr>
+              <a:t> </a:t>
+            </a:r>
+            <a:r>
+              <a:rPr sz="2000" b="1" i="0" dirty="0" err="1">
+                <a:solidFill>
+                  <a:srgbClr val="FFFFFF"/>
+                </a:solidFill>
+                <a:latin typeface="Calibri"/>
+              </a:rPr>
+              <a:t>точность</a:t>
+            </a:r>
+            <a:r>
+              <a:rPr sz="2000" b="1" i="0" dirty="0">
+                <a:solidFill>
+                  <a:srgbClr val="FFFFFF"/>
+                </a:solidFill>
+                <a:latin typeface="Calibri"/>
+              </a:rPr>
+              <a:t> </a:t>
+            </a:r>
+            <a:r>
+              <a:rPr sz="2000" b="1" i="0" dirty="0" err="1">
+                <a:solidFill>
+                  <a:srgbClr val="FFFFFF"/>
+                </a:solidFill>
+                <a:latin typeface="Calibri"/>
+              </a:rPr>
+              <a:t>ответов</a:t>
+            </a:r>
+            <a:endParaRPr sz="2000" b="1" i="0" dirty="0">
+              <a:solidFill>
+                <a:srgbClr val="FFFFFF"/>
+              </a:solidFill>
+              <a:latin typeface="Calibri"/>
+            </a:endParaRPr>
           </a:p>
         </p:txBody>
       </p:sp>
@@ -14171,8 +13721,8 @@
         </p:nvSpPr>
         <p:spPr>
           <a:xfrm>
-            <a:off x="8915400" y="5669280"/>
-            <a:ext cx="2514600" cy="548640"/>
+            <a:off x="7577667" y="5788557"/>
+            <a:ext cx="3852333" cy="310085"/>
           </a:xfrm>
           <a:prstGeom prst="rect">
             <a:avLst/>
@@ -14191,14 +13741,56 @@
               </a:lnSpc>
             </a:pPr>
             <a:r>
-              <a:rPr sz="1400" b="1" i="0">
+              <a:rPr sz="2000" b="1" i="0" dirty="0" err="1">
                 <a:solidFill>
                   <a:srgbClr val="FFFFFF"/>
                 </a:solidFill>
                 <a:latin typeface="Calibri"/>
               </a:rPr>
-              <a:t>Ответов — с указанием источника</a:t>
-            </a:r>
+              <a:t>Ответов</a:t>
+            </a:r>
+            <a:r>
+              <a:rPr sz="2000" b="1" i="0" dirty="0">
+                <a:solidFill>
+                  <a:srgbClr val="FFFFFF"/>
+                </a:solidFill>
+                <a:latin typeface="Calibri"/>
+              </a:rPr>
+              <a:t> — с </a:t>
+            </a:r>
+            <a:r>
+              <a:rPr sz="2000" b="1" i="0" dirty="0" err="1">
+                <a:solidFill>
+                  <a:srgbClr val="FFFFFF"/>
+                </a:solidFill>
+                <a:latin typeface="Calibri"/>
+              </a:rPr>
+              <a:t>указанием</a:t>
+            </a:r>
+            <a:r>
+              <a:rPr sz="2000" b="1" i="0" dirty="0">
+                <a:solidFill>
+                  <a:srgbClr val="FFFFFF"/>
+                </a:solidFill>
+                <a:latin typeface="Calibri"/>
+              </a:rPr>
+              <a:t> </a:t>
+            </a:r>
+            <a:r>
+              <a:rPr sz="2000" b="1" i="0" dirty="0" err="1">
+                <a:solidFill>
+                  <a:srgbClr val="FFFFFF"/>
+                </a:solidFill>
+                <a:latin typeface="Calibri"/>
+              </a:rPr>
+              <a:t>источника</a:t>
+            </a:r>
+            <a:endParaRPr sz="2000" b="1" i="0" dirty="0">
+              <a:solidFill>
+                <a:srgbClr val="FFFFFF"/>
+              </a:solidFill>
+              <a:latin typeface="Calibri"/>
+            </a:endParaRPr>
           </a:p>
         </p:txBody>
       </p:sp>
@@ -14447,14 +14039,14 @@
               <a:buNone/>
             </a:pPr>
             <a:r>
-              <a:rPr lang="en-US" sz="1900" b="1" dirty="0">
+              <a:rPr lang="en-US" sz="2000" b="1" dirty="0">
                 <a:solidFill>
                   <a:srgbClr val="FFFFFF"/>
                 </a:solidFill>
               </a:rPr>
               <a:t>Нормализация вместо векторного поиска</a:t>
             </a:r>
-            <a:endParaRPr lang="en-US" sz="1900" dirty="0"/>
+            <a:endParaRPr lang="en-US" sz="2000" dirty="0"/>
           </a:p>
         </p:txBody>
       </p:sp>
@@ -14589,14 +14181,14 @@
               <a:buNone/>
             </a:pPr>
             <a:r>
-              <a:rPr lang="en-US" sz="1900" b="1" dirty="0">
+              <a:rPr lang="en-US" sz="2000" b="1" dirty="0">
                 <a:solidFill>
                   <a:srgbClr val="FFFFFF"/>
                 </a:solidFill>
               </a:rPr>
               <a:t>Детерминизм вместо «магии» LLM</a:t>
             </a:r>
-            <a:endParaRPr lang="en-US" sz="1900" dirty="0"/>
+            <a:endParaRPr lang="en-US" sz="2000" dirty="0"/>
           </a:p>
         </p:txBody>
       </p:sp>
@@ -14731,14 +14323,14 @@
               <a:buNone/>
             </a:pPr>
             <a:r>
-              <a:rPr lang="en-US" sz="1900" b="1" dirty="0">
+              <a:rPr lang="en-US" sz="2000" b="1" dirty="0">
                 <a:solidFill>
                   <a:srgbClr val="FFFFFF"/>
                 </a:solidFill>
               </a:rPr>
               <a:t>Прозрачность каждого ответа</a:t>
             </a:r>
-            <a:endParaRPr lang="en-US" sz="1900" dirty="0"/>
+            <a:endParaRPr lang="en-US" sz="2000" dirty="0"/>
           </a:p>
         </p:txBody>
       </p:sp>
@@ -14837,14 +14429,14 @@
               <a:buNone/>
             </a:pPr>
             <a:r>
-              <a:rPr lang="en-US" sz="1600" dirty="0">
+              <a:rPr lang="en-US" sz="2000" dirty="0">
                 <a:solidFill>
                   <a:srgbClr val="FFFFFF"/>
                 </a:solidFill>
               </a:rPr>
               <a:t>Кэш ответов и fallback-логика верификатора уменьшают число повторных прогонов графа</a:t>
             </a:r>
-            <a:endParaRPr lang="en-US" sz="1600" dirty="0"/>
+            <a:endParaRPr lang="en-US" sz="2000" dirty="0"/>
           </a:p>
         </p:txBody>
       </p:sp>
@@ -15099,28 +14691,28 @@
               <a:buNone/>
             </a:pPr>
             <a:r>
-              <a:rPr lang="en-US" sz="1500" b="1" dirty="0">
+              <a:rPr lang="en-US" sz="1600" b="1" dirty="0">
                 <a:solidFill>
                   <a:srgbClr val="FFFFFF"/>
                 </a:solidFill>
               </a:rPr>
               <a:t>Excel</a:t>
             </a:r>
-            <a:endParaRPr lang="en-US" sz="1500" dirty="0"/>
+            <a:endParaRPr lang="en-US" sz="1600" dirty="0"/>
           </a:p>
           <a:p>
             <a:pPr marL="0" indent="0" algn="ctr">
               <a:buNone/>
             </a:pPr>
             <a:r>
-              <a:rPr lang="en-US" sz="1100" dirty="0">
+              <a:rPr lang="en-US" sz="1600" dirty="0">
                 <a:solidFill>
                   <a:srgbClr val="A9B4C0"/>
                 </a:solidFill>
               </a:rPr>
               <a:t>файл</a:t>
             </a:r>
-            <a:endParaRPr lang="en-US" sz="1500" dirty="0"/>
+            <a:endParaRPr lang="en-US" sz="1600" dirty="0"/>
           </a:p>
         </p:txBody>
       </p:sp>
@@ -15214,28 +14806,28 @@
               <a:buNone/>
             </a:pPr>
             <a:r>
-              <a:rPr lang="en-US" sz="1500" b="1" dirty="0">
+              <a:rPr lang="en-US" sz="1600" b="1" dirty="0">
                 <a:solidFill>
                   <a:srgbClr val="FFFFFF"/>
                 </a:solidFill>
               </a:rPr>
               <a:t>Парсинг</a:t>
             </a:r>
-            <a:endParaRPr lang="en-US" sz="1500" dirty="0"/>
+            <a:endParaRPr lang="en-US" sz="1600" dirty="0"/>
           </a:p>
           <a:p>
             <a:pPr marL="0" indent="0" algn="ctr">
               <a:buNone/>
             </a:pPr>
             <a:r>
-              <a:rPr lang="en-US" sz="1100" dirty="0">
+              <a:rPr lang="en-US" sz="1600" dirty="0">
                 <a:solidFill>
                   <a:srgbClr val="A9B4C0"/>
                 </a:solidFill>
               </a:rPr>
               <a:t>src/core/excel</a:t>
             </a:r>
-            <a:endParaRPr lang="en-US" sz="1500" dirty="0"/>
+            <a:endParaRPr lang="en-US" sz="1600" dirty="0"/>
           </a:p>
         </p:txBody>
       </p:sp>
@@ -15312,7 +14904,7 @@
         </p:nvSpPr>
         <p:spPr>
           <a:xfrm>
-            <a:off x="4425696" y="1554480"/>
+            <a:off x="4425696" y="1554479"/>
             <a:ext cx="1408176" cy="914400"/>
           </a:xfrm>
           <a:prstGeom prst="rect">
@@ -15329,28 +14921,28 @@
               <a:buNone/>
             </a:pPr>
             <a:r>
-              <a:rPr lang="en-US" sz="1500" b="1" dirty="0">
+              <a:rPr lang="en-US" sz="1600" b="1" dirty="0">
                 <a:solidFill>
                   <a:srgbClr val="FFFFFF"/>
                 </a:solidFill>
               </a:rPr>
               <a:t>RAW</a:t>
             </a:r>
-            <a:endParaRPr lang="en-US" sz="1500" dirty="0"/>
+            <a:endParaRPr lang="en-US" sz="1600" dirty="0"/>
           </a:p>
           <a:p>
             <a:pPr marL="0" indent="0" algn="ctr">
               <a:buNone/>
             </a:pPr>
             <a:r>
-              <a:rPr lang="en-US" sz="1100" dirty="0">
+              <a:rPr lang="en-US" sz="1600" dirty="0">
                 <a:solidFill>
                   <a:srgbClr val="A9B4C0"/>
                 </a:solidFill>
               </a:rPr>
               <a:t>таблицы public</a:t>
             </a:r>
-            <a:endParaRPr lang="en-US" sz="1500" dirty="0"/>
+            <a:endParaRPr lang="en-US" sz="1600" dirty="0"/>
           </a:p>
         </p:txBody>
       </p:sp>
@@ -15444,28 +15036,28 @@
               <a:buNone/>
             </a:pPr>
             <a:r>
-              <a:rPr lang="en-US" sz="1500" b="1" dirty="0">
+              <a:rPr lang="en-US" sz="1600" b="1" dirty="0">
                 <a:solidFill>
                   <a:srgbClr val="FFFFFF"/>
                 </a:solidFill>
               </a:rPr>
               <a:t>Нормализация</a:t>
             </a:r>
-            <a:endParaRPr lang="en-US" sz="1500" dirty="0"/>
+            <a:endParaRPr lang="en-US" sz="1600" dirty="0"/>
           </a:p>
           <a:p>
             <a:pPr marL="0" indent="0" algn="ctr">
               <a:buNone/>
             </a:pPr>
             <a:r>
-              <a:rPr lang="en-US" sz="1100" dirty="0">
+              <a:rPr lang="en-US" sz="1600" dirty="0">
                 <a:solidFill>
                   <a:srgbClr val="A9B4C0"/>
                 </a:solidFill>
               </a:rPr>
               <a:t>витрина mart</a:t>
             </a:r>
-            <a:endParaRPr lang="en-US" sz="1500" dirty="0"/>
+            <a:endParaRPr lang="en-US" sz="1600" dirty="0"/>
           </a:p>
         </p:txBody>
       </p:sp>
@@ -15559,28 +15151,28 @@
               <a:buNone/>
             </a:pPr>
             <a:r>
-              <a:rPr lang="en-US" sz="1500" b="1" dirty="0">
+              <a:rPr lang="en-US" sz="1600" b="1" dirty="0">
                 <a:solidFill>
                   <a:srgbClr val="FFFFFF"/>
                 </a:solidFill>
               </a:rPr>
               <a:t>LangGraph</a:t>
             </a:r>
-            <a:endParaRPr lang="en-US" sz="1500" dirty="0"/>
+            <a:endParaRPr lang="en-US" sz="1600" dirty="0"/>
           </a:p>
           <a:p>
             <a:pPr marL="0" indent="0" algn="ctr">
               <a:buNone/>
             </a:pPr>
             <a:r>
-              <a:rPr lang="en-US" sz="1100" dirty="0">
+              <a:rPr lang="en-US" sz="1600" dirty="0">
                 <a:solidFill>
                   <a:srgbClr val="A9B4C0"/>
                 </a:solidFill>
               </a:rPr>
               <a:t>агент</a:t>
             </a:r>
-            <a:endParaRPr lang="en-US" sz="1500" dirty="0"/>
+            <a:endParaRPr lang="en-US" sz="1600" dirty="0"/>
           </a:p>
         </p:txBody>
       </p:sp>
@@ -15674,28 +15266,28 @@
               <a:buNone/>
             </a:pPr>
             <a:r>
-              <a:rPr lang="en-US" sz="1500" b="1" dirty="0">
+              <a:rPr lang="en-US" sz="1600" b="1" dirty="0">
                 <a:solidFill>
                   <a:srgbClr val="FFFFFF"/>
                 </a:solidFill>
               </a:rPr>
               <a:t>Безопасный</a:t>
             </a:r>
-            <a:endParaRPr lang="en-US" sz="1500" dirty="0"/>
+            <a:endParaRPr lang="en-US" sz="1600" dirty="0"/>
           </a:p>
           <a:p>
             <a:pPr marL="0" indent="0" algn="ctr">
               <a:buNone/>
             </a:pPr>
             <a:r>
-              <a:rPr lang="en-US" sz="1100" dirty="0">
+              <a:rPr lang="en-US" sz="1600" dirty="0">
                 <a:solidFill>
                   <a:srgbClr val="A9B4C0"/>
                 </a:solidFill>
               </a:rPr>
               <a:t>SELECT</a:t>
             </a:r>
-            <a:endParaRPr lang="en-US" sz="1500" dirty="0"/>
+            <a:endParaRPr lang="en-US" sz="1600" dirty="0"/>
           </a:p>
         </p:txBody>
       </p:sp>
@@ -15724,14 +15316,14 @@
               <a:buNone/>
             </a:pPr>
             <a:r>
-              <a:rPr lang="en-US" sz="1500" dirty="0">
+              <a:rPr lang="en-US" sz="2000" dirty="0">
                 <a:solidFill>
                   <a:srgbClr val="A9B4C0"/>
                 </a:solidFill>
               </a:rPr>
               <a:t>Вопрос пользователя → агент планирует и выполняет SQL → ответ + SQL + источники (PostgreSQL)</a:t>
             </a:r>
-            <a:endParaRPr lang="en-US" sz="1500" dirty="0"/>
+            <a:endParaRPr lang="en-US" sz="2000" dirty="0"/>
           </a:p>
         </p:txBody>
       </p:sp>
@@ -15744,7 +15336,7 @@
           <p:nvPr>
             <p:extLst>
               <p:ext uri="{D42A27DB-BD31-4B8C-83A1-F6EECF244321}">
-                <p14:modId xmlns:p14="http://schemas.microsoft.com/office/powerpoint/2010/main" val="393732130"/>
+                <p14:modId xmlns:p14="http://schemas.microsoft.com/office/powerpoint/2010/main" val="1917548764"/>
               </p:ext>
             </p:extLst>
           </p:nvPr>
@@ -15790,14 +15382,14 @@
                         <a:buNone/>
                       </a:pPr>
                       <a:r>
-                        <a:rPr lang="en-US" sz="1500" b="1" dirty="0">
+                        <a:rPr lang="en-US" sz="2000" b="1" dirty="0">
                           <a:solidFill>
                             <a:srgbClr val="FF5A36"/>
                           </a:solidFill>
                         </a:rPr>
                         <a:t>Часть</a:t>
                       </a:r>
-                      <a:endParaRPr lang="en-US" sz="1500" dirty="0"/>
+                      <a:endParaRPr lang="en-US" sz="2000" dirty="0"/>
                     </a:p>
                   </a:txBody>
                   <a:tcPr marL="101600" marR="101600" marT="50800" marB="50800" anchor="ctr">
@@ -15851,14 +15443,14 @@
                         <a:buNone/>
                       </a:pPr>
                       <a:r>
-                        <a:rPr lang="en-US" sz="1500" b="1" dirty="0">
+                        <a:rPr lang="en-US" sz="2000" b="1" dirty="0">
                           <a:solidFill>
                             <a:srgbClr val="FF5A36"/>
                           </a:solidFill>
                         </a:rPr>
                         <a:t>Технологии</a:t>
                       </a:r>
-                      <a:endParaRPr lang="en-US" sz="1500" dirty="0"/>
+                      <a:endParaRPr lang="en-US" sz="2000" dirty="0"/>
                     </a:p>
                   </a:txBody>
                   <a:tcPr marL="101600" marR="101600" marT="50800" marB="50800" anchor="ctr">
@@ -15912,14 +15504,14 @@
                         <a:buNone/>
                       </a:pPr>
                       <a:r>
-                        <a:rPr lang="en-US" sz="1500" b="1" dirty="0">
+                        <a:rPr lang="en-US" sz="2000" b="1" dirty="0">
                           <a:solidFill>
                             <a:srgbClr val="FF5A36"/>
                           </a:solidFill>
                         </a:rPr>
                         <a:t>Назначение</a:t>
                       </a:r>
-                      <a:endParaRPr lang="en-US" sz="1500" dirty="0"/>
+                      <a:endParaRPr lang="en-US" sz="2000" dirty="0"/>
                     </a:p>
                   </a:txBody>
                   <a:tcPr marL="101600" marR="101600" marT="50800" marB="50800" anchor="ctr">
@@ -15980,14 +15572,14 @@
                         <a:buNone/>
                       </a:pPr>
                       <a:r>
-                        <a:rPr lang="en-US" sz="1500" b="1" dirty="0">
+                        <a:rPr lang="en-US" sz="1800" b="1" dirty="0">
                           <a:solidFill>
                             <a:srgbClr val="FFFFFF"/>
                           </a:solidFill>
                         </a:rPr>
                         <a:t>Backend</a:t>
                       </a:r>
-                      <a:endParaRPr lang="en-US" sz="1500" dirty="0"/>
+                      <a:endParaRPr lang="en-US" sz="1800" dirty="0"/>
                     </a:p>
                   </a:txBody>
                   <a:tcPr marL="101600" marR="101600" marT="50800" marB="50800" anchor="ctr">
@@ -16041,14 +15633,14 @@
                         <a:buNone/>
                       </a:pPr>
                       <a:r>
-                        <a:rPr lang="en-US" sz="1500" dirty="0">
+                        <a:rPr lang="en-US" sz="1800" dirty="0">
                           <a:solidFill>
                             <a:srgbClr val="FFFFFF"/>
                           </a:solidFill>
                         </a:rPr>
                         <a:t>FastAPI, LangGraph, SQLAlchemy</a:t>
                       </a:r>
-                      <a:endParaRPr lang="en-US" sz="1500" dirty="0"/>
+                      <a:endParaRPr lang="en-US" sz="1800" dirty="0"/>
                     </a:p>
                   </a:txBody>
                   <a:tcPr marL="101600" marR="101600" marT="50800" marB="50800" anchor="ctr">
@@ -16102,14 +15694,14 @@
                         <a:buNone/>
                       </a:pPr>
                       <a:r>
-                        <a:rPr lang="en-US" sz="1500" dirty="0">
+                        <a:rPr lang="en-US" sz="1800" dirty="0">
                           <a:solidFill>
                             <a:srgbClr val="FFFFFF"/>
                           </a:solidFill>
                         </a:rPr>
                         <a:t>API, парсинг, агент</a:t>
                       </a:r>
-                      <a:endParaRPr lang="en-US" sz="1500" dirty="0"/>
+                      <a:endParaRPr lang="en-US" sz="1800" dirty="0"/>
                     </a:p>
                   </a:txBody>
                   <a:tcPr marL="101600" marR="101600" marT="50800" marB="50800" anchor="ctr">
@@ -16170,14 +15762,14 @@
                         <a:buNone/>
                       </a:pPr>
                       <a:r>
-                        <a:rPr lang="en-US" sz="1500" b="1" dirty="0">
+                        <a:rPr lang="en-US" sz="1800" b="1" dirty="0">
                           <a:solidFill>
                             <a:srgbClr val="FFFFFF"/>
                           </a:solidFill>
                         </a:rPr>
                         <a:t>Frontend</a:t>
                       </a:r>
-                      <a:endParaRPr lang="en-US" sz="1500" dirty="0"/>
+                      <a:endParaRPr lang="en-US" sz="1800" dirty="0"/>
                     </a:p>
                   </a:txBody>
                   <a:tcPr marL="101600" marR="101600" marT="50800" marB="50800" anchor="ctr">
@@ -16231,14 +15823,14 @@
                         <a:buNone/>
                       </a:pPr>
                       <a:r>
-                        <a:rPr lang="en-US" sz="1500" dirty="0">
+                        <a:rPr lang="en-US" sz="1800" dirty="0">
                           <a:solidFill>
                             <a:srgbClr val="FFFFFF"/>
                           </a:solidFill>
                         </a:rPr>
                         <a:t>React 18 + TypeScript + Vite</a:t>
                       </a:r>
-                      <a:endParaRPr lang="en-US" sz="1500" dirty="0"/>
+                      <a:endParaRPr lang="en-US" sz="1800" dirty="0"/>
                     </a:p>
                   </a:txBody>
                   <a:tcPr marL="101600" marR="101600" marT="50800" marB="50800" anchor="ctr">
@@ -16292,14 +15884,14 @@
                         <a:buNone/>
                       </a:pPr>
                       <a:r>
-                        <a:rPr lang="en-US" sz="1500" dirty="0">
+                        <a:rPr lang="en-US" sz="1800" dirty="0">
                           <a:solidFill>
                             <a:srgbClr val="FFFFFF"/>
                           </a:solidFill>
                         </a:rPr>
                         <a:t>Чат, файлы, дашборд, метрики, трейсы</a:t>
                       </a:r>
-                      <a:endParaRPr lang="en-US" sz="1500" dirty="0"/>
+                      <a:endParaRPr lang="en-US" sz="1800" dirty="0"/>
                     </a:p>
                   </a:txBody>
                   <a:tcPr marL="101600" marR="101600" marT="50800" marB="50800" anchor="ctr">
@@ -16360,14 +15952,14 @@
                         <a:buNone/>
                       </a:pPr>
                       <a:r>
-                        <a:rPr lang="en-US" sz="1500" b="1" dirty="0">
+                        <a:rPr lang="en-US" sz="1800" b="1" dirty="0">
                           <a:solidFill>
                             <a:srgbClr val="FFFFFF"/>
                           </a:solidFill>
                         </a:rPr>
                         <a:t>Инфраструктура</a:t>
                       </a:r>
-                      <a:endParaRPr lang="en-US" sz="1500" dirty="0"/>
+                      <a:endParaRPr lang="en-US" sz="1800" dirty="0"/>
                     </a:p>
                   </a:txBody>
                   <a:tcPr marL="101600" marR="101600" marT="50800" marB="50800" anchor="ctr">
@@ -16421,14 +16013,14 @@
                         <a:buNone/>
                       </a:pPr>
                       <a:r>
-                        <a:rPr lang="en-US" sz="1500" dirty="0">
+                        <a:rPr lang="en-US" sz="1800" dirty="0">
                           <a:solidFill>
                             <a:srgbClr val="FFFFFF"/>
                           </a:solidFill>
                         </a:rPr>
                         <a:t>Docker Compose, Nginx</a:t>
                       </a:r>
-                      <a:endParaRPr lang="en-US" sz="1500" dirty="0"/>
+                      <a:endParaRPr lang="en-US" sz="1800" dirty="0"/>
                     </a:p>
                   </a:txBody>
                   <a:tcPr marL="101600" marR="101600" marT="50800" marB="50800" anchor="ctr">
@@ -16482,14 +16074,14 @@
                         <a:buNone/>
                       </a:pPr>
                       <a:r>
-                        <a:rPr lang="en-US" sz="1500" dirty="0">
+                        <a:rPr lang="en-US" sz="1800" dirty="0">
                           <a:solidFill>
                             <a:srgbClr val="FFFFFF"/>
                           </a:solidFill>
                         </a:rPr>
                         <a:t>PostgreSQL, Prometheus, Grafana</a:t>
                       </a:r>
-                      <a:endParaRPr lang="en-US" sz="1500" dirty="0"/>
+                      <a:endParaRPr lang="en-US" sz="1800" dirty="0"/>
                     </a:p>
                   </a:txBody>
                   <a:tcPr marL="101600" marR="101600" marT="50800" marB="50800" anchor="ctr">
@@ -16795,14 +16387,14 @@
               <a:buNone/>
             </a:pPr>
             <a:r>
-              <a:rPr lang="en-US" sz="1400" b="1" dirty="0">
+              <a:rPr lang="en-US" sz="1600" b="1" dirty="0">
                 <a:solidFill>
                   <a:srgbClr val="FFFFFF"/>
                 </a:solidFill>
               </a:rPr>
               <a:t>Пользователь</a:t>
             </a:r>
-            <a:endParaRPr lang="en-US" sz="1400" dirty="0"/>
+            <a:endParaRPr lang="en-US" sz="1600" dirty="0"/>
           </a:p>
         </p:txBody>
       </p:sp>
@@ -16896,28 +16488,28 @@
               <a:buNone/>
             </a:pPr>
             <a:r>
-              <a:rPr lang="en-US" sz="1400" b="1" dirty="0">
+              <a:rPr lang="en-US" sz="1600" b="1" dirty="0">
                 <a:solidFill>
                   <a:srgbClr val="FFFFFF"/>
                 </a:solidFill>
               </a:rPr>
               <a:t>Frontend</a:t>
             </a:r>
-            <a:endParaRPr lang="en-US" sz="1400" dirty="0"/>
+            <a:endParaRPr lang="en-US" sz="1600" dirty="0"/>
           </a:p>
           <a:p>
             <a:pPr marL="0" indent="0" algn="ctr">
               <a:buNone/>
             </a:pPr>
             <a:r>
-              <a:rPr lang="en-US" sz="1100" dirty="0">
+              <a:rPr lang="en-US" sz="1600" dirty="0">
                 <a:solidFill>
                   <a:srgbClr val="A9B4C0"/>
                 </a:solidFill>
               </a:rPr>
               <a:t>React + Vite · Nginx</a:t>
             </a:r>
-            <a:endParaRPr lang="en-US" sz="1400" dirty="0"/>
+            <a:endParaRPr lang="en-US" sz="1600" dirty="0"/>
           </a:p>
         </p:txBody>
       </p:sp>
@@ -16976,14 +16568,14 @@
               <a:buNone/>
             </a:pPr>
             <a:r>
-              <a:rPr lang="en-US" sz="1300" b="1" dirty="0">
+              <a:rPr lang="en-US" sz="1600" b="1" dirty="0">
                 <a:solidFill>
                   <a:srgbClr val="2FA6C9"/>
                 </a:solidFill>
               </a:rPr>
               <a:t>Backend — FastAPI (uvicorn, :8000)</a:t>
             </a:r>
-            <a:endParaRPr lang="en-US" sz="1300" dirty="0"/>
+            <a:endParaRPr lang="en-US" sz="1600" dirty="0"/>
           </a:p>
         </p:txBody>
       </p:sp>
@@ -17043,14 +16635,14 @@
               <a:buNone/>
             </a:pPr>
             <a:r>
-              <a:rPr lang="en-US" sz="1100" dirty="0">
+              <a:rPr lang="en-US" sz="1400" dirty="0">
                 <a:solidFill>
                   <a:srgbClr val="A9B4C0"/>
                 </a:solidFill>
               </a:rPr>
               <a:t>REST</a:t>
             </a:r>
-            <a:endParaRPr lang="en-US" sz="1100" dirty="0"/>
+            <a:endParaRPr lang="en-US" sz="1400" dirty="0"/>
           </a:p>
         </p:txBody>
       </p:sp>
@@ -17113,28 +16705,28 @@
               <a:buNone/>
             </a:pPr>
             <a:r>
-              <a:rPr lang="en-US" sz="1400" b="1" dirty="0">
+              <a:rPr lang="en-US" sz="1600" b="1" dirty="0">
                 <a:solidFill>
                   <a:srgbClr val="FFFFFF"/>
                 </a:solidFill>
               </a:rPr>
               <a:t>API-роутеры</a:t>
             </a:r>
-            <a:endParaRPr lang="en-US" sz="1400" dirty="0"/>
+            <a:endParaRPr lang="en-US" sz="1600" dirty="0"/>
           </a:p>
           <a:p>
             <a:pPr marL="0" indent="0" algn="ctr">
               <a:buNone/>
             </a:pPr>
             <a:r>
-              <a:rPr lang="en-US" sz="1100" dirty="0">
+              <a:rPr lang="en-US" sz="1600" dirty="0">
                 <a:solidFill>
                   <a:srgbClr val="A9B4C0"/>
                 </a:solidFill>
               </a:rPr>
               <a:t>/files · /ask · /trace · /schema · /cache · /metrics</a:t>
             </a:r>
-            <a:endParaRPr lang="en-US" sz="1400" dirty="0"/>
+            <a:endParaRPr lang="en-US" sz="1600" dirty="0"/>
           </a:p>
         </p:txBody>
       </p:sp>
@@ -17225,14 +16817,14 @@
               <a:buNone/>
             </a:pPr>
             <a:r>
-              <a:rPr lang="en-US" sz="1100" dirty="0">
+              <a:rPr lang="en-US" sz="1400" dirty="0">
                 <a:solidFill>
                   <a:srgbClr val="A9B4C0"/>
                 </a:solidFill>
               </a:rPr>
               <a:t>POST /files/upload</a:t>
             </a:r>
-            <a:endParaRPr lang="en-US" sz="1100" dirty="0"/>
+            <a:endParaRPr lang="en-US" sz="1400" dirty="0"/>
           </a:p>
         </p:txBody>
       </p:sp>
@@ -17261,14 +16853,14 @@
               <a:buNone/>
             </a:pPr>
             <a:r>
-              <a:rPr lang="en-US" sz="1100" dirty="0">
+              <a:rPr lang="en-US" sz="1400" dirty="0">
                 <a:solidFill>
                   <a:srgbClr val="A9B4C0"/>
                 </a:solidFill>
               </a:rPr>
               <a:t>POST /ask</a:t>
             </a:r>
-            <a:endParaRPr lang="en-US" sz="1100" dirty="0"/>
+            <a:endParaRPr lang="en-US" sz="1400" dirty="0"/>
           </a:p>
         </p:txBody>
       </p:sp>
@@ -17331,28 +16923,28 @@
               <a:buNone/>
             </a:pPr>
             <a:r>
-              <a:rPr lang="en-US" sz="1400" b="1" dirty="0">
+              <a:rPr lang="en-US" sz="1600" b="1" dirty="0">
                 <a:solidFill>
                   <a:srgbClr val="FFFFFF"/>
                 </a:solidFill>
               </a:rPr>
               <a:t>Excel Ingestion</a:t>
             </a:r>
-            <a:endParaRPr lang="en-US" sz="1400" dirty="0"/>
+            <a:endParaRPr lang="en-US" sz="1600" dirty="0"/>
           </a:p>
           <a:p>
             <a:pPr marL="0" indent="0" algn="ctr">
               <a:buNone/>
             </a:pPr>
             <a:r>
-              <a:rPr lang="en-US" sz="1100" dirty="0">
+              <a:rPr lang="en-US" sz="1600" dirty="0">
                 <a:solidFill>
                   <a:srgbClr val="A9B4C0"/>
                 </a:solidFill>
               </a:rPr>
               <a:t>Queue (async) → парсер → repository → mart-normalizer</a:t>
             </a:r>
-            <a:endParaRPr lang="en-US" sz="1400" dirty="0"/>
+            <a:endParaRPr lang="en-US" sz="1600" dirty="0"/>
           </a:p>
         </p:txBody>
       </p:sp>
@@ -17415,28 +17007,28 @@
               <a:buNone/>
             </a:pPr>
             <a:r>
-              <a:rPr lang="en-US" sz="1400" b="1" dirty="0">
+              <a:rPr lang="en-US" sz="1600" b="1" dirty="0">
                 <a:solidFill>
                   <a:srgbClr val="FFFFFF"/>
                 </a:solidFill>
               </a:rPr>
               <a:t>LangGraph-агент</a:t>
             </a:r>
-            <a:endParaRPr lang="en-US" sz="1400" dirty="0"/>
+            <a:endParaRPr lang="en-US" sz="1600" dirty="0"/>
           </a:p>
           <a:p>
             <a:pPr marL="0" indent="0" algn="ctr">
               <a:buNone/>
             </a:pPr>
             <a:r>
-              <a:rPr lang="en-US" sz="1100" dirty="0">
+              <a:rPr lang="en-US" sz="1600" dirty="0">
                 <a:solidFill>
                   <a:srgbClr val="A9B4C0"/>
                 </a:solidFill>
               </a:rPr>
               <a:t>classifier → … → answer · Entity Resolution · Query Cache</a:t>
             </a:r>
-            <a:endParaRPr lang="en-US" sz="1400" dirty="0"/>
+            <a:endParaRPr lang="en-US" sz="1600" dirty="0"/>
           </a:p>
         </p:txBody>
       </p:sp>
@@ -17448,8 +17040,8 @@
         </p:nvSpPr>
         <p:spPr>
           <a:xfrm>
-            <a:off x="9601200" y="2788920"/>
-            <a:ext cx="2039112" cy="685800"/>
+            <a:off x="9601200" y="2624669"/>
+            <a:ext cx="2039112" cy="1032931"/>
           </a:xfrm>
           <a:prstGeom prst="roundRect">
             <a:avLst>
@@ -17499,28 +17091,28 @@
               <a:buNone/>
             </a:pPr>
             <a:r>
-              <a:rPr lang="en-US" sz="1400" b="1" dirty="0">
+              <a:rPr lang="en-US" sz="1600" b="1" dirty="0">
                 <a:solidFill>
                   <a:srgbClr val="FFFFFF"/>
                 </a:solidFill>
               </a:rPr>
               <a:t>Мониторинг</a:t>
             </a:r>
-            <a:endParaRPr lang="en-US" sz="1400" dirty="0"/>
+            <a:endParaRPr lang="en-US" sz="1600" dirty="0"/>
           </a:p>
           <a:p>
             <a:pPr marL="0" indent="0" algn="ctr">
               <a:buNone/>
             </a:pPr>
             <a:r>
-              <a:rPr lang="en-US" sz="1100" dirty="0">
+              <a:rPr lang="en-US" sz="1600" dirty="0">
                 <a:solidFill>
                   <a:srgbClr val="A9B4C0"/>
                 </a:solidFill>
               </a:rPr>
               <a:t>Prometheus · Grafana</a:t>
             </a:r>
-            <a:endParaRPr lang="en-US" sz="1400" dirty="0"/>
+            <a:endParaRPr lang="en-US" sz="1600" dirty="0"/>
           </a:p>
         </p:txBody>
       </p:sp>
@@ -17614,28 +17206,28 @@
               <a:buNone/>
             </a:pPr>
             <a:r>
-              <a:rPr lang="en-US" sz="1400" b="1" dirty="0">
+              <a:rPr lang="en-US" sz="1600" b="1" dirty="0">
                 <a:solidFill>
                   <a:srgbClr val="FFFFFF"/>
                 </a:solidFill>
               </a:rPr>
               <a:t>LLM-провайдер</a:t>
             </a:r>
-            <a:endParaRPr lang="en-US" sz="1400" dirty="0"/>
+            <a:endParaRPr lang="en-US" sz="1600" dirty="0"/>
           </a:p>
           <a:p>
             <a:pPr marL="0" indent="0" algn="ctr">
               <a:buNone/>
             </a:pPr>
             <a:r>
-              <a:rPr lang="en-US" sz="1100" dirty="0">
+              <a:rPr lang="en-US" sz="1600" dirty="0">
                 <a:solidFill>
                   <a:srgbClr val="A9B4C0"/>
                 </a:solidFill>
               </a:rPr>
               <a:t>OpenAI-совместимый API · DeepSeek</a:t>
             </a:r>
-            <a:endParaRPr lang="en-US" sz="1400" dirty="0"/>
+            <a:endParaRPr lang="en-US" sz="1600" dirty="0"/>
           </a:p>
         </p:txBody>
       </p:sp>
@@ -17757,14 +17349,14 @@
               <a:buNone/>
             </a:pPr>
             <a:r>
-              <a:rPr lang="en-US" sz="1100" dirty="0">
+              <a:rPr lang="en-US" sz="1400" dirty="0">
                 <a:solidFill>
                   <a:srgbClr val="A9B4C0"/>
                 </a:solidFill>
               </a:rPr>
               <a:t>RAW + нормализация</a:t>
             </a:r>
-            <a:endParaRPr lang="en-US" sz="1100" dirty="0"/>
+            <a:endParaRPr lang="en-US" sz="1400" dirty="0"/>
           </a:p>
         </p:txBody>
       </p:sp>
@@ -17793,14 +17385,14 @@
               <a:buNone/>
             </a:pPr>
             <a:r>
-              <a:rPr lang="en-US" sz="1100" dirty="0">
+              <a:rPr lang="en-US" sz="1400" dirty="0">
                 <a:solidFill>
                   <a:srgbClr val="A9B4C0"/>
                 </a:solidFill>
               </a:rPr>
               <a:t>безопасный SELECT</a:t>
             </a:r>
-            <a:endParaRPr lang="en-US" sz="1100" dirty="0"/>
+            <a:endParaRPr lang="en-US" sz="1400" dirty="0"/>
           </a:p>
         </p:txBody>
       </p:sp>
@@ -17863,28 +17455,28 @@
               <a:buNone/>
             </a:pPr>
             <a:r>
-              <a:rPr lang="en-US" sz="1400" b="1" dirty="0">
+              <a:rPr lang="en-US" sz="1600" b="1" dirty="0">
                 <a:solidFill>
                   <a:srgbClr val="FFFFFF"/>
                 </a:solidFill>
               </a:rPr>
               <a:t>PostgreSQL 16</a:t>
             </a:r>
-            <a:endParaRPr lang="en-US" sz="1400" dirty="0"/>
+            <a:endParaRPr lang="en-US" sz="1600" dirty="0"/>
           </a:p>
           <a:p>
             <a:pPr marL="0" indent="0" algn="ctr">
               <a:buNone/>
             </a:pPr>
             <a:r>
-              <a:rPr lang="en-US" sz="1100" dirty="0">
+              <a:rPr lang="en-US" sz="1600" dirty="0">
                 <a:solidFill>
                   <a:srgbClr val="A9B4C0"/>
                 </a:solidFill>
               </a:rPr>
               <a:t>public: files, sheets, cells, query_logs … · mart: price_facts, metrics</a:t>
             </a:r>
-            <a:endParaRPr lang="en-US" sz="1400" dirty="0"/>
+            <a:endParaRPr lang="en-US" sz="1600" dirty="0"/>
           </a:p>
         </p:txBody>
       </p:sp>
@@ -18082,18 +17674,60 @@
       </p:sp>
       <p:sp>
         <p:nvSpPr>
-          <p:cNvPr id="102" name="Card"/>
+          <p:cNvPr id="111" name="Slide Number Placeholder 0"/>
+          <p:cNvSpPr>
+            <a:spLocks noGrp="1"/>
+          </p:cNvSpPr>
+          <p:nvPr>
+            <p:ph type="sldNum" sz="quarter" idx="4294967295"/>
+          </p:nvPr>
+        </p:nvSpPr>
+        <p:spPr>
+          <a:xfrm>
+            <a:off x="11155680" y="6400800"/>
+            <a:ext cx="502920" cy="274320"/>
+          </a:xfrm>
+          <a:prstGeom prst="rect">
+            <a:avLst/>
+          </a:prstGeom>
+          <a:extLst>
+            <a:ext uri="{C572A759-6A51-4108-AA02-DFA0A04FC94B}">
+              <ma14:wrappingTextBoxFlag xmlns="" xmlns:ma14="http://schemas.microsoft.com/office/mac/drawingml/2011/main" val="0"/>
+            </a:ext>
+          </a:extLst>
+        </p:spPr>
+        <p:txBody>
+          <a:bodyPr/>
+          <a:lstStyle>
+            <a:lvl1pPr>
+              <a:defRPr sz="1000">
+                <a:solidFill>
+                  <a:srgbClr val="A9B4C0"/>
+                </a:solidFill>
+              </a:defRPr>
+            </a:lvl1pPr>
+          </a:lstStyle>
+          <a:p>
+            <a:r>
+              <a:t>4</a:t>
+            </a:r>
+          </a:p>
+        </p:txBody>
+      </p:sp>
+      <p:sp>
+        <p:nvSpPr>
+          <p:cNvPr id="112" name="Rounded Rectangle 111"/>
           <p:cNvSpPr/>
           <p:nvPr/>
         </p:nvSpPr>
         <p:spPr>
           <a:xfrm>
             <a:off x="548640" y="1554480"/>
-            <a:ext cx="3566160" cy="4480560"/>
+            <a:ext cx="2569464" cy="4480560"/>
           </a:xfrm>
           <a:prstGeom prst="roundRect">
             <a:avLst>
-              <a:gd name="adj" fmla="val 2051"/>
+              <a:gd name="adj" fmla="val 20510"/>
             </a:avLst>
           </a:prstGeom>
           <a:solidFill>
@@ -18103,215 +17737,193 @@
             <a:solidFill>
               <a:srgbClr val="3A434D"/>
             </a:solidFill>
-            <a:prstDash val="solid"/>
           </a:ln>
-        </p:spPr>
-        <p:txBody>
-          <a:bodyPr/>
-          <a:lstStyle/>
-          <a:p>
+          <a:effectLst/>
+        </p:spPr>
+        <p:style>
+          <a:lnRef idx="1">
+            <a:schemeClr val="accent1"/>
+          </a:lnRef>
+          <a:fillRef idx="3">
+            <a:schemeClr val="accent1"/>
+          </a:fillRef>
+          <a:effectRef idx="2">
+            <a:schemeClr val="accent1"/>
+          </a:effectRef>
+          <a:fontRef idx="minor">
+            <a:schemeClr val="lt1"/>
+          </a:fontRef>
+        </p:style>
+        <p:txBody>
+          <a:bodyPr rtlCol="0" anchor="ctr"/>
+          <a:lstStyle/>
+          <a:p>
+            <a:pPr algn="ctr"/>
             <a:endParaRPr/>
           </a:p>
         </p:txBody>
       </p:sp>
       <p:sp>
         <p:nvSpPr>
-          <p:cNvPr id="103" name="Text 3"/>
+          <p:cNvPr id="113" name="TextBox 112"/>
           <p:cNvSpPr txBox="1"/>
           <p:nvPr/>
         </p:nvSpPr>
         <p:spPr>
           <a:xfrm>
-            <a:off x="822960" y="1737360"/>
-            <a:ext cx="3017520" cy="365760"/>
-          </a:xfrm>
-          <a:prstGeom prst="rect">
-            <a:avLst/>
-          </a:prstGeom>
-          <a:noFill/>
-          <a:ln/>
-        </p:spPr>
-        <p:txBody>
-          <a:bodyPr wrap="square" lIns="0" tIns="0" rIns="0" bIns="0" rtlCol="0" anchor="t"/>
-          <a:lstStyle/>
-          <a:p>
-            <a:pPr marL="0" indent="0">
-              <a:buNone/>
-            </a:pPr>
-            <a:r>
-              <a:rPr lang="en-US" sz="1800" b="1" dirty="0">
+            <a:off x="676656" y="1719072"/>
+            <a:ext cx="2313432" cy="502920"/>
+          </a:xfrm>
+          <a:prstGeom prst="rect">
+            <a:avLst/>
+          </a:prstGeom>
+          <a:noFill/>
+        </p:spPr>
+        <p:txBody>
+          <a:bodyPr wrap="square" lIns="0" tIns="0" rIns="0" bIns="0" anchor="t">
+            <a:spAutoFit/>
+          </a:bodyPr>
+          <a:lstStyle/>
+          <a:p>
+            <a:r>
+              <a:rPr sz="1600" b="1">
                 <a:solidFill>
                   <a:srgbClr val="FF5A36"/>
                 </a:solidFill>
+                <a:latin typeface="Calibri"/>
               </a:rPr>
               <a:t>Backend (Python ≥ 3.12)</a:t>
             </a:r>
-            <a:endParaRPr lang="en-US" sz="1800" dirty="0"/>
-          </a:p>
-        </p:txBody>
-      </p:sp>
-      <p:sp>
-        <p:nvSpPr>
-          <p:cNvPr id="104" name="Text 4"/>
+          </a:p>
+        </p:txBody>
+      </p:sp>
+      <p:sp>
+        <p:nvSpPr>
+          <p:cNvPr id="114" name="TextBox 113"/>
           <p:cNvSpPr txBox="1"/>
           <p:nvPr/>
         </p:nvSpPr>
         <p:spPr>
           <a:xfrm>
-            <a:off x="822960" y="2286000"/>
-            <a:ext cx="3063240" cy="3566160"/>
-          </a:xfrm>
-          <a:prstGeom prst="rect">
-            <a:avLst/>
-          </a:prstGeom>
-          <a:noFill/>
-          <a:ln/>
-        </p:spPr>
-        <p:txBody>
-          <a:bodyPr wrap="square" lIns="0" tIns="0" rIns="0" bIns="0" rtlCol="0" anchor="t"/>
+            <a:off x="676656" y="2240280"/>
+            <a:ext cx="2313432" cy="3566160"/>
+          </a:xfrm>
+          <a:prstGeom prst="rect">
+            <a:avLst/>
+          </a:prstGeom>
+          <a:noFill/>
+        </p:spPr>
+        <p:txBody>
+          <a:bodyPr wrap="square" lIns="0" tIns="0" rIns="0" bIns="0" anchor="t">
+            <a:spAutoFit/>
+          </a:bodyPr>
           <a:lstStyle/>
           <a:p>
             <a:pPr marL="342900" indent="-342900">
               <a:spcAft>
-                <a:spcPts val="600"/>
+                <a:spcPts val="500"/>
               </a:spcAft>
               <a:buSzPct val="100000"/>
               <a:buChar char="•"/>
             </a:pPr>
             <a:r>
-              <a:rPr lang="en-US" sz="1500" dirty="0">
+              <a:rPr sz="1400">
                 <a:solidFill>
                   <a:srgbClr val="FFFFFF"/>
                 </a:solidFill>
-              </a:rPr>
-              <a:t>FastAPI + uvicorn — REST API</a:t>
-            </a:r>
-            <a:endParaRPr lang="en-US" sz="1500" dirty="0"/>
+                <a:latin typeface="Calibri"/>
+              </a:rPr>
+              <a:t>FastAPI + uvicorn — REST API, async</a:t>
+            </a:r>
           </a:p>
           <a:p>
             <a:pPr marL="342900" indent="-342900">
               <a:spcAft>
-                <a:spcPts val="600"/>
+                <a:spcPts val="500"/>
               </a:spcAft>
               <a:buSzPct val="100000"/>
               <a:buChar char="•"/>
             </a:pPr>
             <a:r>
-              <a:rPr lang="en-US" sz="1500" dirty="0">
+              <a:rPr sz="1400">
                 <a:solidFill>
                   <a:srgbClr val="FFFFFF"/>
                 </a:solidFill>
-              </a:rPr>
-              <a:t>LangGraph + checkpoint-postgres</a:t>
-            </a:r>
-            <a:endParaRPr lang="en-US" sz="1500" dirty="0"/>
+                <a:latin typeface="Calibri"/>
+              </a:rPr>
+              <a:t>SQLAlchemy 2.0 (async) · Alembic</a:t>
+            </a:r>
           </a:p>
           <a:p>
             <a:pPr marL="342900" indent="-342900">
               <a:spcAft>
-                <a:spcPts val="600"/>
+                <a:spcPts val="500"/>
               </a:spcAft>
               <a:buSzPct val="100000"/>
               <a:buChar char="•"/>
             </a:pPr>
             <a:r>
-              <a:rPr lang="en-US" sz="1500" dirty="0">
+              <a:rPr sz="1400">
                 <a:solidFill>
                   <a:srgbClr val="FFFFFF"/>
                 </a:solidFill>
-              </a:rPr>
-              <a:t>langchain-openai — structured output</a:t>
-            </a:r>
-            <a:endParaRPr lang="en-US" sz="1500" dirty="0"/>
+                <a:latin typeface="Calibri"/>
+              </a:rPr>
+              <a:t>openpyxl · pandas — парсинг Excel</a:t>
+            </a:r>
           </a:p>
           <a:p>
             <a:pPr marL="342900" indent="-342900">
               <a:spcAft>
-                <a:spcPts val="600"/>
+                <a:spcPts val="500"/>
               </a:spcAft>
               <a:buSzPct val="100000"/>
               <a:buChar char="•"/>
             </a:pPr>
             <a:r>
-              <a:rPr lang="en-US" sz="1500" dirty="0">
+              <a:rPr sz="1400">
                 <a:solidFill>
                   <a:srgbClr val="FFFFFF"/>
                 </a:solidFill>
-              </a:rPr>
-              <a:t>SQLAlchemy 2.0 (async) + Alembic</a:t>
-            </a:r>
-            <a:endParaRPr lang="en-US" sz="1500" dirty="0"/>
+                <a:latin typeface="Calibri"/>
+              </a:rPr>
+              <a:t>loguru — логирование</a:t>
+            </a:r>
           </a:p>
           <a:p>
             <a:pPr marL="342900" indent="-342900">
               <a:spcAft>
-                <a:spcPts val="600"/>
+                <a:spcPts val="500"/>
               </a:spcAft>
               <a:buSzPct val="100000"/>
               <a:buChar char="•"/>
             </a:pPr>
             <a:r>
-              <a:rPr lang="en-US" sz="1500" dirty="0">
+              <a:rPr sz="1400">
                 <a:solidFill>
                   <a:srgbClr val="FFFFFF"/>
                 </a:solidFill>
-              </a:rPr>
-              <a:t>openpyxl, pandas — Excel</a:t>
-            </a:r>
-            <a:endParaRPr lang="en-US" sz="1500" dirty="0"/>
-          </a:p>
-          <a:p>
-            <a:pPr marL="342900" indent="-342900">
-              <a:spcAft>
-                <a:spcPts val="600"/>
-              </a:spcAft>
-              <a:buSzPct val="100000"/>
-              <a:buChar char="•"/>
-            </a:pPr>
-            <a:r>
-              <a:rPr lang="en-US" sz="1500" dirty="0">
-                <a:solidFill>
-                  <a:srgbClr val="FFFFFF"/>
-                </a:solidFill>
-              </a:rPr>
-              <a:t>rapidfuzz — fuzzy match</a:t>
-            </a:r>
-            <a:endParaRPr lang="en-US" sz="1500" dirty="0"/>
-          </a:p>
-          <a:p>
-            <a:pPr marL="342900" indent="-342900">
-              <a:spcAft>
-                <a:spcPts val="600"/>
-              </a:spcAft>
-              <a:buSzPct val="100000"/>
-              <a:buChar char="•"/>
-            </a:pPr>
-            <a:r>
-              <a:rPr lang="en-US" sz="1500" dirty="0">
-                <a:solidFill>
-                  <a:srgbClr val="FFFFFF"/>
-                </a:solidFill>
-              </a:rPr>
-              <a:t>loguru, prometheus-client, slowapi</a:t>
-            </a:r>
-            <a:endParaRPr lang="en-US" sz="1500" dirty="0"/>
-          </a:p>
-        </p:txBody>
-      </p:sp>
-      <p:sp>
-        <p:nvSpPr>
-          <p:cNvPr id="105" name="Card"/>
+                <a:latin typeface="Calibri"/>
+              </a:rPr>
+              <a:t>prometheus-client · slowapi — метрики и лимиты</a:t>
+            </a:r>
+          </a:p>
+        </p:txBody>
+      </p:sp>
+      <p:sp>
+        <p:nvSpPr>
+          <p:cNvPr id="115" name="Rounded Rectangle 114"/>
           <p:cNvSpPr/>
           <p:nvPr/>
         </p:nvSpPr>
         <p:spPr>
           <a:xfrm>
-            <a:off x="4297680" y="1554480"/>
-            <a:ext cx="3566160" cy="4480560"/>
+            <a:off x="3392424" y="1554480"/>
+            <a:ext cx="2569464" cy="4480560"/>
           </a:xfrm>
           <a:prstGeom prst="roundRect">
             <a:avLst>
-              <a:gd name="adj" fmla="val 2051"/>
+              <a:gd name="adj" fmla="val 20510"/>
             </a:avLst>
           </a:prstGeom>
           <a:solidFill>
@@ -18321,197 +17933,211 @@
             <a:solidFill>
               <a:srgbClr val="3A434D"/>
             </a:solidFill>
-            <a:prstDash val="solid"/>
           </a:ln>
-        </p:spPr>
-        <p:txBody>
-          <a:bodyPr/>
-          <a:lstStyle/>
-          <a:p>
+          <a:effectLst/>
+        </p:spPr>
+        <p:style>
+          <a:lnRef idx="1">
+            <a:schemeClr val="accent1"/>
+          </a:lnRef>
+          <a:fillRef idx="3">
+            <a:schemeClr val="accent1"/>
+          </a:fillRef>
+          <a:effectRef idx="2">
+            <a:schemeClr val="accent1"/>
+          </a:effectRef>
+          <a:fontRef idx="minor">
+            <a:schemeClr val="lt1"/>
+          </a:fontRef>
+        </p:style>
+        <p:txBody>
+          <a:bodyPr rtlCol="0" anchor="ctr"/>
+          <a:lstStyle/>
+          <a:p>
+            <a:pPr algn="ctr"/>
             <a:endParaRPr/>
           </a:p>
         </p:txBody>
       </p:sp>
       <p:sp>
         <p:nvSpPr>
-          <p:cNvPr id="106" name="Text 6"/>
+          <p:cNvPr id="116" name="TextBox 115"/>
           <p:cNvSpPr txBox="1"/>
           <p:nvPr/>
         </p:nvSpPr>
         <p:spPr>
           <a:xfrm>
-            <a:off x="4572000" y="1737360"/>
-            <a:ext cx="3017520" cy="365760"/>
-          </a:xfrm>
-          <a:prstGeom prst="rect">
-            <a:avLst/>
-          </a:prstGeom>
-          <a:noFill/>
-          <a:ln/>
-        </p:spPr>
-        <p:txBody>
-          <a:bodyPr wrap="square" lIns="0" tIns="0" rIns="0" bIns="0" rtlCol="0" anchor="t"/>
-          <a:lstStyle/>
-          <a:p>
-            <a:pPr marL="0" indent="0">
-              <a:buNone/>
-            </a:pPr>
-            <a:r>
-              <a:rPr lang="en-US" sz="1800" b="1" dirty="0">
+            <a:off x="3520440" y="1719072"/>
+            <a:ext cx="2313432" cy="502920"/>
+          </a:xfrm>
+          <a:prstGeom prst="rect">
+            <a:avLst/>
+          </a:prstGeom>
+          <a:noFill/>
+        </p:spPr>
+        <p:txBody>
+          <a:bodyPr wrap="square" lIns="0" tIns="0" rIns="0" bIns="0" anchor="t">
+            <a:spAutoFit/>
+          </a:bodyPr>
+          <a:lstStyle/>
+          <a:p>
+            <a:r>
+              <a:rPr sz="1600" b="1">
                 <a:solidFill>
                   <a:srgbClr val="FF5A36"/>
                 </a:solidFill>
-              </a:rPr>
-              <a:t>Frontend (React)</a:t>
-            </a:r>
-            <a:endParaRPr lang="en-US" sz="1800" dirty="0"/>
-          </a:p>
-        </p:txBody>
-      </p:sp>
-      <p:sp>
-        <p:nvSpPr>
-          <p:cNvPr id="107" name="Text 7"/>
+                <a:latin typeface="Calibri"/>
+              </a:rPr>
+              <a:t>LLM-стек</a:t>
+            </a:r>
+          </a:p>
+        </p:txBody>
+      </p:sp>
+      <p:sp>
+        <p:nvSpPr>
+          <p:cNvPr id="117" name="TextBox 116"/>
           <p:cNvSpPr txBox="1"/>
           <p:nvPr/>
         </p:nvSpPr>
         <p:spPr>
           <a:xfrm>
-            <a:off x="4572000" y="2286000"/>
-            <a:ext cx="3063240" cy="3566160"/>
-          </a:xfrm>
-          <a:prstGeom prst="rect">
-            <a:avLst/>
-          </a:prstGeom>
-          <a:noFill/>
-          <a:ln/>
-        </p:spPr>
-        <p:txBody>
-          <a:bodyPr wrap="square" lIns="0" tIns="0" rIns="0" bIns="0" rtlCol="0" anchor="t"/>
+            <a:off x="3520440" y="2240280"/>
+            <a:ext cx="2313432" cy="3566160"/>
+          </a:xfrm>
+          <a:prstGeom prst="rect">
+            <a:avLst/>
+          </a:prstGeom>
+          <a:noFill/>
+        </p:spPr>
+        <p:txBody>
+          <a:bodyPr wrap="square" lIns="0" tIns="0" rIns="0" bIns="0" anchor="t">
+            <a:spAutoFit/>
+          </a:bodyPr>
           <a:lstStyle/>
           <a:p>
             <a:pPr marL="342900" indent="-342900">
               <a:spcAft>
-                <a:spcPts val="600"/>
+                <a:spcPts val="500"/>
               </a:spcAft>
               <a:buSzPct val="100000"/>
               <a:buChar char="•"/>
             </a:pPr>
             <a:r>
-              <a:rPr lang="en-US" sz="1500" dirty="0">
+              <a:rPr sz="1400">
                 <a:solidFill>
                   <a:srgbClr val="FFFFFF"/>
                 </a:solidFill>
-              </a:rPr>
-              <a:t>React 18 + TypeScript + Vite</a:t>
-            </a:r>
-            <a:endParaRPr lang="en-US" sz="1500" dirty="0"/>
+                <a:latin typeface="Calibri"/>
+              </a:rPr>
+              <a:t>LangGraph + checkpoint-postgres</a:t>
+            </a:r>
           </a:p>
           <a:p>
             <a:pPr marL="342900" indent="-342900">
               <a:spcAft>
-                <a:spcPts val="600"/>
+                <a:spcPts val="500"/>
               </a:spcAft>
               <a:buSzPct val="100000"/>
               <a:buChar char="•"/>
             </a:pPr>
             <a:r>
-              <a:rPr lang="en-US" sz="1500" dirty="0">
+              <a:rPr sz="1400">
                 <a:solidFill>
                   <a:srgbClr val="FFFFFF"/>
                 </a:solidFill>
-              </a:rPr>
-              <a:t>react-router-dom — роутинг</a:t>
-            </a:r>
-            <a:endParaRPr lang="en-US" sz="1500" dirty="0"/>
+                <a:latin typeface="Calibri"/>
+              </a:rPr>
+              <a:t>langchain-openai — structured output</a:t>
+            </a:r>
           </a:p>
           <a:p>
             <a:pPr marL="342900" indent="-342900">
               <a:spcAft>
-                <a:spcPts val="600"/>
+                <a:spcPts val="500"/>
               </a:spcAft>
               <a:buSzPct val="100000"/>
               <a:buChar char="•"/>
             </a:pPr>
             <a:r>
-              <a:rPr lang="en-US" sz="1500" dirty="0">
+              <a:rPr sz="1400">
                 <a:solidFill>
                   <a:srgbClr val="FFFFFF"/>
                 </a:solidFill>
-              </a:rPr>
-              <a:t>chart.js — графики результатов</a:t>
-            </a:r>
-            <a:endParaRPr lang="en-US" sz="1500" dirty="0"/>
+                <a:latin typeface="Calibri"/>
+              </a:rPr>
+              <a:t>Провайдер: OpenAI-совместимый API · DeepSeek</a:t>
+            </a:r>
           </a:p>
           <a:p>
             <a:pPr marL="342900" indent="-342900">
               <a:spcAft>
-                <a:spcPts val="600"/>
+                <a:spcPts val="500"/>
               </a:spcAft>
               <a:buSzPct val="100000"/>
               <a:buChar char="•"/>
             </a:pPr>
             <a:r>
-              <a:rPr lang="en-US" sz="1500" dirty="0">
+              <a:rPr sz="1400">
                 <a:solidFill>
                   <a:srgbClr val="FFFFFF"/>
                 </a:solidFill>
-              </a:rPr>
-              <a:t>framer-motion — анимации</a:t>
-            </a:r>
-            <a:endParaRPr lang="en-US" sz="1500" dirty="0"/>
+                <a:latin typeface="Calibri"/>
+              </a:rPr>
+              <a:t>Pydantic: Plan · SQLStep · SheetSchema</a:t>
+            </a:r>
           </a:p>
           <a:p>
             <a:pPr marL="342900" indent="-342900">
               <a:spcAft>
-                <a:spcPts val="600"/>
+                <a:spcPts val="500"/>
               </a:spcAft>
               <a:buSzPct val="100000"/>
               <a:buChar char="•"/>
             </a:pPr>
             <a:r>
-              <a:rPr lang="en-US" sz="1500" dirty="0">
+              <a:rPr sz="1400">
                 <a:solidFill>
                   <a:srgbClr val="FFFFFF"/>
                 </a:solidFill>
-              </a:rPr>
-              <a:t>lucide-react — иконки</a:t>
-            </a:r>
-            <a:endParaRPr lang="en-US" sz="1500" dirty="0"/>
+                <a:latin typeface="Calibri"/>
+              </a:rPr>
+              <a:t>Верификатор — самопроверка (до 3 попыток)</a:t>
+            </a:r>
           </a:p>
           <a:p>
             <a:pPr marL="342900" indent="-342900">
               <a:spcAft>
-                <a:spcPts val="600"/>
+                <a:spcPts val="500"/>
               </a:spcAft>
               <a:buSzPct val="100000"/>
               <a:buChar char="•"/>
             </a:pPr>
             <a:r>
-              <a:rPr lang="en-US" sz="1500" dirty="0">
+              <a:rPr sz="1400">
                 <a:solidFill>
                   <a:srgbClr val="FFFFFF"/>
                 </a:solidFill>
-              </a:rPr>
-              <a:t>react-markdown — рендер ответов</a:t>
-            </a:r>
-            <a:endParaRPr lang="en-US" sz="1500" dirty="0"/>
-          </a:p>
-        </p:txBody>
-      </p:sp>
-      <p:sp>
-        <p:nvSpPr>
-          <p:cNvPr id="108" name="Card"/>
+                <a:latin typeface="Calibri"/>
+              </a:rPr>
+              <a:t>Entity Resolution · кэш ответов</a:t>
+            </a:r>
+          </a:p>
+        </p:txBody>
+      </p:sp>
+      <p:sp>
+        <p:nvSpPr>
+          <p:cNvPr id="118" name="Rounded Rectangle 117"/>
           <p:cNvSpPr/>
           <p:nvPr/>
         </p:nvSpPr>
         <p:spPr>
           <a:xfrm>
-            <a:off x="8046720" y="1554480"/>
-            <a:ext cx="3566160" cy="4480560"/>
+            <a:off x="6236207" y="1554480"/>
+            <a:ext cx="2569464" cy="4480560"/>
           </a:xfrm>
           <a:prstGeom prst="roundRect">
             <a:avLst>
-              <a:gd name="adj" fmla="val 2051"/>
+              <a:gd name="adj" fmla="val 20510"/>
             </a:avLst>
           </a:prstGeom>
           <a:solidFill>
@@ -18521,203 +18147,389 @@
             <a:solidFill>
               <a:srgbClr val="3A434D"/>
             </a:solidFill>
-            <a:prstDash val="solid"/>
           </a:ln>
-        </p:spPr>
-        <p:txBody>
-          <a:bodyPr/>
-          <a:lstStyle/>
-          <a:p>
+          <a:effectLst/>
+        </p:spPr>
+        <p:style>
+          <a:lnRef idx="1">
+            <a:schemeClr val="accent1"/>
+          </a:lnRef>
+          <a:fillRef idx="3">
+            <a:schemeClr val="accent1"/>
+          </a:fillRef>
+          <a:effectRef idx="2">
+            <a:schemeClr val="accent1"/>
+          </a:effectRef>
+          <a:fontRef idx="minor">
+            <a:schemeClr val="lt1"/>
+          </a:fontRef>
+        </p:style>
+        <p:txBody>
+          <a:bodyPr rtlCol="0" anchor="ctr"/>
+          <a:lstStyle/>
+          <a:p>
+            <a:pPr algn="ctr"/>
             <a:endParaRPr/>
           </a:p>
         </p:txBody>
       </p:sp>
       <p:sp>
         <p:nvSpPr>
-          <p:cNvPr id="109" name="Text 9"/>
+          <p:cNvPr id="119" name="TextBox 118"/>
           <p:cNvSpPr txBox="1"/>
           <p:nvPr/>
         </p:nvSpPr>
         <p:spPr>
           <a:xfrm>
-            <a:off x="8321040" y="1737360"/>
-            <a:ext cx="3017520" cy="365760"/>
-          </a:xfrm>
-          <a:prstGeom prst="rect">
-            <a:avLst/>
-          </a:prstGeom>
-          <a:noFill/>
-          <a:ln/>
-        </p:spPr>
-        <p:txBody>
-          <a:bodyPr wrap="square" lIns="0" tIns="0" rIns="0" bIns="0" rtlCol="0" anchor="t"/>
-          <a:lstStyle/>
-          <a:p>
-            <a:pPr marL="0" indent="0">
-              <a:buNone/>
-            </a:pPr>
-            <a:r>
-              <a:rPr lang="en-US" sz="1800" b="1" dirty="0">
+            <a:off x="6364223" y="1719072"/>
+            <a:ext cx="2313432" cy="502920"/>
+          </a:xfrm>
+          <a:prstGeom prst="rect">
+            <a:avLst/>
+          </a:prstGeom>
+          <a:noFill/>
+        </p:spPr>
+        <p:txBody>
+          <a:bodyPr wrap="square" lIns="0" tIns="0" rIns="0" bIns="0" anchor="t">
+            <a:spAutoFit/>
+          </a:bodyPr>
+          <a:lstStyle/>
+          <a:p>
+            <a:r>
+              <a:rPr sz="1600" b="1">
                 <a:solidFill>
                   <a:srgbClr val="FF5A36"/>
                 </a:solidFill>
-              </a:rPr>
-              <a:t>Инфраструктура (Docker)</a:t>
-            </a:r>
-            <a:endParaRPr lang="en-US" sz="1800" dirty="0"/>
-          </a:p>
-        </p:txBody>
-      </p:sp>
-      <p:sp>
-        <p:nvSpPr>
-          <p:cNvPr id="110" name="Text 10"/>
+                <a:latin typeface="Calibri"/>
+              </a:rPr>
+              <a:t>Frontend (React)</a:t>
+            </a:r>
+          </a:p>
+        </p:txBody>
+      </p:sp>
+      <p:sp>
+        <p:nvSpPr>
+          <p:cNvPr id="120" name="TextBox 119"/>
           <p:cNvSpPr txBox="1"/>
           <p:nvPr/>
         </p:nvSpPr>
         <p:spPr>
           <a:xfrm>
-            <a:off x="8321040" y="2286000"/>
-            <a:ext cx="3063240" cy="3566160"/>
-          </a:xfrm>
-          <a:prstGeom prst="rect">
-            <a:avLst/>
-          </a:prstGeom>
-          <a:noFill/>
-          <a:ln/>
-        </p:spPr>
-        <p:txBody>
-          <a:bodyPr wrap="square" lIns="0" tIns="0" rIns="0" bIns="0" rtlCol="0" anchor="t"/>
+            <a:off x="6364223" y="2240280"/>
+            <a:ext cx="2313432" cy="3566160"/>
+          </a:xfrm>
+          <a:prstGeom prst="rect">
+            <a:avLst/>
+          </a:prstGeom>
+          <a:noFill/>
+        </p:spPr>
+        <p:txBody>
+          <a:bodyPr wrap="square" lIns="0" tIns="0" rIns="0" bIns="0" anchor="t">
+            <a:spAutoFit/>
+          </a:bodyPr>
           <a:lstStyle/>
           <a:p>
             <a:pPr marL="342900" indent="-342900">
               <a:spcAft>
-                <a:spcPts val="600"/>
+                <a:spcPts val="500"/>
               </a:spcAft>
               <a:buSzPct val="100000"/>
               <a:buChar char="•"/>
             </a:pPr>
             <a:r>
-              <a:rPr lang="en-US" sz="1500" dirty="0">
+              <a:rPr sz="1400">
                 <a:solidFill>
                   <a:srgbClr val="FFFFFF"/>
                 </a:solidFill>
-              </a:rPr>
-              <a:t>postgres:16-alpine — БД</a:t>
-            </a:r>
-            <a:endParaRPr lang="en-US" sz="1500" dirty="0"/>
+                <a:latin typeface="Calibri"/>
+              </a:rPr>
+              <a:t>React 18 + TypeScript + Vite</a:t>
+            </a:r>
           </a:p>
           <a:p>
             <a:pPr marL="342900" indent="-342900">
               <a:spcAft>
-                <a:spcPts val="600"/>
+                <a:spcPts val="500"/>
               </a:spcAft>
               <a:buSzPct val="100000"/>
               <a:buChar char="•"/>
             </a:pPr>
             <a:r>
-              <a:rPr lang="en-US" sz="1500" dirty="0">
+              <a:rPr sz="1400">
                 <a:solidFill>
                   <a:srgbClr val="FFFFFF"/>
                 </a:solidFill>
-              </a:rPr>
-              <a:t>service — FastAPI (:8000)</a:t>
-            </a:r>
-            <a:endParaRPr lang="en-US" sz="1500" dirty="0"/>
+                <a:latin typeface="Calibri"/>
+              </a:rPr>
+              <a:t>react-router-dom — роутинг</a:t>
+            </a:r>
           </a:p>
           <a:p>
             <a:pPr marL="342900" indent="-342900">
               <a:spcAft>
-                <a:spcPts val="600"/>
+                <a:spcPts val="500"/>
               </a:spcAft>
               <a:buSzPct val="100000"/>
               <a:buChar char="•"/>
             </a:pPr>
             <a:r>
-              <a:rPr lang="en-US" sz="1500" dirty="0">
+              <a:rPr sz="1400">
                 <a:solidFill>
                   <a:srgbClr val="FFFFFF"/>
                 </a:solidFill>
-              </a:rPr>
-              <a:t>frontend — Nginx (:8080)</a:t>
-            </a:r>
-            <a:endParaRPr lang="en-US" sz="1500" dirty="0"/>
+                <a:latin typeface="Calibri"/>
+              </a:rPr>
+              <a:t>chart.js — графики результатов</a:t>
+            </a:r>
           </a:p>
           <a:p>
             <a:pPr marL="342900" indent="-342900">
               <a:spcAft>
-                <a:spcPts val="600"/>
+                <a:spcPts val="500"/>
               </a:spcAft>
               <a:buSzPct val="100000"/>
               <a:buChar char="•"/>
             </a:pPr>
             <a:r>
-              <a:rPr lang="en-US" sz="1500" dirty="0">
+              <a:rPr sz="1400">
                 <a:solidFill>
                   <a:srgbClr val="FFFFFF"/>
                 </a:solidFill>
-              </a:rPr>
-              <a:t>prometheus — метрики (:9090)</a:t>
-            </a:r>
-            <a:endParaRPr lang="en-US" sz="1500" dirty="0"/>
+                <a:latin typeface="Calibri"/>
+              </a:rPr>
+              <a:t>framer-motion — анимации</a:t>
+            </a:r>
           </a:p>
           <a:p>
             <a:pPr marL="342900" indent="-342900">
               <a:spcAft>
-                <a:spcPts val="600"/>
+                <a:spcPts val="500"/>
               </a:spcAft>
               <a:buSzPct val="100000"/>
               <a:buChar char="•"/>
             </a:pPr>
             <a:r>
-              <a:rPr lang="en-US" sz="1500" dirty="0">
+              <a:rPr sz="1400">
                 <a:solidFill>
                   <a:srgbClr val="FFFFFF"/>
                 </a:solidFill>
+                <a:latin typeface="Calibri"/>
+              </a:rPr>
+              <a:t>lucide-react — иконки</a:t>
+            </a:r>
+          </a:p>
+          <a:p>
+            <a:pPr marL="342900" indent="-342900">
+              <a:spcAft>
+                <a:spcPts val="500"/>
+              </a:spcAft>
+              <a:buSzPct val="100000"/>
+              <a:buChar char="•"/>
+            </a:pPr>
+            <a:r>
+              <a:rPr sz="1400">
+                <a:solidFill>
+                  <a:srgbClr val="FFFFFF"/>
+                </a:solidFill>
+                <a:latin typeface="Calibri"/>
+              </a:rPr>
+              <a:t>react-markdown — рендер ответов</a:t>
+            </a:r>
+          </a:p>
+        </p:txBody>
+      </p:sp>
+      <p:sp>
+        <p:nvSpPr>
+          <p:cNvPr id="121" name="Rounded Rectangle 120"/>
+          <p:cNvSpPr/>
+          <p:nvPr/>
+        </p:nvSpPr>
+        <p:spPr>
+          <a:xfrm>
+            <a:off x="9079992" y="1554480"/>
+            <a:ext cx="2569464" cy="4480560"/>
+          </a:xfrm>
+          <a:prstGeom prst="roundRect">
+            <a:avLst>
+              <a:gd name="adj" fmla="val 20510"/>
+            </a:avLst>
+          </a:prstGeom>
+          <a:solidFill>
+            <a:srgbClr val="262C33"/>
+          </a:solidFill>
+          <a:ln w="12700">
+            <a:solidFill>
+              <a:srgbClr val="3A434D"/>
+            </a:solidFill>
+          </a:ln>
+          <a:effectLst/>
+        </p:spPr>
+        <p:style>
+          <a:lnRef idx="1">
+            <a:schemeClr val="accent1"/>
+          </a:lnRef>
+          <a:fillRef idx="3">
+            <a:schemeClr val="accent1"/>
+          </a:fillRef>
+          <a:effectRef idx="2">
+            <a:schemeClr val="accent1"/>
+          </a:effectRef>
+          <a:fontRef idx="minor">
+            <a:schemeClr val="lt1"/>
+          </a:fontRef>
+        </p:style>
+        <p:txBody>
+          <a:bodyPr rtlCol="0" anchor="ctr"/>
+          <a:lstStyle/>
+          <a:p>
+            <a:pPr algn="ctr"/>
+            <a:endParaRPr/>
+          </a:p>
+        </p:txBody>
+      </p:sp>
+      <p:sp>
+        <p:nvSpPr>
+          <p:cNvPr id="122" name="TextBox 121"/>
+          <p:cNvSpPr txBox="1"/>
+          <p:nvPr/>
+        </p:nvSpPr>
+        <p:spPr>
+          <a:xfrm>
+            <a:off x="9208008" y="1719072"/>
+            <a:ext cx="2313432" cy="502920"/>
+          </a:xfrm>
+          <a:prstGeom prst="rect">
+            <a:avLst/>
+          </a:prstGeom>
+          <a:noFill/>
+        </p:spPr>
+        <p:txBody>
+          <a:bodyPr wrap="square" lIns="0" tIns="0" rIns="0" bIns="0" anchor="t">
+            <a:spAutoFit/>
+          </a:bodyPr>
+          <a:lstStyle/>
+          <a:p>
+            <a:r>
+              <a:rPr sz="1600" b="1">
+                <a:solidFill>
+                  <a:srgbClr val="FF5A36"/>
+                </a:solidFill>
+                <a:latin typeface="Calibri"/>
+              </a:rPr>
+              <a:t>Инфраструктура (Docker)</a:t>
+            </a:r>
+          </a:p>
+        </p:txBody>
+      </p:sp>
+      <p:sp>
+        <p:nvSpPr>
+          <p:cNvPr id="123" name="TextBox 122"/>
+          <p:cNvSpPr txBox="1"/>
+          <p:nvPr/>
+        </p:nvSpPr>
+        <p:spPr>
+          <a:xfrm>
+            <a:off x="9208008" y="2240280"/>
+            <a:ext cx="2313432" cy="3566160"/>
+          </a:xfrm>
+          <a:prstGeom prst="rect">
+            <a:avLst/>
+          </a:prstGeom>
+          <a:noFill/>
+        </p:spPr>
+        <p:txBody>
+          <a:bodyPr wrap="square" lIns="0" tIns="0" rIns="0" bIns="0" anchor="t">
+            <a:spAutoFit/>
+          </a:bodyPr>
+          <a:lstStyle/>
+          <a:p>
+            <a:pPr marL="342900" indent="-342900">
+              <a:spcAft>
+                <a:spcPts val="500"/>
+              </a:spcAft>
+              <a:buSzPct val="100000"/>
+              <a:buChar char="•"/>
+            </a:pPr>
+            <a:r>
+              <a:rPr sz="1400">
+                <a:solidFill>
+                  <a:srgbClr val="FFFFFF"/>
+                </a:solidFill>
+                <a:latin typeface="Calibri"/>
+              </a:rPr>
+              <a:t>postgres:16-alpine — БД</a:t>
+            </a:r>
+          </a:p>
+          <a:p>
+            <a:pPr marL="342900" indent="-342900">
+              <a:spcAft>
+                <a:spcPts val="500"/>
+              </a:spcAft>
+              <a:buSzPct val="100000"/>
+              <a:buChar char="•"/>
+            </a:pPr>
+            <a:r>
+              <a:rPr sz="1400">
+                <a:solidFill>
+                  <a:srgbClr val="FFFFFF"/>
+                </a:solidFill>
+                <a:latin typeface="Calibri"/>
+              </a:rPr>
+              <a:t>backend — FastAPI (:8000)</a:t>
+            </a:r>
+          </a:p>
+          <a:p>
+            <a:pPr marL="342900" indent="-342900">
+              <a:spcAft>
+                <a:spcPts val="500"/>
+              </a:spcAft>
+              <a:buSzPct val="100000"/>
+              <a:buChar char="•"/>
+            </a:pPr>
+            <a:r>
+              <a:rPr sz="1400">
+                <a:solidFill>
+                  <a:srgbClr val="FFFFFF"/>
+                </a:solidFill>
+                <a:latin typeface="Calibri"/>
+              </a:rPr>
+              <a:t>frontend — Nginx (:8080)</a:t>
+            </a:r>
+          </a:p>
+          <a:p>
+            <a:pPr marL="342900" indent="-342900">
+              <a:spcAft>
+                <a:spcPts val="500"/>
+              </a:spcAft>
+              <a:buSzPct val="100000"/>
+              <a:buChar char="•"/>
+            </a:pPr>
+            <a:r>
+              <a:rPr sz="1400">
+                <a:solidFill>
+                  <a:srgbClr val="FFFFFF"/>
+                </a:solidFill>
+                <a:latin typeface="Calibri"/>
+              </a:rPr>
+              <a:t>prometheus — метрики (:9090)</a:t>
+            </a:r>
+          </a:p>
+          <a:p>
+            <a:pPr marL="342900" indent="-342900">
+              <a:spcAft>
+                <a:spcPts val="500"/>
+              </a:spcAft>
+              <a:buSzPct val="100000"/>
+              <a:buChar char="•"/>
+            </a:pPr>
+            <a:r>
+              <a:rPr sz="1400">
+                <a:solidFill>
+                  <a:srgbClr val="FFFFFF"/>
+                </a:solidFill>
+                <a:latin typeface="Calibri"/>
               </a:rPr>
               <a:t>grafana — дашборды (:3001)</a:t>
-            </a:r>
-            <a:endParaRPr lang="en-US" sz="1500" dirty="0"/>
-          </a:p>
-        </p:txBody>
-      </p:sp>
-      <p:sp>
-        <p:nvSpPr>
-          <p:cNvPr id="111" name="Slide Number Placeholder 0"/>
-          <p:cNvSpPr>
-            <a:spLocks noGrp="1"/>
-          </p:cNvSpPr>
-          <p:nvPr>
-            <p:ph type="sldNum" sz="quarter" idx="4294967295"/>
-          </p:nvPr>
-        </p:nvSpPr>
-        <p:spPr>
-          <a:xfrm>
-            <a:off x="11155680" y="6400800"/>
-            <a:ext cx="502920" cy="274320"/>
-          </a:xfrm>
-          <a:prstGeom prst="rect">
-            <a:avLst/>
-          </a:prstGeom>
-          <a:extLst>
-            <a:ext uri="{C572A759-6A51-4108-AA02-DFA0A04FC94B}">
-              <ma14:wrappingTextBoxFlag xmlns="" xmlns:ma14="http://schemas.microsoft.com/office/mac/drawingml/2011/main" val="0"/>
-            </a:ext>
-          </a:extLst>
-        </p:spPr>
-        <p:txBody>
-          <a:bodyPr/>
-          <a:lstStyle>
-            <a:lvl1pPr>
-              <a:defRPr sz="1000">
-                <a:solidFill>
-                  <a:srgbClr val="A9B4C0"/>
-                </a:solidFill>
-              </a:defRPr>
-            </a:lvl1pPr>
-          </a:lstStyle>
-          <a:p>
-            <a:r>
-              <a:t>4</a:t>
             </a:r>
           </a:p>
         </p:txBody>
@@ -18943,7 +18755,7 @@
               </a:lnSpc>
             </a:pPr>
             <a:r>
-              <a:rPr sz="1000" b="0" i="0">
+              <a:rPr sz="1000" b="0" i="0" dirty="0">
                 <a:solidFill>
                   <a:srgbClr val="8A97A6"/>
                 </a:solidFill>
@@ -18991,7 +18803,7 @@
         <p:spPr>
           <a:xfrm>
             <a:off x="548640" y="1572768"/>
-            <a:ext cx="11064240" cy="274320"/>
+            <a:ext cx="11064240" cy="246221"/>
           </a:xfrm>
           <a:prstGeom prst="rect">
             <a:avLst/>
@@ -19006,30 +18818,63 @@
           <a:p>
             <a:pPr algn="l"/>
             <a:r>
-              <a:rPr sz="1150" b="0">
+              <a:rPr sz="1600" b="0">
+                <a:latin typeface="Calibri"/>
+              </a:rPr>
+              <a:t>Каждый файл проходит путь от загрузки до витрины mart: парсинг → RAW → нормализация по единым справочникам.</a:t>
+            </a:r>
+          </a:p>
+        </p:txBody>
+      </p:sp>
+      <p:sp>
+        <p:nvSpPr>
+          <p:cNvPr id="57" name="TextBox 56"/>
+          <p:cNvSpPr txBox="1"/>
+          <p:nvPr/>
+        </p:nvSpPr>
+        <p:spPr>
+          <a:xfrm>
+            <a:off x="548640" y="5806440"/>
+            <a:ext cx="11064240" cy="365760"/>
+          </a:xfrm>
+          <a:prstGeom prst="rect">
+            <a:avLst/>
+          </a:prstGeom>
+          <a:noFill/>
+        </p:spPr>
+        <p:txBody>
+          <a:bodyPr wrap="square" lIns="0" tIns="0" rIns="0" bIns="0" anchor="t">
+            <a:spAutoFit/>
+          </a:bodyPr>
+          <a:lstStyle/>
+          <a:p>
+            <a:pPr algn="l"/>
+            <a:r>
+              <a:rPr sz="1150">
                 <a:solidFill>
                   <a:srgbClr val="A9B4C0"/>
                 </a:solidFill>
-              </a:rPr>
-              <a:t>Каждый файл проходит путь от загрузки до готовой витрины mart — с распознаванием формата и едиными справочниками.</a:t>
-            </a:r>
-          </a:p>
-        </p:txBody>
-      </p:sp>
-      <p:sp>
-        <p:nvSpPr>
-          <p:cNvPr id="9" name="Rounded Rectangle 8"/>
+                <a:latin typeface="Calibri"/>
+              </a:rPr>
+              <a:t>Исходные Excel не изменяются (только чтение) · единые названия поставщиков и материалов · витрина готова для вопросов и графиков</a:t>
+            </a:r>
+          </a:p>
+        </p:txBody>
+      </p:sp>
+      <p:sp>
+        <p:nvSpPr>
+          <p:cNvPr id="58" name="Rounded Rectangle 57"/>
           <p:cNvSpPr/>
           <p:nvPr/>
         </p:nvSpPr>
         <p:spPr>
           <a:xfrm>
-            <a:off x="548640" y="1901952"/>
-            <a:ext cx="1993392" cy="1371600"/>
+            <a:off x="548640" y="1755648"/>
+            <a:ext cx="2103120" cy="868680"/>
           </a:xfrm>
           <a:prstGeom prst="roundRect">
             <a:avLst>
-              <a:gd name="adj" fmla="val 5500"/>
+              <a:gd name="adj" fmla="val 70000"/>
             </a:avLst>
           </a:prstGeom>
           <a:solidFill>
@@ -19037,7 +18882,7 @@
           </a:solidFill>
           <a:ln w="12700">
             <a:solidFill>
-              <a:srgbClr val="3D4A57"/>
+              <a:srgbClr val="3A434D"/>
             </a:solidFill>
           </a:ln>
           <a:effectLst/>
@@ -19067,23 +18912,100 @@
       </p:sp>
       <p:sp>
         <p:nvSpPr>
-          <p:cNvPr id="10" name="Rectangle 9"/>
+          <p:cNvPr id="59" name="TextBox 58"/>
+          <p:cNvSpPr txBox="1"/>
+          <p:nvPr/>
+        </p:nvSpPr>
+        <p:spPr>
+          <a:xfrm>
+            <a:off x="640080" y="1847088"/>
+            <a:ext cx="1920239" cy="365760"/>
+          </a:xfrm>
+          <a:prstGeom prst="rect">
+            <a:avLst/>
+          </a:prstGeom>
+          <a:noFill/>
+        </p:spPr>
+        <p:txBody>
+          <a:bodyPr wrap="square" lIns="0" tIns="0" rIns="0" bIns="0" anchor="t">
+            <a:spAutoFit/>
+          </a:bodyPr>
+          <a:lstStyle/>
+          <a:p>
+            <a:r>
+              <a:rPr sz="1400" b="1">
+                <a:solidFill>
+                  <a:srgbClr val="FFFFFF"/>
+                </a:solidFill>
+                <a:latin typeface="Calibri"/>
+              </a:rPr>
+              <a:t>Excel-файл</a:t>
+            </a:r>
+          </a:p>
+        </p:txBody>
+      </p:sp>
+      <p:sp>
+        <p:nvSpPr>
+          <p:cNvPr id="60" name="TextBox 59"/>
+          <p:cNvSpPr txBox="1"/>
+          <p:nvPr/>
+        </p:nvSpPr>
+        <p:spPr>
+          <a:xfrm>
+            <a:off x="640080" y="2212848"/>
+            <a:ext cx="1920239" cy="338328"/>
+          </a:xfrm>
+          <a:prstGeom prst="rect">
+            <a:avLst/>
+          </a:prstGeom>
+          <a:noFill/>
+        </p:spPr>
+        <p:txBody>
+          <a:bodyPr wrap="square" lIns="0" tIns="0" rIns="0" bIns="0" anchor="t">
+            <a:spAutoFit/>
+          </a:bodyPr>
+          <a:lstStyle/>
+          <a:p>
+            <a:pPr>
+              <a:lnSpc>
+                <a:spcPct val="105000"/>
+              </a:lnSpc>
+            </a:pPr>
+            <a:r>
+              <a:rPr sz="1050">
+                <a:solidFill>
+                  <a:srgbClr val="A9B4C0"/>
+                </a:solidFill>
+                <a:latin typeface="Calibri"/>
+              </a:rPr>
+              <a:t>.xlsx / .xls · до 50 МБ · только чтение</a:t>
+            </a:r>
+          </a:p>
+        </p:txBody>
+      </p:sp>
+      <p:sp>
+        <p:nvSpPr>
+          <p:cNvPr id="61" name="Rounded Rectangle 60"/>
           <p:cNvSpPr/>
           <p:nvPr/>
         </p:nvSpPr>
         <p:spPr>
           <a:xfrm>
-            <a:off x="548640" y="1901952"/>
-            <a:ext cx="1993392" cy="64008"/>
-          </a:xfrm>
-          <a:prstGeom prst="rect">
-            <a:avLst/>
+            <a:off x="3017520" y="1755648"/>
+            <a:ext cx="2103120" cy="868680"/>
+          </a:xfrm>
+          <a:prstGeom prst="roundRect">
+            <a:avLst>
+              <a:gd name="adj" fmla="val 70000"/>
+            </a:avLst>
           </a:prstGeom>
           <a:solidFill>
-            <a:srgbClr val="2FA6C9"/>
+            <a:srgbClr val="262C33"/>
           </a:solidFill>
-          <a:ln>
-            <a:noFill/>
+          <a:ln w="12700">
+            <a:solidFill>
+              <a:srgbClr val="3A434D"/>
+            </a:solidFill>
           </a:ln>
           <a:effectLst/>
         </p:spPr>
@@ -19112,14 +19034,14 @@
       </p:sp>
       <p:sp>
         <p:nvSpPr>
-          <p:cNvPr id="11" name="TextBox 10"/>
+          <p:cNvPr id="62" name="TextBox 61"/>
           <p:cNvSpPr txBox="1"/>
           <p:nvPr/>
         </p:nvSpPr>
         <p:spPr>
           <a:xfrm>
-            <a:off x="658368" y="2066544"/>
-            <a:ext cx="1773936" cy="365760"/>
+            <a:off x="3108960" y="1847088"/>
+            <a:ext cx="1920239" cy="365760"/>
           </a:xfrm>
           <a:prstGeom prst="rect">
             <a:avLst/>
@@ -19132,28 +19054,28 @@
           </a:bodyPr>
           <a:lstStyle/>
           <a:p>
-            <a:pPr algn="l"/>
-            <a:r>
-              <a:rPr sz="1250" b="1">
+            <a:r>
+              <a:rPr sz="1400" b="1">
                 <a:solidFill>
                   <a:srgbClr val="FFFFFF"/>
                 </a:solidFill>
-              </a:rPr>
-              <a:t>Excel-файл</a:t>
-            </a:r>
-          </a:p>
-        </p:txBody>
-      </p:sp>
-      <p:sp>
-        <p:nvSpPr>
-          <p:cNvPr id="12" name="TextBox 11"/>
+                <a:latin typeface="Calibri"/>
+              </a:rPr>
+              <a:t>Загрузка</a:t>
+            </a:r>
+          </a:p>
+        </p:txBody>
+      </p:sp>
+      <p:sp>
+        <p:nvSpPr>
+          <p:cNvPr id="63" name="TextBox 62"/>
           <p:cNvSpPr txBox="1"/>
           <p:nvPr/>
         </p:nvSpPr>
         <p:spPr>
           <a:xfrm>
-            <a:off x="658368" y="2432304"/>
-            <a:ext cx="1773936" cy="731520"/>
+            <a:off x="3108960" y="2212848"/>
+            <a:ext cx="1920239" cy="338328"/>
           </a:xfrm>
           <a:prstGeom prst="rect">
             <a:avLst/>
@@ -19166,37 +19088,38 @@
           </a:bodyPr>
           <a:lstStyle/>
           <a:p>
-            <a:pPr algn="l">
+            <a:pPr>
               <a:lnSpc>
                 <a:spcPct val="105000"/>
               </a:lnSpc>
             </a:pPr>
             <a:r>
-              <a:rPr sz="950" b="0">
+              <a:rPr sz="1050">
                 <a:solidFill>
                   <a:srgbClr val="A9B4C0"/>
                 </a:solidFill>
-              </a:rPr>
-              <a:t>.xlsx / .xls · до 50 МБ</a:t>
+                <a:latin typeface="Calibri"/>
+              </a:rPr>
+              <a:t>POST /files/upload · async-очередь · pending</a:t>
             </a:r>
           </a:p>
         </p:txBody>
       </p:sp>
       <p:cxnSp>
         <p:nvCxnSpPr>
-          <p:cNvPr id="13" name="Connector 12"/>
+          <p:cNvPr id="64" name="Connector 63"/>
           <p:cNvCxnSpPr/>
           <p:nvPr/>
         </p:nvCxnSpPr>
         <p:spPr>
           <a:xfrm>
-            <a:off x="2560320" y="2587752"/>
-            <a:ext cx="219456" cy="0"/>
+            <a:off x="2670048" y="2189988"/>
+            <a:ext cx="329184" cy="0"/>
           </a:xfrm>
           <a:prstGeom prst="line">
             <a:avLst/>
           </a:prstGeom>
-          <a:ln w="28575">
+          <a:ln w="25400">
             <a:solidFill>
               <a:srgbClr val="FF5A36"/>
             </a:solidFill>
@@ -19221,18 +19144,18 @@
       </p:cxnSp>
       <p:sp>
         <p:nvSpPr>
-          <p:cNvPr id="14" name="Rounded Rectangle 13"/>
+          <p:cNvPr id="65" name="Rounded Rectangle 64"/>
           <p:cNvSpPr/>
           <p:nvPr/>
         </p:nvSpPr>
         <p:spPr>
           <a:xfrm>
-            <a:off x="2816352" y="1901952"/>
-            <a:ext cx="1993392" cy="1371600"/>
+            <a:off x="5486400" y="1755648"/>
+            <a:ext cx="2103120" cy="868680"/>
           </a:xfrm>
           <a:prstGeom prst="roundRect">
             <a:avLst>
-              <a:gd name="adj" fmla="val 5500"/>
+              <a:gd name="adj" fmla="val 70000"/>
             </a:avLst>
           </a:prstGeom>
           <a:solidFill>
@@ -19240,7 +19163,7 @@
           </a:solidFill>
           <a:ln w="12700">
             <a:solidFill>
-              <a:srgbClr val="3D4A57"/>
+              <a:srgbClr val="3A434D"/>
             </a:solidFill>
           </a:ln>
           <a:effectLst/>
@@ -19270,59 +19193,14 @@
       </p:sp>
       <p:sp>
         <p:nvSpPr>
-          <p:cNvPr id="15" name="Rectangle 14"/>
-          <p:cNvSpPr/>
-          <p:nvPr/>
-        </p:nvSpPr>
-        <p:spPr>
-          <a:xfrm>
-            <a:off x="2816352" y="1901952"/>
-            <a:ext cx="1993392" cy="64008"/>
-          </a:xfrm>
-          <a:prstGeom prst="rect">
-            <a:avLst/>
-          </a:prstGeom>
-          <a:solidFill>
-            <a:srgbClr val="E5B53D"/>
-          </a:solidFill>
-          <a:ln>
-            <a:noFill/>
-          </a:ln>
-          <a:effectLst/>
-        </p:spPr>
-        <p:style>
-          <a:lnRef idx="1">
-            <a:schemeClr val="accent1"/>
-          </a:lnRef>
-          <a:fillRef idx="3">
-            <a:schemeClr val="accent1"/>
-          </a:fillRef>
-          <a:effectRef idx="2">
-            <a:schemeClr val="accent1"/>
-          </a:effectRef>
-          <a:fontRef idx="minor">
-            <a:schemeClr val="lt1"/>
-          </a:fontRef>
-        </p:style>
-        <p:txBody>
-          <a:bodyPr rtlCol="0" anchor="ctr"/>
-          <a:lstStyle/>
-          <a:p>
-            <a:pPr algn="ctr"/>
-            <a:endParaRPr/>
-          </a:p>
-        </p:txBody>
-      </p:sp>
-      <p:sp>
-        <p:nvSpPr>
-          <p:cNvPr id="16" name="TextBox 15"/>
+          <p:cNvPr id="66" name="TextBox 65"/>
           <p:cNvSpPr txBox="1"/>
           <p:nvPr/>
         </p:nvSpPr>
         <p:spPr>
           <a:xfrm>
-            <a:off x="2926080" y="2066544"/>
-            <a:ext cx="1773936" cy="365760"/>
+            <a:off x="5577840" y="1847088"/>
+            <a:ext cx="1920239" cy="365760"/>
           </a:xfrm>
           <a:prstGeom prst="rect">
             <a:avLst/>
@@ -19335,28 +19213,28 @@
           </a:bodyPr>
           <a:lstStyle/>
           <a:p>
-            <a:pPr algn="l"/>
-            <a:r>
-              <a:rPr sz="1250" b="1">
+            <a:r>
+              <a:rPr sz="1400" b="1">
                 <a:solidFill>
                   <a:srgbClr val="FFFFFF"/>
                 </a:solidFill>
-              </a:rPr>
-              <a:t>Загрузка</a:t>
-            </a:r>
-          </a:p>
-        </p:txBody>
-      </p:sp>
-      <p:sp>
-        <p:nvSpPr>
-          <p:cNvPr id="17" name="TextBox 16"/>
+                <a:latin typeface="Calibri"/>
+              </a:rPr>
+              <a:t>Парсинг</a:t>
+            </a:r>
+          </a:p>
+        </p:txBody>
+      </p:sp>
+      <p:sp>
+        <p:nvSpPr>
+          <p:cNvPr id="67" name="TextBox 66"/>
           <p:cNvSpPr txBox="1"/>
           <p:nvPr/>
         </p:nvSpPr>
         <p:spPr>
           <a:xfrm>
-            <a:off x="2926080" y="2432304"/>
-            <a:ext cx="1773936" cy="731520"/>
+            <a:off x="5577840" y="2212848"/>
+            <a:ext cx="1920239" cy="338328"/>
           </a:xfrm>
           <a:prstGeom prst="rect">
             <a:avLst/>
@@ -19369,37 +19247,38 @@
           </a:bodyPr>
           <a:lstStyle/>
           <a:p>
-            <a:pPr algn="l">
+            <a:pPr>
               <a:lnSpc>
                 <a:spcPct val="105000"/>
               </a:lnSpc>
             </a:pPr>
             <a:r>
-              <a:rPr sz="950" b="0">
+              <a:rPr sz="1050">
                 <a:solidFill>
                   <a:srgbClr val="A9B4C0"/>
                 </a:solidFill>
-              </a:rPr>
-              <a:t>POST /files/upload → async-очередь · статус pending</a:t>
+                <a:latin typeface="Calibri"/>
+              </a:rPr>
+              <a:t>листы · unmerge ячеек · шапка · период · комментарии</a:t>
             </a:r>
           </a:p>
         </p:txBody>
       </p:sp>
       <p:cxnSp>
         <p:nvCxnSpPr>
-          <p:cNvPr id="18" name="Connector 17"/>
+          <p:cNvPr id="68" name="Connector 67"/>
           <p:cNvCxnSpPr/>
           <p:nvPr/>
         </p:nvCxnSpPr>
         <p:spPr>
           <a:xfrm>
-            <a:off x="4828031" y="2587752"/>
-            <a:ext cx="219457" cy="0"/>
+            <a:off x="5138928" y="2189988"/>
+            <a:ext cx="329184" cy="0"/>
           </a:xfrm>
           <a:prstGeom prst="line">
             <a:avLst/>
           </a:prstGeom>
-          <a:ln w="28575">
+          <a:ln w="25400">
             <a:solidFill>
               <a:srgbClr val="FF5A36"/>
             </a:solidFill>
@@ -19422,187 +19301,21 @@
           </a:fontRef>
         </p:style>
       </p:cxnSp>
-      <p:sp>
-        <p:nvSpPr>
-          <p:cNvPr id="19" name="Rounded Rectangle 18"/>
-          <p:cNvSpPr/>
-          <p:nvPr/>
-        </p:nvSpPr>
-        <p:spPr>
-          <a:xfrm>
-            <a:off x="5084064" y="1901952"/>
-            <a:ext cx="1993392" cy="1371600"/>
-          </a:xfrm>
-          <a:prstGeom prst="roundRect">
-            <a:avLst>
-              <a:gd name="adj" fmla="val 5500"/>
-            </a:avLst>
-          </a:prstGeom>
-          <a:solidFill>
-            <a:srgbClr val="262C33"/>
-          </a:solidFill>
-          <a:ln w="12700">
-            <a:solidFill>
-              <a:srgbClr val="3D4A57"/>
-            </a:solidFill>
-          </a:ln>
-          <a:effectLst/>
-        </p:spPr>
-        <p:style>
-          <a:lnRef idx="1">
-            <a:schemeClr val="accent1"/>
-          </a:lnRef>
-          <a:fillRef idx="3">
-            <a:schemeClr val="accent1"/>
-          </a:fillRef>
-          <a:effectRef idx="2">
-            <a:schemeClr val="accent1"/>
-          </a:effectRef>
-          <a:fontRef idx="minor">
-            <a:schemeClr val="lt1"/>
-          </a:fontRef>
-        </p:style>
-        <p:txBody>
-          <a:bodyPr rtlCol="0" anchor="ctr"/>
-          <a:lstStyle/>
-          <a:p>
-            <a:pPr algn="ctr"/>
-            <a:endParaRPr/>
-          </a:p>
-        </p:txBody>
-      </p:sp>
-      <p:sp>
-        <p:nvSpPr>
-          <p:cNvPr id="20" name="Rectangle 19"/>
-          <p:cNvSpPr/>
-          <p:nvPr/>
-        </p:nvSpPr>
-        <p:spPr>
-          <a:xfrm>
-            <a:off x="5084064" y="1901952"/>
-            <a:ext cx="1993392" cy="64008"/>
-          </a:xfrm>
-          <a:prstGeom prst="rect">
-            <a:avLst/>
-          </a:prstGeom>
-          <a:solidFill>
-            <a:srgbClr val="FF5A36"/>
-          </a:solidFill>
-          <a:ln>
-            <a:noFill/>
-          </a:ln>
-          <a:effectLst/>
-        </p:spPr>
-        <p:style>
-          <a:lnRef idx="1">
-            <a:schemeClr val="accent1"/>
-          </a:lnRef>
-          <a:fillRef idx="3">
-            <a:schemeClr val="accent1"/>
-          </a:fillRef>
-          <a:effectRef idx="2">
-            <a:schemeClr val="accent1"/>
-          </a:effectRef>
-          <a:fontRef idx="minor">
-            <a:schemeClr val="lt1"/>
-          </a:fontRef>
-        </p:style>
-        <p:txBody>
-          <a:bodyPr rtlCol="0" anchor="ctr"/>
-          <a:lstStyle/>
-          <a:p>
-            <a:pPr algn="ctr"/>
-            <a:endParaRPr/>
-          </a:p>
-        </p:txBody>
-      </p:sp>
-      <p:sp>
-        <p:nvSpPr>
-          <p:cNvPr id="21" name="TextBox 20"/>
-          <p:cNvSpPr txBox="1"/>
-          <p:nvPr/>
-        </p:nvSpPr>
-        <p:spPr>
-          <a:xfrm>
-            <a:off x="5193792" y="2066544"/>
-            <a:ext cx="1773936" cy="365760"/>
-          </a:xfrm>
-          <a:prstGeom prst="rect">
-            <a:avLst/>
-          </a:prstGeom>
-          <a:noFill/>
-        </p:spPr>
-        <p:txBody>
-          <a:bodyPr wrap="square" lIns="0" tIns="0" rIns="0" bIns="0" anchor="t">
-            <a:spAutoFit/>
-          </a:bodyPr>
-          <a:lstStyle/>
-          <a:p>
-            <a:pPr algn="l"/>
-            <a:r>
-              <a:rPr sz="1250" b="1">
-                <a:solidFill>
-                  <a:srgbClr val="FFFFFF"/>
-                </a:solidFill>
-              </a:rPr>
-              <a:t>Парсинг Excel</a:t>
-            </a:r>
-          </a:p>
-        </p:txBody>
-      </p:sp>
-      <p:sp>
-        <p:nvSpPr>
-          <p:cNvPr id="22" name="TextBox 21"/>
-          <p:cNvSpPr txBox="1"/>
-          <p:nvPr/>
-        </p:nvSpPr>
-        <p:spPr>
-          <a:xfrm>
-            <a:off x="5193792" y="2432304"/>
-            <a:ext cx="1773936" cy="731520"/>
-          </a:xfrm>
-          <a:prstGeom prst="rect">
-            <a:avLst/>
-          </a:prstGeom>
-          <a:noFill/>
-        </p:spPr>
-        <p:txBody>
-          <a:bodyPr wrap="square" lIns="0" tIns="0" rIns="0" bIns="0" anchor="t">
-            <a:spAutoFit/>
-          </a:bodyPr>
-          <a:lstStyle/>
-          <a:p>
-            <a:pPr algn="l">
-              <a:lnSpc>
-                <a:spcPct val="105000"/>
-              </a:lnSpc>
-            </a:pPr>
-            <a:r>
-              <a:rPr sz="950" b="0">
-                <a:solidFill>
-                  <a:srgbClr val="A9B4C0"/>
-                </a:solidFill>
-              </a:rPr>
-              <a:t>unmerge ячеек · шапка · тип листа · период · комментарии</a:t>
-            </a:r>
-          </a:p>
-        </p:txBody>
-      </p:sp>
       <p:cxnSp>
         <p:nvCxnSpPr>
-          <p:cNvPr id="23" name="Connector 22"/>
+          <p:cNvPr id="69" name="Connector 68"/>
           <p:cNvCxnSpPr/>
           <p:nvPr/>
         </p:nvCxnSpPr>
         <p:spPr>
           <a:xfrm>
-            <a:off x="7095744" y="2587752"/>
-            <a:ext cx="219455" cy="0"/>
+            <a:off x="6537960" y="2606040"/>
+            <a:ext cx="0" cy="530352"/>
           </a:xfrm>
           <a:prstGeom prst="line">
             <a:avLst/>
           </a:prstGeom>
-          <a:ln w="28575">
+          <a:ln w="25400">
             <a:solidFill>
               <a:srgbClr val="FF5A36"/>
             </a:solidFill>
@@ -19627,18 +19340,18 @@
       </p:cxnSp>
       <p:sp>
         <p:nvSpPr>
-          <p:cNvPr id="24" name="Rounded Rectangle 23"/>
+          <p:cNvPr id="70" name="Rounded Rectangle 69"/>
           <p:cNvSpPr/>
           <p:nvPr/>
         </p:nvSpPr>
         <p:spPr>
           <a:xfrm>
-            <a:off x="7351775" y="1901952"/>
-            <a:ext cx="1993392" cy="1371600"/>
+            <a:off x="5486400" y="3154680"/>
+            <a:ext cx="2103120" cy="1005840"/>
           </a:xfrm>
           <a:prstGeom prst="roundRect">
             <a:avLst>
-              <a:gd name="adj" fmla="val 5500"/>
+              <a:gd name="adj" fmla="val 70000"/>
             </a:avLst>
           </a:prstGeom>
           <a:solidFill>
@@ -19646,7 +19359,7 @@
           </a:solidFill>
           <a:ln w="12700">
             <a:solidFill>
-              <a:srgbClr val="3D4A57"/>
+              <a:srgbClr val="3A434D"/>
             </a:solidFill>
           </a:ln>
           <a:effectLst/>
@@ -19676,59 +19389,14 @@
       </p:sp>
       <p:sp>
         <p:nvSpPr>
-          <p:cNvPr id="25" name="Rectangle 24"/>
-          <p:cNvSpPr/>
-          <p:nvPr/>
-        </p:nvSpPr>
-        <p:spPr>
-          <a:xfrm>
-            <a:off x="7351775" y="1901952"/>
-            <a:ext cx="1993392" cy="64008"/>
-          </a:xfrm>
-          <a:prstGeom prst="rect">
-            <a:avLst/>
-          </a:prstGeom>
-          <a:solidFill>
-            <a:srgbClr val="3FBF8A"/>
-          </a:solidFill>
-          <a:ln>
-            <a:noFill/>
-          </a:ln>
-          <a:effectLst/>
-        </p:spPr>
-        <p:style>
-          <a:lnRef idx="1">
-            <a:schemeClr val="accent1"/>
-          </a:lnRef>
-          <a:fillRef idx="3">
-            <a:schemeClr val="accent1"/>
-          </a:fillRef>
-          <a:effectRef idx="2">
-            <a:schemeClr val="accent1"/>
-          </a:effectRef>
-          <a:fontRef idx="minor">
-            <a:schemeClr val="lt1"/>
-          </a:fontRef>
-        </p:style>
-        <p:txBody>
-          <a:bodyPr rtlCol="0" anchor="ctr"/>
-          <a:lstStyle/>
-          <a:p>
-            <a:pPr algn="ctr"/>
-            <a:endParaRPr/>
-          </a:p>
-        </p:txBody>
-      </p:sp>
-      <p:sp>
-        <p:nvSpPr>
-          <p:cNvPr id="26" name="TextBox 25"/>
+          <p:cNvPr id="71" name="TextBox 70"/>
           <p:cNvSpPr txBox="1"/>
           <p:nvPr/>
         </p:nvSpPr>
         <p:spPr>
           <a:xfrm>
-            <a:off x="7461503" y="2066544"/>
-            <a:ext cx="1773936" cy="365760"/>
+            <a:off x="5577840" y="3246120"/>
+            <a:ext cx="1920239" cy="365760"/>
           </a:xfrm>
           <a:prstGeom prst="rect">
             <a:avLst/>
@@ -19741,28 +19409,28 @@
           </a:bodyPr>
           <a:lstStyle/>
           <a:p>
-            <a:pPr algn="l"/>
-            <a:r>
-              <a:rPr sz="1250" b="1">
+            <a:r>
+              <a:rPr sz="1350" b="1">
                 <a:solidFill>
                   <a:srgbClr val="FFFFFF"/>
                 </a:solidFill>
-              </a:rPr>
-              <a:t>RAW → mart</a:t>
-            </a:r>
-          </a:p>
-        </p:txBody>
-      </p:sp>
-      <p:sp>
-        <p:nvSpPr>
-          <p:cNvPr id="27" name="TextBox 26"/>
+                <a:latin typeface="Calibri"/>
+              </a:rPr>
+              <a:t>RAW → Нормализация</a:t>
+            </a:r>
+          </a:p>
+        </p:txBody>
+      </p:sp>
+      <p:sp>
+        <p:nvSpPr>
+          <p:cNvPr id="72" name="TextBox 71"/>
           <p:cNvSpPr txBox="1"/>
           <p:nvPr/>
         </p:nvSpPr>
         <p:spPr>
           <a:xfrm>
-            <a:off x="7461503" y="2432304"/>
-            <a:ext cx="1773936" cy="731520"/>
+            <a:off x="5577840" y="3611880"/>
+            <a:ext cx="1920239" cy="475488"/>
           </a:xfrm>
           <a:prstGeom prst="rect">
             <a:avLst/>
@@ -19775,41 +19443,41 @@
           </a:bodyPr>
           <a:lstStyle/>
           <a:p>
-            <a:pPr algn="l">
+            <a:pPr>
               <a:lnSpc>
                 <a:spcPct val="105000"/>
               </a:lnSpc>
             </a:pPr>
             <a:r>
-              <a:rPr sz="950" b="0">
+              <a:rPr sz="1000">
                 <a:solidFill>
                   <a:srgbClr val="A9B4C0"/>
                 </a:solidFill>
-              </a:rPr>
-              <a:t>sheets · cells · comments → price_facts · metrics · aliases</a:t>
+                <a:latin typeface="Calibri"/>
+              </a:rPr>
+              <a:t>public: sheets · cells → mart · справочники · руб./тн</a:t>
             </a:r>
           </a:p>
         </p:txBody>
       </p:sp>
       <p:cxnSp>
         <p:nvCxnSpPr>
-          <p:cNvPr id="28" name="Connector 27"/>
+          <p:cNvPr id="73" name="Connector 72"/>
           <p:cNvCxnSpPr/>
           <p:nvPr/>
         </p:nvCxnSpPr>
         <p:spPr>
           <a:xfrm>
-            <a:off x="9363455" y="2587752"/>
-            <a:ext cx="219457" cy="0"/>
+            <a:off x="7955279" y="2331720"/>
+            <a:ext cx="0" cy="1965959"/>
           </a:xfrm>
           <a:prstGeom prst="line">
             <a:avLst/>
           </a:prstGeom>
-          <a:ln w="28575">
+          <a:ln w="25400">
             <a:solidFill>
               <a:srgbClr val="FF5A36"/>
             </a:solidFill>
-            <a:tailEnd type="triangle" w="med" len="med"/>
           </a:ln>
           <a:effectLst/>
         </p:spPr>
@@ -19828,387 +19496,21 @@
           </a:fontRef>
         </p:style>
       </p:cxnSp>
-      <p:sp>
-        <p:nvSpPr>
-          <p:cNvPr id="29" name="Rounded Rectangle 28"/>
-          <p:cNvSpPr/>
-          <p:nvPr/>
-        </p:nvSpPr>
-        <p:spPr>
-          <a:xfrm>
-            <a:off x="9619488" y="1901952"/>
-            <a:ext cx="1993392" cy="1371600"/>
-          </a:xfrm>
-          <a:prstGeom prst="roundRect">
-            <a:avLst>
-              <a:gd name="adj" fmla="val 5500"/>
-            </a:avLst>
-          </a:prstGeom>
-          <a:solidFill>
-            <a:srgbClr val="262C33"/>
-          </a:solidFill>
-          <a:ln w="12700">
-            <a:solidFill>
-              <a:srgbClr val="3D4A57"/>
-            </a:solidFill>
-          </a:ln>
-          <a:effectLst/>
-        </p:spPr>
-        <p:style>
-          <a:lnRef idx="1">
-            <a:schemeClr val="accent1"/>
-          </a:lnRef>
-          <a:fillRef idx="3">
-            <a:schemeClr val="accent1"/>
-          </a:fillRef>
-          <a:effectRef idx="2">
-            <a:schemeClr val="accent1"/>
-          </a:effectRef>
-          <a:fontRef idx="minor">
-            <a:schemeClr val="lt1"/>
-          </a:fontRef>
-        </p:style>
-        <p:txBody>
-          <a:bodyPr rtlCol="0" anchor="ctr"/>
-          <a:lstStyle/>
-          <a:p>
-            <a:pPr algn="ctr"/>
-            <a:endParaRPr/>
-          </a:p>
-        </p:txBody>
-      </p:sp>
-      <p:sp>
-        <p:nvSpPr>
-          <p:cNvPr id="30" name="Rectangle 29"/>
-          <p:cNvSpPr/>
-          <p:nvPr/>
-        </p:nvSpPr>
-        <p:spPr>
-          <a:xfrm>
-            <a:off x="9619488" y="1901952"/>
-            <a:ext cx="1993392" cy="64008"/>
-          </a:xfrm>
-          <a:prstGeom prst="rect">
-            <a:avLst/>
-          </a:prstGeom>
-          <a:solidFill>
-            <a:srgbClr val="3A434D"/>
-          </a:solidFill>
-          <a:ln>
-            <a:noFill/>
-          </a:ln>
-          <a:effectLst/>
-        </p:spPr>
-        <p:style>
-          <a:lnRef idx="1">
-            <a:schemeClr val="accent1"/>
-          </a:lnRef>
-          <a:fillRef idx="3">
-            <a:schemeClr val="accent1"/>
-          </a:fillRef>
-          <a:effectRef idx="2">
-            <a:schemeClr val="accent1"/>
-          </a:effectRef>
-          <a:fontRef idx="minor">
-            <a:schemeClr val="lt1"/>
-          </a:fontRef>
-        </p:style>
-        <p:txBody>
-          <a:bodyPr rtlCol="0" anchor="ctr"/>
-          <a:lstStyle/>
-          <a:p>
-            <a:pPr algn="ctr"/>
-            <a:endParaRPr/>
-          </a:p>
-        </p:txBody>
-      </p:sp>
-      <p:sp>
-        <p:nvSpPr>
-          <p:cNvPr id="31" name="TextBox 30"/>
-          <p:cNvSpPr txBox="1"/>
-          <p:nvPr/>
-        </p:nvSpPr>
-        <p:spPr>
-          <a:xfrm>
-            <a:off x="9729215" y="2066544"/>
-            <a:ext cx="1773936" cy="365760"/>
-          </a:xfrm>
-          <a:prstGeom prst="rect">
-            <a:avLst/>
-          </a:prstGeom>
-          <a:noFill/>
-        </p:spPr>
-        <p:txBody>
-          <a:bodyPr wrap="square" lIns="0" tIns="0" rIns="0" bIns="0" anchor="t">
-            <a:spAutoFit/>
-          </a:bodyPr>
-          <a:lstStyle/>
-          <a:p>
-            <a:pPr algn="l"/>
-            <a:r>
-              <a:rPr sz="1250" b="1">
-                <a:solidFill>
-                  <a:srgbClr val="FFFFFF"/>
-                </a:solidFill>
-              </a:rPr>
-              <a:t>Entity Resolution</a:t>
-            </a:r>
-          </a:p>
-        </p:txBody>
-      </p:sp>
-      <p:sp>
-        <p:nvSpPr>
-          <p:cNvPr id="32" name="TextBox 31"/>
-          <p:cNvSpPr txBox="1"/>
-          <p:nvPr/>
-        </p:nvSpPr>
-        <p:spPr>
-          <a:xfrm>
-            <a:off x="9729215" y="2432304"/>
-            <a:ext cx="1773936" cy="731520"/>
-          </a:xfrm>
-          <a:prstGeom prst="rect">
-            <a:avLst/>
-          </a:prstGeom>
-          <a:noFill/>
-        </p:spPr>
-        <p:txBody>
-          <a:bodyPr wrap="square" lIns="0" tIns="0" rIns="0" bIns="0" anchor="t">
-            <a:spAutoFit/>
-          </a:bodyPr>
-          <a:lstStyle/>
-          <a:p>
-            <a:pPr algn="l">
-              <a:lnSpc>
-                <a:spcPct val="105000"/>
-              </a:lnSpc>
-            </a:pPr>
-            <a:r>
-              <a:rPr sz="950" b="0">
-                <a:solidFill>
-                  <a:srgbClr val="A9B4C0"/>
-                </a:solidFill>
-              </a:rPr>
-              <a:t>каталоги item / supplier / period</a:t>
-            </a:r>
-          </a:p>
-        </p:txBody>
-      </p:sp>
-      <p:sp>
-        <p:nvSpPr>
-          <p:cNvPr id="33" name="TextBox 32"/>
-          <p:cNvSpPr txBox="1"/>
-          <p:nvPr/>
-        </p:nvSpPr>
-        <p:spPr>
-          <a:xfrm>
-            <a:off x="548640" y="3493008"/>
-            <a:ext cx="11064240" cy="274320"/>
-          </a:xfrm>
-          <a:prstGeom prst="rect">
-            <a:avLst/>
-          </a:prstGeom>
-          <a:noFill/>
-        </p:spPr>
-        <p:txBody>
-          <a:bodyPr wrap="square" lIns="0" tIns="0" rIns="0" bIns="0" anchor="t">
-            <a:spAutoFit/>
-          </a:bodyPr>
-          <a:lstStyle/>
-          <a:p>
-            <a:pPr algn="l"/>
-            <a:r>
-              <a:rPr sz="1200" b="1">
-                <a:solidFill>
-                  <a:srgbClr val="A9B4C0"/>
-                </a:solidFill>
-              </a:rPr>
-              <a:t>Распознавание схемы листа</a:t>
-            </a:r>
-          </a:p>
-        </p:txBody>
-      </p:sp>
-      <p:sp>
-        <p:nvSpPr>
-          <p:cNvPr id="34" name="Rounded Rectangle 33"/>
-          <p:cNvSpPr/>
-          <p:nvPr/>
-        </p:nvSpPr>
-        <p:spPr>
-          <a:xfrm>
-            <a:off x="548640" y="3785615"/>
-            <a:ext cx="2651760" cy="1188720"/>
-          </a:xfrm>
-          <a:prstGeom prst="roundRect">
-            <a:avLst>
-              <a:gd name="adj" fmla="val 5500"/>
-            </a:avLst>
-          </a:prstGeom>
-          <a:solidFill>
-            <a:srgbClr val="262C33"/>
-          </a:solidFill>
-          <a:ln w="12700">
-            <a:solidFill>
-              <a:srgbClr val="3D4A57"/>
-            </a:solidFill>
-          </a:ln>
-          <a:effectLst/>
-        </p:spPr>
-        <p:style>
-          <a:lnRef idx="1">
-            <a:schemeClr val="accent1"/>
-          </a:lnRef>
-          <a:fillRef idx="3">
-            <a:schemeClr val="accent1"/>
-          </a:fillRef>
-          <a:effectRef idx="2">
-            <a:schemeClr val="accent1"/>
-          </a:effectRef>
-          <a:fontRef idx="minor">
-            <a:schemeClr val="lt1"/>
-          </a:fontRef>
-        </p:style>
-        <p:txBody>
-          <a:bodyPr rtlCol="0" anchor="ctr"/>
-          <a:lstStyle/>
-          <a:p>
-            <a:pPr algn="ctr"/>
-            <a:endParaRPr/>
-          </a:p>
-        </p:txBody>
-      </p:sp>
-      <p:sp>
-        <p:nvSpPr>
-          <p:cNvPr id="35" name="Rectangle 34"/>
-          <p:cNvSpPr/>
-          <p:nvPr/>
-        </p:nvSpPr>
-        <p:spPr>
-          <a:xfrm>
-            <a:off x="548640" y="3785615"/>
-            <a:ext cx="2651760" cy="64008"/>
-          </a:xfrm>
-          <a:prstGeom prst="rect">
-            <a:avLst/>
-          </a:prstGeom>
-          <a:solidFill>
-            <a:srgbClr val="2FA6C9"/>
-          </a:solidFill>
-          <a:ln>
-            <a:noFill/>
-          </a:ln>
-          <a:effectLst/>
-        </p:spPr>
-        <p:style>
-          <a:lnRef idx="1">
-            <a:schemeClr val="accent1"/>
-          </a:lnRef>
-          <a:fillRef idx="3">
-            <a:schemeClr val="accent1"/>
-          </a:fillRef>
-          <a:effectRef idx="2">
-            <a:schemeClr val="accent1"/>
-          </a:effectRef>
-          <a:fontRef idx="minor">
-            <a:schemeClr val="lt1"/>
-          </a:fontRef>
-        </p:style>
-        <p:txBody>
-          <a:bodyPr rtlCol="0" anchor="ctr"/>
-          <a:lstStyle/>
-          <a:p>
-            <a:pPr algn="ctr"/>
-            <a:endParaRPr/>
-          </a:p>
-        </p:txBody>
-      </p:sp>
-      <p:sp>
-        <p:nvSpPr>
-          <p:cNvPr id="36" name="TextBox 35"/>
-          <p:cNvSpPr txBox="1"/>
-          <p:nvPr/>
-        </p:nvSpPr>
-        <p:spPr>
-          <a:xfrm>
-            <a:off x="658368" y="3931920"/>
-            <a:ext cx="2432304" cy="320040"/>
-          </a:xfrm>
-          <a:prstGeom prst="rect">
-            <a:avLst/>
-          </a:prstGeom>
-          <a:noFill/>
-        </p:spPr>
-        <p:txBody>
-          <a:bodyPr wrap="square" lIns="0" tIns="0" rIns="0" bIns="0" anchor="t">
-            <a:spAutoFit/>
-          </a:bodyPr>
-          <a:lstStyle/>
-          <a:p>
-            <a:pPr algn="l"/>
-            <a:r>
-              <a:rPr sz="1200" b="1">
-                <a:solidFill>
-                  <a:srgbClr val="FFFFFF"/>
-                </a:solidFill>
-              </a:rPr>
-              <a:t>Fingerprint</a:t>
-            </a:r>
-          </a:p>
-        </p:txBody>
-      </p:sp>
-      <p:sp>
-        <p:nvSpPr>
-          <p:cNvPr id="37" name="TextBox 36"/>
-          <p:cNvSpPr txBox="1"/>
-          <p:nvPr/>
-        </p:nvSpPr>
-        <p:spPr>
-          <a:xfrm>
-            <a:off x="658368" y="4279392"/>
-            <a:ext cx="2432304" cy="548640"/>
-          </a:xfrm>
-          <a:prstGeom prst="rect">
-            <a:avLst/>
-          </a:prstGeom>
-          <a:noFill/>
-        </p:spPr>
-        <p:txBody>
-          <a:bodyPr wrap="square" lIns="0" tIns="0" rIns="0" bIns="0" anchor="t">
-            <a:spAutoFit/>
-          </a:bodyPr>
-          <a:lstStyle/>
-          <a:p>
-            <a:pPr algn="l">
-              <a:lnSpc>
-                <a:spcPct val="105000"/>
-              </a:lnSpc>
-            </a:pPr>
-            <a:r>
-              <a:rPr sz="950" b="0">
-                <a:solidFill>
-                  <a:srgbClr val="A9B4C0"/>
-                </a:solidFill>
-              </a:rPr>
-              <a:t>сигнатура структуры листа: колонки · типы · шаблон</a:t>
-            </a:r>
-          </a:p>
-        </p:txBody>
-      </p:sp>
       <p:cxnSp>
         <p:nvCxnSpPr>
-          <p:cNvPr id="38" name="Connector 37"/>
+          <p:cNvPr id="74" name="Connector 73"/>
           <p:cNvCxnSpPr/>
           <p:nvPr/>
         </p:nvCxnSpPr>
         <p:spPr>
           <a:xfrm>
-            <a:off x="3218688" y="4224528"/>
-            <a:ext cx="365760" cy="0"/>
+            <a:off x="7607808" y="3657600"/>
+            <a:ext cx="329184" cy="0"/>
           </a:xfrm>
           <a:prstGeom prst="line">
             <a:avLst/>
           </a:prstGeom>
-          <a:ln w="28575">
+          <a:ln w="25400">
             <a:solidFill>
               <a:srgbClr val="FF5A36"/>
             </a:solidFill>
@@ -20231,20 +19533,57 @@
           </a:fontRef>
         </p:style>
       </p:cxnSp>
-      <p:sp>
-        <p:nvSpPr>
-          <p:cNvPr id="39" name="Rounded Rectangle 38"/>
+      <p:cxnSp>
+        <p:nvCxnSpPr>
+          <p:cNvPr id="75" name="Connector 74"/>
+          <p:cNvCxnSpPr/>
+          <p:nvPr/>
+        </p:nvCxnSpPr>
+        <p:spPr>
+          <a:xfrm>
+            <a:off x="7955279" y="2331720"/>
+            <a:ext cx="365761" cy="0"/>
+          </a:xfrm>
+          <a:prstGeom prst="line">
+            <a:avLst/>
+          </a:prstGeom>
+          <a:ln w="25400">
+            <a:solidFill>
+              <a:srgbClr val="FF5A36"/>
+            </a:solidFill>
+            <a:tailEnd type="triangle" w="med" len="med"/>
+          </a:ln>
+          <a:effectLst/>
+        </p:spPr>
+        <p:style>
+          <a:lnRef idx="2">
+            <a:schemeClr val="accent1"/>
+          </a:lnRef>
+          <a:fillRef idx="0">
+            <a:schemeClr val="accent1"/>
+          </a:fillRef>
+          <a:effectRef idx="1">
+            <a:schemeClr val="accent1"/>
+          </a:effectRef>
+          <a:fontRef idx="minor">
+            <a:schemeClr val="tx1"/>
+          </a:fontRef>
+        </p:style>
+      </p:cxnSp>
+      <p:sp>
+        <p:nvSpPr>
+          <p:cNvPr id="76" name="Rounded Rectangle 75"/>
           <p:cNvSpPr/>
           <p:nvPr/>
         </p:nvSpPr>
         <p:spPr>
           <a:xfrm>
-            <a:off x="3611880" y="3785615"/>
-            <a:ext cx="3886200" cy="1188720"/>
+            <a:off x="8321040" y="1874519"/>
+            <a:ext cx="3657600" cy="914400"/>
           </a:xfrm>
           <a:prstGeom prst="roundRect">
             <a:avLst>
-              <a:gd name="adj" fmla="val 5500"/>
+              <a:gd name="adj" fmla="val 70000"/>
             </a:avLst>
           </a:prstGeom>
           <a:solidFill>
@@ -20252,7 +19591,7 @@
           </a:solidFill>
           <a:ln w="12700">
             <a:solidFill>
-              <a:srgbClr val="3FBF8A"/>
+              <a:srgbClr val="3A434D"/>
             </a:solidFill>
           </a:ln>
           <a:effectLst/>
@@ -20282,14 +19621,14 @@
       </p:sp>
       <p:sp>
         <p:nvSpPr>
-          <p:cNvPr id="40" name="TextBox 39"/>
+          <p:cNvPr id="77" name="TextBox 76"/>
           <p:cNvSpPr txBox="1"/>
           <p:nvPr/>
         </p:nvSpPr>
         <p:spPr>
           <a:xfrm>
-            <a:off x="3721608" y="3931920"/>
-            <a:ext cx="3657600" cy="320040"/>
+            <a:off x="8412480" y="1965960"/>
+            <a:ext cx="3474720" cy="365760"/>
           </a:xfrm>
           <a:prstGeom prst="rect">
             <a:avLst/>
@@ -20302,28 +19641,28 @@
           </a:bodyPr>
           <a:lstStyle/>
           <a:p>
-            <a:pPr algn="l"/>
-            <a:r>
-              <a:rPr sz="1200" b="1">
+            <a:r>
+              <a:rPr sz="1400" b="1">
                 <a:solidFill>
                   <a:srgbClr val="FFFFFF"/>
                 </a:solidFill>
-              </a:rPr>
-              <a:t>Шаблон известен</a:t>
-            </a:r>
-          </a:p>
-        </p:txBody>
-      </p:sp>
-      <p:sp>
-        <p:nvSpPr>
-          <p:cNvPr id="41" name="TextBox 40"/>
+                <a:latin typeface="Calibri"/>
+              </a:rPr>
+              <a:t>mart.price_facts</a:t>
+            </a:r>
+          </a:p>
+        </p:txBody>
+      </p:sp>
+      <p:sp>
+        <p:nvSpPr>
+          <p:cNvPr id="78" name="TextBox 77"/>
           <p:cNvSpPr txBox="1"/>
           <p:nvPr/>
         </p:nvSpPr>
         <p:spPr>
           <a:xfrm>
-            <a:off x="3721608" y="4279392"/>
-            <a:ext cx="3657600" cy="548640"/>
+            <a:off x="8412480" y="2331720"/>
+            <a:ext cx="3474720" cy="384048"/>
           </a:xfrm>
           <a:prstGeom prst="rect">
             <a:avLst/>
@@ -20336,104 +19675,74 @@
           </a:bodyPr>
           <a:lstStyle/>
           <a:p>
-            <a:pPr algn="l">
+            <a:pPr>
               <a:lnSpc>
                 <a:spcPct val="105000"/>
               </a:lnSpc>
             </a:pPr>
             <a:r>
-              <a:rPr sz="950" b="0">
+              <a:rPr sz="1100">
                 <a:solidFill>
                   <a:srgbClr val="A9B4C0"/>
                 </a:solidFill>
-              </a:rPr>
-              <a:t>схема из mart.sheet_templates — разбор без LLM</a:t>
-            </a:r>
-          </a:p>
-        </p:txBody>
-      </p:sp>
-      <p:sp>
-        <p:nvSpPr>
-          <p:cNvPr id="42" name="TextBox 41"/>
-          <p:cNvSpPr txBox="1"/>
-          <p:nvPr/>
-        </p:nvSpPr>
-        <p:spPr>
-          <a:xfrm>
-            <a:off x="6949440" y="4041648"/>
-            <a:ext cx="502920" cy="274320"/>
-          </a:xfrm>
-          <a:prstGeom prst="rect">
-            <a:avLst/>
-          </a:prstGeom>
-          <a:noFill/>
-        </p:spPr>
-        <p:txBody>
-          <a:bodyPr wrap="square" lIns="0" tIns="0" rIns="0" bIns="0" anchor="t">
-            <a:spAutoFit/>
-          </a:bodyPr>
-          <a:lstStyle/>
-          <a:p>
-            <a:pPr algn="r"/>
-            <a:r>
-              <a:rPr sz="900" b="1">
-                <a:solidFill>
-                  <a:srgbClr val="3FBF8A"/>
-                </a:solidFill>
-              </a:rPr>
-              <a:t>✓ без LLM</a:t>
-            </a:r>
-          </a:p>
-        </p:txBody>
-      </p:sp>
-      <p:sp>
-        <p:nvSpPr>
-          <p:cNvPr id="43" name="TextBox 42"/>
-          <p:cNvSpPr txBox="1"/>
-          <p:nvPr/>
-        </p:nvSpPr>
-        <p:spPr>
-          <a:xfrm>
-            <a:off x="7552944" y="4279392"/>
-            <a:ext cx="256032" cy="274320"/>
-          </a:xfrm>
-          <a:prstGeom prst="rect">
-            <a:avLst/>
-          </a:prstGeom>
-          <a:noFill/>
-        </p:spPr>
-        <p:txBody>
-          <a:bodyPr wrap="square" lIns="0" tIns="0" rIns="0" bIns="0" anchor="t">
-            <a:spAutoFit/>
-          </a:bodyPr>
-          <a:lstStyle/>
-          <a:p>
-            <a:pPr algn="l"/>
-            <a:r>
-              <a:rPr sz="1050" b="1">
-                <a:solidFill>
-                  <a:srgbClr val="A9B4C0"/>
-                </a:solidFill>
-              </a:rPr>
-              <a:t>или</a:t>
-            </a:r>
-          </a:p>
-        </p:txBody>
-      </p:sp>
-      <p:sp>
-        <p:nvSpPr>
-          <p:cNvPr id="44" name="Rounded Rectangle 43"/>
+                <a:latin typeface="Calibri"/>
+              </a:rPr>
+              <a:t>листы prices → факты цен (руб./тн · месяцы)</a:t>
+            </a:r>
+          </a:p>
+        </p:txBody>
+      </p:sp>
+      <p:cxnSp>
+        <p:nvCxnSpPr>
+          <p:cNvPr id="79" name="Connector 78"/>
+          <p:cNvCxnSpPr/>
+          <p:nvPr/>
+        </p:nvCxnSpPr>
+        <p:spPr>
+          <a:xfrm>
+            <a:off x="7955279" y="4297680"/>
+            <a:ext cx="365761" cy="0"/>
+          </a:xfrm>
+          <a:prstGeom prst="line">
+            <a:avLst/>
+          </a:prstGeom>
+          <a:ln w="25400">
+            <a:solidFill>
+              <a:srgbClr val="FF5A36"/>
+            </a:solidFill>
+            <a:tailEnd type="triangle" w="med" len="med"/>
+          </a:ln>
+          <a:effectLst/>
+        </p:spPr>
+        <p:style>
+          <a:lnRef idx="2">
+            <a:schemeClr val="accent1"/>
+          </a:lnRef>
+          <a:fillRef idx="0">
+            <a:schemeClr val="accent1"/>
+          </a:fillRef>
+          <a:effectRef idx="1">
+            <a:schemeClr val="accent1"/>
+          </a:effectRef>
+          <a:fontRef idx="minor">
+            <a:schemeClr val="tx1"/>
+          </a:fontRef>
+        </p:style>
+      </p:cxnSp>
+      <p:sp>
+        <p:nvSpPr>
+          <p:cNvPr id="80" name="Rounded Rectangle 79"/>
           <p:cNvSpPr/>
           <p:nvPr/>
         </p:nvSpPr>
         <p:spPr>
           <a:xfrm>
-            <a:off x="7863840" y="3785615"/>
-            <a:ext cx="3657600" cy="1188720"/>
+            <a:off x="8321040" y="3840480"/>
+            <a:ext cx="3657600" cy="914400"/>
           </a:xfrm>
           <a:prstGeom prst="roundRect">
             <a:avLst>
-              <a:gd name="adj" fmla="val 5500"/>
+              <a:gd name="adj" fmla="val 70000"/>
             </a:avLst>
           </a:prstGeom>
           <a:solidFill>
@@ -20441,7 +19750,7 @@
           </a:solidFill>
           <a:ln w="12700">
             <a:solidFill>
-              <a:srgbClr val="FF5A36"/>
+              <a:srgbClr val="3A434D"/>
             </a:solidFill>
           </a:ln>
           <a:effectLst/>
@@ -20471,14 +19780,14 @@
       </p:sp>
       <p:sp>
         <p:nvSpPr>
-          <p:cNvPr id="45" name="TextBox 44"/>
+          <p:cNvPr id="81" name="TextBox 80"/>
           <p:cNvSpPr txBox="1"/>
           <p:nvPr/>
         </p:nvSpPr>
         <p:spPr>
           <a:xfrm>
-            <a:off x="7973568" y="3931920"/>
-            <a:ext cx="3438144" cy="320040"/>
+            <a:off x="8412480" y="3931920"/>
+            <a:ext cx="3474720" cy="365760"/>
           </a:xfrm>
           <a:prstGeom prst="rect">
             <a:avLst/>
@@ -20491,28 +19800,28 @@
           </a:bodyPr>
           <a:lstStyle/>
           <a:p>
-            <a:pPr algn="l"/>
-            <a:r>
-              <a:rPr sz="1200" b="1">
+            <a:r>
+              <a:rPr sz="1400" b="1">
                 <a:solidFill>
                   <a:srgbClr val="FFFFFF"/>
                 </a:solidFill>
-              </a:rPr>
-              <a:t>Новый формат</a:t>
-            </a:r>
-          </a:p>
-        </p:txBody>
-      </p:sp>
-      <p:sp>
-        <p:nvSpPr>
-          <p:cNvPr id="46" name="TextBox 45"/>
+                <a:latin typeface="Calibri"/>
+              </a:rPr>
+              <a:t>mart.metrics</a:t>
+            </a:r>
+          </a:p>
+        </p:txBody>
+      </p:sp>
+      <p:sp>
+        <p:nvSpPr>
+          <p:cNvPr id="82" name="TextBox 81"/>
           <p:cNvSpPr txBox="1"/>
           <p:nvPr/>
         </p:nvSpPr>
         <p:spPr>
           <a:xfrm>
-            <a:off x="7973568" y="4279392"/>
-            <a:ext cx="3438144" cy="548640"/>
+            <a:off x="8412480" y="4297680"/>
+            <a:ext cx="3474720" cy="384048"/>
           </a:xfrm>
           <a:prstGeom prst="rect">
             <a:avLst/>
@@ -20525,112 +19834,45 @@
           </a:bodyPr>
           <a:lstStyle/>
           <a:p>
-            <a:pPr algn="l">
+            <a:pPr>
               <a:lnSpc>
                 <a:spcPct val="105000"/>
               </a:lnSpc>
             </a:pPr>
             <a:r>
-              <a:rPr sz="950" b="0">
+              <a:rPr sz="1100">
                 <a:solidFill>
                   <a:srgbClr val="A9B4C0"/>
                 </a:solidFill>
-              </a:rPr>
-              <a:t>LLM-инференс · Pydantic SheetSchema → подтверждение специалистом</a:t>
-            </a:r>
-          </a:p>
-        </p:txBody>
-      </p:sp>
-      <p:sp>
-        <p:nvSpPr>
-          <p:cNvPr id="47" name="TextBox 46"/>
-          <p:cNvSpPr txBox="1"/>
-          <p:nvPr/>
-        </p:nvSpPr>
-        <p:spPr>
-          <a:xfrm>
-            <a:off x="10927080" y="4041648"/>
-            <a:ext cx="457200" cy="274320"/>
-          </a:xfrm>
-          <a:prstGeom prst="rect">
-            <a:avLst/>
-          </a:prstGeom>
-          <a:noFill/>
-        </p:spPr>
-        <p:txBody>
-          <a:bodyPr wrap="square" lIns="0" tIns="0" rIns="0" bIns="0" anchor="t">
-            <a:spAutoFit/>
-          </a:bodyPr>
-          <a:lstStyle/>
-          <a:p>
-            <a:pPr algn="r"/>
-            <a:r>
-              <a:rPr sz="900" b="1">
-                <a:solidFill>
-                  <a:srgbClr val="FF5A36"/>
-                </a:solidFill>
-              </a:rPr>
-              <a:t>✦ LLM</a:t>
-            </a:r>
-          </a:p>
-        </p:txBody>
-      </p:sp>
-      <p:sp>
-        <p:nvSpPr>
-          <p:cNvPr id="48" name="TextBox 47"/>
-          <p:cNvSpPr txBox="1"/>
-          <p:nvPr/>
-        </p:nvSpPr>
-        <p:spPr>
-          <a:xfrm>
-            <a:off x="548640" y="5230368"/>
-            <a:ext cx="1371600" cy="365760"/>
-          </a:xfrm>
-          <a:prstGeom prst="rect">
-            <a:avLst/>
-          </a:prstGeom>
-          <a:noFill/>
-        </p:spPr>
-        <p:txBody>
-          <a:bodyPr wrap="square" lIns="0" tIns="0" rIns="0" bIns="0" anchor="ctr">
-            <a:spAutoFit/>
-          </a:bodyPr>
-          <a:lstStyle/>
-          <a:p>
-            <a:pPr algn="l"/>
-            <a:r>
-              <a:rPr sz="1100" b="1">
-                <a:solidFill>
-                  <a:srgbClr val="A9B4C0"/>
-                </a:solidFill>
-              </a:rPr>
-              <a:t>Статус файла: </a:t>
-            </a:r>
-          </a:p>
-        </p:txBody>
-      </p:sp>
-      <p:sp>
-        <p:nvSpPr>
-          <p:cNvPr id="49" name="Rounded Rectangle 48"/>
+                <a:latin typeface="Calibri"/>
+              </a:rPr>
+              <a:t>листы matrix → показатели (месяцы)</a:t>
+            </a:r>
+          </a:p>
+        </p:txBody>
+      </p:sp>
+      <p:sp>
+        <p:nvSpPr>
+          <p:cNvPr id="83" name="Rounded Rectangle 82"/>
           <p:cNvSpPr/>
           <p:nvPr/>
         </p:nvSpPr>
         <p:spPr>
           <a:xfrm>
-            <a:off x="1965960" y="5212080"/>
-            <a:ext cx="1005840" cy="384048"/>
+            <a:off x="8321040" y="5029200"/>
+            <a:ext cx="3657600" cy="731520"/>
           </a:xfrm>
           <a:prstGeom prst="roundRect">
             <a:avLst>
-              <a:gd name="adj" fmla="val 50000"/>
+              <a:gd name="adj" fmla="val 70000"/>
             </a:avLst>
           </a:prstGeom>
           <a:solidFill>
-            <a:srgbClr val="22272D"/>
+            <a:srgbClr val="262C33"/>
           </a:solidFill>
           <a:ln w="12700">
             <a:solidFill>
-              <a:srgbClr val="A9B4C0"/>
+              <a:srgbClr val="3A434D"/>
             </a:solidFill>
           </a:ln>
           <a:effectLst/>
@@ -20660,94 +19902,204 @@
       </p:sp>
       <p:sp>
         <p:nvSpPr>
-          <p:cNvPr id="50" name="TextBox 49"/>
+          <p:cNvPr id="84" name="TextBox 83"/>
           <p:cNvSpPr txBox="1"/>
           <p:nvPr/>
         </p:nvSpPr>
         <p:spPr>
           <a:xfrm>
-            <a:off x="1965960" y="5248656"/>
-            <a:ext cx="1005840" cy="329184"/>
-          </a:xfrm>
-          <a:prstGeom prst="rect">
-            <a:avLst/>
-          </a:prstGeom>
-          <a:noFill/>
-        </p:spPr>
-        <p:txBody>
-          <a:bodyPr wrap="square" lIns="0" tIns="0" rIns="0" bIns="0" anchor="ctr">
+            <a:off x="8412480" y="5120640"/>
+            <a:ext cx="3474720" cy="365760"/>
+          </a:xfrm>
+          <a:prstGeom prst="rect">
+            <a:avLst/>
+          </a:prstGeom>
+          <a:noFill/>
+        </p:spPr>
+        <p:txBody>
+          <a:bodyPr wrap="square" lIns="0" tIns="0" rIns="0" bIns="0" anchor="t">
             <a:spAutoFit/>
           </a:bodyPr>
           <a:lstStyle/>
           <a:p>
-            <a:pPr algn="ctr"/>
-            <a:r>
-              <a:rPr sz="1050" b="1">
-                <a:solidFill>
-                  <a:srgbClr val="A9B4C0"/>
-                </a:solidFill>
-              </a:rPr>
-              <a:t>pending</a:t>
-            </a:r>
-          </a:p>
-        </p:txBody>
-      </p:sp>
-      <p:sp>
-        <p:nvSpPr>
-          <p:cNvPr id="51" name="TextBox 50"/>
+            <a:r>
+              <a:rPr sz="1250" b="1">
+                <a:solidFill>
+                  <a:srgbClr val="FFFFFF"/>
+                </a:solidFill>
+                <a:latin typeface="Calibri"/>
+              </a:rPr>
+              <a:t>Entity Resolution · Витрина</a:t>
+            </a:r>
+          </a:p>
+        </p:txBody>
+      </p:sp>
+      <p:sp>
+        <p:nvSpPr>
+          <p:cNvPr id="85" name="TextBox 84"/>
           <p:cNvSpPr txBox="1"/>
           <p:nvPr/>
         </p:nvSpPr>
         <p:spPr>
           <a:xfrm>
-            <a:off x="3017520" y="5248656"/>
-            <a:ext cx="274320" cy="274320"/>
-          </a:xfrm>
-          <a:prstGeom prst="rect">
-            <a:avLst/>
-          </a:prstGeom>
-          <a:noFill/>
-        </p:spPr>
-        <p:txBody>
-          <a:bodyPr wrap="square" lIns="0" tIns="0" rIns="0" bIns="0" anchor="ctr">
+            <a:off x="8412480" y="5486400"/>
+            <a:ext cx="3474720" cy="201168"/>
+          </a:xfrm>
+          <a:prstGeom prst="rect">
+            <a:avLst/>
+          </a:prstGeom>
+          <a:noFill/>
+        </p:spPr>
+        <p:txBody>
+          <a:bodyPr wrap="square" lIns="0" tIns="0" rIns="0" bIns="0" anchor="t">
             <a:spAutoFit/>
           </a:bodyPr>
           <a:lstStyle/>
           <a:p>
-            <a:pPr algn="l"/>
-            <a:r>
-              <a:rPr sz="1300" b="1">
+            <a:pPr>
+              <a:lnSpc>
+                <a:spcPct val="105000"/>
+              </a:lnSpc>
+            </a:pPr>
+            <a:r>
+              <a:rPr sz="950">
                 <a:solidFill>
                   <a:srgbClr val="A9B4C0"/>
                 </a:solidFill>
-              </a:rPr>
-              <a:t>→</a:t>
-            </a:r>
-          </a:p>
-        </p:txBody>
-      </p:sp>
-      <p:sp>
-        <p:nvSpPr>
-          <p:cNvPr id="52" name="Rounded Rectangle 51"/>
+                <a:latin typeface="Calibri"/>
+              </a:rPr>
+              <a:t>каталоги item / supplier / period · статус processed</a:t>
+            </a:r>
+          </a:p>
+        </p:txBody>
+      </p:sp>
+      <p:cxnSp>
+        <p:nvCxnSpPr>
+          <p:cNvPr id="86" name="Connector 85"/>
+          <p:cNvCxnSpPr/>
+          <p:nvPr/>
+        </p:nvCxnSpPr>
+        <p:spPr>
+          <a:xfrm>
+            <a:off x="10149840" y="4754880"/>
+            <a:ext cx="0" cy="274320"/>
+          </a:xfrm>
+          <a:prstGeom prst="line">
+            <a:avLst/>
+          </a:prstGeom>
+          <a:ln w="25400">
+            <a:solidFill>
+              <a:srgbClr val="FF5A36"/>
+            </a:solidFill>
+            <a:tailEnd type="triangle" w="med" len="med"/>
+          </a:ln>
+          <a:effectLst/>
+        </p:spPr>
+        <p:style>
+          <a:lnRef idx="2">
+            <a:schemeClr val="accent1"/>
+          </a:lnRef>
+          <a:fillRef idx="0">
+            <a:schemeClr val="accent1"/>
+          </a:fillRef>
+          <a:effectRef idx="1">
+            <a:schemeClr val="accent1"/>
+          </a:effectRef>
+          <a:fontRef idx="minor">
+            <a:schemeClr val="tx1"/>
+          </a:fontRef>
+        </p:style>
+      </p:cxnSp>
+      <p:sp>
+        <p:nvSpPr>
+          <p:cNvPr id="87" name="TextBox 86"/>
+          <p:cNvSpPr txBox="1"/>
+          <p:nvPr/>
+        </p:nvSpPr>
+        <p:spPr>
+          <a:xfrm>
+            <a:off x="6949440" y="2103120"/>
+            <a:ext cx="548640" cy="237744"/>
+          </a:xfrm>
+          <a:prstGeom prst="rect">
+            <a:avLst/>
+          </a:prstGeom>
+          <a:noFill/>
+        </p:spPr>
+        <p:txBody>
+          <a:bodyPr wrap="square" lIns="0" tIns="0" rIns="0" bIns="0" anchor="t">
+            <a:spAutoFit/>
+          </a:bodyPr>
+          <a:lstStyle/>
+          <a:p>
+            <a:r>
+              <a:rPr sz="1000" b="1">
+                <a:solidFill>
+                  <a:srgbClr val="A9B4C0"/>
+                </a:solidFill>
+                <a:latin typeface="Calibri"/>
+              </a:rPr>
+              <a:t>prices</a:t>
+            </a:r>
+          </a:p>
+        </p:txBody>
+      </p:sp>
+      <p:sp>
+        <p:nvSpPr>
+          <p:cNvPr id="88" name="TextBox 87"/>
+          <p:cNvSpPr txBox="1"/>
+          <p:nvPr/>
+        </p:nvSpPr>
+        <p:spPr>
+          <a:xfrm>
+            <a:off x="6949440" y="4498848"/>
+            <a:ext cx="548640" cy="237744"/>
+          </a:xfrm>
+          <a:prstGeom prst="rect">
+            <a:avLst/>
+          </a:prstGeom>
+          <a:noFill/>
+        </p:spPr>
+        <p:txBody>
+          <a:bodyPr wrap="square" lIns="0" tIns="0" rIns="0" bIns="0" anchor="t">
+            <a:spAutoFit/>
+          </a:bodyPr>
+          <a:lstStyle/>
+          <a:p>
+            <a:r>
+              <a:rPr sz="1000" b="1">
+                <a:solidFill>
+                  <a:srgbClr val="A9B4C0"/>
+                </a:solidFill>
+                <a:latin typeface="Calibri"/>
+              </a:rPr>
+              <a:t>matrix</a:t>
+            </a:r>
+          </a:p>
+        </p:txBody>
+      </p:sp>
+      <p:sp>
+        <p:nvSpPr>
+          <p:cNvPr id="89" name="Rounded Rectangle 88"/>
           <p:cNvSpPr/>
           <p:nvPr/>
         </p:nvSpPr>
         <p:spPr>
           <a:xfrm>
-            <a:off x="3310128" y="5212080"/>
-            <a:ext cx="1371600" cy="384048"/>
+            <a:off x="548640" y="4023360"/>
+            <a:ext cx="4709160" cy="1691640"/>
           </a:xfrm>
           <a:prstGeom prst="roundRect">
             <a:avLst>
-              <a:gd name="adj" fmla="val 50000"/>
+              <a:gd name="adj" fmla="val 10000"/>
             </a:avLst>
           </a:prstGeom>
           <a:solidFill>
-            <a:srgbClr val="22272D"/>
+            <a:srgbClr val="262C33"/>
           </a:solidFill>
           <a:ln w="12700">
             <a:solidFill>
-              <a:srgbClr val="3FBF8A"/>
+              <a:srgbClr val="3A434D"/>
             </a:solidFill>
           </a:ln>
           <a:effectLst/>
@@ -20777,95 +20129,23 @@
       </p:sp>
       <p:sp>
         <p:nvSpPr>
-          <p:cNvPr id="53" name="TextBox 52"/>
-          <p:cNvSpPr txBox="1"/>
-          <p:nvPr/>
-        </p:nvSpPr>
-        <p:spPr>
-          <a:xfrm>
-            <a:off x="3310128" y="5248656"/>
-            <a:ext cx="1371600" cy="329184"/>
-          </a:xfrm>
-          <a:prstGeom prst="rect">
-            <a:avLst/>
-          </a:prstGeom>
-          <a:noFill/>
-        </p:spPr>
-        <p:txBody>
-          <a:bodyPr wrap="square" lIns="0" tIns="0" rIns="0" bIns="0" anchor="ctr">
-            <a:spAutoFit/>
-          </a:bodyPr>
-          <a:lstStyle/>
-          <a:p>
-            <a:pPr algn="ctr"/>
-            <a:r>
-              <a:rPr sz="1050" b="1">
-                <a:solidFill>
-                  <a:srgbClr val="3FBF8A"/>
-                </a:solidFill>
-              </a:rPr>
-              <a:t>processed</a:t>
-            </a:r>
-          </a:p>
-        </p:txBody>
-      </p:sp>
-      <p:sp>
-        <p:nvSpPr>
-          <p:cNvPr id="54" name="TextBox 53"/>
-          <p:cNvSpPr txBox="1"/>
-          <p:nvPr/>
-        </p:nvSpPr>
-        <p:spPr>
-          <a:xfrm>
-            <a:off x="4754880" y="5248656"/>
-            <a:ext cx="365760" cy="274320"/>
-          </a:xfrm>
-          <a:prstGeom prst="rect">
-            <a:avLst/>
-          </a:prstGeom>
-          <a:noFill/>
-        </p:spPr>
-        <p:txBody>
-          <a:bodyPr wrap="square" lIns="0" tIns="0" rIns="0" bIns="0" anchor="ctr">
-            <a:spAutoFit/>
-          </a:bodyPr>
-          <a:lstStyle/>
-          <a:p>
-            <a:pPr algn="l"/>
-            <a:r>
-              <a:rPr sz="1050" b="1">
-                <a:solidFill>
-                  <a:srgbClr val="A9B4C0"/>
-                </a:solidFill>
-              </a:rPr>
-              <a:t>или</a:t>
-            </a:r>
-          </a:p>
-        </p:txBody>
-      </p:sp>
-      <p:sp>
-        <p:nvSpPr>
-          <p:cNvPr id="55" name="Rounded Rectangle 54"/>
+          <p:cNvPr id="90" name="Rectangle 89"/>
           <p:cNvSpPr/>
           <p:nvPr/>
         </p:nvSpPr>
         <p:spPr>
           <a:xfrm>
-            <a:off x="5138928" y="5212080"/>
-            <a:ext cx="1005840" cy="384048"/>
-          </a:xfrm>
-          <a:prstGeom prst="roundRect">
-            <a:avLst>
-              <a:gd name="adj" fmla="val 50000"/>
-            </a:avLst>
+            <a:off x="548640" y="4023360"/>
+            <a:ext cx="64008" cy="1691640"/>
+          </a:xfrm>
+          <a:prstGeom prst="rect">
+            <a:avLst/>
           </a:prstGeom>
           <a:solidFill>
-            <a:srgbClr val="22272D"/>
+            <a:srgbClr val="FF5A36"/>
           </a:solidFill>
-          <a:ln w="12700">
-            <a:solidFill>
-              <a:srgbClr val="E5484D"/>
-            </a:solidFill>
+          <a:ln>
+            <a:noFill/>
           </a:ln>
           <a:effectLst/>
         </p:spPr>
@@ -20894,48 +20174,14 @@
       </p:sp>
       <p:sp>
         <p:nvSpPr>
-          <p:cNvPr id="56" name="TextBox 55"/>
+          <p:cNvPr id="91" name="TextBox 90"/>
           <p:cNvSpPr txBox="1"/>
           <p:nvPr/>
         </p:nvSpPr>
         <p:spPr>
           <a:xfrm>
-            <a:off x="5138928" y="5248656"/>
-            <a:ext cx="1005840" cy="329184"/>
-          </a:xfrm>
-          <a:prstGeom prst="rect">
-            <a:avLst/>
-          </a:prstGeom>
-          <a:noFill/>
-        </p:spPr>
-        <p:txBody>
-          <a:bodyPr wrap="square" lIns="0" tIns="0" rIns="0" bIns="0" anchor="ctr">
-            <a:spAutoFit/>
-          </a:bodyPr>
-          <a:lstStyle/>
-          <a:p>
-            <a:pPr algn="ctr"/>
-            <a:r>
-              <a:rPr sz="1050" b="1">
-                <a:solidFill>
-                  <a:srgbClr val="E5484D"/>
-                </a:solidFill>
-              </a:rPr>
-              <a:t>failed</a:t>
-            </a:r>
-          </a:p>
-        </p:txBody>
-      </p:sp>
-      <p:sp>
-        <p:nvSpPr>
-          <p:cNvPr id="57" name="TextBox 56"/>
-          <p:cNvSpPr txBox="1"/>
-          <p:nvPr/>
-        </p:nvSpPr>
-        <p:spPr>
-          <a:xfrm>
-            <a:off x="548640" y="5806440"/>
-            <a:ext cx="11064240" cy="365760"/>
+            <a:off x="841248" y="4206240"/>
+            <a:ext cx="4160520" cy="1371600"/>
           </a:xfrm>
           <a:prstGeom prst="rect">
             <a:avLst/>
@@ -20948,14 +20194,35 @@
           </a:bodyPr>
           <a:lstStyle/>
           <a:p>
-            <a:pPr algn="l"/>
-            <a:r>
-              <a:rPr sz="1150" b="0">
+            <a:pPr>
+              <a:spcAft>
+                <a:spcPts val="500"/>
+              </a:spcAft>
+            </a:pPr>
+            <a:r>
+              <a:rPr sz="1300" b="1">
+                <a:solidFill>
+                  <a:srgbClr val="FF5A36"/>
+                </a:solidFill>
+                <a:latin typeface="Calibri"/>
+              </a:rPr>
+              <a:t>Результат</a:t>
+            </a:r>
+          </a:p>
+          <a:p>
+            <a:pPr>
+              <a:lnSpc>
+                <a:spcPct val="112000"/>
+              </a:lnSpc>
+            </a:pPr>
+            <a:r>
+              <a:rPr sz="1150">
                 <a:solidFill>
                   <a:srgbClr val="A9B4C0"/>
                 </a:solidFill>
-              </a:rPr>
-              <a:t>Исходные Excel не изменяются · поставщики и материалы приводятся к единым названиям · знакомые форматы разбираются автоматически</a:t>
+                <a:latin typeface="Calibri"/>
+              </a:rPr>
+              <a:t>«Цены» → mart.price_facts · «метрики» → mart.metrics — единая витрина с каталогами поставщиков и материалов.</a:t>
             </a:r>
           </a:p>
         </p:txBody>
@@ -21165,14 +20432,30 @@
               <a:buNone/>
             </a:pPr>
             <a:r>
-              <a:rPr lang="en-US" sz="1300" b="1" dirty="0">
+              <a:rPr lang="ru-RU" b="1" dirty="0">
                 <a:solidFill>
                   <a:srgbClr val="2FA6C9"/>
                 </a:solidFill>
               </a:rPr>
-              <a:t>схема public</a:t>
-            </a:r>
-            <a:endParaRPr lang="en-US" sz="1300" dirty="0"/>
+              <a:t>С</a:t>
+            </a:r>
+            <a:r>
+              <a:rPr lang="en-US" b="1" dirty="0" err="1">
+                <a:solidFill>
+                  <a:srgbClr val="2FA6C9"/>
+                </a:solidFill>
+              </a:rPr>
+              <a:t>хема</a:t>
+            </a:r>
+            <a:r>
+              <a:rPr lang="en-US" b="1" dirty="0">
+                <a:solidFill>
+                  <a:srgbClr val="2FA6C9"/>
+                </a:solidFill>
+              </a:rPr>
+              <a:t> public</a:t>
+            </a:r>
+            <a:endParaRPr lang="en-US" dirty="0"/>
           </a:p>
         </p:txBody>
       </p:sp>
@@ -21231,14 +20514,30 @@
               <a:buNone/>
             </a:pPr>
             <a:r>
-              <a:rPr lang="en-US" sz="1300" b="1" dirty="0">
+              <a:rPr lang="ru-RU" b="1" dirty="0">
                 <a:solidFill>
                   <a:srgbClr val="3FBF8A"/>
                 </a:solidFill>
               </a:rPr>
-              <a:t>схема mart</a:t>
-            </a:r>
-            <a:endParaRPr lang="en-US" sz="1300" dirty="0"/>
+              <a:t>С</a:t>
+            </a:r>
+            <a:r>
+              <a:rPr lang="en-US" b="1" dirty="0" err="1">
+                <a:solidFill>
+                  <a:srgbClr val="3FBF8A"/>
+                </a:solidFill>
+              </a:rPr>
+              <a:t>хема</a:t>
+            </a:r>
+            <a:r>
+              <a:rPr lang="en-US" b="1" dirty="0">
+                <a:solidFill>
+                  <a:srgbClr val="3FBF8A"/>
+                </a:solidFill>
+              </a:rPr>
+              <a:t> mart</a:t>
+            </a:r>
+            <a:endParaRPr lang="en-US" dirty="0"/>
           </a:p>
         </p:txBody>
       </p:sp>
@@ -21301,28 +20600,28 @@
               <a:buNone/>
             </a:pPr>
             <a:r>
-              <a:rPr lang="en-US" sz="1400" b="1" dirty="0">
+              <a:rPr lang="en-US" sz="1600" b="1" dirty="0">
                 <a:solidFill>
                   <a:srgbClr val="FFFFFF"/>
                 </a:solidFill>
               </a:rPr>
               <a:t>files</a:t>
             </a:r>
-            <a:endParaRPr lang="en-US" sz="1400" dirty="0"/>
+            <a:endParaRPr lang="en-US" sz="1600" dirty="0"/>
           </a:p>
           <a:p>
             <a:pPr marL="0" indent="0" algn="ctr">
               <a:buNone/>
             </a:pPr>
             <a:r>
-              <a:rPr lang="en-US" sz="1100" dirty="0">
+              <a:rPr lang="en-US" sz="1600" dirty="0">
                 <a:solidFill>
                   <a:srgbClr val="A9B4C0"/>
                 </a:solidFill>
               </a:rPr>
               <a:t>id · filename · file_hash UK · status</a:t>
             </a:r>
-            <a:endParaRPr lang="en-US" sz="1400" dirty="0"/>
+            <a:endParaRPr lang="en-US" sz="1600" dirty="0"/>
           </a:p>
         </p:txBody>
       </p:sp>
@@ -21385,28 +20684,28 @@
               <a:buNone/>
             </a:pPr>
             <a:r>
-              <a:rPr lang="en-US" sz="1400" b="1" dirty="0">
+              <a:rPr lang="en-US" sz="1600" b="1" dirty="0">
                 <a:solidFill>
                   <a:srgbClr val="FFFFFF"/>
                 </a:solidFill>
               </a:rPr>
               <a:t>sheets</a:t>
             </a:r>
-            <a:endParaRPr lang="en-US" sz="1400" dirty="0"/>
+            <a:endParaRPr lang="en-US" sz="1600" dirty="0"/>
           </a:p>
           <a:p>
             <a:pPr marL="0" indent="0" algn="ctr">
               <a:buNone/>
             </a:pPr>
             <a:r>
-              <a:rPr lang="en-US" sz="1100" dirty="0">
+              <a:rPr lang="en-US" sz="1600" dirty="0">
                 <a:solidFill>
                   <a:srgbClr val="A9B4C0"/>
                 </a:solidFill>
               </a:rPr>
               <a:t>file_id FK · period · sheet_kind</a:t>
             </a:r>
-            <a:endParaRPr lang="en-US" sz="1400" dirty="0"/>
+            <a:endParaRPr lang="en-US" sz="1600" dirty="0"/>
           </a:p>
         </p:txBody>
       </p:sp>
@@ -21466,14 +20765,14 @@
               <a:buNone/>
             </a:pPr>
             <a:r>
-              <a:rPr lang="en-US" sz="1100" dirty="0">
+              <a:rPr lang="en-US" sz="1600" dirty="0">
                 <a:solidFill>
                   <a:srgbClr val="A9B4C0"/>
                 </a:solidFill>
               </a:rPr>
               <a:t>1 : N</a:t>
             </a:r>
-            <a:endParaRPr lang="en-US" sz="1100" dirty="0"/>
+            <a:endParaRPr lang="en-US" sz="1600" dirty="0"/>
           </a:p>
         </p:txBody>
       </p:sp>
@@ -21691,28 +20990,28 @@
               <a:buNone/>
             </a:pPr>
             <a:r>
-              <a:rPr lang="en-US" sz="1300" b="1" dirty="0">
+              <a:rPr lang="en-US" sz="1600" b="1" dirty="0">
                 <a:solidFill>
                   <a:srgbClr val="FFFFFF"/>
                 </a:solidFill>
               </a:rPr>
               <a:t>column_metadata</a:t>
             </a:r>
-            <a:endParaRPr lang="en-US" sz="1300" dirty="0"/>
+            <a:endParaRPr lang="en-US" sz="1600" dirty="0"/>
           </a:p>
           <a:p>
             <a:pPr marL="0" indent="0" algn="ctr">
               <a:buNone/>
             </a:pPr>
             <a:r>
-              <a:rPr lang="en-US" sz="1100" dirty="0">
+              <a:rPr lang="en-US" sz="1600" dirty="0">
                 <a:solidFill>
                   <a:srgbClr val="A9B4C0"/>
                 </a:solidFill>
               </a:rPr>
               <a:t>data_type · role</a:t>
             </a:r>
-            <a:endParaRPr lang="en-US" sz="1300" dirty="0"/>
+            <a:endParaRPr lang="en-US" sz="1600" dirty="0"/>
           </a:p>
         </p:txBody>
       </p:sp>
@@ -21775,28 +21074,28 @@
               <a:buNone/>
             </a:pPr>
             <a:r>
-              <a:rPr lang="en-US" sz="1300" b="1" dirty="0">
+              <a:rPr lang="en-US" sz="1600" b="1" dirty="0">
                 <a:solidFill>
                   <a:srgbClr val="FFFFFF"/>
                 </a:solidFill>
               </a:rPr>
               <a:t>cells</a:t>
             </a:r>
-            <a:endParaRPr lang="en-US" sz="1300" dirty="0"/>
+            <a:endParaRPr lang="en-US" sz="1600" dirty="0"/>
           </a:p>
           <a:p>
             <a:pPr marL="0" indent="0" algn="ctr">
               <a:buNone/>
             </a:pPr>
             <a:r>
-              <a:rPr lang="en-US" sz="1100" dirty="0">
+              <a:rPr lang="en-US" sz="1600" dirty="0">
                 <a:solidFill>
                   <a:srgbClr val="A9B4C0"/>
                 </a:solidFill>
               </a:rPr>
               <a:t>row_num · value_text · value_number</a:t>
             </a:r>
-            <a:endParaRPr lang="en-US" sz="1300" dirty="0"/>
+            <a:endParaRPr lang="en-US" sz="1600" dirty="0"/>
           </a:p>
         </p:txBody>
       </p:sp>
@@ -21859,28 +21158,28 @@
               <a:buNone/>
             </a:pPr>
             <a:r>
-              <a:rPr lang="en-US" sz="1300" b="1" dirty="0">
+              <a:rPr lang="en-US" sz="1600" b="1" dirty="0">
                 <a:solidFill>
                   <a:srgbClr val="FFFFFF"/>
                 </a:solidFill>
               </a:rPr>
               <a:t>excel_comments</a:t>
             </a:r>
-            <a:endParaRPr lang="en-US" sz="1300" dirty="0"/>
+            <a:endParaRPr lang="en-US" sz="1600" dirty="0"/>
           </a:p>
           <a:p>
             <a:pPr marL="0" indent="0" algn="ctr">
               <a:buNone/>
             </a:pPr>
             <a:r>
-              <a:rPr lang="en-US" sz="1100" dirty="0">
+              <a:rPr lang="en-US" sz="1600" dirty="0">
                 <a:solidFill>
                   <a:srgbClr val="A9B4C0"/>
                 </a:solidFill>
               </a:rPr>
               <a:t>cell_ref · author · text</a:t>
             </a:r>
-            <a:endParaRPr lang="en-US" sz="1300" dirty="0"/>
+            <a:endParaRPr lang="en-US" sz="1600" dirty="0"/>
           </a:p>
         </p:txBody>
       </p:sp>
@@ -21943,28 +21242,28 @@
               <a:buNone/>
             </a:pPr>
             <a:r>
-              <a:rPr lang="en-US" sz="1300" b="1" dirty="0">
+              <a:rPr lang="en-US" sz="1600" b="1" dirty="0">
                 <a:solidFill>
                   <a:srgbClr val="FFFFFF"/>
                 </a:solidFill>
               </a:rPr>
               <a:t>Служебные таблицы</a:t>
             </a:r>
-            <a:endParaRPr lang="en-US" sz="1300" dirty="0"/>
+            <a:endParaRPr lang="en-US" sz="1600" dirty="0"/>
           </a:p>
           <a:p>
             <a:pPr marL="0" indent="0" algn="ctr">
               <a:buNone/>
             </a:pPr>
             <a:r>
-              <a:rPr lang="en-US" sz="1100" dirty="0">
+              <a:rPr lang="en-US" sz="1600" dirty="0">
                 <a:solidFill>
                   <a:srgbClr val="A9B4C0"/>
                 </a:solidFill>
               </a:rPr>
               <a:t>entity_dictionary · query_cache · query_logs</a:t>
             </a:r>
-            <a:endParaRPr lang="en-US" sz="1300" dirty="0"/>
+            <a:endParaRPr lang="en-US" sz="1600" dirty="0"/>
           </a:p>
         </p:txBody>
       </p:sp>
@@ -22180,28 +21479,28 @@
               <a:buNone/>
             </a:pPr>
             <a:r>
-              <a:rPr lang="en-US" sz="1400" b="1" dirty="0">
+              <a:rPr lang="en-US" sz="1600" b="1" dirty="0">
                 <a:solidFill>
                   <a:srgbClr val="FFFFFF"/>
                 </a:solidFill>
               </a:rPr>
               <a:t>price_facts</a:t>
             </a:r>
-            <a:endParaRPr lang="en-US" sz="1400" dirty="0"/>
+            <a:endParaRPr lang="en-US" sz="1600" dirty="0"/>
           </a:p>
           <a:p>
             <a:pPr marL="0" indent="0" algn="ctr">
               <a:buNone/>
             </a:pPr>
             <a:r>
-              <a:rPr lang="en-US" sz="1100" dirty="0">
+              <a:rPr lang="en-US" sz="1600" dirty="0">
                 <a:solidFill>
                   <a:srgbClr val="A9B4C0"/>
                 </a:solidFill>
               </a:rPr>
               <a:t>file_id FK · item_name · supplier · price_type · value · is_blank</a:t>
             </a:r>
-            <a:endParaRPr lang="en-US" sz="1400" dirty="0"/>
+            <a:endParaRPr lang="en-US" sz="1600" dirty="0"/>
           </a:p>
         </p:txBody>
       </p:sp>
@@ -22264,28 +21563,28 @@
               <a:buNone/>
             </a:pPr>
             <a:r>
-              <a:rPr lang="en-US" sz="1400" b="1" dirty="0">
+              <a:rPr lang="en-US" sz="1600" b="1" dirty="0">
                 <a:solidFill>
                   <a:srgbClr val="FFFFFF"/>
                 </a:solidFill>
               </a:rPr>
               <a:t>metrics</a:t>
             </a:r>
-            <a:endParaRPr lang="en-US" sz="1400" dirty="0"/>
+            <a:endParaRPr lang="en-US" sz="1600" dirty="0"/>
           </a:p>
           <a:p>
             <a:pPr marL="0" indent="0" algn="ctr">
               <a:buNone/>
             </a:pPr>
             <a:r>
-              <a:rPr lang="en-US" sz="1100" dirty="0">
+              <a:rPr lang="en-US" sz="1600" dirty="0">
                 <a:solidFill>
                   <a:srgbClr val="A9B4C0"/>
                 </a:solidFill>
               </a:rPr>
               <a:t>file_id FK · dimension · metric_type · value · is_blank</a:t>
             </a:r>
-            <a:endParaRPr lang="en-US" sz="1400" dirty="0"/>
+            <a:endParaRPr lang="en-US" sz="1600" dirty="0"/>
           </a:p>
         </p:txBody>
       </p:sp>
@@ -22348,28 +21647,28 @@
               <a:buNone/>
             </a:pPr>
             <a:r>
-              <a:rPr lang="en-US" sz="1300" b="1" dirty="0">
+              <a:rPr lang="en-US" sz="1600" b="1" dirty="0">
                 <a:solidFill>
                   <a:srgbClr val="FFFFFF"/>
                 </a:solidFill>
               </a:rPr>
               <a:t>supplier_aliases · sheet_templates</a:t>
             </a:r>
-            <a:endParaRPr lang="en-US" sz="1300" dirty="0"/>
+            <a:endParaRPr lang="en-US" sz="1600" dirty="0"/>
           </a:p>
           <a:p>
             <a:pPr marL="0" indent="0" algn="ctr">
               <a:buNone/>
             </a:pPr>
             <a:r>
-              <a:rPr lang="en-US" sz="1100" dirty="0">
+              <a:rPr lang="en-US" sz="1600" dirty="0">
                 <a:solidFill>
                   <a:srgbClr val="A9B4C0"/>
                 </a:solidFill>
               </a:rPr>
               <a:t>канонические имена · шаблоны по fingerprint</a:t>
             </a:r>
-            <a:endParaRPr lang="en-US" sz="1300" dirty="0"/>
+            <a:endParaRPr lang="en-US" sz="1600" dirty="0"/>
           </a:p>
         </p:txBody>
       </p:sp>
@@ -22429,14 +21728,14 @@
               <a:buNone/>
             </a:pPr>
             <a:r>
-              <a:rPr lang="en-US" sz="1000" dirty="0">
+              <a:rPr lang="en-US" sz="1600" dirty="0">
                 <a:solidFill>
                   <a:srgbClr val="A9B4C0"/>
                 </a:solidFill>
               </a:rPr>
               <a:t>file_id</a:t>
             </a:r>
-            <a:endParaRPr lang="en-US" sz="1000" dirty="0"/>
+            <a:endParaRPr lang="en-US" sz="1600" dirty="0"/>
           </a:p>
         </p:txBody>
       </p:sp>

--- a/data/EVRAZ_Agent_main.pptx
+++ b/data/EVRAZ_Agent_main.pptx
@@ -779,7 +779,7 @@
           <a:p>
             <a:fld id="{3FA89327-E8A3-415C-A891-4B227273A86B}" type="datetimeFigureOut">
               <a:rPr lang="ru-RU" smtClean="0"/>
-              <a:t>24.10.2026</a:t>
+              <a:t>25.10.2026</a:t>
             </a:fld>
             <a:endParaRPr lang="ru-RU"/>
           </a:p>
@@ -1309,7 +1309,7 @@
           <a:p>
             <a:fld id="{5BCAD085-E8A6-8845-BD4E-CB4CCA059FC4}" type="datetimeFigureOut">
               <a:rPr lang="en-US" smtClean="0"/>
-              <a:t>10/24/2026</a:t>
+              <a:t>10/25/2026</a:t>
             </a:fld>
             <a:endParaRPr lang="en-US"/>
           </a:p>
@@ -1477,7 +1477,7 @@
           <a:p>
             <a:fld id="{5BCAD085-E8A6-8845-BD4E-CB4CCA059FC4}" type="datetimeFigureOut">
               <a:rPr lang="en-US" smtClean="0"/>
-              <a:t>10/24/2026</a:t>
+              <a:t>10/25/2026</a:t>
             </a:fld>
             <a:endParaRPr lang="en-US"/>
           </a:p>
@@ -1655,7 +1655,7 @@
           <a:p>
             <a:fld id="{5BCAD085-E8A6-8845-BD4E-CB4CCA059FC4}" type="datetimeFigureOut">
               <a:rPr lang="en-US" smtClean="0"/>
-              <a:t>10/24/2026</a:t>
+              <a:t>10/25/2026</a:t>
             </a:fld>
             <a:endParaRPr lang="en-US"/>
           </a:p>
@@ -1823,7 +1823,7 @@
           <a:p>
             <a:fld id="{5BCAD085-E8A6-8845-BD4E-CB4CCA059FC4}" type="datetimeFigureOut">
               <a:rPr lang="en-US" smtClean="0"/>
-              <a:t>10/24/2026</a:t>
+              <a:t>10/25/2026</a:t>
             </a:fld>
             <a:endParaRPr lang="en-US"/>
           </a:p>
@@ -2068,7 +2068,7 @@
           <a:p>
             <a:fld id="{5BCAD085-E8A6-8845-BD4E-CB4CCA059FC4}" type="datetimeFigureOut">
               <a:rPr lang="en-US" smtClean="0"/>
-              <a:t>10/24/2026</a:t>
+              <a:t>10/25/2026</a:t>
             </a:fld>
             <a:endParaRPr lang="en-US"/>
           </a:p>
@@ -2353,7 +2353,7 @@
           <a:p>
             <a:fld id="{5BCAD085-E8A6-8845-BD4E-CB4CCA059FC4}" type="datetimeFigureOut">
               <a:rPr lang="en-US" smtClean="0"/>
-              <a:t>10/24/2026</a:t>
+              <a:t>10/25/2026</a:t>
             </a:fld>
             <a:endParaRPr lang="en-US"/>
           </a:p>
@@ -2772,7 +2772,7 @@
           <a:p>
             <a:fld id="{5BCAD085-E8A6-8845-BD4E-CB4CCA059FC4}" type="datetimeFigureOut">
               <a:rPr lang="en-US" smtClean="0"/>
-              <a:t>10/24/2026</a:t>
+              <a:t>10/25/2026</a:t>
             </a:fld>
             <a:endParaRPr lang="en-US"/>
           </a:p>
@@ -2889,7 +2889,7 @@
           <a:p>
             <a:fld id="{5BCAD085-E8A6-8845-BD4E-CB4CCA059FC4}" type="datetimeFigureOut">
               <a:rPr lang="en-US" smtClean="0"/>
-              <a:t>10/24/2026</a:t>
+              <a:t>10/25/2026</a:t>
             </a:fld>
             <a:endParaRPr lang="en-US"/>
           </a:p>
@@ -2984,7 +2984,7 @@
           <a:p>
             <a:fld id="{5BCAD085-E8A6-8845-BD4E-CB4CCA059FC4}" type="datetimeFigureOut">
               <a:rPr lang="en-US" smtClean="0"/>
-              <a:t>10/24/2026</a:t>
+              <a:t>10/25/2026</a:t>
             </a:fld>
             <a:endParaRPr lang="en-US"/>
           </a:p>
@@ -3259,7 +3259,7 @@
           <a:p>
             <a:fld id="{5BCAD085-E8A6-8845-BD4E-CB4CCA059FC4}" type="datetimeFigureOut">
               <a:rPr lang="en-US" smtClean="0"/>
-              <a:t>10/24/2026</a:t>
+              <a:t>10/25/2026</a:t>
             </a:fld>
             <a:endParaRPr lang="en-US"/>
           </a:p>
@@ -3511,7 +3511,7 @@
           <a:p>
             <a:fld id="{5BCAD085-E8A6-8845-BD4E-CB4CCA059FC4}" type="datetimeFigureOut">
               <a:rPr lang="en-US" smtClean="0"/>
-              <a:t>10/24/2026</a:t>
+              <a:t>10/25/2026</a:t>
             </a:fld>
             <a:endParaRPr lang="en-US"/>
           </a:p>
@@ -3722,7 +3722,7 @@
           <a:p>
             <a:fld id="{5BCAD085-E8A6-8845-BD4E-CB4CCA059FC4}" type="datetimeFigureOut">
               <a:rPr lang="en-US" smtClean="0"/>
-              <a:t>10/24/2026</a:t>
+              <a:t>10/25/2026</a:t>
             </a:fld>
             <a:endParaRPr lang="en-US"/>
           </a:p>
@@ -6768,7 +6768,7 @@
           </a:prstGeom>
           <a:extLst>
             <a:ext uri="{C572A759-6A51-4108-AA02-DFA0A04FC94B}">
-              <ma14:wrappingTextBoxFlag xmlns="" xmlns:ma14="http://schemas.microsoft.com/office/mac/drawingml/2011/main" val="0"/>
+              <ma14:wrappingTextBoxFlag xmlns:ma14="http://schemas.microsoft.com/office/mac/drawingml/2011/main" xmlns="" val="0"/>
             </a:ext>
           </a:extLst>
         </p:spPr>
@@ -14372,76 +14372,6 @@
       </p:sp>
       <p:sp>
         <p:nvSpPr>
-          <p:cNvPr id="114" name="Card"/>
-          <p:cNvSpPr/>
-          <p:nvPr/>
-        </p:nvSpPr>
-        <p:spPr>
-          <a:xfrm>
-            <a:off x="548640" y="5166360"/>
-            <a:ext cx="11064240" cy="822960"/>
-          </a:xfrm>
-          <a:prstGeom prst="roundRect">
-            <a:avLst>
-              <a:gd name="adj" fmla="val 8889"/>
-            </a:avLst>
-          </a:prstGeom>
-          <a:solidFill>
-            <a:srgbClr val="262C33"/>
-          </a:solidFill>
-          <a:ln w="12700">
-            <a:solidFill>
-              <a:srgbClr val="3A434D"/>
-            </a:solidFill>
-            <a:prstDash val="solid"/>
-          </a:ln>
-        </p:spPr>
-        <p:txBody>
-          <a:bodyPr/>
-          <a:lstStyle/>
-          <a:p>
-            <a:endParaRPr/>
-          </a:p>
-        </p:txBody>
-      </p:sp>
-      <p:sp>
-        <p:nvSpPr>
-          <p:cNvPr id="115" name="Text 15"/>
-          <p:cNvSpPr txBox="1"/>
-          <p:nvPr/>
-        </p:nvSpPr>
-        <p:spPr>
-          <a:xfrm>
-            <a:off x="822960" y="5166360"/>
-            <a:ext cx="10515600" cy="822960"/>
-          </a:xfrm>
-          <a:prstGeom prst="rect">
-            <a:avLst/>
-          </a:prstGeom>
-          <a:noFill/>
-          <a:ln/>
-        </p:spPr>
-        <p:txBody>
-          <a:bodyPr wrap="square" lIns="0" tIns="0" rIns="0" bIns="0" rtlCol="0" anchor="ctr"/>
-          <a:lstStyle/>
-          <a:p>
-            <a:pPr marL="0" indent="0">
-              <a:buNone/>
-            </a:pPr>
-            <a:r>
-              <a:rPr lang="en-US" sz="2000" dirty="0">
-                <a:solidFill>
-                  <a:srgbClr val="FFFFFF"/>
-                </a:solidFill>
-              </a:rPr>
-              <a:t>Кэш ответов и fallback-логика верификатора уменьшают число повторных прогонов графа</a:t>
-            </a:r>
-            <a:endParaRPr lang="en-US" sz="2000" dirty="0"/>
-          </a:p>
-        </p:txBody>
-      </p:sp>
-      <p:sp>
-        <p:nvSpPr>
           <p:cNvPr id="116" name="Slide Number Placeholder 0"/>
           <p:cNvSpPr>
             <a:spLocks noGrp="1"/>
@@ -14460,7 +14390,7 @@
           </a:prstGeom>
           <a:extLst>
             <a:ext uri="{C572A759-6A51-4108-AA02-DFA0A04FC94B}">
-              <ma14:wrappingTextBoxFlag xmlns:ma14="http://schemas.microsoft.com/office/mac/drawingml/2011/main" xmlns="" val="0"/>
+              <ma14:wrappingTextBoxFlag xmlns="" xmlns:ma14="http://schemas.microsoft.com/office/mac/drawingml/2011/main" val="0"/>
             </a:ext>
           </a:extLst>
         </p:spPr>
@@ -16156,7 +16086,7 @@
           </a:prstGeom>
           <a:extLst>
             <a:ext uri="{C572A759-6A51-4108-AA02-DFA0A04FC94B}">
-              <ma14:wrappingTextBoxFlag xmlns:ma14="http://schemas.microsoft.com/office/mac/drawingml/2011/main" xmlns="" val="0"/>
+              <ma14:wrappingTextBoxFlag xmlns="" xmlns:ma14="http://schemas.microsoft.com/office/mac/drawingml/2011/main" val="0"/>
             </a:ext>
           </a:extLst>
         </p:spPr>
@@ -17500,7 +17430,7 @@
           </a:prstGeom>
           <a:extLst>
             <a:ext uri="{C572A759-6A51-4108-AA02-DFA0A04FC94B}">
-              <ma14:wrappingTextBoxFlag xmlns:ma14="http://schemas.microsoft.com/office/mac/drawingml/2011/main" xmlns="" val="0"/>
+              <ma14:wrappingTextBoxFlag xmlns="" xmlns:ma14="http://schemas.microsoft.com/office/mac/drawingml/2011/main" val="0"/>
             </a:ext>
           </a:extLst>
         </p:spPr>
@@ -17692,7 +17622,7 @@
           </a:prstGeom>
           <a:extLst>
             <a:ext uri="{C572A759-6A51-4108-AA02-DFA0A04FC94B}">
-              <ma14:wrappingTextBoxFlag xmlns="" xmlns:ma14="http://schemas.microsoft.com/office/mac/drawingml/2011/main" val="0"/>
+              <ma14:wrappingTextBoxFlag xmlns:ma14="http://schemas.microsoft.com/office/mac/drawingml/2011/main" xmlns="" val="0"/>
             </a:ext>
           </a:extLst>
         </p:spPr>
@@ -18002,7 +17932,7 @@
         <p:spPr>
           <a:xfrm>
             <a:off x="3520440" y="2240280"/>
-            <a:ext cx="2313432" cy="3566160"/>
+            <a:ext cx="2313432" cy="1636345"/>
           </a:xfrm>
           <a:prstGeom prst="rect">
             <a:avLst/>
@@ -18023,14 +17953,38 @@
               <a:buChar char="•"/>
             </a:pPr>
             <a:r>
-              <a:rPr sz="1400">
+              <a:rPr sz="1400" dirty="0" err="1">
                 <a:solidFill>
                   <a:srgbClr val="FFFFFF"/>
                 </a:solidFill>
                 <a:latin typeface="Calibri"/>
               </a:rPr>
-              <a:t>LangGraph + checkpoint-postgres</a:t>
-            </a:r>
+              <a:t>LangGraph</a:t>
+            </a:r>
+            <a:r>
+              <a:rPr sz="1400" dirty="0">
+                <a:solidFill>
+                  <a:srgbClr val="FFFFFF"/>
+                </a:solidFill>
+                <a:latin typeface="Calibri"/>
+              </a:rPr>
+              <a:t> + checkpoint-</a:t>
+            </a:r>
+            <a:r>
+              <a:rPr sz="1400" dirty="0" err="1">
+                <a:solidFill>
+                  <a:srgbClr val="FFFFFF"/>
+                </a:solidFill>
+                <a:latin typeface="Calibri"/>
+              </a:rPr>
+              <a:t>postgres</a:t>
+            </a:r>
+            <a:endParaRPr sz="1400" dirty="0">
+              <a:solidFill>
+                <a:srgbClr val="FFFFFF"/>
+              </a:solidFill>
+              <a:latin typeface="Calibri"/>
+            </a:endParaRPr>
           </a:p>
           <a:p>
             <a:pPr marL="342900" indent="-342900">
@@ -18041,13 +17995,22 @@
               <a:buChar char="•"/>
             </a:pPr>
             <a:r>
-              <a:rPr sz="1400">
+              <a:rPr sz="1400" dirty="0" err="1">
                 <a:solidFill>
                   <a:srgbClr val="FFFFFF"/>
                 </a:solidFill>
                 <a:latin typeface="Calibri"/>
               </a:rPr>
-              <a:t>langchain-openai — structured output</a:t>
+              <a:t>langchain-openai</a:t>
+            </a:r>
+            <a:r>
+              <a:rPr sz="1400" dirty="0">
+                <a:solidFill>
+                  <a:srgbClr val="FFFFFF"/>
+                </a:solidFill>
+                <a:latin typeface="Calibri"/>
+              </a:rPr>
+              <a:t> — structured output</a:t>
             </a:r>
           </a:p>
           <a:p>
@@ -18059,68 +18022,65 @@
               <a:buChar char="•"/>
             </a:pPr>
             <a:r>
+              <a:rPr sz="1400" dirty="0" err="1">
+                <a:solidFill>
+                  <a:srgbClr val="FFFFFF"/>
+                </a:solidFill>
+                <a:latin typeface="Calibri"/>
+              </a:rPr>
+              <a:t>Провайдер</a:t>
+            </a:r>
+            <a:r>
+              <a:rPr sz="1400" dirty="0">
+                <a:solidFill>
+                  <a:srgbClr val="FFFFFF"/>
+                </a:solidFill>
+                <a:latin typeface="Calibri"/>
+              </a:rPr>
+              <a:t>: OpenAI-</a:t>
+            </a:r>
+            <a:r>
+              <a:rPr sz="1400" dirty="0" err="1">
+                <a:solidFill>
+                  <a:srgbClr val="FFFFFF"/>
+                </a:solidFill>
+                <a:latin typeface="Calibri"/>
+              </a:rPr>
+              <a:t>совместимый</a:t>
+            </a:r>
+            <a:r>
+              <a:rPr sz="1400" dirty="0">
+                <a:solidFill>
+                  <a:srgbClr val="FFFFFF"/>
+                </a:solidFill>
+                <a:latin typeface="Calibri"/>
+              </a:rPr>
+              <a:t> API </a:t>
+            </a:r>
+            <a:r>
               <a:rPr sz="1400">
                 <a:solidFill>
                   <a:srgbClr val="FFFFFF"/>
                 </a:solidFill>
                 <a:latin typeface="Calibri"/>
               </a:rPr>
-              <a:t>Провайдер: OpenAI-совместимый API · DeepSeek</a:t>
-            </a:r>
-          </a:p>
-          <a:p>
-            <a:pPr marL="342900" indent="-342900">
-              <a:spcAft>
-                <a:spcPts val="500"/>
-              </a:spcAft>
-              <a:buSzPct val="100000"/>
-              <a:buChar char="•"/>
-            </a:pPr>
-            <a:r>
-              <a:rPr sz="1400">
+              <a:t>· </a:t>
+            </a:r>
+            <a:r>
+              <a:rPr lang="en-US" sz="1400">
                 <a:solidFill>
                   <a:srgbClr val="FFFFFF"/>
                 </a:solidFill>
                 <a:latin typeface="Calibri"/>
               </a:rPr>
-              <a:t>Pydantic: Plan · SQLStep · SheetSchema</a:t>
-            </a:r>
-          </a:p>
-          <a:p>
-            <a:pPr marL="342900" indent="-342900">
-              <a:spcAft>
-                <a:spcPts val="500"/>
-              </a:spcAft>
-              <a:buSzPct val="100000"/>
-              <a:buChar char="•"/>
-            </a:pPr>
-            <a:r>
-              <a:rPr sz="1400">
-                <a:solidFill>
-                  <a:srgbClr val="FFFFFF"/>
-                </a:solidFill>
-                <a:latin typeface="Calibri"/>
-              </a:rPr>
-              <a:t>Верификатор — самопроверка (до 3 попыток)</a:t>
-            </a:r>
-          </a:p>
-          <a:p>
-            <a:pPr marL="342900" indent="-342900">
-              <a:spcAft>
-                <a:spcPts val="500"/>
-              </a:spcAft>
-              <a:buSzPct val="100000"/>
-              <a:buChar char="•"/>
-            </a:pPr>
-            <a:r>
-              <a:rPr sz="1400">
-                <a:solidFill>
-                  <a:srgbClr val="FFFFFF"/>
-                </a:solidFill>
-                <a:latin typeface="Calibri"/>
-              </a:rPr>
-              <a:t>Entity Resolution · кэш ответов</a:t>
-            </a:r>
+              <a:t>Qwen3.8-27B</a:t>
+            </a:r>
+            <a:endParaRPr sz="1400" dirty="0">
+              <a:solidFill>
+                <a:srgbClr val="FFFFFF"/>
+              </a:solidFill>
+              <a:latin typeface="Calibri"/>
+            </a:endParaRPr>
           </a:p>
         </p:txBody>
       </p:sp>
@@ -18828,61 +18788,26 @@
       </p:sp>
       <p:sp>
         <p:nvSpPr>
-          <p:cNvPr id="57" name="TextBox 56"/>
-          <p:cNvSpPr txBox="1"/>
-          <p:nvPr/>
-        </p:nvSpPr>
-        <p:spPr>
-          <a:xfrm>
-            <a:off x="548640" y="5806440"/>
-            <a:ext cx="11064240" cy="365760"/>
-          </a:xfrm>
-          <a:prstGeom prst="rect">
-            <a:avLst/>
-          </a:prstGeom>
-          <a:noFill/>
-        </p:spPr>
-        <p:txBody>
-          <a:bodyPr wrap="square" lIns="0" tIns="0" rIns="0" bIns="0" anchor="t">
-            <a:spAutoFit/>
-          </a:bodyPr>
-          <a:lstStyle/>
-          <a:p>
-            <a:pPr algn="l"/>
-            <a:r>
-              <a:rPr sz="1150">
-                <a:solidFill>
-                  <a:srgbClr val="A9B4C0"/>
-                </a:solidFill>
-                <a:latin typeface="Calibri"/>
-              </a:rPr>
-              <a:t>Исходные Excel не изменяются (только чтение) · единые названия поставщиков и материалов · витрина готова для вопросов и графиков</a:t>
-            </a:r>
-          </a:p>
-        </p:txBody>
-      </p:sp>
-      <p:sp>
-        <p:nvSpPr>
-          <p:cNvPr id="58" name="Rounded Rectangle 57"/>
+          <p:cNvPr id="9" name="Rounded Rectangle 8"/>
           <p:cNvSpPr/>
           <p:nvPr/>
         </p:nvSpPr>
         <p:spPr>
           <a:xfrm>
-            <a:off x="548640" y="1755648"/>
-            <a:ext cx="2103120" cy="868680"/>
+            <a:off x="548640" y="1900000"/>
+            <a:ext cx="11101360" cy="3620000"/>
           </a:xfrm>
           <a:prstGeom prst="roundRect">
             <a:avLst>
-              <a:gd name="adj" fmla="val 70000"/>
+              <a:gd name="adj" fmla="val 2500"/>
             </a:avLst>
           </a:prstGeom>
           <a:solidFill>
-            <a:srgbClr val="262C33"/>
+            <a:srgbClr val="20262D"/>
           </a:solidFill>
           <a:ln w="12700">
             <a:solidFill>
-              <a:srgbClr val="3A434D"/>
+              <a:srgbClr val="2C3742"/>
             </a:solidFill>
           </a:ln>
           <a:effectLst/>
@@ -18906,106 +18831,28 @@
           <a:lstStyle/>
           <a:p>
             <a:pPr algn="ctr"/>
-            <a:endParaRPr/>
-          </a:p>
-        </p:txBody>
-      </p:sp>
-      <p:sp>
-        <p:nvSpPr>
-          <p:cNvPr id="59" name="TextBox 58"/>
-          <p:cNvSpPr txBox="1"/>
-          <p:nvPr/>
-        </p:nvSpPr>
-        <p:spPr>
-          <a:xfrm>
-            <a:off x="640080" y="1847088"/>
-            <a:ext cx="1920239" cy="365760"/>
-          </a:xfrm>
-          <a:prstGeom prst="rect">
-            <a:avLst/>
-          </a:prstGeom>
-          <a:noFill/>
-        </p:spPr>
-        <p:txBody>
-          <a:bodyPr wrap="square" lIns="0" tIns="0" rIns="0" bIns="0" anchor="t">
-            <a:spAutoFit/>
-          </a:bodyPr>
-          <a:lstStyle/>
-          <a:p>
-            <a:r>
-              <a:rPr sz="1400" b="1">
-                <a:solidFill>
-                  <a:srgbClr val="FFFFFF"/>
-                </a:solidFill>
-                <a:latin typeface="Calibri"/>
-              </a:rPr>
-              <a:t>Excel-файл</a:t>
-            </a:r>
-          </a:p>
-        </p:txBody>
-      </p:sp>
-      <p:sp>
-        <p:nvSpPr>
-          <p:cNvPr id="60" name="TextBox 59"/>
-          <p:cNvSpPr txBox="1"/>
-          <p:nvPr/>
-        </p:nvSpPr>
-        <p:spPr>
-          <a:xfrm>
-            <a:off x="640080" y="2212848"/>
-            <a:ext cx="1920239" cy="338328"/>
-          </a:xfrm>
-          <a:prstGeom prst="rect">
-            <a:avLst/>
-          </a:prstGeom>
-          <a:noFill/>
-        </p:spPr>
-        <p:txBody>
-          <a:bodyPr wrap="square" lIns="0" tIns="0" rIns="0" bIns="0" anchor="t">
-            <a:spAutoFit/>
-          </a:bodyPr>
-          <a:lstStyle/>
-          <a:p>
-            <a:pPr>
-              <a:lnSpc>
-                <a:spcPct val="105000"/>
-              </a:lnSpc>
-            </a:pPr>
-            <a:r>
-              <a:rPr sz="1050">
-                <a:solidFill>
-                  <a:srgbClr val="A9B4C0"/>
-                </a:solidFill>
-                <a:latin typeface="Calibri"/>
-              </a:rPr>
-              <a:t>.xlsx / .xls · до 50 МБ · только чтение</a:t>
-            </a:r>
-          </a:p>
-        </p:txBody>
-      </p:sp>
-      <p:sp>
-        <p:nvSpPr>
-          <p:cNvPr id="61" name="Rounded Rectangle 60"/>
+          </a:p>
+        </p:txBody>
+      </p:sp>
+      <p:sp>
+        <p:nvSpPr>
+          <p:cNvPr id="10" name="Rectangle 9"/>
           <p:cNvSpPr/>
           <p:nvPr/>
         </p:nvSpPr>
         <p:spPr>
           <a:xfrm>
-            <a:off x="3017520" y="1755648"/>
-            <a:ext cx="2103120" cy="868680"/>
-          </a:xfrm>
-          <a:prstGeom prst="roundRect">
-            <a:avLst>
-              <a:gd name="adj" fmla="val 70000"/>
-            </a:avLst>
+            <a:off x="1668640" y="2025000"/>
+            <a:ext cx="260000" cy="20000"/>
+          </a:xfrm>
+          <a:prstGeom prst="rect">
+            <a:avLst/>
           </a:prstGeom>
           <a:solidFill>
-            <a:srgbClr val="262C33"/>
+            <a:srgbClr val="2FA6C9"/>
           </a:solidFill>
-          <a:ln w="12700">
-            <a:solidFill>
-              <a:srgbClr val="3A434D"/>
-            </a:solidFill>
+          <a:ln>
+            <a:noFill/>
           </a:ln>
           <a:effectLst/>
         </p:spPr>
@@ -19028,143 +18875,63 @@
           <a:lstStyle/>
           <a:p>
             <a:pPr algn="ctr"/>
-            <a:endParaRPr/>
-          </a:p>
-        </p:txBody>
-      </p:sp>
-      <p:sp>
-        <p:nvSpPr>
-          <p:cNvPr id="62" name="TextBox 61"/>
+          </a:p>
+        </p:txBody>
+      </p:sp>
+      <p:sp>
+        <p:nvSpPr>
+          <p:cNvPr id="11" name="TextBox 10"/>
           <p:cNvSpPr txBox="1"/>
           <p:nvPr/>
         </p:nvSpPr>
         <p:spPr>
           <a:xfrm>
-            <a:off x="3108960" y="1847088"/>
-            <a:ext cx="1920239" cy="365760"/>
-          </a:xfrm>
-          <a:prstGeom prst="rect">
-            <a:avLst/>
-          </a:prstGeom>
-          <a:noFill/>
-        </p:spPr>
-        <p:txBody>
-          <a:bodyPr wrap="square" lIns="0" tIns="0" rIns="0" bIns="0" anchor="t">
+            <a:off x="548640" y="2060000"/>
+            <a:ext cx="2500000" cy="160000"/>
+          </a:xfrm>
+          <a:prstGeom prst="rect">
+            <a:avLst/>
+          </a:prstGeom>
+          <a:noFill/>
+        </p:spPr>
+        <p:txBody>
+          <a:bodyPr wrap="square" anchor="t" lIns="30000" rIns="30000" tIns="10000" bIns="10000">
             <a:spAutoFit/>
           </a:bodyPr>
           <a:lstStyle/>
           <a:p>
-            <a:r>
-              <a:rPr sz="1400" b="1">
-                <a:solidFill>
-                  <a:srgbClr val="FFFFFF"/>
-                </a:solidFill>
-                <a:latin typeface="Calibri"/>
-              </a:rPr>
-              <a:t>Загрузка</a:t>
-            </a:r>
-          </a:p>
-        </p:txBody>
-      </p:sp>
-      <p:sp>
-        <p:nvSpPr>
-          <p:cNvPr id="63" name="TextBox 62"/>
-          <p:cNvSpPr txBox="1"/>
-          <p:nvPr/>
-        </p:nvSpPr>
-        <p:spPr>
-          <a:xfrm>
-            <a:off x="3108960" y="2212848"/>
-            <a:ext cx="1920239" cy="338328"/>
-          </a:xfrm>
-          <a:prstGeom prst="rect">
-            <a:avLst/>
-          </a:prstGeom>
-          <a:noFill/>
-        </p:spPr>
-        <p:txBody>
-          <a:bodyPr wrap="square" lIns="0" tIns="0" rIns="0" bIns="0" anchor="t">
-            <a:spAutoFit/>
-          </a:bodyPr>
-          <a:lstStyle/>
-          <a:p>
-            <a:pPr>
-              <a:lnSpc>
-                <a:spcPct val="105000"/>
-              </a:lnSpc>
-            </a:pPr>
-            <a:r>
-              <a:rPr sz="1050">
-                <a:solidFill>
-                  <a:srgbClr val="A9B4C0"/>
-                </a:solidFill>
-                <a:latin typeface="Calibri"/>
-              </a:rPr>
-              <a:t>POST /files/upload · async-очередь · pending</a:t>
-            </a:r>
-          </a:p>
-        </p:txBody>
-      </p:sp>
-      <p:cxnSp>
-        <p:nvCxnSpPr>
-          <p:cNvPr id="64" name="Connector 63"/>
-          <p:cNvCxnSpPr/>
-          <p:nvPr/>
-        </p:nvCxnSpPr>
-        <p:spPr>
-          <a:xfrm>
-            <a:off x="2670048" y="2189988"/>
-            <a:ext cx="329184" cy="0"/>
-          </a:xfrm>
-          <a:prstGeom prst="line">
-            <a:avLst/>
-          </a:prstGeom>
-          <a:ln w="25400">
-            <a:solidFill>
-              <a:srgbClr val="FF5A36"/>
-            </a:solidFill>
-            <a:tailEnd type="triangle" w="med" len="med"/>
-          </a:ln>
-          <a:effectLst/>
-        </p:spPr>
-        <p:style>
-          <a:lnRef idx="2">
-            <a:schemeClr val="accent1"/>
-          </a:lnRef>
-          <a:fillRef idx="0">
-            <a:schemeClr val="accent1"/>
-          </a:fillRef>
-          <a:effectRef idx="1">
-            <a:schemeClr val="accent1"/>
-          </a:effectRef>
-          <a:fontRef idx="minor">
-            <a:schemeClr val="tx1"/>
-          </a:fontRef>
-        </p:style>
-      </p:cxnSp>
-      <p:sp>
-        <p:nvSpPr>
-          <p:cNvPr id="65" name="Rounded Rectangle 64"/>
+            <a:pPr algn="ctr"/>
+            <a:r>
+              <a:rPr sz="1050" b="1" i="0">
+                <a:solidFill>
+                  <a:srgbClr val="2FA6C9"/>
+                </a:solidFill>
+                <a:latin typeface="Calibri"/>
+              </a:rPr>
+              <a:t>ИСТОЧНИК И ПАРСИНГ</a:t>
+            </a:r>
+          </a:p>
+        </p:txBody>
+      </p:sp>
+      <p:sp>
+        <p:nvSpPr>
+          <p:cNvPr id="12" name="Rectangle 11"/>
           <p:cNvSpPr/>
           <p:nvPr/>
         </p:nvSpPr>
         <p:spPr>
           <a:xfrm>
-            <a:off x="5486400" y="1755648"/>
-            <a:ext cx="2103120" cy="868680"/>
-          </a:xfrm>
-          <a:prstGeom prst="roundRect">
-            <a:avLst>
-              <a:gd name="adj" fmla="val 70000"/>
-            </a:avLst>
+            <a:off x="4595000" y="2025000"/>
+            <a:ext cx="260000" cy="20000"/>
+          </a:xfrm>
+          <a:prstGeom prst="rect">
+            <a:avLst/>
           </a:prstGeom>
           <a:solidFill>
-            <a:srgbClr val="262C33"/>
+            <a:srgbClr val="2FA6C9"/>
           </a:solidFill>
-          <a:ln w="12700">
-            <a:solidFill>
-              <a:srgbClr val="3A434D"/>
-            </a:solidFill>
+          <a:ln>
+            <a:noFill/>
           </a:ln>
           <a:effectLst/>
         </p:spPr>
@@ -19187,98 +18954,1853 @@
           <a:lstStyle/>
           <a:p>
             <a:pPr algn="ctr"/>
-            <a:endParaRPr/>
-          </a:p>
-        </p:txBody>
-      </p:sp>
-      <p:sp>
-        <p:nvSpPr>
-          <p:cNvPr id="66" name="TextBox 65"/>
+          </a:p>
+        </p:txBody>
+      </p:sp>
+      <p:sp>
+        <p:nvSpPr>
+          <p:cNvPr id="13" name="TextBox 12"/>
           <p:cNvSpPr txBox="1"/>
           <p:nvPr/>
         </p:nvSpPr>
         <p:spPr>
           <a:xfrm>
-            <a:off x="5577840" y="1847088"/>
-            <a:ext cx="1920239" cy="365760"/>
-          </a:xfrm>
-          <a:prstGeom prst="rect">
-            <a:avLst/>
-          </a:prstGeom>
-          <a:noFill/>
-        </p:spPr>
-        <p:txBody>
-          <a:bodyPr wrap="square" lIns="0" tIns="0" rIns="0" bIns="0" anchor="t">
+            <a:off x="3350000" y="2060000"/>
+            <a:ext cx="2750000" cy="160000"/>
+          </a:xfrm>
+          <a:prstGeom prst="rect">
+            <a:avLst/>
+          </a:prstGeom>
+          <a:noFill/>
+        </p:spPr>
+        <p:txBody>
+          <a:bodyPr wrap="square" anchor="t" lIns="30000" rIns="30000" tIns="10000" bIns="10000">
             <a:spAutoFit/>
           </a:bodyPr>
           <a:lstStyle/>
           <a:p>
-            <a:r>
-              <a:rPr sz="1400" b="1">
-                <a:solidFill>
-                  <a:srgbClr val="FFFFFF"/>
-                </a:solidFill>
-                <a:latin typeface="Calibri"/>
-              </a:rPr>
-              <a:t>Парсинг</a:t>
-            </a:r>
-          </a:p>
-        </p:txBody>
-      </p:sp>
-      <p:sp>
-        <p:nvSpPr>
-          <p:cNvPr id="67" name="TextBox 66"/>
+            <a:pPr algn="ctr"/>
+            <a:r>
+              <a:rPr sz="1050" b="1" i="0">
+                <a:solidFill>
+                  <a:srgbClr val="2FA6C9"/>
+                </a:solidFill>
+                <a:latin typeface="Calibri"/>
+              </a:rPr>
+              <a:t>СЫРЫЕ ДАННЫЕ · RAW</a:t>
+            </a:r>
+          </a:p>
+        </p:txBody>
+      </p:sp>
+      <p:sp>
+        <p:nvSpPr>
+          <p:cNvPr id="14" name="Rectangle 13"/>
+          <p:cNvSpPr/>
+          <p:nvPr/>
+        </p:nvSpPr>
+        <p:spPr>
+          <a:xfrm>
+            <a:off x="7695000" y="2025000"/>
+            <a:ext cx="260000" cy="20000"/>
+          </a:xfrm>
+          <a:prstGeom prst="rect">
+            <a:avLst/>
+          </a:prstGeom>
+          <a:solidFill>
+            <a:srgbClr val="FF5A36"/>
+          </a:solidFill>
+          <a:ln>
+            <a:noFill/>
+          </a:ln>
+          <a:effectLst/>
+        </p:spPr>
+        <p:style>
+          <a:lnRef idx="1">
+            <a:schemeClr val="accent1"/>
+          </a:lnRef>
+          <a:fillRef idx="3">
+            <a:schemeClr val="accent1"/>
+          </a:fillRef>
+          <a:effectRef idx="2">
+            <a:schemeClr val="accent1"/>
+          </a:effectRef>
+          <a:fontRef idx="minor">
+            <a:schemeClr val="lt1"/>
+          </a:fontRef>
+        </p:style>
+        <p:txBody>
+          <a:bodyPr rtlCol="0" anchor="ctr"/>
+          <a:lstStyle/>
+          <a:p>
+            <a:pPr algn="ctr"/>
+          </a:p>
+        </p:txBody>
+      </p:sp>
+      <p:sp>
+        <p:nvSpPr>
+          <p:cNvPr id="15" name="TextBox 14"/>
           <p:cNvSpPr txBox="1"/>
           <p:nvPr/>
         </p:nvSpPr>
         <p:spPr>
           <a:xfrm>
-            <a:off x="5577840" y="2212848"/>
-            <a:ext cx="1920239" cy="338328"/>
-          </a:xfrm>
-          <a:prstGeom prst="rect">
-            <a:avLst/>
-          </a:prstGeom>
-          <a:noFill/>
-        </p:spPr>
-        <p:txBody>
-          <a:bodyPr wrap="square" lIns="0" tIns="0" rIns="0" bIns="0" anchor="t">
+            <a:off x="6500000" y="2060000"/>
+            <a:ext cx="2650000" cy="160000"/>
+          </a:xfrm>
+          <a:prstGeom prst="rect">
+            <a:avLst/>
+          </a:prstGeom>
+          <a:noFill/>
+        </p:spPr>
+        <p:txBody>
+          <a:bodyPr wrap="square" anchor="t" lIns="30000" rIns="30000" tIns="10000" bIns="10000">
             <a:spAutoFit/>
           </a:bodyPr>
           <a:lstStyle/>
           <a:p>
-            <a:pPr>
+            <a:pPr algn="ctr"/>
+            <a:r>
+              <a:rPr sz="1050" b="1" i="0">
+                <a:solidFill>
+                  <a:srgbClr val="FF5A36"/>
+                </a:solidFill>
+                <a:latin typeface="Calibri"/>
+              </a:rPr>
+              <a:t>ПРИВЕДЕНИЕ К ЕДИНОМУ ВИДУ</a:t>
+            </a:r>
+          </a:p>
+        </p:txBody>
+      </p:sp>
+      <p:sp>
+        <p:nvSpPr>
+          <p:cNvPr id="16" name="Rounded Rectangle 15"/>
+          <p:cNvSpPr/>
+          <p:nvPr/>
+        </p:nvSpPr>
+        <p:spPr>
+          <a:xfrm>
+            <a:off x="548640" y="2280000"/>
+            <a:ext cx="2500000" cy="820000"/>
+          </a:xfrm>
+          <a:prstGeom prst="roundRect">
+            <a:avLst>
+              <a:gd name="adj" fmla="val 12000"/>
+            </a:avLst>
+          </a:prstGeom>
+          <a:solidFill>
+            <a:srgbClr val="232931"/>
+          </a:solidFill>
+          <a:ln w="15875">
+            <a:solidFill>
+              <a:srgbClr val="3E4A56"/>
+            </a:solidFill>
+          </a:ln>
+          <a:effectLst/>
+        </p:spPr>
+        <p:style>
+          <a:lnRef idx="1">
+            <a:schemeClr val="accent1"/>
+          </a:lnRef>
+          <a:fillRef idx="3">
+            <a:schemeClr val="accent1"/>
+          </a:fillRef>
+          <a:effectRef idx="2">
+            <a:schemeClr val="accent1"/>
+          </a:effectRef>
+          <a:fontRef idx="minor">
+            <a:schemeClr val="lt1"/>
+          </a:fontRef>
+        </p:style>
+        <p:txBody>
+          <a:bodyPr rtlCol="0" anchor="ctr"/>
+          <a:lstStyle/>
+          <a:p>
+            <a:pPr algn="ctr"/>
+          </a:p>
+        </p:txBody>
+      </p:sp>
+      <p:sp>
+        <p:nvSpPr>
+          <p:cNvPr id="17" name="Rounded Rectangle 16"/>
+          <p:cNvSpPr/>
+          <p:nvPr/>
+        </p:nvSpPr>
+        <p:spPr>
+          <a:xfrm>
+            <a:off x="588640" y="2320000"/>
+            <a:ext cx="2420000" cy="135000"/>
+          </a:xfrm>
+          <a:prstGeom prst="roundRect">
+            <a:avLst>
+              <a:gd name="adj" fmla="val 50000"/>
+            </a:avLst>
+          </a:prstGeom>
+          <a:solidFill>
+            <a:srgbClr val="2FA6C9"/>
+          </a:solidFill>
+          <a:ln>
+            <a:noFill/>
+          </a:ln>
+          <a:effectLst/>
+        </p:spPr>
+        <p:style>
+          <a:lnRef idx="1">
+            <a:schemeClr val="accent1"/>
+          </a:lnRef>
+          <a:fillRef idx="3">
+            <a:schemeClr val="accent1"/>
+          </a:fillRef>
+          <a:effectRef idx="2">
+            <a:schemeClr val="accent1"/>
+          </a:effectRef>
+          <a:fontRef idx="minor">
+            <a:schemeClr val="lt1"/>
+          </a:fontRef>
+        </p:style>
+        <p:txBody>
+          <a:bodyPr rtlCol="0" anchor="ctr" wrap="none" lIns="20000" rIns="20000" tIns="0" bIns="0"/>
+          <a:lstStyle/>
+          <a:p>
+            <a:pPr algn="ctr"/>
+            <a:r>
+              <a:rPr sz="1350" b="1">
+                <a:solidFill>
+                  <a:srgbClr val="101418"/>
+                </a:solidFill>
+                <a:latin typeface="Calibri"/>
+              </a:rPr>
+              <a:t>1 · Excel-файл</a:t>
+            </a:r>
+          </a:p>
+        </p:txBody>
+      </p:sp>
+      <p:sp>
+        <p:nvSpPr>
+          <p:cNvPr id="18" name="TextBox 17"/>
+          <p:cNvSpPr txBox="1"/>
+          <p:nvPr/>
+        </p:nvSpPr>
+        <p:spPr>
+          <a:xfrm>
+            <a:off x="608640" y="2495000"/>
+            <a:ext cx="2380000" cy="565000"/>
+          </a:xfrm>
+          <a:prstGeom prst="rect">
+            <a:avLst/>
+          </a:prstGeom>
+          <a:noFill/>
+        </p:spPr>
+        <p:txBody>
+          <a:bodyPr wrap="square" anchor="ctr" lIns="30000" rIns="30000" tIns="10000" bIns="10000">
+            <a:spAutoFit/>
+          </a:bodyPr>
+          <a:lstStyle/>
+          <a:p>
+            <a:pPr algn="ctr">
               <a:lnSpc>
-                <a:spcPct val="105000"/>
+                <a:spcPct val="110000"/>
               </a:lnSpc>
             </a:pPr>
             <a:r>
-              <a:rPr sz="1050">
+              <a:rPr sz="1100" b="0" i="0">
                 <a:solidFill>
                   <a:srgbClr val="A9B4C0"/>
                 </a:solidFill>
                 <a:latin typeface="Calibri"/>
               </a:rPr>
-              <a:t>листы · unmerge ячеек · шапка · период · комментарии</a:t>
+              <a:t>.xlsx · .xls · только чтение</a:t>
+            </a:r>
+          </a:p>
+        </p:txBody>
+      </p:sp>
+      <p:sp>
+        <p:nvSpPr>
+          <p:cNvPr id="19" name="Rounded Rectangle 18"/>
+          <p:cNvSpPr/>
+          <p:nvPr/>
+        </p:nvSpPr>
+        <p:spPr>
+          <a:xfrm>
+            <a:off x="548640" y="3440000"/>
+            <a:ext cx="2500000" cy="820000"/>
+          </a:xfrm>
+          <a:prstGeom prst="roundRect">
+            <a:avLst>
+              <a:gd name="adj" fmla="val 12000"/>
+            </a:avLst>
+          </a:prstGeom>
+          <a:solidFill>
+            <a:srgbClr val="232931"/>
+          </a:solidFill>
+          <a:ln w="15875">
+            <a:solidFill>
+              <a:srgbClr val="3E4A56"/>
+            </a:solidFill>
+          </a:ln>
+          <a:effectLst/>
+        </p:spPr>
+        <p:style>
+          <a:lnRef idx="1">
+            <a:schemeClr val="accent1"/>
+          </a:lnRef>
+          <a:fillRef idx="3">
+            <a:schemeClr val="accent1"/>
+          </a:fillRef>
+          <a:effectRef idx="2">
+            <a:schemeClr val="accent1"/>
+          </a:effectRef>
+          <a:fontRef idx="minor">
+            <a:schemeClr val="lt1"/>
+          </a:fontRef>
+        </p:style>
+        <p:txBody>
+          <a:bodyPr rtlCol="0" anchor="ctr"/>
+          <a:lstStyle/>
+          <a:p>
+            <a:pPr algn="ctr"/>
+          </a:p>
+        </p:txBody>
+      </p:sp>
+      <p:sp>
+        <p:nvSpPr>
+          <p:cNvPr id="20" name="Rounded Rectangle 19"/>
+          <p:cNvSpPr/>
+          <p:nvPr/>
+        </p:nvSpPr>
+        <p:spPr>
+          <a:xfrm>
+            <a:off x="588640" y="3480000"/>
+            <a:ext cx="2420000" cy="135000"/>
+          </a:xfrm>
+          <a:prstGeom prst="roundRect">
+            <a:avLst>
+              <a:gd name="adj" fmla="val 50000"/>
+            </a:avLst>
+          </a:prstGeom>
+          <a:solidFill>
+            <a:srgbClr val="5B8DEF"/>
+          </a:solidFill>
+          <a:ln>
+            <a:noFill/>
+          </a:ln>
+          <a:effectLst/>
+        </p:spPr>
+        <p:style>
+          <a:lnRef idx="1">
+            <a:schemeClr val="accent1"/>
+          </a:lnRef>
+          <a:fillRef idx="3">
+            <a:schemeClr val="accent1"/>
+          </a:fillRef>
+          <a:effectRef idx="2">
+            <a:schemeClr val="accent1"/>
+          </a:effectRef>
+          <a:fontRef idx="minor">
+            <a:schemeClr val="lt1"/>
+          </a:fontRef>
+        </p:style>
+        <p:txBody>
+          <a:bodyPr rtlCol="0" anchor="ctr" wrap="none" lIns="20000" rIns="20000" tIns="0" bIns="0"/>
+          <a:lstStyle/>
+          <a:p>
+            <a:pPr algn="ctr"/>
+            <a:r>
+              <a:rPr sz="1350" b="1">
+                <a:solidFill>
+                  <a:srgbClr val="101418"/>
+                </a:solidFill>
+                <a:latin typeface="Calibri"/>
+              </a:rPr>
+              <a:t>2 · Загрузка</a:t>
+            </a:r>
+          </a:p>
+        </p:txBody>
+      </p:sp>
+      <p:sp>
+        <p:nvSpPr>
+          <p:cNvPr id="21" name="TextBox 20"/>
+          <p:cNvSpPr txBox="1"/>
+          <p:nvPr/>
+        </p:nvSpPr>
+        <p:spPr>
+          <a:xfrm>
+            <a:off x="608640" y="3655000"/>
+            <a:ext cx="2380000" cy="565000"/>
+          </a:xfrm>
+          <a:prstGeom prst="rect">
+            <a:avLst/>
+          </a:prstGeom>
+          <a:noFill/>
+        </p:spPr>
+        <p:txBody>
+          <a:bodyPr wrap="square" anchor="ctr" lIns="30000" rIns="30000" tIns="10000" bIns="10000">
+            <a:spAutoFit/>
+          </a:bodyPr>
+          <a:lstStyle/>
+          <a:p>
+            <a:pPr algn="ctr">
+              <a:lnSpc>
+                <a:spcPct val="110000"/>
+              </a:lnSpc>
+            </a:pPr>
+            <a:r>
+              <a:rPr sz="1100" b="0" i="0">
+                <a:solidFill>
+                  <a:srgbClr val="A9B4C0"/>
+                </a:solidFill>
+                <a:latin typeface="Calibri"/>
+              </a:rPr>
+              <a:t>POST /files/upload · async-очередь</a:t>
+            </a:r>
+          </a:p>
+        </p:txBody>
+      </p:sp>
+      <p:sp>
+        <p:nvSpPr>
+          <p:cNvPr id="22" name="Rounded Rectangle 21"/>
+          <p:cNvSpPr/>
+          <p:nvPr/>
+        </p:nvSpPr>
+        <p:spPr>
+          <a:xfrm>
+            <a:off x="548640" y="4600000"/>
+            <a:ext cx="2500000" cy="820000"/>
+          </a:xfrm>
+          <a:prstGeom prst="roundRect">
+            <a:avLst>
+              <a:gd name="adj" fmla="val 12000"/>
+            </a:avLst>
+          </a:prstGeom>
+          <a:solidFill>
+            <a:srgbClr val="232931"/>
+          </a:solidFill>
+          <a:ln w="15875">
+            <a:solidFill>
+              <a:srgbClr val="3E4A56"/>
+            </a:solidFill>
+          </a:ln>
+          <a:effectLst/>
+        </p:spPr>
+        <p:style>
+          <a:lnRef idx="1">
+            <a:schemeClr val="accent1"/>
+          </a:lnRef>
+          <a:fillRef idx="3">
+            <a:schemeClr val="accent1"/>
+          </a:fillRef>
+          <a:effectRef idx="2">
+            <a:schemeClr val="accent1"/>
+          </a:effectRef>
+          <a:fontRef idx="minor">
+            <a:schemeClr val="lt1"/>
+          </a:fontRef>
+        </p:style>
+        <p:txBody>
+          <a:bodyPr rtlCol="0" anchor="ctr"/>
+          <a:lstStyle/>
+          <a:p>
+            <a:pPr algn="ctr"/>
+          </a:p>
+        </p:txBody>
+      </p:sp>
+      <p:sp>
+        <p:nvSpPr>
+          <p:cNvPr id="23" name="Rounded Rectangle 22"/>
+          <p:cNvSpPr/>
+          <p:nvPr/>
+        </p:nvSpPr>
+        <p:spPr>
+          <a:xfrm>
+            <a:off x="588640" y="4640000"/>
+            <a:ext cx="2420000" cy="135000"/>
+          </a:xfrm>
+          <a:prstGeom prst="roundRect">
+            <a:avLst>
+              <a:gd name="adj" fmla="val 50000"/>
+            </a:avLst>
+          </a:prstGeom>
+          <a:solidFill>
+            <a:srgbClr val="5B8DEF"/>
+          </a:solidFill>
+          <a:ln>
+            <a:noFill/>
+          </a:ln>
+          <a:effectLst/>
+        </p:spPr>
+        <p:style>
+          <a:lnRef idx="1">
+            <a:schemeClr val="accent1"/>
+          </a:lnRef>
+          <a:fillRef idx="3">
+            <a:schemeClr val="accent1"/>
+          </a:fillRef>
+          <a:effectRef idx="2">
+            <a:schemeClr val="accent1"/>
+          </a:effectRef>
+          <a:fontRef idx="minor">
+            <a:schemeClr val="lt1"/>
+          </a:fontRef>
+        </p:style>
+        <p:txBody>
+          <a:bodyPr rtlCol="0" anchor="ctr" wrap="none" lIns="20000" rIns="20000" tIns="0" bIns="0"/>
+          <a:lstStyle/>
+          <a:p>
+            <a:pPr algn="ctr"/>
+            <a:r>
+              <a:rPr sz="1350" b="1">
+                <a:solidFill>
+                  <a:srgbClr val="101418"/>
+                </a:solidFill>
+                <a:latin typeface="Calibri"/>
+              </a:rPr>
+              <a:t>3 · Парсинг</a:t>
+            </a:r>
+          </a:p>
+        </p:txBody>
+      </p:sp>
+      <p:sp>
+        <p:nvSpPr>
+          <p:cNvPr id="24" name="TextBox 23"/>
+          <p:cNvSpPr txBox="1"/>
+          <p:nvPr/>
+        </p:nvSpPr>
+        <p:spPr>
+          <a:xfrm>
+            <a:off x="608640" y="4815000"/>
+            <a:ext cx="2380000" cy="565000"/>
+          </a:xfrm>
+          <a:prstGeom prst="rect">
+            <a:avLst/>
+          </a:prstGeom>
+          <a:noFill/>
+        </p:spPr>
+        <p:txBody>
+          <a:bodyPr wrap="square" anchor="ctr" lIns="30000" rIns="30000" tIns="10000" bIns="10000">
+            <a:spAutoFit/>
+          </a:bodyPr>
+          <a:lstStyle/>
+          <a:p>
+            <a:pPr algn="ctr">
+              <a:lnSpc>
+                <a:spcPct val="110000"/>
+              </a:lnSpc>
+            </a:pPr>
+            <a:r>
+              <a:rPr sz="1100" b="0" i="0">
+                <a:solidFill>
+                  <a:srgbClr val="A9B4C0"/>
+                </a:solidFill>
+                <a:latin typeface="Calibri"/>
+              </a:rPr>
+              <a:t>листы · шапка · периоды · комментарии</a:t>
+            </a:r>
+          </a:p>
+        </p:txBody>
+      </p:sp>
+      <p:sp>
+        <p:nvSpPr>
+          <p:cNvPr id="25" name="Rounded Rectangle 24"/>
+          <p:cNvSpPr/>
+          <p:nvPr/>
+        </p:nvSpPr>
+        <p:spPr>
+          <a:xfrm>
+            <a:off x="3350000" y="2280000"/>
+            <a:ext cx="2750000" cy="820000"/>
+          </a:xfrm>
+          <a:prstGeom prst="roundRect">
+            <a:avLst>
+              <a:gd name="adj" fmla="val 12000"/>
+            </a:avLst>
+          </a:prstGeom>
+          <a:solidFill>
+            <a:srgbClr val="232931"/>
+          </a:solidFill>
+          <a:ln w="15875">
+            <a:solidFill>
+              <a:srgbClr val="3E4A56"/>
+            </a:solidFill>
+          </a:ln>
+          <a:effectLst/>
+        </p:spPr>
+        <p:style>
+          <a:lnRef idx="1">
+            <a:schemeClr val="accent1"/>
+          </a:lnRef>
+          <a:fillRef idx="3">
+            <a:schemeClr val="accent1"/>
+          </a:fillRef>
+          <a:effectRef idx="2">
+            <a:schemeClr val="accent1"/>
+          </a:effectRef>
+          <a:fontRef idx="minor">
+            <a:schemeClr val="lt1"/>
+          </a:fontRef>
+        </p:style>
+        <p:txBody>
+          <a:bodyPr rtlCol="0" anchor="ctr"/>
+          <a:lstStyle/>
+          <a:p>
+            <a:pPr algn="ctr"/>
+          </a:p>
+        </p:txBody>
+      </p:sp>
+      <p:sp>
+        <p:nvSpPr>
+          <p:cNvPr id="26" name="Rounded Rectangle 25"/>
+          <p:cNvSpPr/>
+          <p:nvPr/>
+        </p:nvSpPr>
+        <p:spPr>
+          <a:xfrm>
+            <a:off x="3390000" y="2320000"/>
+            <a:ext cx="2670000" cy="135000"/>
+          </a:xfrm>
+          <a:prstGeom prst="roundRect">
+            <a:avLst>
+              <a:gd name="adj" fmla="val 50000"/>
+            </a:avLst>
+          </a:prstGeom>
+          <a:solidFill>
+            <a:srgbClr val="2FA6C9"/>
+          </a:solidFill>
+          <a:ln>
+            <a:noFill/>
+          </a:ln>
+          <a:effectLst/>
+        </p:spPr>
+        <p:style>
+          <a:lnRef idx="1">
+            <a:schemeClr val="accent1"/>
+          </a:lnRef>
+          <a:fillRef idx="3">
+            <a:schemeClr val="accent1"/>
+          </a:fillRef>
+          <a:effectRef idx="2">
+            <a:schemeClr val="accent1"/>
+          </a:effectRef>
+          <a:fontRef idx="minor">
+            <a:schemeClr val="lt1"/>
+          </a:fontRef>
+        </p:style>
+        <p:txBody>
+          <a:bodyPr rtlCol="0" anchor="ctr" wrap="none" lIns="20000" rIns="20000" tIns="0" bIns="0"/>
+          <a:lstStyle/>
+          <a:p>
+            <a:pPr algn="ctr"/>
+            <a:r>
+              <a:rPr sz="1350" b="1">
+                <a:solidFill>
+                  <a:srgbClr val="101418"/>
+                </a:solidFill>
+                <a:latin typeface="Calibri"/>
+              </a:rPr>
+              <a:t>4 · RAW · prices</a:t>
+            </a:r>
+          </a:p>
+        </p:txBody>
+      </p:sp>
+      <p:sp>
+        <p:nvSpPr>
+          <p:cNvPr id="27" name="TextBox 26"/>
+          <p:cNvSpPr txBox="1"/>
+          <p:nvPr/>
+        </p:nvSpPr>
+        <p:spPr>
+          <a:xfrm>
+            <a:off x="3410000" y="2495000"/>
+            <a:ext cx="2630000" cy="565000"/>
+          </a:xfrm>
+          <a:prstGeom prst="rect">
+            <a:avLst/>
+          </a:prstGeom>
+          <a:noFill/>
+        </p:spPr>
+        <p:txBody>
+          <a:bodyPr wrap="square" anchor="ctr" lIns="30000" rIns="30000" tIns="10000" bIns="10000">
+            <a:spAutoFit/>
+          </a:bodyPr>
+          <a:lstStyle/>
+          <a:p>
+            <a:pPr algn="ctr">
+              <a:lnSpc>
+                <a:spcPct val="110000"/>
+              </a:lnSpc>
+            </a:pPr>
+            <a:r>
+              <a:rPr sz="1100" b="0" i="0">
+                <a:solidFill>
+                  <a:srgbClr val="A9B4C0"/>
+                </a:solidFill>
+                <a:latin typeface="Calibri"/>
+              </a:rPr>
+              <a:t>листы «prices»: строки и ячейки · public</a:t>
+            </a:r>
+          </a:p>
+        </p:txBody>
+      </p:sp>
+      <p:sp>
+        <p:nvSpPr>
+          <p:cNvPr id="28" name="Rounded Rectangle 27"/>
+          <p:cNvSpPr/>
+          <p:nvPr/>
+        </p:nvSpPr>
+        <p:spPr>
+          <a:xfrm>
+            <a:off x="3350000" y="3440000"/>
+            <a:ext cx="2750000" cy="820000"/>
+          </a:xfrm>
+          <a:prstGeom prst="roundRect">
+            <a:avLst>
+              <a:gd name="adj" fmla="val 12000"/>
+            </a:avLst>
+          </a:prstGeom>
+          <a:solidFill>
+            <a:srgbClr val="232931"/>
+          </a:solidFill>
+          <a:ln w="15875">
+            <a:solidFill>
+              <a:srgbClr val="3E4A56"/>
+            </a:solidFill>
+          </a:ln>
+          <a:effectLst/>
+        </p:spPr>
+        <p:style>
+          <a:lnRef idx="1">
+            <a:schemeClr val="accent1"/>
+          </a:lnRef>
+          <a:fillRef idx="3">
+            <a:schemeClr val="accent1"/>
+          </a:fillRef>
+          <a:effectRef idx="2">
+            <a:schemeClr val="accent1"/>
+          </a:effectRef>
+          <a:fontRef idx="minor">
+            <a:schemeClr val="lt1"/>
+          </a:fontRef>
+        </p:style>
+        <p:txBody>
+          <a:bodyPr rtlCol="0" anchor="ctr"/>
+          <a:lstStyle/>
+          <a:p>
+            <a:pPr algn="ctr"/>
+          </a:p>
+        </p:txBody>
+      </p:sp>
+      <p:sp>
+        <p:nvSpPr>
+          <p:cNvPr id="29" name="Rounded Rectangle 28"/>
+          <p:cNvSpPr/>
+          <p:nvPr/>
+        </p:nvSpPr>
+        <p:spPr>
+          <a:xfrm>
+            <a:off x="3390000" y="3480000"/>
+            <a:ext cx="2670000" cy="135000"/>
+          </a:xfrm>
+          <a:prstGeom prst="roundRect">
+            <a:avLst>
+              <a:gd name="adj" fmla="val 50000"/>
+            </a:avLst>
+          </a:prstGeom>
+          <a:solidFill>
+            <a:srgbClr val="2FA6C9"/>
+          </a:solidFill>
+          <a:ln>
+            <a:noFill/>
+          </a:ln>
+          <a:effectLst/>
+        </p:spPr>
+        <p:style>
+          <a:lnRef idx="1">
+            <a:schemeClr val="accent1"/>
+          </a:lnRef>
+          <a:fillRef idx="3">
+            <a:schemeClr val="accent1"/>
+          </a:fillRef>
+          <a:effectRef idx="2">
+            <a:schemeClr val="accent1"/>
+          </a:effectRef>
+          <a:fontRef idx="minor">
+            <a:schemeClr val="lt1"/>
+          </a:fontRef>
+        </p:style>
+        <p:txBody>
+          <a:bodyPr rtlCol="0" anchor="ctr" wrap="none" lIns="20000" rIns="20000" tIns="0" bIns="0"/>
+          <a:lstStyle/>
+          <a:p>
+            <a:pPr algn="ctr"/>
+            <a:r>
+              <a:rPr sz="1350" b="1">
+                <a:solidFill>
+                  <a:srgbClr val="101418"/>
+                </a:solidFill>
+                <a:latin typeface="Calibri"/>
+              </a:rPr>
+              <a:t>5 · RAW · metrics</a:t>
+            </a:r>
+          </a:p>
+        </p:txBody>
+      </p:sp>
+      <p:sp>
+        <p:nvSpPr>
+          <p:cNvPr id="30" name="TextBox 29"/>
+          <p:cNvSpPr txBox="1"/>
+          <p:nvPr/>
+        </p:nvSpPr>
+        <p:spPr>
+          <a:xfrm>
+            <a:off x="3410000" y="3655000"/>
+            <a:ext cx="2630000" cy="565000"/>
+          </a:xfrm>
+          <a:prstGeom prst="rect">
+            <a:avLst/>
+          </a:prstGeom>
+          <a:noFill/>
+        </p:spPr>
+        <p:txBody>
+          <a:bodyPr wrap="square" anchor="ctr" lIns="30000" rIns="30000" tIns="10000" bIns="10000">
+            <a:spAutoFit/>
+          </a:bodyPr>
+          <a:lstStyle/>
+          <a:p>
+            <a:pPr algn="ctr">
+              <a:lnSpc>
+                <a:spcPct val="110000"/>
+              </a:lnSpc>
+            </a:pPr>
+            <a:r>
+              <a:rPr sz="1100" b="0" i="0">
+                <a:solidFill>
+                  <a:srgbClr val="A9B4C0"/>
+                </a:solidFill>
+                <a:latin typeface="Calibri"/>
+              </a:rPr>
+              <a:t>листы «metrics»: строки и ячейки · public</a:t>
+            </a:r>
+          </a:p>
+        </p:txBody>
+      </p:sp>
+      <p:sp>
+        <p:nvSpPr>
+          <p:cNvPr id="31" name="Rounded Rectangle 30"/>
+          <p:cNvSpPr/>
+          <p:nvPr/>
+        </p:nvSpPr>
+        <p:spPr>
+          <a:xfrm>
+            <a:off x="6500000" y="2280000"/>
+            <a:ext cx="2650000" cy="1980000"/>
+          </a:xfrm>
+          <a:prstGeom prst="roundRect">
+            <a:avLst>
+              <a:gd name="adj" fmla="val 5000"/>
+            </a:avLst>
+          </a:prstGeom>
+          <a:solidFill>
+            <a:srgbClr val="232931"/>
+          </a:solidFill>
+          <a:ln w="19050">
+            <a:solidFill>
+              <a:srgbClr val="FF5A36"/>
+            </a:solidFill>
+          </a:ln>
+          <a:effectLst/>
+        </p:spPr>
+        <p:style>
+          <a:lnRef idx="1">
+            <a:schemeClr val="accent1"/>
+          </a:lnRef>
+          <a:fillRef idx="3">
+            <a:schemeClr val="accent1"/>
+          </a:fillRef>
+          <a:effectRef idx="2">
+            <a:schemeClr val="accent1"/>
+          </a:effectRef>
+          <a:fontRef idx="minor">
+            <a:schemeClr val="lt1"/>
+          </a:fontRef>
+        </p:style>
+        <p:txBody>
+          <a:bodyPr rtlCol="0" anchor="ctr"/>
+          <a:lstStyle/>
+          <a:p>
+            <a:pPr algn="ctr"/>
+          </a:p>
+        </p:txBody>
+      </p:sp>
+      <p:sp>
+        <p:nvSpPr>
+          <p:cNvPr id="32" name="Rectangle 31"/>
+          <p:cNvSpPr/>
+          <p:nvPr/>
+        </p:nvSpPr>
+        <p:spPr>
+          <a:xfrm>
+            <a:off x="6500000" y="2280000"/>
+            <a:ext cx="90000" cy="1980000"/>
+          </a:xfrm>
+          <a:prstGeom prst="rect">
+            <a:avLst/>
+          </a:prstGeom>
+          <a:solidFill>
+            <a:srgbClr val="FF5A36"/>
+          </a:solidFill>
+          <a:ln>
+            <a:noFill/>
+          </a:ln>
+          <a:effectLst/>
+        </p:spPr>
+        <p:style>
+          <a:lnRef idx="1">
+            <a:schemeClr val="accent1"/>
+          </a:lnRef>
+          <a:fillRef idx="3">
+            <a:schemeClr val="accent1"/>
+          </a:fillRef>
+          <a:effectRef idx="2">
+            <a:schemeClr val="accent1"/>
+          </a:effectRef>
+          <a:fontRef idx="minor">
+            <a:schemeClr val="lt1"/>
+          </a:fontRef>
+        </p:style>
+        <p:txBody>
+          <a:bodyPr rtlCol="0" anchor="ctr"/>
+          <a:lstStyle/>
+          <a:p>
+            <a:pPr algn="ctr"/>
+          </a:p>
+        </p:txBody>
+      </p:sp>
+      <p:sp>
+        <p:nvSpPr>
+          <p:cNvPr id="33" name="Rounded Rectangle 32"/>
+          <p:cNvSpPr/>
+          <p:nvPr/>
+        </p:nvSpPr>
+        <p:spPr>
+          <a:xfrm>
+            <a:off x="6720000" y="2430000"/>
+            <a:ext cx="2210000" cy="150000"/>
+          </a:xfrm>
+          <a:prstGeom prst="roundRect">
+            <a:avLst>
+              <a:gd name="adj" fmla="val 50000"/>
+            </a:avLst>
+          </a:prstGeom>
+          <a:solidFill>
+            <a:srgbClr val="FF5A36"/>
+          </a:solidFill>
+          <a:ln>
+            <a:noFill/>
+          </a:ln>
+          <a:effectLst/>
+        </p:spPr>
+        <p:style>
+          <a:lnRef idx="1">
+            <a:schemeClr val="accent1"/>
+          </a:lnRef>
+          <a:fillRef idx="3">
+            <a:schemeClr val="accent1"/>
+          </a:fillRef>
+          <a:effectRef idx="2">
+            <a:schemeClr val="accent1"/>
+          </a:effectRef>
+          <a:fontRef idx="minor">
+            <a:schemeClr val="lt1"/>
+          </a:fontRef>
+        </p:style>
+        <p:txBody>
+          <a:bodyPr rtlCol="0" anchor="ctr" wrap="none" lIns="20000" rIns="20000" tIns="0" bIns="0"/>
+          <a:lstStyle/>
+          <a:p>
+            <a:pPr algn="ctr"/>
+            <a:r>
+              <a:rPr sz="1350" b="1">
+                <a:solidFill>
+                  <a:srgbClr val="101418"/>
+                </a:solidFill>
+                <a:latin typeface="Calibri"/>
+              </a:rPr>
+              <a:t>6 · Нормализация</a:t>
+            </a:r>
+          </a:p>
+        </p:txBody>
+      </p:sp>
+      <p:sp>
+        <p:nvSpPr>
+          <p:cNvPr id="34" name="TextBox 33"/>
+          <p:cNvSpPr txBox="1"/>
+          <p:nvPr/>
+        </p:nvSpPr>
+        <p:spPr>
+          <a:xfrm>
+            <a:off x="6720000" y="2620000"/>
+            <a:ext cx="2210000" cy="300000"/>
+          </a:xfrm>
+          <a:prstGeom prst="rect">
+            <a:avLst/>
+          </a:prstGeom>
+          <a:noFill/>
+        </p:spPr>
+        <p:txBody>
+          <a:bodyPr wrap="square" anchor="t" lIns="30000" rIns="30000" tIns="10000" bIns="10000">
+            <a:spAutoFit/>
+          </a:bodyPr>
+          <a:lstStyle/>
+          <a:p>
+            <a:pPr algn="l"/>
+            <a:r>
+              <a:rPr sz="1250" b="0" i="0">
+                <a:solidFill>
+                  <a:srgbClr val="2FA6C9"/>
+                </a:solidFill>
+                <a:latin typeface="Calibri"/>
+              </a:rPr>
+              <a:t>приводим Excel к единым справочникам</a:t>
+            </a:r>
+          </a:p>
+        </p:txBody>
+      </p:sp>
+      <p:sp>
+        <p:nvSpPr>
+          <p:cNvPr id="35" name="Rectangle 34"/>
+          <p:cNvSpPr/>
+          <p:nvPr/>
+        </p:nvSpPr>
+        <p:spPr>
+          <a:xfrm>
+            <a:off x="6720000" y="2970000"/>
+            <a:ext cx="2210000" cy="30000"/>
+          </a:xfrm>
+          <a:prstGeom prst="rect">
+            <a:avLst/>
+          </a:prstGeom>
+          <a:solidFill>
+            <a:srgbClr val="FF5A36"/>
+          </a:solidFill>
+          <a:ln>
+            <a:noFill/>
+          </a:ln>
+          <a:effectLst/>
+        </p:spPr>
+        <p:style>
+          <a:lnRef idx="1">
+            <a:schemeClr val="accent1"/>
+          </a:lnRef>
+          <a:fillRef idx="3">
+            <a:schemeClr val="accent1"/>
+          </a:fillRef>
+          <a:effectRef idx="2">
+            <a:schemeClr val="accent1"/>
+          </a:effectRef>
+          <a:fontRef idx="minor">
+            <a:schemeClr val="lt1"/>
+          </a:fontRef>
+        </p:style>
+        <p:txBody>
+          <a:bodyPr rtlCol="0" anchor="ctr"/>
+          <a:lstStyle/>
+          <a:p>
+            <a:pPr algn="ctr"/>
+          </a:p>
+        </p:txBody>
+      </p:sp>
+      <p:sp>
+        <p:nvSpPr>
+          <p:cNvPr id="36" name="TextBox 35"/>
+          <p:cNvSpPr txBox="1"/>
+          <p:nvPr/>
+        </p:nvSpPr>
+        <p:spPr>
+          <a:xfrm>
+            <a:off x="6750000" y="3110000"/>
+            <a:ext cx="2150000" cy="1060000"/>
+          </a:xfrm>
+          <a:prstGeom prst="rect">
+            <a:avLst/>
+          </a:prstGeom>
+          <a:noFill/>
+        </p:spPr>
+        <p:txBody>
+          <a:bodyPr wrap="square" anchor="t" lIns="30000" rIns="30000" tIns="10000" bIns="10000">
+            <a:spAutoFit/>
+          </a:bodyPr>
+          <a:lstStyle/>
+          <a:p>
+            <a:pPr algn="l">
+              <a:lnSpc>
+                <a:spcPct val="120000"/>
+              </a:lnSpc>
+              <a:spcAft>
+                <a:spcPts val="1600"/>
+              </a:spcAft>
+            </a:pPr>
+            <a:r>
+              <a:rPr sz="1350" b="1" i="0">
+                <a:solidFill>
+                  <a:srgbClr val="FF5A36"/>
+                </a:solidFill>
+                <a:latin typeface="Calibri"/>
+              </a:rPr>
+              <a:t>•  </a:t>
+            </a:r>
+            <a:r>
+              <a:rPr sz="1350" b="0" i="0">
+                <a:solidFill>
+                  <a:srgbClr val="A9B4C0"/>
+                </a:solidFill>
+                <a:latin typeface="Calibri"/>
+              </a:rPr>
+              <a:t>единые справочники поставщиков и материалов</a:t>
+            </a:r>
+          </a:p>
+          <a:p>
+            <a:pPr algn="l">
+              <a:lnSpc>
+                <a:spcPct val="120000"/>
+              </a:lnSpc>
+              <a:spcAft>
+                <a:spcPts val="1600"/>
+              </a:spcAft>
+            </a:pPr>
+            <a:r>
+              <a:rPr sz="1350" b="1" i="0">
+                <a:solidFill>
+                  <a:srgbClr val="FF5A36"/>
+                </a:solidFill>
+                <a:latin typeface="Calibri"/>
+              </a:rPr>
+              <a:t>•  </a:t>
+            </a:r>
+            <a:r>
+              <a:rPr sz="1350" b="0" i="0">
+                <a:solidFill>
+                  <a:srgbClr val="A9B4C0"/>
+                </a:solidFill>
+                <a:latin typeface="Calibri"/>
+              </a:rPr>
+              <a:t>цены → руб./тн по месяцам</a:t>
+            </a:r>
+          </a:p>
+          <a:p>
+            <a:pPr algn="l">
+              <a:lnSpc>
+                <a:spcPct val="120000"/>
+              </a:lnSpc>
+              <a:spcAft>
+                <a:spcPts val="1600"/>
+              </a:spcAft>
+            </a:pPr>
+            <a:r>
+              <a:rPr sz="1350" b="1" i="0">
+                <a:solidFill>
+                  <a:srgbClr val="FF5A36"/>
+                </a:solidFill>
+                <a:latin typeface="Calibri"/>
+              </a:rPr>
+              <a:t>•  </a:t>
+            </a:r>
+            <a:r>
+              <a:rPr sz="1350" b="0" i="0">
+                <a:solidFill>
+                  <a:srgbClr val="A9B4C0"/>
+                </a:solidFill>
+                <a:latin typeface="Calibri"/>
+              </a:rPr>
+              <a:t>результат складывается в витрину mart</a:t>
+            </a:r>
+          </a:p>
+        </p:txBody>
+      </p:sp>
+      <p:sp>
+        <p:nvSpPr>
+          <p:cNvPr id="37" name="Rounded Rectangle 36"/>
+          <p:cNvSpPr/>
+          <p:nvPr/>
+        </p:nvSpPr>
+        <p:spPr>
+          <a:xfrm>
+            <a:off x="6500000" y="4600000"/>
+            <a:ext cx="2650000" cy="820000"/>
+          </a:xfrm>
+          <a:prstGeom prst="roundRect">
+            <a:avLst>
+              <a:gd name="adj" fmla="val 12000"/>
+            </a:avLst>
+          </a:prstGeom>
+          <a:solidFill>
+            <a:srgbClr val="232931"/>
+          </a:solidFill>
+          <a:ln w="15875">
+            <a:solidFill>
+              <a:srgbClr val="3E4A56"/>
+            </a:solidFill>
+          </a:ln>
+          <a:effectLst/>
+        </p:spPr>
+        <p:style>
+          <a:lnRef idx="1">
+            <a:schemeClr val="accent1"/>
+          </a:lnRef>
+          <a:fillRef idx="3">
+            <a:schemeClr val="accent1"/>
+          </a:fillRef>
+          <a:effectRef idx="2">
+            <a:schemeClr val="accent1"/>
+          </a:effectRef>
+          <a:fontRef idx="minor">
+            <a:schemeClr val="lt1"/>
+          </a:fontRef>
+        </p:style>
+        <p:txBody>
+          <a:bodyPr rtlCol="0" anchor="ctr"/>
+          <a:lstStyle/>
+          <a:p>
+            <a:pPr algn="ctr"/>
+          </a:p>
+        </p:txBody>
+      </p:sp>
+      <p:sp>
+        <p:nvSpPr>
+          <p:cNvPr id="38" name="Rounded Rectangle 37"/>
+          <p:cNvSpPr/>
+          <p:nvPr/>
+        </p:nvSpPr>
+        <p:spPr>
+          <a:xfrm>
+            <a:off x="6540000" y="4640000"/>
+            <a:ext cx="2570000" cy="135000"/>
+          </a:xfrm>
+          <a:prstGeom prst="roundRect">
+            <a:avLst>
+              <a:gd name="adj" fmla="val 50000"/>
+            </a:avLst>
+          </a:prstGeom>
+          <a:solidFill>
+            <a:srgbClr val="FF5A36"/>
+          </a:solidFill>
+          <a:ln>
+            <a:noFill/>
+          </a:ln>
+          <a:effectLst/>
+        </p:spPr>
+        <p:style>
+          <a:lnRef idx="1">
+            <a:schemeClr val="accent1"/>
+          </a:lnRef>
+          <a:fillRef idx="3">
+            <a:schemeClr val="accent1"/>
+          </a:fillRef>
+          <a:effectRef idx="2">
+            <a:schemeClr val="accent1"/>
+          </a:effectRef>
+          <a:fontRef idx="minor">
+            <a:schemeClr val="lt1"/>
+          </a:fontRef>
+        </p:style>
+        <p:txBody>
+          <a:bodyPr rtlCol="0" anchor="ctr" wrap="none" lIns="20000" rIns="20000" tIns="0" bIns="0"/>
+          <a:lstStyle/>
+          <a:p>
+            <a:pPr algn="ctr"/>
+            <a:r>
+              <a:rPr sz="1350" b="1">
+                <a:solidFill>
+                  <a:srgbClr val="101418"/>
+                </a:solidFill>
+                <a:latin typeface="Calibri"/>
+              </a:rPr>
+              <a:t>7 · Entity Resolution</a:t>
+            </a:r>
+          </a:p>
+        </p:txBody>
+      </p:sp>
+      <p:sp>
+        <p:nvSpPr>
+          <p:cNvPr id="39" name="TextBox 38"/>
+          <p:cNvSpPr txBox="1"/>
+          <p:nvPr/>
+        </p:nvSpPr>
+        <p:spPr>
+          <a:xfrm>
+            <a:off x="6560000" y="4815000"/>
+            <a:ext cx="2530000" cy="565000"/>
+          </a:xfrm>
+          <a:prstGeom prst="rect">
+            <a:avLst/>
+          </a:prstGeom>
+          <a:noFill/>
+        </p:spPr>
+        <p:txBody>
+          <a:bodyPr wrap="square" anchor="ctr" lIns="30000" rIns="30000" tIns="10000" bIns="10000">
+            <a:spAutoFit/>
+          </a:bodyPr>
+          <a:lstStyle/>
+          <a:p>
+            <a:pPr algn="ctr">
+              <a:lnSpc>
+                <a:spcPct val="110000"/>
+              </a:lnSpc>
+            </a:pPr>
+            <a:r>
+              <a:rPr sz="1100" b="0" i="0">
+                <a:solidFill>
+                  <a:srgbClr val="A9B4C0"/>
+                </a:solidFill>
+                <a:latin typeface="Calibri"/>
+              </a:rPr>
+              <a:t>каталоги item · supplier · period</a:t>
+            </a:r>
+          </a:p>
+        </p:txBody>
+      </p:sp>
+      <p:sp>
+        <p:nvSpPr>
+          <p:cNvPr id="40" name="Rounded Rectangle 39"/>
+          <p:cNvSpPr/>
+          <p:nvPr/>
+        </p:nvSpPr>
+        <p:spPr>
+          <a:xfrm>
+            <a:off x="9450000" y="2180000"/>
+            <a:ext cx="2360000" cy="3820000"/>
+          </a:xfrm>
+          <a:prstGeom prst="roundRect">
+            <a:avLst>
+              <a:gd name="adj" fmla="val 4000"/>
+            </a:avLst>
+          </a:prstGeom>
+          <a:noFill/>
+          <a:ln w="12700">
+            <a:solidFill>
+              <a:srgbClr val="4A5662"/>
+            </a:solidFill>
+            <a:prstDash val="dash"/>
+          </a:ln>
+          <a:effectLst/>
+        </p:spPr>
+        <p:style>
+          <a:lnRef idx="1">
+            <a:schemeClr val="accent1"/>
+          </a:lnRef>
+          <a:fillRef idx="3">
+            <a:schemeClr val="accent1"/>
+          </a:fillRef>
+          <a:effectRef idx="2">
+            <a:schemeClr val="accent1"/>
+          </a:effectRef>
+          <a:fontRef idx="minor">
+            <a:schemeClr val="lt1"/>
+          </a:fontRef>
+        </p:style>
+        <p:txBody>
+          <a:bodyPr rtlCol="0" anchor="ctr"/>
+          <a:lstStyle/>
+          <a:p>
+            <a:pPr algn="ctr"/>
+          </a:p>
+        </p:txBody>
+      </p:sp>
+      <p:sp>
+        <p:nvSpPr>
+          <p:cNvPr id="41" name="Rounded Rectangle 40"/>
+          <p:cNvSpPr/>
+          <p:nvPr/>
+        </p:nvSpPr>
+        <p:spPr>
+          <a:xfrm>
+            <a:off x="10160000" y="2060000"/>
+            <a:ext cx="940000" cy="240000"/>
+          </a:xfrm>
+          <a:prstGeom prst="roundRect">
+            <a:avLst>
+              <a:gd name="adj" fmla="val 50000"/>
+            </a:avLst>
+          </a:prstGeom>
+          <a:solidFill>
+            <a:srgbClr val="1B1F24"/>
+          </a:solidFill>
+          <a:ln w="12700">
+            <a:solidFill>
+              <a:srgbClr val="2FA6C9"/>
+            </a:solidFill>
+          </a:ln>
+          <a:effectLst/>
+        </p:spPr>
+        <p:style>
+          <a:lnRef idx="1">
+            <a:schemeClr val="accent1"/>
+          </a:lnRef>
+          <a:fillRef idx="3">
+            <a:schemeClr val="accent1"/>
+          </a:fillRef>
+          <a:effectRef idx="2">
+            <a:schemeClr val="accent1"/>
+          </a:effectRef>
+          <a:fontRef idx="minor">
+            <a:schemeClr val="lt1"/>
+          </a:fontRef>
+        </p:style>
+        <p:txBody>
+          <a:bodyPr rtlCol="0" anchor="ctr" wrap="none" lIns="10000" rIns="10000" tIns="0" bIns="0"/>
+          <a:lstStyle/>
+          <a:p>
+            <a:pPr algn="ctr"/>
+            <a:r>
+              <a:rPr sz="1050" b="1">
+                <a:solidFill>
+                  <a:srgbClr val="2FA6C9"/>
+                </a:solidFill>
+                <a:latin typeface="Calibri"/>
+              </a:rPr>
+              <a:t>витрина mart</a:t>
+            </a:r>
+          </a:p>
+        </p:txBody>
+      </p:sp>
+      <p:sp>
+        <p:nvSpPr>
+          <p:cNvPr id="42" name="Rounded Rectangle 41"/>
+          <p:cNvSpPr/>
+          <p:nvPr/>
+        </p:nvSpPr>
+        <p:spPr>
+          <a:xfrm>
+            <a:off x="9550000" y="2280000"/>
+            <a:ext cx="2100000" cy="820000"/>
+          </a:xfrm>
+          <a:prstGeom prst="roundRect">
+            <a:avLst>
+              <a:gd name="adj" fmla="val 12000"/>
+            </a:avLst>
+          </a:prstGeom>
+          <a:solidFill>
+            <a:srgbClr val="232931"/>
+          </a:solidFill>
+          <a:ln w="15875">
+            <a:solidFill>
+              <a:srgbClr val="3E4A56"/>
+            </a:solidFill>
+          </a:ln>
+          <a:effectLst/>
+        </p:spPr>
+        <p:style>
+          <a:lnRef idx="1">
+            <a:schemeClr val="accent1"/>
+          </a:lnRef>
+          <a:fillRef idx="3">
+            <a:schemeClr val="accent1"/>
+          </a:fillRef>
+          <a:effectRef idx="2">
+            <a:schemeClr val="accent1"/>
+          </a:effectRef>
+          <a:fontRef idx="minor">
+            <a:schemeClr val="lt1"/>
+          </a:fontRef>
+        </p:style>
+        <p:txBody>
+          <a:bodyPr rtlCol="0" anchor="ctr"/>
+          <a:lstStyle/>
+          <a:p>
+            <a:pPr algn="ctr"/>
+          </a:p>
+        </p:txBody>
+      </p:sp>
+      <p:sp>
+        <p:nvSpPr>
+          <p:cNvPr id="43" name="Rounded Rectangle 42"/>
+          <p:cNvSpPr/>
+          <p:nvPr/>
+        </p:nvSpPr>
+        <p:spPr>
+          <a:xfrm>
+            <a:off x="9590000" y="2320000"/>
+            <a:ext cx="2020000" cy="135000"/>
+          </a:xfrm>
+          <a:prstGeom prst="roundRect">
+            <a:avLst>
+              <a:gd name="adj" fmla="val 50000"/>
+            </a:avLst>
+          </a:prstGeom>
+          <a:solidFill>
+            <a:srgbClr val="FF5A36"/>
+          </a:solidFill>
+          <a:ln>
+            <a:noFill/>
+          </a:ln>
+          <a:effectLst/>
+        </p:spPr>
+        <p:style>
+          <a:lnRef idx="1">
+            <a:schemeClr val="accent1"/>
+          </a:lnRef>
+          <a:fillRef idx="3">
+            <a:schemeClr val="accent1"/>
+          </a:fillRef>
+          <a:effectRef idx="2">
+            <a:schemeClr val="accent1"/>
+          </a:effectRef>
+          <a:fontRef idx="minor">
+            <a:schemeClr val="lt1"/>
+          </a:fontRef>
+        </p:style>
+        <p:txBody>
+          <a:bodyPr rtlCol="0" anchor="ctr" wrap="none" lIns="20000" rIns="20000" tIns="0" bIns="0"/>
+          <a:lstStyle/>
+          <a:p>
+            <a:pPr algn="ctr"/>
+            <a:r>
+              <a:rPr sz="1350" b="1">
+                <a:solidFill>
+                  <a:srgbClr val="101418"/>
+                </a:solidFill>
+                <a:latin typeface="Calibri"/>
+              </a:rPr>
+              <a:t>8 · mart.price_facts</a:t>
+            </a:r>
+          </a:p>
+        </p:txBody>
+      </p:sp>
+      <p:sp>
+        <p:nvSpPr>
+          <p:cNvPr id="44" name="TextBox 43"/>
+          <p:cNvSpPr txBox="1"/>
+          <p:nvPr/>
+        </p:nvSpPr>
+        <p:spPr>
+          <a:xfrm>
+            <a:off x="9610000" y="2495000"/>
+            <a:ext cx="1980000" cy="565000"/>
+          </a:xfrm>
+          <a:prstGeom prst="rect">
+            <a:avLst/>
+          </a:prstGeom>
+          <a:noFill/>
+        </p:spPr>
+        <p:txBody>
+          <a:bodyPr wrap="square" anchor="ctr" lIns="30000" rIns="30000" tIns="10000" bIns="10000">
+            <a:spAutoFit/>
+          </a:bodyPr>
+          <a:lstStyle/>
+          <a:p>
+            <a:pPr algn="ctr">
+              <a:lnSpc>
+                <a:spcPct val="110000"/>
+              </a:lnSpc>
+            </a:pPr>
+            <a:r>
+              <a:rPr sz="1100" b="0" i="0">
+                <a:solidFill>
+                  <a:srgbClr val="A9B4C0"/>
+                </a:solidFill>
+                <a:latin typeface="Calibri"/>
+              </a:rPr>
+              <a:t>цены · руб./тн по месяцам</a:t>
+            </a:r>
+          </a:p>
+        </p:txBody>
+      </p:sp>
+      <p:sp>
+        <p:nvSpPr>
+          <p:cNvPr id="45" name="Rounded Rectangle 44"/>
+          <p:cNvSpPr/>
+          <p:nvPr/>
+        </p:nvSpPr>
+        <p:spPr>
+          <a:xfrm>
+            <a:off x="9550000" y="3440000"/>
+            <a:ext cx="2100000" cy="820000"/>
+          </a:xfrm>
+          <a:prstGeom prst="roundRect">
+            <a:avLst>
+              <a:gd name="adj" fmla="val 12000"/>
+            </a:avLst>
+          </a:prstGeom>
+          <a:solidFill>
+            <a:srgbClr val="232931"/>
+          </a:solidFill>
+          <a:ln w="15875">
+            <a:solidFill>
+              <a:srgbClr val="3E4A56"/>
+            </a:solidFill>
+          </a:ln>
+          <a:effectLst/>
+        </p:spPr>
+        <p:style>
+          <a:lnRef idx="1">
+            <a:schemeClr val="accent1"/>
+          </a:lnRef>
+          <a:fillRef idx="3">
+            <a:schemeClr val="accent1"/>
+          </a:fillRef>
+          <a:effectRef idx="2">
+            <a:schemeClr val="accent1"/>
+          </a:effectRef>
+          <a:fontRef idx="minor">
+            <a:schemeClr val="lt1"/>
+          </a:fontRef>
+        </p:style>
+        <p:txBody>
+          <a:bodyPr rtlCol="0" anchor="ctr"/>
+          <a:lstStyle/>
+          <a:p>
+            <a:pPr algn="ctr"/>
+          </a:p>
+        </p:txBody>
+      </p:sp>
+      <p:sp>
+        <p:nvSpPr>
+          <p:cNvPr id="46" name="Rounded Rectangle 45"/>
+          <p:cNvSpPr/>
+          <p:nvPr/>
+        </p:nvSpPr>
+        <p:spPr>
+          <a:xfrm>
+            <a:off x="9590000" y="3480000"/>
+            <a:ext cx="2020000" cy="135000"/>
+          </a:xfrm>
+          <a:prstGeom prst="roundRect">
+            <a:avLst>
+              <a:gd name="adj" fmla="val 50000"/>
+            </a:avLst>
+          </a:prstGeom>
+          <a:solidFill>
+            <a:srgbClr val="FF5A36"/>
+          </a:solidFill>
+          <a:ln>
+            <a:noFill/>
+          </a:ln>
+          <a:effectLst/>
+        </p:spPr>
+        <p:style>
+          <a:lnRef idx="1">
+            <a:schemeClr val="accent1"/>
+          </a:lnRef>
+          <a:fillRef idx="3">
+            <a:schemeClr val="accent1"/>
+          </a:fillRef>
+          <a:effectRef idx="2">
+            <a:schemeClr val="accent1"/>
+          </a:effectRef>
+          <a:fontRef idx="minor">
+            <a:schemeClr val="lt1"/>
+          </a:fontRef>
+        </p:style>
+        <p:txBody>
+          <a:bodyPr rtlCol="0" anchor="ctr" wrap="none" lIns="20000" rIns="20000" tIns="0" bIns="0"/>
+          <a:lstStyle/>
+          <a:p>
+            <a:pPr algn="ctr"/>
+            <a:r>
+              <a:rPr sz="1350" b="1">
+                <a:solidFill>
+                  <a:srgbClr val="101418"/>
+                </a:solidFill>
+                <a:latin typeface="Calibri"/>
+              </a:rPr>
+              <a:t>9 · mart.metrics</a:t>
+            </a:r>
+          </a:p>
+        </p:txBody>
+      </p:sp>
+      <p:sp>
+        <p:nvSpPr>
+          <p:cNvPr id="47" name="TextBox 46"/>
+          <p:cNvSpPr txBox="1"/>
+          <p:nvPr/>
+        </p:nvSpPr>
+        <p:spPr>
+          <a:xfrm>
+            <a:off x="9610000" y="3655000"/>
+            <a:ext cx="1980000" cy="565000"/>
+          </a:xfrm>
+          <a:prstGeom prst="rect">
+            <a:avLst/>
+          </a:prstGeom>
+          <a:noFill/>
+        </p:spPr>
+        <p:txBody>
+          <a:bodyPr wrap="square" anchor="ctr" lIns="30000" rIns="30000" tIns="10000" bIns="10000">
+            <a:spAutoFit/>
+          </a:bodyPr>
+          <a:lstStyle/>
+          <a:p>
+            <a:pPr algn="ctr">
+              <a:lnSpc>
+                <a:spcPct val="110000"/>
+              </a:lnSpc>
+            </a:pPr>
+            <a:r>
+              <a:rPr sz="1100" b="0" i="0">
+                <a:solidFill>
+                  <a:srgbClr val="A9B4C0"/>
+                </a:solidFill>
+                <a:latin typeface="Calibri"/>
+              </a:rPr>
+              <a:t>показатели по месяцам</a:t>
+            </a:r>
+          </a:p>
+        </p:txBody>
+      </p:sp>
+      <p:sp>
+        <p:nvSpPr>
+          <p:cNvPr id="48" name="Rounded Rectangle 47"/>
+          <p:cNvSpPr/>
+          <p:nvPr/>
+        </p:nvSpPr>
+        <p:spPr>
+          <a:xfrm>
+            <a:off x="9550000" y="4600000"/>
+            <a:ext cx="2100000" cy="820000"/>
+          </a:xfrm>
+          <a:prstGeom prst="roundRect">
+            <a:avLst>
+              <a:gd name="adj" fmla="val 12000"/>
+            </a:avLst>
+          </a:prstGeom>
+          <a:solidFill>
+            <a:srgbClr val="232931"/>
+          </a:solidFill>
+          <a:ln w="15875">
+            <a:solidFill>
+              <a:srgbClr val="3E4A56"/>
+            </a:solidFill>
+          </a:ln>
+          <a:effectLst/>
+        </p:spPr>
+        <p:style>
+          <a:lnRef idx="1">
+            <a:schemeClr val="accent1"/>
+          </a:lnRef>
+          <a:fillRef idx="3">
+            <a:schemeClr val="accent1"/>
+          </a:fillRef>
+          <a:effectRef idx="2">
+            <a:schemeClr val="accent1"/>
+          </a:effectRef>
+          <a:fontRef idx="minor">
+            <a:schemeClr val="lt1"/>
+          </a:fontRef>
+        </p:style>
+        <p:txBody>
+          <a:bodyPr rtlCol="0" anchor="ctr"/>
+          <a:lstStyle/>
+          <a:p>
+            <a:pPr algn="ctr"/>
+          </a:p>
+        </p:txBody>
+      </p:sp>
+      <p:sp>
+        <p:nvSpPr>
+          <p:cNvPr id="49" name="Rounded Rectangle 48"/>
+          <p:cNvSpPr/>
+          <p:nvPr/>
+        </p:nvSpPr>
+        <p:spPr>
+          <a:xfrm>
+            <a:off x="9590000" y="4640000"/>
+            <a:ext cx="2020000" cy="135000"/>
+          </a:xfrm>
+          <a:prstGeom prst="roundRect">
+            <a:avLst>
+              <a:gd name="adj" fmla="val 50000"/>
+            </a:avLst>
+          </a:prstGeom>
+          <a:solidFill>
+            <a:srgbClr val="FF5A36"/>
+          </a:solidFill>
+          <a:ln>
+            <a:noFill/>
+          </a:ln>
+          <a:effectLst/>
+        </p:spPr>
+        <p:style>
+          <a:lnRef idx="1">
+            <a:schemeClr val="accent1"/>
+          </a:lnRef>
+          <a:fillRef idx="3">
+            <a:schemeClr val="accent1"/>
+          </a:fillRef>
+          <a:effectRef idx="2">
+            <a:schemeClr val="accent1"/>
+          </a:effectRef>
+          <a:fontRef idx="minor">
+            <a:schemeClr val="lt1"/>
+          </a:fontRef>
+        </p:style>
+        <p:txBody>
+          <a:bodyPr rtlCol="0" anchor="ctr" wrap="none" lIns="20000" rIns="20000" tIns="0" bIns="0"/>
+          <a:lstStyle/>
+          <a:p>
+            <a:pPr algn="ctr"/>
+            <a:r>
+              <a:rPr sz="1350" b="1">
+                <a:solidFill>
+                  <a:srgbClr val="101418"/>
+                </a:solidFill>
+                <a:latin typeface="Calibri"/>
+              </a:rPr>
+              <a:t>10 · Каталоги</a:t>
+            </a:r>
+          </a:p>
+        </p:txBody>
+      </p:sp>
+      <p:sp>
+        <p:nvSpPr>
+          <p:cNvPr id="50" name="TextBox 49"/>
+          <p:cNvSpPr txBox="1"/>
+          <p:nvPr/>
+        </p:nvSpPr>
+        <p:spPr>
+          <a:xfrm>
+            <a:off x="9610000" y="4815000"/>
+            <a:ext cx="1980000" cy="565000"/>
+          </a:xfrm>
+          <a:prstGeom prst="rect">
+            <a:avLst/>
+          </a:prstGeom>
+          <a:noFill/>
+        </p:spPr>
+        <p:txBody>
+          <a:bodyPr wrap="square" anchor="ctr" lIns="30000" rIns="30000" tIns="10000" bIns="10000">
+            <a:spAutoFit/>
+          </a:bodyPr>
+          <a:lstStyle/>
+          <a:p>
+            <a:pPr algn="ctr">
+              <a:lnSpc>
+                <a:spcPct val="110000"/>
+              </a:lnSpc>
+            </a:pPr>
+            <a:r>
+              <a:rPr sz="1100" b="0" i="0">
+                <a:solidFill>
+                  <a:srgbClr val="A9B4C0"/>
+                </a:solidFill>
+                <a:latin typeface="Calibri"/>
+              </a:rPr>
+              <a:t>item · supplier · period</a:t>
             </a:r>
           </a:p>
         </p:txBody>
       </p:sp>
       <p:cxnSp>
         <p:nvCxnSpPr>
-          <p:cNvPr id="68" name="Connector 67"/>
+          <p:cNvPr id="51" name="Connector 50"/>
           <p:cNvCxnSpPr/>
           <p:nvPr/>
         </p:nvCxnSpPr>
         <p:spPr>
           <a:xfrm>
-            <a:off x="5138928" y="2189988"/>
-            <a:ext cx="329184" cy="0"/>
+            <a:off x="1798640" y="3100000"/>
+            <a:ext cx="0" cy="340000"/>
           </a:xfrm>
           <a:prstGeom prst="line">
             <a:avLst/>
           </a:prstGeom>
-          <a:ln w="25400">
+          <a:ln w="22225">
             <a:solidFill>
               <a:srgbClr val="FF5A36"/>
             </a:solidFill>
@@ -19303,181 +20825,23 @@
       </p:cxnSp>
       <p:cxnSp>
         <p:nvCxnSpPr>
-          <p:cNvPr id="69" name="Connector 68"/>
+          <p:cNvPr id="52" name="Connector 51"/>
           <p:cNvCxnSpPr/>
           <p:nvPr/>
         </p:nvCxnSpPr>
         <p:spPr>
           <a:xfrm>
-            <a:off x="6537960" y="2606040"/>
-            <a:ext cx="0" cy="530352"/>
+            <a:off x="1798640" y="4260000"/>
+            <a:ext cx="0" cy="340000"/>
           </a:xfrm>
           <a:prstGeom prst="line">
             <a:avLst/>
           </a:prstGeom>
-          <a:ln w="25400">
+          <a:ln w="22225">
             <a:solidFill>
               <a:srgbClr val="FF5A36"/>
             </a:solidFill>
             <a:tailEnd type="triangle" w="med" len="med"/>
-          </a:ln>
-          <a:effectLst/>
-        </p:spPr>
-        <p:style>
-          <a:lnRef idx="2">
-            <a:schemeClr val="accent1"/>
-          </a:lnRef>
-          <a:fillRef idx="0">
-            <a:schemeClr val="accent1"/>
-          </a:fillRef>
-          <a:effectRef idx="1">
-            <a:schemeClr val="accent1"/>
-          </a:effectRef>
-          <a:fontRef idx="minor">
-            <a:schemeClr val="tx1"/>
-          </a:fontRef>
-        </p:style>
-      </p:cxnSp>
-      <p:sp>
-        <p:nvSpPr>
-          <p:cNvPr id="70" name="Rounded Rectangle 69"/>
-          <p:cNvSpPr/>
-          <p:nvPr/>
-        </p:nvSpPr>
-        <p:spPr>
-          <a:xfrm>
-            <a:off x="5486400" y="3154680"/>
-            <a:ext cx="2103120" cy="1005840"/>
-          </a:xfrm>
-          <a:prstGeom prst="roundRect">
-            <a:avLst>
-              <a:gd name="adj" fmla="val 70000"/>
-            </a:avLst>
-          </a:prstGeom>
-          <a:solidFill>
-            <a:srgbClr val="262C33"/>
-          </a:solidFill>
-          <a:ln w="12700">
-            <a:solidFill>
-              <a:srgbClr val="3A434D"/>
-            </a:solidFill>
-          </a:ln>
-          <a:effectLst/>
-        </p:spPr>
-        <p:style>
-          <a:lnRef idx="1">
-            <a:schemeClr val="accent1"/>
-          </a:lnRef>
-          <a:fillRef idx="3">
-            <a:schemeClr val="accent1"/>
-          </a:fillRef>
-          <a:effectRef idx="2">
-            <a:schemeClr val="accent1"/>
-          </a:effectRef>
-          <a:fontRef idx="minor">
-            <a:schemeClr val="lt1"/>
-          </a:fontRef>
-        </p:style>
-        <p:txBody>
-          <a:bodyPr rtlCol="0" anchor="ctr"/>
-          <a:lstStyle/>
-          <a:p>
-            <a:pPr algn="ctr"/>
-            <a:endParaRPr/>
-          </a:p>
-        </p:txBody>
-      </p:sp>
-      <p:sp>
-        <p:nvSpPr>
-          <p:cNvPr id="71" name="TextBox 70"/>
-          <p:cNvSpPr txBox="1"/>
-          <p:nvPr/>
-        </p:nvSpPr>
-        <p:spPr>
-          <a:xfrm>
-            <a:off x="5577840" y="3246120"/>
-            <a:ext cx="1920239" cy="365760"/>
-          </a:xfrm>
-          <a:prstGeom prst="rect">
-            <a:avLst/>
-          </a:prstGeom>
-          <a:noFill/>
-        </p:spPr>
-        <p:txBody>
-          <a:bodyPr wrap="square" lIns="0" tIns="0" rIns="0" bIns="0" anchor="t">
-            <a:spAutoFit/>
-          </a:bodyPr>
-          <a:lstStyle/>
-          <a:p>
-            <a:r>
-              <a:rPr sz="1350" b="1">
-                <a:solidFill>
-                  <a:srgbClr val="FFFFFF"/>
-                </a:solidFill>
-                <a:latin typeface="Calibri"/>
-              </a:rPr>
-              <a:t>RAW → Нормализация</a:t>
-            </a:r>
-          </a:p>
-        </p:txBody>
-      </p:sp>
-      <p:sp>
-        <p:nvSpPr>
-          <p:cNvPr id="72" name="TextBox 71"/>
-          <p:cNvSpPr txBox="1"/>
-          <p:nvPr/>
-        </p:nvSpPr>
-        <p:spPr>
-          <a:xfrm>
-            <a:off x="5577840" y="3611880"/>
-            <a:ext cx="1920239" cy="475488"/>
-          </a:xfrm>
-          <a:prstGeom prst="rect">
-            <a:avLst/>
-          </a:prstGeom>
-          <a:noFill/>
-        </p:spPr>
-        <p:txBody>
-          <a:bodyPr wrap="square" lIns="0" tIns="0" rIns="0" bIns="0" anchor="t">
-            <a:spAutoFit/>
-          </a:bodyPr>
-          <a:lstStyle/>
-          <a:p>
-            <a:pPr>
-              <a:lnSpc>
-                <a:spcPct val="105000"/>
-              </a:lnSpc>
-            </a:pPr>
-            <a:r>
-              <a:rPr sz="1000">
-                <a:solidFill>
-                  <a:srgbClr val="A9B4C0"/>
-                </a:solidFill>
-                <a:latin typeface="Calibri"/>
-              </a:rPr>
-              <a:t>public: sheets · cells → mart · справочники · руб./тн</a:t>
-            </a:r>
-          </a:p>
-        </p:txBody>
-      </p:sp>
-      <p:cxnSp>
-        <p:nvCxnSpPr>
-          <p:cNvPr id="73" name="Connector 72"/>
-          <p:cNvCxnSpPr/>
-          <p:nvPr/>
-        </p:nvCxnSpPr>
-        <p:spPr>
-          <a:xfrm>
-            <a:off x="7955279" y="2331720"/>
-            <a:ext cx="0" cy="1965959"/>
-          </a:xfrm>
-          <a:prstGeom prst="line">
-            <a:avLst/>
-          </a:prstGeom>
-          <a:ln w="25400">
-            <a:solidFill>
-              <a:srgbClr val="FF5A36"/>
-            </a:solidFill>
           </a:ln>
           <a:effectLst/>
         </p:spPr>
@@ -19498,19 +20862,19 @@
       </p:cxnSp>
       <p:cxnSp>
         <p:nvCxnSpPr>
-          <p:cNvPr id="74" name="Connector 73"/>
+          <p:cNvPr id="53" name="Connector 52"/>
           <p:cNvCxnSpPr/>
           <p:nvPr/>
         </p:nvCxnSpPr>
         <p:spPr>
-          <a:xfrm>
-            <a:off x="7607808" y="3657600"/>
-            <a:ext cx="329184" cy="0"/>
+          <a:xfrm flipV="1">
+            <a:off x="3328640" y="2880000"/>
+            <a:ext cx="121360" cy="1900000"/>
           </a:xfrm>
           <a:prstGeom prst="line">
             <a:avLst/>
           </a:prstGeom>
-          <a:ln w="25400">
+          <a:ln w="22225">
             <a:solidFill>
               <a:srgbClr val="FF5A36"/>
             </a:solidFill>
@@ -19535,19 +20899,19 @@
       </p:cxnSp>
       <p:cxnSp>
         <p:nvCxnSpPr>
-          <p:cNvPr id="75" name="Connector 74"/>
+          <p:cNvPr id="54" name="Connector 53"/>
           <p:cNvCxnSpPr/>
           <p:nvPr/>
         </p:nvCxnSpPr>
         <p:spPr>
-          <a:xfrm>
-            <a:off x="7955279" y="2331720"/>
-            <a:ext cx="365761" cy="0"/>
+          <a:xfrm flipV="1">
+            <a:off x="3328640" y="4080000"/>
+            <a:ext cx="121360" cy="700000"/>
           </a:xfrm>
           <a:prstGeom prst="line">
             <a:avLst/>
           </a:prstGeom>
-          <a:ln w="25400">
+          <a:ln w="22225">
             <a:solidFill>
               <a:srgbClr val="FF5A36"/>
             </a:solidFill>
@@ -19570,143 +20934,21 @@
           </a:fontRef>
         </p:style>
       </p:cxnSp>
-      <p:sp>
-        <p:nvSpPr>
-          <p:cNvPr id="76" name="Rounded Rectangle 75"/>
-          <p:cNvSpPr/>
-          <p:nvPr/>
-        </p:nvSpPr>
-        <p:spPr>
-          <a:xfrm>
-            <a:off x="8321040" y="1874519"/>
-            <a:ext cx="3657600" cy="914400"/>
-          </a:xfrm>
-          <a:prstGeom prst="roundRect">
-            <a:avLst>
-              <a:gd name="adj" fmla="val 70000"/>
-            </a:avLst>
-          </a:prstGeom>
-          <a:solidFill>
-            <a:srgbClr val="262C33"/>
-          </a:solidFill>
-          <a:ln w="12700">
-            <a:solidFill>
-              <a:srgbClr val="3A434D"/>
-            </a:solidFill>
-          </a:ln>
-          <a:effectLst/>
-        </p:spPr>
-        <p:style>
-          <a:lnRef idx="1">
-            <a:schemeClr val="accent1"/>
-          </a:lnRef>
-          <a:fillRef idx="3">
-            <a:schemeClr val="accent1"/>
-          </a:fillRef>
-          <a:effectRef idx="2">
-            <a:schemeClr val="accent1"/>
-          </a:effectRef>
-          <a:fontRef idx="minor">
-            <a:schemeClr val="lt1"/>
-          </a:fontRef>
-        </p:style>
-        <p:txBody>
-          <a:bodyPr rtlCol="0" anchor="ctr"/>
-          <a:lstStyle/>
-          <a:p>
-            <a:pPr algn="ctr"/>
-            <a:endParaRPr/>
-          </a:p>
-        </p:txBody>
-      </p:sp>
-      <p:sp>
-        <p:nvSpPr>
-          <p:cNvPr id="77" name="TextBox 76"/>
-          <p:cNvSpPr txBox="1"/>
-          <p:nvPr/>
-        </p:nvSpPr>
-        <p:spPr>
-          <a:xfrm>
-            <a:off x="8412480" y="1965960"/>
-            <a:ext cx="3474720" cy="365760"/>
-          </a:xfrm>
-          <a:prstGeom prst="rect">
-            <a:avLst/>
-          </a:prstGeom>
-          <a:noFill/>
-        </p:spPr>
-        <p:txBody>
-          <a:bodyPr wrap="square" lIns="0" tIns="0" rIns="0" bIns="0" anchor="t">
-            <a:spAutoFit/>
-          </a:bodyPr>
-          <a:lstStyle/>
-          <a:p>
-            <a:r>
-              <a:rPr sz="1400" b="1">
-                <a:solidFill>
-                  <a:srgbClr val="FFFFFF"/>
-                </a:solidFill>
-                <a:latin typeface="Calibri"/>
-              </a:rPr>
-              <a:t>mart.price_facts</a:t>
-            </a:r>
-          </a:p>
-        </p:txBody>
-      </p:sp>
-      <p:sp>
-        <p:nvSpPr>
-          <p:cNvPr id="78" name="TextBox 77"/>
-          <p:cNvSpPr txBox="1"/>
-          <p:nvPr/>
-        </p:nvSpPr>
-        <p:spPr>
-          <a:xfrm>
-            <a:off x="8412480" y="2331720"/>
-            <a:ext cx="3474720" cy="384048"/>
-          </a:xfrm>
-          <a:prstGeom prst="rect">
-            <a:avLst/>
-          </a:prstGeom>
-          <a:noFill/>
-        </p:spPr>
-        <p:txBody>
-          <a:bodyPr wrap="square" lIns="0" tIns="0" rIns="0" bIns="0" anchor="t">
-            <a:spAutoFit/>
-          </a:bodyPr>
-          <a:lstStyle/>
-          <a:p>
-            <a:pPr>
-              <a:lnSpc>
-                <a:spcPct val="105000"/>
-              </a:lnSpc>
-            </a:pPr>
-            <a:r>
-              <a:rPr sz="1100">
-                <a:solidFill>
-                  <a:srgbClr val="A9B4C0"/>
-                </a:solidFill>
-                <a:latin typeface="Calibri"/>
-              </a:rPr>
-              <a:t>листы prices → факты цен (руб./тн · месяцы)</a:t>
-            </a:r>
-          </a:p>
-        </p:txBody>
-      </p:sp>
       <p:cxnSp>
         <p:nvCxnSpPr>
-          <p:cNvPr id="79" name="Connector 78"/>
+          <p:cNvPr id="55" name="Connector 54"/>
           <p:cNvCxnSpPr/>
           <p:nvPr/>
         </p:nvCxnSpPr>
         <p:spPr>
           <a:xfrm>
-            <a:off x="7955279" y="4297680"/>
-            <a:ext cx="365761" cy="0"/>
+            <a:off x="6100000" y="2690000"/>
+            <a:ext cx="400000" cy="0"/>
           </a:xfrm>
           <a:prstGeom prst="line">
             <a:avLst/>
           </a:prstGeom>
-          <a:ln w="25400">
+          <a:ln w="22225">
             <a:solidFill>
               <a:srgbClr val="FF5A36"/>
             </a:solidFill>
@@ -19729,265 +20971,21 @@
           </a:fontRef>
         </p:style>
       </p:cxnSp>
-      <p:sp>
-        <p:nvSpPr>
-          <p:cNvPr id="80" name="Rounded Rectangle 79"/>
-          <p:cNvSpPr/>
-          <p:nvPr/>
-        </p:nvSpPr>
-        <p:spPr>
-          <a:xfrm>
-            <a:off x="8321040" y="3840480"/>
-            <a:ext cx="3657600" cy="914400"/>
-          </a:xfrm>
-          <a:prstGeom prst="roundRect">
-            <a:avLst>
-              <a:gd name="adj" fmla="val 70000"/>
-            </a:avLst>
-          </a:prstGeom>
-          <a:solidFill>
-            <a:srgbClr val="262C33"/>
-          </a:solidFill>
-          <a:ln w="12700">
-            <a:solidFill>
-              <a:srgbClr val="3A434D"/>
-            </a:solidFill>
-          </a:ln>
-          <a:effectLst/>
-        </p:spPr>
-        <p:style>
-          <a:lnRef idx="1">
-            <a:schemeClr val="accent1"/>
-          </a:lnRef>
-          <a:fillRef idx="3">
-            <a:schemeClr val="accent1"/>
-          </a:fillRef>
-          <a:effectRef idx="2">
-            <a:schemeClr val="accent1"/>
-          </a:effectRef>
-          <a:fontRef idx="minor">
-            <a:schemeClr val="lt1"/>
-          </a:fontRef>
-        </p:style>
-        <p:txBody>
-          <a:bodyPr rtlCol="0" anchor="ctr"/>
-          <a:lstStyle/>
-          <a:p>
-            <a:pPr algn="ctr"/>
-            <a:endParaRPr/>
-          </a:p>
-        </p:txBody>
-      </p:sp>
-      <p:sp>
-        <p:nvSpPr>
-          <p:cNvPr id="81" name="TextBox 80"/>
-          <p:cNvSpPr txBox="1"/>
-          <p:nvPr/>
-        </p:nvSpPr>
-        <p:spPr>
-          <a:xfrm>
-            <a:off x="8412480" y="3931920"/>
-            <a:ext cx="3474720" cy="365760"/>
-          </a:xfrm>
-          <a:prstGeom prst="rect">
-            <a:avLst/>
-          </a:prstGeom>
-          <a:noFill/>
-        </p:spPr>
-        <p:txBody>
-          <a:bodyPr wrap="square" lIns="0" tIns="0" rIns="0" bIns="0" anchor="t">
-            <a:spAutoFit/>
-          </a:bodyPr>
-          <a:lstStyle/>
-          <a:p>
-            <a:r>
-              <a:rPr sz="1400" b="1">
-                <a:solidFill>
-                  <a:srgbClr val="FFFFFF"/>
-                </a:solidFill>
-                <a:latin typeface="Calibri"/>
-              </a:rPr>
-              <a:t>mart.metrics</a:t>
-            </a:r>
-          </a:p>
-        </p:txBody>
-      </p:sp>
-      <p:sp>
-        <p:nvSpPr>
-          <p:cNvPr id="82" name="TextBox 81"/>
-          <p:cNvSpPr txBox="1"/>
-          <p:nvPr/>
-        </p:nvSpPr>
-        <p:spPr>
-          <a:xfrm>
-            <a:off x="8412480" y="4297680"/>
-            <a:ext cx="3474720" cy="384048"/>
-          </a:xfrm>
-          <a:prstGeom prst="rect">
-            <a:avLst/>
-          </a:prstGeom>
-          <a:noFill/>
-        </p:spPr>
-        <p:txBody>
-          <a:bodyPr wrap="square" lIns="0" tIns="0" rIns="0" bIns="0" anchor="t">
-            <a:spAutoFit/>
-          </a:bodyPr>
-          <a:lstStyle/>
-          <a:p>
-            <a:pPr>
-              <a:lnSpc>
-                <a:spcPct val="105000"/>
-              </a:lnSpc>
-            </a:pPr>
-            <a:r>
-              <a:rPr sz="1100">
-                <a:solidFill>
-                  <a:srgbClr val="A9B4C0"/>
-                </a:solidFill>
-                <a:latin typeface="Calibri"/>
-              </a:rPr>
-              <a:t>листы matrix → показатели (месяцы)</a:t>
-            </a:r>
-          </a:p>
-        </p:txBody>
-      </p:sp>
-      <p:sp>
-        <p:nvSpPr>
-          <p:cNvPr id="83" name="Rounded Rectangle 82"/>
-          <p:cNvSpPr/>
-          <p:nvPr/>
-        </p:nvSpPr>
-        <p:spPr>
-          <a:xfrm>
-            <a:off x="8321040" y="5029200"/>
-            <a:ext cx="3657600" cy="731520"/>
-          </a:xfrm>
-          <a:prstGeom prst="roundRect">
-            <a:avLst>
-              <a:gd name="adj" fmla="val 70000"/>
-            </a:avLst>
-          </a:prstGeom>
-          <a:solidFill>
-            <a:srgbClr val="262C33"/>
-          </a:solidFill>
-          <a:ln w="12700">
-            <a:solidFill>
-              <a:srgbClr val="3A434D"/>
-            </a:solidFill>
-          </a:ln>
-          <a:effectLst/>
-        </p:spPr>
-        <p:style>
-          <a:lnRef idx="1">
-            <a:schemeClr val="accent1"/>
-          </a:lnRef>
-          <a:fillRef idx="3">
-            <a:schemeClr val="accent1"/>
-          </a:fillRef>
-          <a:effectRef idx="2">
-            <a:schemeClr val="accent1"/>
-          </a:effectRef>
-          <a:fontRef idx="minor">
-            <a:schemeClr val="lt1"/>
-          </a:fontRef>
-        </p:style>
-        <p:txBody>
-          <a:bodyPr rtlCol="0" anchor="ctr"/>
-          <a:lstStyle/>
-          <a:p>
-            <a:pPr algn="ctr"/>
-            <a:endParaRPr/>
-          </a:p>
-        </p:txBody>
-      </p:sp>
-      <p:sp>
-        <p:nvSpPr>
-          <p:cNvPr id="84" name="TextBox 83"/>
-          <p:cNvSpPr txBox="1"/>
-          <p:nvPr/>
-        </p:nvSpPr>
-        <p:spPr>
-          <a:xfrm>
-            <a:off x="8412480" y="5120640"/>
-            <a:ext cx="3474720" cy="365760"/>
-          </a:xfrm>
-          <a:prstGeom prst="rect">
-            <a:avLst/>
-          </a:prstGeom>
-          <a:noFill/>
-        </p:spPr>
-        <p:txBody>
-          <a:bodyPr wrap="square" lIns="0" tIns="0" rIns="0" bIns="0" anchor="t">
-            <a:spAutoFit/>
-          </a:bodyPr>
-          <a:lstStyle/>
-          <a:p>
-            <a:r>
-              <a:rPr sz="1250" b="1">
-                <a:solidFill>
-                  <a:srgbClr val="FFFFFF"/>
-                </a:solidFill>
-                <a:latin typeface="Calibri"/>
-              </a:rPr>
-              <a:t>Entity Resolution · Витрина</a:t>
-            </a:r>
-          </a:p>
-        </p:txBody>
-      </p:sp>
-      <p:sp>
-        <p:nvSpPr>
-          <p:cNvPr id="85" name="TextBox 84"/>
-          <p:cNvSpPr txBox="1"/>
-          <p:nvPr/>
-        </p:nvSpPr>
-        <p:spPr>
-          <a:xfrm>
-            <a:off x="8412480" y="5486400"/>
-            <a:ext cx="3474720" cy="201168"/>
-          </a:xfrm>
-          <a:prstGeom prst="rect">
-            <a:avLst/>
-          </a:prstGeom>
-          <a:noFill/>
-        </p:spPr>
-        <p:txBody>
-          <a:bodyPr wrap="square" lIns="0" tIns="0" rIns="0" bIns="0" anchor="t">
-            <a:spAutoFit/>
-          </a:bodyPr>
-          <a:lstStyle/>
-          <a:p>
-            <a:pPr>
-              <a:lnSpc>
-                <a:spcPct val="105000"/>
-              </a:lnSpc>
-            </a:pPr>
-            <a:r>
-              <a:rPr sz="950">
-                <a:solidFill>
-                  <a:srgbClr val="A9B4C0"/>
-                </a:solidFill>
-                <a:latin typeface="Calibri"/>
-              </a:rPr>
-              <a:t>каталоги item / supplier / period · статус processed</a:t>
-            </a:r>
-          </a:p>
-        </p:txBody>
-      </p:sp>
       <p:cxnSp>
         <p:nvCxnSpPr>
-          <p:cNvPr id="86" name="Connector 85"/>
+          <p:cNvPr id="56" name="Connector 55"/>
           <p:cNvCxnSpPr/>
           <p:nvPr/>
         </p:nvCxnSpPr>
         <p:spPr>
           <a:xfrm>
-            <a:off x="10149840" y="4754880"/>
-            <a:ext cx="0" cy="274320"/>
+            <a:off x="6100000" y="3850000"/>
+            <a:ext cx="400000" cy="0"/>
           </a:xfrm>
           <a:prstGeom prst="line">
             <a:avLst/>
           </a:prstGeom>
-          <a:ln w="25400">
+          <a:ln w="22225">
             <a:solidFill>
               <a:srgbClr val="FF5A36"/>
             </a:solidFill>
@@ -20010,96 +21008,139 @@
           </a:fontRef>
         </p:style>
       </p:cxnSp>
-      <p:sp>
-        <p:nvSpPr>
-          <p:cNvPr id="87" name="TextBox 86"/>
-          <p:cNvSpPr txBox="1"/>
-          <p:nvPr/>
-        </p:nvSpPr>
-        <p:spPr>
-          <a:xfrm>
-            <a:off x="6949440" y="2103120"/>
-            <a:ext cx="548640" cy="237744"/>
-          </a:xfrm>
-          <a:prstGeom prst="rect">
-            <a:avLst/>
-          </a:prstGeom>
-          <a:noFill/>
-        </p:spPr>
-        <p:txBody>
-          <a:bodyPr wrap="square" lIns="0" tIns="0" rIns="0" bIns="0" anchor="t">
-            <a:spAutoFit/>
-          </a:bodyPr>
-          <a:lstStyle/>
-          <a:p>
-            <a:r>
-              <a:rPr sz="1000" b="1">
-                <a:solidFill>
-                  <a:srgbClr val="A9B4C0"/>
-                </a:solidFill>
-                <a:latin typeface="Calibri"/>
-              </a:rPr>
-              <a:t>prices</a:t>
-            </a:r>
-          </a:p>
-        </p:txBody>
-      </p:sp>
-      <p:sp>
-        <p:nvSpPr>
-          <p:cNvPr id="88" name="TextBox 87"/>
-          <p:cNvSpPr txBox="1"/>
-          <p:nvPr/>
-        </p:nvSpPr>
-        <p:spPr>
-          <a:xfrm>
-            <a:off x="6949440" y="4498848"/>
-            <a:ext cx="548640" cy="237744"/>
-          </a:xfrm>
-          <a:prstGeom prst="rect">
-            <a:avLst/>
-          </a:prstGeom>
-          <a:noFill/>
-        </p:spPr>
-        <p:txBody>
-          <a:bodyPr wrap="square" lIns="0" tIns="0" rIns="0" bIns="0" anchor="t">
-            <a:spAutoFit/>
-          </a:bodyPr>
-          <a:lstStyle/>
-          <a:p>
-            <a:r>
-              <a:rPr sz="1000" b="1">
-                <a:solidFill>
-                  <a:srgbClr val="A9B4C0"/>
-                </a:solidFill>
-                <a:latin typeface="Calibri"/>
-              </a:rPr>
-              <a:t>matrix</a:t>
-            </a:r>
-          </a:p>
-        </p:txBody>
-      </p:sp>
-      <p:sp>
-        <p:nvSpPr>
-          <p:cNvPr id="89" name="Rounded Rectangle 88"/>
+      <p:cxnSp>
+        <p:nvCxnSpPr>
+          <p:cNvPr id="57" name="Connector 56"/>
+          <p:cNvCxnSpPr/>
+          <p:nvPr/>
+        </p:nvCxnSpPr>
+        <p:spPr>
+          <a:xfrm>
+            <a:off x="9150000" y="2690000"/>
+            <a:ext cx="400000" cy="0"/>
+          </a:xfrm>
+          <a:prstGeom prst="line">
+            <a:avLst/>
+          </a:prstGeom>
+          <a:ln w="22225">
+            <a:solidFill>
+              <a:srgbClr val="FF5A36"/>
+            </a:solidFill>
+            <a:tailEnd type="triangle" w="med" len="med"/>
+          </a:ln>
+          <a:effectLst/>
+        </p:spPr>
+        <p:style>
+          <a:lnRef idx="2">
+            <a:schemeClr val="accent1"/>
+          </a:lnRef>
+          <a:fillRef idx="0">
+            <a:schemeClr val="accent1"/>
+          </a:fillRef>
+          <a:effectRef idx="1">
+            <a:schemeClr val="accent1"/>
+          </a:effectRef>
+          <a:fontRef idx="minor">
+            <a:schemeClr val="tx1"/>
+          </a:fontRef>
+        </p:style>
+      </p:cxnSp>
+      <p:cxnSp>
+        <p:nvCxnSpPr>
+          <p:cNvPr id="58" name="Connector 57"/>
+          <p:cNvCxnSpPr/>
+          <p:nvPr/>
+        </p:nvCxnSpPr>
+        <p:spPr>
+          <a:xfrm>
+            <a:off x="9150000" y="3850000"/>
+            <a:ext cx="400000" cy="0"/>
+          </a:xfrm>
+          <a:prstGeom prst="line">
+            <a:avLst/>
+          </a:prstGeom>
+          <a:ln w="22225">
+            <a:solidFill>
+              <a:srgbClr val="FF5A36"/>
+            </a:solidFill>
+            <a:tailEnd type="triangle" w="med" len="med"/>
+          </a:ln>
+          <a:effectLst/>
+        </p:spPr>
+        <p:style>
+          <a:lnRef idx="2">
+            <a:schemeClr val="accent1"/>
+          </a:lnRef>
+          <a:fillRef idx="0">
+            <a:schemeClr val="accent1"/>
+          </a:fillRef>
+          <a:effectRef idx="1">
+            <a:schemeClr val="accent1"/>
+          </a:effectRef>
+          <a:fontRef idx="minor">
+            <a:schemeClr val="tx1"/>
+          </a:fontRef>
+        </p:style>
+      </p:cxnSp>
+      <p:cxnSp>
+        <p:nvCxnSpPr>
+          <p:cNvPr id="59" name="Connector 58"/>
+          <p:cNvCxnSpPr/>
+          <p:nvPr/>
+        </p:nvCxnSpPr>
+        <p:spPr>
+          <a:xfrm>
+            <a:off x="9150000" y="5010000"/>
+            <a:ext cx="400000" cy="0"/>
+          </a:xfrm>
+          <a:prstGeom prst="line">
+            <a:avLst/>
+          </a:prstGeom>
+          <a:ln w="22225">
+            <a:solidFill>
+              <a:srgbClr val="FF5A36"/>
+            </a:solidFill>
+            <a:tailEnd type="triangle" w="med" len="med"/>
+          </a:ln>
+          <a:effectLst/>
+        </p:spPr>
+        <p:style>
+          <a:lnRef idx="2">
+            <a:schemeClr val="accent1"/>
+          </a:lnRef>
+          <a:fillRef idx="0">
+            <a:schemeClr val="accent1"/>
+          </a:fillRef>
+          <a:effectRef idx="1">
+            <a:schemeClr val="accent1"/>
+          </a:effectRef>
+          <a:fontRef idx="minor">
+            <a:schemeClr val="tx1"/>
+          </a:fontRef>
+        </p:style>
+      </p:cxnSp>
+      <p:sp>
+        <p:nvSpPr>
+          <p:cNvPr id="60" name="Rounded Rectangle 59"/>
           <p:cNvSpPr/>
           <p:nvPr/>
         </p:nvSpPr>
         <p:spPr>
           <a:xfrm>
-            <a:off x="548640" y="4023360"/>
-            <a:ext cx="4709160" cy="1691640"/>
+            <a:off x="548640" y="5660000"/>
+            <a:ext cx="11094240" cy="600000"/>
           </a:xfrm>
           <a:prstGeom prst="roundRect">
             <a:avLst>
-              <a:gd name="adj" fmla="val 10000"/>
+              <a:gd name="adj" fmla="val 50000"/>
             </a:avLst>
           </a:prstGeom>
           <a:solidFill>
-            <a:srgbClr val="262C33"/>
+            <a:srgbClr val="1F252B"/>
           </a:solidFill>
           <a:ln w="12700">
             <a:solidFill>
-              <a:srgbClr val="3A434D"/>
+              <a:srgbClr val="333E49"/>
             </a:solidFill>
           </a:ln>
           <a:effectLst/>
@@ -20123,20 +21164,19 @@
           <a:lstStyle/>
           <a:p>
             <a:pPr algn="ctr"/>
-            <a:endParaRPr/>
-          </a:p>
-        </p:txBody>
-      </p:sp>
-      <p:sp>
-        <p:nvSpPr>
-          <p:cNvPr id="90" name="Rectangle 89"/>
+          </a:p>
+        </p:txBody>
+      </p:sp>
+      <p:sp>
+        <p:nvSpPr>
+          <p:cNvPr id="61" name="Rectangle 60"/>
           <p:cNvSpPr/>
           <p:nvPr/>
         </p:nvSpPr>
         <p:spPr>
           <a:xfrm>
-            <a:off x="548640" y="4023360"/>
-            <a:ext cx="64008" cy="1691640"/>
+            <a:off x="548640" y="5660000"/>
+            <a:ext cx="100000" cy="600000"/>
           </a:xfrm>
           <a:prstGeom prst="rect">
             <a:avLst/>
@@ -20168,61 +21208,76 @@
           <a:lstStyle/>
           <a:p>
             <a:pPr algn="ctr"/>
-            <a:endParaRPr/>
-          </a:p>
-        </p:txBody>
-      </p:sp>
-      <p:sp>
-        <p:nvSpPr>
-          <p:cNvPr id="91" name="TextBox 90"/>
+          </a:p>
+        </p:txBody>
+      </p:sp>
+      <p:sp>
+        <p:nvSpPr>
+          <p:cNvPr id="62" name="TextBox 61"/>
           <p:cNvSpPr txBox="1"/>
           <p:nvPr/>
         </p:nvSpPr>
         <p:spPr>
           <a:xfrm>
-            <a:off x="841248" y="4206240"/>
-            <a:ext cx="4160520" cy="1371600"/>
-          </a:xfrm>
-          <a:prstGeom prst="rect">
-            <a:avLst/>
-          </a:prstGeom>
-          <a:noFill/>
-        </p:spPr>
-        <p:txBody>
-          <a:bodyPr wrap="square" lIns="0" tIns="0" rIns="0" bIns="0" anchor="t">
+            <a:off x="728640" y="5660000"/>
+            <a:ext cx="10734240" cy="600000"/>
+          </a:xfrm>
+          <a:prstGeom prst="rect">
+            <a:avLst/>
+          </a:prstGeom>
+          <a:noFill/>
+        </p:spPr>
+        <p:txBody>
+          <a:bodyPr wrap="square" anchor="ctr" lIns="30000" rIns="30000" tIns="10000" bIns="10000">
             <a:spAutoFit/>
           </a:bodyPr>
           <a:lstStyle/>
           <a:p>
-            <a:pPr>
-              <a:spcAft>
-                <a:spcPts val="500"/>
-              </a:spcAft>
-            </a:pPr>
-            <a:r>
-              <a:rPr sz="1300" b="1">
+            <a:pPr algn="ctr"/>
+            <a:r>
+              <a:rPr sz="1350" b="0" i="0">
+                <a:solidFill>
+                  <a:srgbClr val="FFFFFF"/>
+                </a:solidFill>
+                <a:latin typeface="Calibri"/>
+              </a:rPr>
+              <a:t>Исходные Excel не изменяются (только чтение)</a:t>
+            </a:r>
+            <a:r>
+              <a:rPr sz="1350" b="1" i="0">
                 <a:solidFill>
                   <a:srgbClr val="FF5A36"/>
                 </a:solidFill>
                 <a:latin typeface="Calibri"/>
               </a:rPr>
-              <a:t>Результат</a:t>
-            </a:r>
-          </a:p>
-          <a:p>
-            <a:pPr>
-              <a:lnSpc>
-                <a:spcPct val="112000"/>
-              </a:lnSpc>
-            </a:pPr>
-            <a:r>
-              <a:rPr sz="1150">
+              <a:t>    ·    </a:t>
+            </a:r>
+            <a:r>
+              <a:rPr sz="1350" b="0" i="0">
                 <a:solidFill>
                   <a:srgbClr val="A9B4C0"/>
                 </a:solidFill>
                 <a:latin typeface="Calibri"/>
               </a:rPr>
-              <a:t>«Цены» → mart.price_facts · «метрики» → mart.metrics — единая витрина с каталогами поставщиков и материалов.</a:t>
+              <a:t>единые названия поставщиков и материалов</a:t>
+            </a:r>
+            <a:r>
+              <a:rPr sz="1350" b="1" i="0">
+                <a:solidFill>
+                  <a:srgbClr val="FF5A36"/>
+                </a:solidFill>
+                <a:latin typeface="Calibri"/>
+              </a:rPr>
+              <a:t>    ·    </a:t>
+            </a:r>
+            <a:r>
+              <a:rPr sz="1350" b="0" i="0">
+                <a:solidFill>
+                  <a:srgbClr val="A9B4C0"/>
+                </a:solidFill>
+                <a:latin typeface="Calibri"/>
+              </a:rPr>
+              <a:t>витрина готова для вопросов и графиков</a:t>
             </a:r>
           </a:p>
         </p:txBody>
@@ -21759,7 +22814,7 @@
           </a:prstGeom>
           <a:extLst>
             <a:ext uri="{C572A759-6A51-4108-AA02-DFA0A04FC94B}">
-              <ma14:wrappingTextBoxFlag xmlns:ma14="http://schemas.microsoft.com/office/mac/drawingml/2011/main" xmlns="" val="0"/>
+              <ma14:wrappingTextBoxFlag xmlns="" xmlns:ma14="http://schemas.microsoft.com/office/mac/drawingml/2011/main" val="0"/>
             </a:ext>
           </a:extLst>
         </p:spPr>
@@ -23566,7 +24621,7 @@
           </a:prstGeom>
           <a:extLst>
             <a:ext uri="{C572A759-6A51-4108-AA02-DFA0A04FC94B}">
-              <ma14:wrappingTextBoxFlag xmlns:ma14="http://schemas.microsoft.com/office/mac/drawingml/2011/main" xmlns="" val="0"/>
+              <ma14:wrappingTextBoxFlag xmlns="" xmlns:ma14="http://schemas.microsoft.com/office/mac/drawingml/2011/main" val="0"/>
             </a:ext>
           </a:extLst>
         </p:spPr>
